--- a/docs/pptx/carbo/jx-carbo-cox-linear-ratio-death.pptx
+++ b/docs/pptx/carbo/jx-carbo-cox-linear-ratio-death.pptx
@@ -2271,7 +2271,7 @@
           </p:nvSpPr>
           <p:spPr>
             <a:xfrm>
-              <a:off x="817517" y="5114368"/>
+              <a:off x="817517" y="5142518"/>
               <a:ext cx="7799693" cy="0"/>
             </a:xfrm>
             <a:custGeom>
@@ -2314,7 +2314,7 @@
           </p:nvSpPr>
           <p:spPr>
             <a:xfrm>
-              <a:off x="817517" y="4244691"/>
+              <a:off x="817517" y="4313054"/>
               <a:ext cx="7799693" cy="0"/>
             </a:xfrm>
             <a:custGeom>
@@ -2357,7 +2357,7 @@
           </p:nvSpPr>
           <p:spPr>
             <a:xfrm>
-              <a:off x="817517" y="3375014"/>
+              <a:off x="817517" y="3483591"/>
               <a:ext cx="7799693" cy="0"/>
             </a:xfrm>
             <a:custGeom>
@@ -2400,7 +2400,7 @@
           </p:nvSpPr>
           <p:spPr>
             <a:xfrm>
-              <a:off x="817517" y="2505337"/>
+              <a:off x="817517" y="2654127"/>
               <a:ext cx="7799693" cy="0"/>
             </a:xfrm>
             <a:custGeom>
@@ -2443,15 +2443,15 @@
           </p:nvSpPr>
           <p:spPr>
             <a:xfrm>
-              <a:off x="1615213" y="1896563"/>
-              <a:ext cx="0" cy="3826579"/>
+              <a:off x="1615213" y="2073503"/>
+              <a:ext cx="0" cy="3649639"/>
             </a:xfrm>
             <a:custGeom>
               <a:avLst/>
               <a:pathLst>
-                <a:path w="0" h="3826579">
+                <a:path w="0" h="3649639">
                   <a:moveTo>
-                    <a:pt x="0" y="3826579"/>
+                    <a:pt x="0" y="3649639"/>
                   </a:moveTo>
                   <a:lnTo>
                     <a:pt x="0" y="0"/>
@@ -2486,15 +2486,15 @@
           </p:nvSpPr>
           <p:spPr>
             <a:xfrm>
-              <a:off x="3387871" y="1896563"/>
-              <a:ext cx="0" cy="3826579"/>
+              <a:off x="3387871" y="2073503"/>
+              <a:ext cx="0" cy="3649639"/>
             </a:xfrm>
             <a:custGeom>
               <a:avLst/>
               <a:pathLst>
-                <a:path w="0" h="3826579">
+                <a:path w="0" h="3649639">
                   <a:moveTo>
-                    <a:pt x="0" y="3826579"/>
+                    <a:pt x="0" y="3649639"/>
                   </a:moveTo>
                   <a:lnTo>
                     <a:pt x="0" y="0"/>
@@ -2529,15 +2529,15 @@
           </p:nvSpPr>
           <p:spPr>
             <a:xfrm>
-              <a:off x="5160528" y="1896563"/>
-              <a:ext cx="0" cy="3826579"/>
+              <a:off x="5160528" y="2073503"/>
+              <a:ext cx="0" cy="3649639"/>
             </a:xfrm>
             <a:custGeom>
               <a:avLst/>
               <a:pathLst>
-                <a:path w="0" h="3826579">
+                <a:path w="0" h="3649639">
                   <a:moveTo>
-                    <a:pt x="0" y="3826579"/>
+                    <a:pt x="0" y="3649639"/>
                   </a:moveTo>
                   <a:lnTo>
                     <a:pt x="0" y="0"/>
@@ -2572,15 +2572,15 @@
           </p:nvSpPr>
           <p:spPr>
             <a:xfrm>
-              <a:off x="6933186" y="1896563"/>
-              <a:ext cx="0" cy="3826579"/>
+              <a:off x="6933186" y="2073503"/>
+              <a:ext cx="0" cy="3649639"/>
             </a:xfrm>
             <a:custGeom>
               <a:avLst/>
               <a:pathLst>
-                <a:path w="0" h="3826579">
+                <a:path w="0" h="3649639">
                   <a:moveTo>
-                    <a:pt x="0" y="3826579"/>
+                    <a:pt x="0" y="3649639"/>
                   </a:moveTo>
                   <a:lnTo>
                     <a:pt x="0" y="0"/>
@@ -2615,7 +2615,7 @@
           </p:nvSpPr>
           <p:spPr>
             <a:xfrm>
-              <a:off x="817517" y="5549207"/>
+              <a:off x="817517" y="5557249"/>
               <a:ext cx="7799693" cy="0"/>
             </a:xfrm>
             <a:custGeom>
@@ -2658,7 +2658,7 @@
           </p:nvSpPr>
           <p:spPr>
             <a:xfrm>
-              <a:off x="817517" y="4679530"/>
+              <a:off x="817517" y="4727786"/>
               <a:ext cx="7799693" cy="0"/>
             </a:xfrm>
             <a:custGeom>
@@ -2701,7 +2701,7 @@
           </p:nvSpPr>
           <p:spPr>
             <a:xfrm>
-              <a:off x="817517" y="3809853"/>
+              <a:off x="817517" y="3898322"/>
               <a:ext cx="7799693" cy="0"/>
             </a:xfrm>
             <a:custGeom>
@@ -2744,7 +2744,7 @@
           </p:nvSpPr>
           <p:spPr>
             <a:xfrm>
-              <a:off x="817517" y="2940175"/>
+              <a:off x="817517" y="3068859"/>
               <a:ext cx="7799693" cy="0"/>
             </a:xfrm>
             <a:custGeom>
@@ -2787,7 +2787,7 @@
           </p:nvSpPr>
           <p:spPr>
             <a:xfrm>
-              <a:off x="817517" y="2070498"/>
+              <a:off x="817517" y="2239395"/>
               <a:ext cx="7799693" cy="0"/>
             </a:xfrm>
             <a:custGeom>
@@ -2830,15 +2830,15 @@
           </p:nvSpPr>
           <p:spPr>
             <a:xfrm>
-              <a:off x="2501542" y="1896563"/>
-              <a:ext cx="0" cy="3826579"/>
+              <a:off x="2501542" y="2073503"/>
+              <a:ext cx="0" cy="3649639"/>
             </a:xfrm>
             <a:custGeom>
               <a:avLst/>
               <a:pathLst>
-                <a:path w="0" h="3826579">
+                <a:path w="0" h="3649639">
                   <a:moveTo>
-                    <a:pt x="0" y="3826579"/>
+                    <a:pt x="0" y="3649639"/>
                   </a:moveTo>
                   <a:lnTo>
                     <a:pt x="0" y="0"/>
@@ -2873,15 +2873,15 @@
           </p:nvSpPr>
           <p:spPr>
             <a:xfrm>
-              <a:off x="4274200" y="1896563"/>
-              <a:ext cx="0" cy="3826579"/>
+              <a:off x="4274200" y="2073503"/>
+              <a:ext cx="0" cy="3649639"/>
             </a:xfrm>
             <a:custGeom>
               <a:avLst/>
               <a:pathLst>
-                <a:path w="0" h="3826579">
+                <a:path w="0" h="3649639">
                   <a:moveTo>
-                    <a:pt x="0" y="3826579"/>
+                    <a:pt x="0" y="3649639"/>
                   </a:moveTo>
                   <a:lnTo>
                     <a:pt x="0" y="0"/>
@@ -2916,15 +2916,15 @@
           </p:nvSpPr>
           <p:spPr>
             <a:xfrm>
-              <a:off x="6046857" y="1896563"/>
-              <a:ext cx="0" cy="3826579"/>
+              <a:off x="6046857" y="2073503"/>
+              <a:ext cx="0" cy="3649639"/>
             </a:xfrm>
             <a:custGeom>
               <a:avLst/>
               <a:pathLst>
-                <a:path w="0" h="3826579">
+                <a:path w="0" h="3649639">
                   <a:moveTo>
-                    <a:pt x="0" y="3826579"/>
+                    <a:pt x="0" y="3649639"/>
                   </a:moveTo>
                   <a:lnTo>
                     <a:pt x="0" y="0"/>
@@ -2959,15 +2959,15 @@
           </p:nvSpPr>
           <p:spPr>
             <a:xfrm>
-              <a:off x="7819515" y="1896563"/>
-              <a:ext cx="0" cy="3826579"/>
+              <a:off x="7819515" y="2073503"/>
+              <a:ext cx="0" cy="3649639"/>
             </a:xfrm>
             <a:custGeom>
               <a:avLst/>
               <a:pathLst>
-                <a:path w="0" h="3826579">
+                <a:path w="0" h="3649639">
                   <a:moveTo>
-                    <a:pt x="0" y="3826579"/>
+                    <a:pt x="0" y="3649639"/>
                   </a:moveTo>
                   <a:lnTo>
                     <a:pt x="0" y="0"/>
@@ -3002,468 +3002,468 @@
           </p:nvSpPr>
           <p:spPr>
             <a:xfrm>
-              <a:off x="1697896" y="1896563"/>
-              <a:ext cx="6523404" cy="3650105"/>
+              <a:off x="1697896" y="2073503"/>
+              <a:ext cx="6523404" cy="3481326"/>
             </a:xfrm>
             <a:custGeom>
               <a:avLst/>
               <a:pathLst>
-                <a:path w="6523404" h="3650105">
+                <a:path w="6523404" h="3481326">
                   <a:moveTo>
                     <a:pt x="1543666" y="0"/>
                   </a:moveTo>
                   <a:lnTo>
-                    <a:pt x="1618921" y="380471"/>
-                  </a:lnTo>
-                  <a:lnTo>
-                    <a:pt x="1695554" y="726890"/>
-                  </a:lnTo>
-                  <a:lnTo>
-                    <a:pt x="1772186" y="1036634"/>
-                  </a:lnTo>
-                  <a:lnTo>
-                    <a:pt x="1848819" y="1313586"/>
-                  </a:lnTo>
-                  <a:lnTo>
-                    <a:pt x="1925452" y="1561218"/>
-                  </a:lnTo>
-                  <a:lnTo>
-                    <a:pt x="2002084" y="1782633"/>
-                  </a:lnTo>
-                  <a:lnTo>
-                    <a:pt x="2078717" y="1980608"/>
-                  </a:lnTo>
-                  <a:lnTo>
-                    <a:pt x="2155349" y="2157623"/>
-                  </a:lnTo>
-                  <a:lnTo>
-                    <a:pt x="2231982" y="2315898"/>
-                  </a:lnTo>
-                  <a:lnTo>
-                    <a:pt x="2308614" y="2457417"/>
-                  </a:lnTo>
-                  <a:lnTo>
-                    <a:pt x="2385247" y="2583953"/>
-                  </a:lnTo>
-                  <a:lnTo>
-                    <a:pt x="2461879" y="2697093"/>
-                  </a:lnTo>
-                  <a:lnTo>
-                    <a:pt x="2538512" y="2788946"/>
-                  </a:lnTo>
-                  <a:lnTo>
-                    <a:pt x="2615144" y="2825734"/>
-                  </a:lnTo>
-                  <a:lnTo>
-                    <a:pt x="2691777" y="2860955"/>
-                  </a:lnTo>
-                  <a:lnTo>
-                    <a:pt x="2768410" y="2894676"/>
-                  </a:lnTo>
-                  <a:lnTo>
-                    <a:pt x="2845042" y="2926960"/>
-                  </a:lnTo>
-                  <a:lnTo>
-                    <a:pt x="2921675" y="2957870"/>
-                  </a:lnTo>
-                  <a:lnTo>
-                    <a:pt x="2998307" y="2987463"/>
-                  </a:lnTo>
-                  <a:lnTo>
-                    <a:pt x="3074940" y="3015795"/>
-                  </a:lnTo>
-                  <a:lnTo>
-                    <a:pt x="3151572" y="3042921"/>
-                  </a:lnTo>
-                  <a:lnTo>
-                    <a:pt x="3228205" y="3068891"/>
-                  </a:lnTo>
-                  <a:lnTo>
-                    <a:pt x="3304837" y="3093756"/>
-                  </a:lnTo>
-                  <a:lnTo>
-                    <a:pt x="3381470" y="3117561"/>
-                  </a:lnTo>
-                  <a:lnTo>
-                    <a:pt x="3458103" y="3140352"/>
-                  </a:lnTo>
-                  <a:lnTo>
-                    <a:pt x="3534735" y="3162172"/>
-                  </a:lnTo>
-                  <a:lnTo>
-                    <a:pt x="3611368" y="3183063"/>
-                  </a:lnTo>
-                  <a:lnTo>
-                    <a:pt x="3688000" y="3203064"/>
-                  </a:lnTo>
-                  <a:lnTo>
-                    <a:pt x="3764633" y="3222213"/>
-                  </a:lnTo>
-                  <a:lnTo>
-                    <a:pt x="3841265" y="3240547"/>
-                  </a:lnTo>
-                  <a:lnTo>
-                    <a:pt x="3917898" y="3258100"/>
-                  </a:lnTo>
-                  <a:lnTo>
-                    <a:pt x="3994530" y="3274905"/>
-                  </a:lnTo>
-                  <a:lnTo>
-                    <a:pt x="4071163" y="3290994"/>
-                  </a:lnTo>
-                  <a:lnTo>
-                    <a:pt x="4147795" y="3306398"/>
-                  </a:lnTo>
-                  <a:lnTo>
-                    <a:pt x="4224428" y="3321146"/>
-                  </a:lnTo>
-                  <a:lnTo>
-                    <a:pt x="4301061" y="3335266"/>
-                  </a:lnTo>
-                  <a:lnTo>
-                    <a:pt x="4377693" y="3348784"/>
-                  </a:lnTo>
-                  <a:lnTo>
-                    <a:pt x="4454326" y="3361726"/>
-                  </a:lnTo>
-                  <a:lnTo>
-                    <a:pt x="4530958" y="3374118"/>
-                  </a:lnTo>
-                  <a:lnTo>
-                    <a:pt x="4607591" y="3385981"/>
-                  </a:lnTo>
-                  <a:lnTo>
-                    <a:pt x="4684223" y="3397339"/>
-                  </a:lnTo>
-                  <a:lnTo>
-                    <a:pt x="4760856" y="3408213"/>
-                  </a:lnTo>
-                  <a:lnTo>
-                    <a:pt x="4837488" y="3418625"/>
-                  </a:lnTo>
-                  <a:lnTo>
-                    <a:pt x="4914121" y="3428592"/>
-                  </a:lnTo>
-                  <a:lnTo>
-                    <a:pt x="4990753" y="3438136"/>
-                  </a:lnTo>
-                  <a:lnTo>
-                    <a:pt x="5067386" y="3447272"/>
-                  </a:lnTo>
-                  <a:lnTo>
-                    <a:pt x="5144019" y="3456020"/>
-                  </a:lnTo>
-                  <a:lnTo>
-                    <a:pt x="5220651" y="3464395"/>
-                  </a:lnTo>
-                  <a:lnTo>
-                    <a:pt x="5297284" y="3472413"/>
-                  </a:lnTo>
-                  <a:lnTo>
-                    <a:pt x="5373916" y="3480090"/>
-                  </a:lnTo>
-                  <a:lnTo>
-                    <a:pt x="5450549" y="3487439"/>
-                  </a:lnTo>
-                  <a:lnTo>
-                    <a:pt x="5527181" y="3494476"/>
-                  </a:lnTo>
-                  <a:lnTo>
-                    <a:pt x="5603814" y="3501213"/>
-                  </a:lnTo>
-                  <a:lnTo>
-                    <a:pt x="5680446" y="3507663"/>
-                  </a:lnTo>
-                  <a:lnTo>
-                    <a:pt x="5757079" y="3513838"/>
-                  </a:lnTo>
-                  <a:lnTo>
-                    <a:pt x="5833712" y="3519750"/>
-                  </a:lnTo>
-                  <a:lnTo>
-                    <a:pt x="5910344" y="3525411"/>
-                  </a:lnTo>
-                  <a:lnTo>
-                    <a:pt x="5986977" y="3530830"/>
-                  </a:lnTo>
-                  <a:lnTo>
-                    <a:pt x="6063609" y="3536018"/>
-                  </a:lnTo>
-                  <a:lnTo>
-                    <a:pt x="6140242" y="3540986"/>
-                  </a:lnTo>
-                  <a:lnTo>
-                    <a:pt x="6216874" y="3545742"/>
-                  </a:lnTo>
-                  <a:lnTo>
-                    <a:pt x="6293507" y="3550295"/>
-                  </a:lnTo>
-                  <a:lnTo>
-                    <a:pt x="6370139" y="3554655"/>
-                  </a:lnTo>
-                  <a:lnTo>
-                    <a:pt x="6446772" y="3558828"/>
-                  </a:lnTo>
-                  <a:lnTo>
-                    <a:pt x="6523404" y="3562824"/>
-                  </a:lnTo>
-                  <a:lnTo>
-                    <a:pt x="6523404" y="3650105"/>
-                  </a:lnTo>
-                  <a:lnTo>
-                    <a:pt x="6446772" y="3649805"/>
-                  </a:lnTo>
-                  <a:lnTo>
-                    <a:pt x="6370139" y="3649468"/>
-                  </a:lnTo>
-                  <a:lnTo>
-                    <a:pt x="6293507" y="3649092"/>
-                  </a:lnTo>
-                  <a:lnTo>
-                    <a:pt x="6216874" y="3648672"/>
-                  </a:lnTo>
-                  <a:lnTo>
-                    <a:pt x="6140242" y="3648202"/>
-                  </a:lnTo>
-                  <a:lnTo>
-                    <a:pt x="6063609" y="3647676"/>
-                  </a:lnTo>
-                  <a:lnTo>
-                    <a:pt x="5986977" y="3647088"/>
-                  </a:lnTo>
-                  <a:lnTo>
-                    <a:pt x="5910344" y="3646430"/>
-                  </a:lnTo>
-                  <a:lnTo>
-                    <a:pt x="5833712" y="3645694"/>
-                  </a:lnTo>
-                  <a:lnTo>
-                    <a:pt x="5757079" y="3644872"/>
-                  </a:lnTo>
-                  <a:lnTo>
-                    <a:pt x="5680446" y="3643951"/>
-                  </a:lnTo>
-                  <a:lnTo>
-                    <a:pt x="5603814" y="3642922"/>
-                  </a:lnTo>
-                  <a:lnTo>
-                    <a:pt x="5527181" y="3641771"/>
-                  </a:lnTo>
-                  <a:lnTo>
-                    <a:pt x="5450549" y="3640484"/>
-                  </a:lnTo>
-                  <a:lnTo>
-                    <a:pt x="5373916" y="3639044"/>
-                  </a:lnTo>
-                  <a:lnTo>
-                    <a:pt x="5297284" y="3637434"/>
-                  </a:lnTo>
-                  <a:lnTo>
-                    <a:pt x="5220651" y="3635633"/>
-                  </a:lnTo>
-                  <a:lnTo>
-                    <a:pt x="5144019" y="3633619"/>
-                  </a:lnTo>
-                  <a:lnTo>
-                    <a:pt x="5067386" y="3631366"/>
-                  </a:lnTo>
-                  <a:lnTo>
-                    <a:pt x="4990753" y="3628847"/>
-                  </a:lnTo>
-                  <a:lnTo>
-                    <a:pt x="4914121" y="3626030"/>
-                  </a:lnTo>
-                  <a:lnTo>
-                    <a:pt x="4837488" y="3622879"/>
-                  </a:lnTo>
-                  <a:lnTo>
-                    <a:pt x="4760856" y="3619354"/>
-                  </a:lnTo>
-                  <a:lnTo>
-                    <a:pt x="4684223" y="3615413"/>
-                  </a:lnTo>
-                  <a:lnTo>
-                    <a:pt x="4607591" y="3611005"/>
-                  </a:lnTo>
-                  <a:lnTo>
-                    <a:pt x="4530958" y="3606074"/>
-                  </a:lnTo>
-                  <a:lnTo>
-                    <a:pt x="4454326" y="3600561"/>
-                  </a:lnTo>
-                  <a:lnTo>
-                    <a:pt x="4377693" y="3594394"/>
-                  </a:lnTo>
-                  <a:lnTo>
-                    <a:pt x="4301061" y="3587497"/>
-                  </a:lnTo>
-                  <a:lnTo>
-                    <a:pt x="4224428" y="3579783"/>
-                  </a:lnTo>
-                  <a:lnTo>
-                    <a:pt x="4147795" y="3571156"/>
-                  </a:lnTo>
-                  <a:lnTo>
-                    <a:pt x="4071163" y="3561508"/>
-                  </a:lnTo>
-                  <a:lnTo>
-                    <a:pt x="3994530" y="3550717"/>
-                  </a:lnTo>
-                  <a:lnTo>
-                    <a:pt x="3917898" y="3538649"/>
-                  </a:lnTo>
-                  <a:lnTo>
-                    <a:pt x="3841265" y="3525152"/>
-                  </a:lnTo>
-                  <a:lnTo>
-                    <a:pt x="3764633" y="3510056"/>
-                  </a:lnTo>
-                  <a:lnTo>
-                    <a:pt x="3688000" y="3493174"/>
-                  </a:lnTo>
-                  <a:lnTo>
-                    <a:pt x="3611368" y="3474292"/>
-                  </a:lnTo>
-                  <a:lnTo>
-                    <a:pt x="3534735" y="3453174"/>
-                  </a:lnTo>
-                  <a:lnTo>
-                    <a:pt x="3458103" y="3429557"/>
-                  </a:lnTo>
-                  <a:lnTo>
-                    <a:pt x="3381470" y="3403142"/>
-                  </a:lnTo>
-                  <a:lnTo>
-                    <a:pt x="3304837" y="3373601"/>
-                  </a:lnTo>
-                  <a:lnTo>
-                    <a:pt x="3228205" y="3340561"/>
-                  </a:lnTo>
-                  <a:lnTo>
-                    <a:pt x="3151572" y="3303610"/>
-                  </a:lnTo>
-                  <a:lnTo>
-                    <a:pt x="3074940" y="3262283"/>
-                  </a:lnTo>
-                  <a:lnTo>
-                    <a:pt x="2998307" y="3216063"/>
-                  </a:lnTo>
-                  <a:lnTo>
-                    <a:pt x="2921675" y="3164370"/>
-                  </a:lnTo>
-                  <a:lnTo>
-                    <a:pt x="2845042" y="3106557"/>
-                  </a:lnTo>
-                  <a:lnTo>
-                    <a:pt x="2768410" y="3041899"/>
-                  </a:lnTo>
-                  <a:lnTo>
-                    <a:pt x="2691777" y="2969585"/>
-                  </a:lnTo>
-                  <a:lnTo>
-                    <a:pt x="2615144" y="2888708"/>
-                  </a:lnTo>
-                  <a:lnTo>
-                    <a:pt x="2538512" y="2798256"/>
-                  </a:lnTo>
-                  <a:lnTo>
-                    <a:pt x="2461879" y="2750521"/>
-                  </a:lnTo>
-                  <a:lnTo>
-                    <a:pt x="2385247" y="2710387"/>
-                  </a:lnTo>
-                  <a:lnTo>
-                    <a:pt x="2308614" y="2668467"/>
-                  </a:lnTo>
-                  <a:lnTo>
-                    <a:pt x="2231982" y="2624683"/>
-                  </a:lnTo>
-                  <a:lnTo>
-                    <a:pt x="2155349" y="2578950"/>
-                  </a:lnTo>
-                  <a:lnTo>
-                    <a:pt x="2078717" y="2531183"/>
-                  </a:lnTo>
-                  <a:lnTo>
-                    <a:pt x="2002084" y="2481291"/>
-                  </a:lnTo>
-                  <a:lnTo>
-                    <a:pt x="1925452" y="2429179"/>
-                  </a:lnTo>
-                  <a:lnTo>
-                    <a:pt x="1848819" y="2374749"/>
-                  </a:lnTo>
-                  <a:lnTo>
-                    <a:pt x="1772186" y="2317897"/>
-                  </a:lnTo>
-                  <a:lnTo>
-                    <a:pt x="1695554" y="2258516"/>
-                  </a:lnTo>
-                  <a:lnTo>
-                    <a:pt x="1618921" y="2196493"/>
-                  </a:lnTo>
-                  <a:lnTo>
-                    <a:pt x="1542289" y="2131711"/>
-                  </a:lnTo>
-                  <a:lnTo>
-                    <a:pt x="1465656" y="2064047"/>
-                  </a:lnTo>
-                  <a:lnTo>
-                    <a:pt x="1389024" y="1993372"/>
-                  </a:lnTo>
-                  <a:lnTo>
-                    <a:pt x="1312391" y="1919554"/>
-                  </a:lnTo>
-                  <a:lnTo>
-                    <a:pt x="1235759" y="1842451"/>
-                  </a:lnTo>
-                  <a:lnTo>
-                    <a:pt x="1159126" y="1761918"/>
-                  </a:lnTo>
-                  <a:lnTo>
-                    <a:pt x="1082493" y="1677802"/>
-                  </a:lnTo>
-                  <a:lnTo>
-                    <a:pt x="1005861" y="1589944"/>
-                  </a:lnTo>
-                  <a:lnTo>
-                    <a:pt x="929228" y="1498178"/>
-                  </a:lnTo>
-                  <a:lnTo>
-                    <a:pt x="852596" y="1402329"/>
-                  </a:lnTo>
-                  <a:lnTo>
-                    <a:pt x="775963" y="1302215"/>
-                  </a:lnTo>
-                  <a:lnTo>
-                    <a:pt x="699331" y="1197648"/>
-                  </a:lnTo>
-                  <a:lnTo>
-                    <a:pt x="622698" y="1088429"/>
-                  </a:lnTo>
-                  <a:lnTo>
-                    <a:pt x="546066" y="974350"/>
-                  </a:lnTo>
-                  <a:lnTo>
-                    <a:pt x="469433" y="855197"/>
-                  </a:lnTo>
-                  <a:lnTo>
-                    <a:pt x="392801" y="730742"/>
-                  </a:lnTo>
-                  <a:lnTo>
-                    <a:pt x="316168" y="600751"/>
-                  </a:lnTo>
-                  <a:lnTo>
-                    <a:pt x="239535" y="464977"/>
-                  </a:lnTo>
-                  <a:lnTo>
-                    <a:pt x="162903" y="323162"/>
-                  </a:lnTo>
-                  <a:lnTo>
-                    <a:pt x="86270" y="175038"/>
-                  </a:lnTo>
-                  <a:lnTo>
-                    <a:pt x="9638" y="20324"/>
+                    <a:pt x="1618921" y="362878"/>
+                  </a:lnTo>
+                  <a:lnTo>
+                    <a:pt x="1695554" y="693279"/>
+                  </a:lnTo>
+                  <a:lnTo>
+                    <a:pt x="1772186" y="988700"/>
+                  </a:lnTo>
+                  <a:lnTo>
+                    <a:pt x="1848819" y="1252846"/>
+                  </a:lnTo>
+                  <a:lnTo>
+                    <a:pt x="1925452" y="1489028"/>
+                  </a:lnTo>
+                  <a:lnTo>
+                    <a:pt x="2002084" y="1700205"/>
+                  </a:lnTo>
+                  <a:lnTo>
+                    <a:pt x="2078717" y="1889025"/>
+                  </a:lnTo>
+                  <a:lnTo>
+                    <a:pt x="2155349" y="2057855"/>
+                  </a:lnTo>
+                  <a:lnTo>
+                    <a:pt x="2231982" y="2208812"/>
+                  </a:lnTo>
+                  <a:lnTo>
+                    <a:pt x="2308614" y="2343787"/>
+                  </a:lnTo>
+                  <a:lnTo>
+                    <a:pt x="2385247" y="2464472"/>
+                  </a:lnTo>
+                  <a:lnTo>
+                    <a:pt x="2461879" y="2572381"/>
+                  </a:lnTo>
+                  <a:lnTo>
+                    <a:pt x="2538512" y="2659986"/>
+                  </a:lnTo>
+                  <a:lnTo>
+                    <a:pt x="2615144" y="2695073"/>
+                  </a:lnTo>
+                  <a:lnTo>
+                    <a:pt x="2691777" y="2728665"/>
+                  </a:lnTo>
+                  <a:lnTo>
+                    <a:pt x="2768410" y="2760827"/>
+                  </a:lnTo>
+                  <a:lnTo>
+                    <a:pt x="2845042" y="2791619"/>
+                  </a:lnTo>
+                  <a:lnTo>
+                    <a:pt x="2921675" y="2821099"/>
+                  </a:lnTo>
+                  <a:lnTo>
+                    <a:pt x="2998307" y="2849324"/>
+                  </a:lnTo>
+                  <a:lnTo>
+                    <a:pt x="3074940" y="2876346"/>
+                  </a:lnTo>
+                  <a:lnTo>
+                    <a:pt x="3151572" y="2902218"/>
+                  </a:lnTo>
+                  <a:lnTo>
+                    <a:pt x="3228205" y="2926987"/>
+                  </a:lnTo>
+                  <a:lnTo>
+                    <a:pt x="3304837" y="2950701"/>
+                  </a:lnTo>
+                  <a:lnTo>
+                    <a:pt x="3381470" y="2973406"/>
+                  </a:lnTo>
+                  <a:lnTo>
+                    <a:pt x="3458103" y="2995143"/>
+                  </a:lnTo>
+                  <a:lnTo>
+                    <a:pt x="3534735" y="3015954"/>
+                  </a:lnTo>
+                  <a:lnTo>
+                    <a:pt x="3611368" y="3035879"/>
+                  </a:lnTo>
+                  <a:lnTo>
+                    <a:pt x="3688000" y="3054956"/>
+                  </a:lnTo>
+                  <a:lnTo>
+                    <a:pt x="3764633" y="3073219"/>
+                  </a:lnTo>
+                  <a:lnTo>
+                    <a:pt x="3841265" y="3090705"/>
+                  </a:lnTo>
+                  <a:lnTo>
+                    <a:pt x="3917898" y="3107446"/>
+                  </a:lnTo>
+                  <a:lnTo>
+                    <a:pt x="3994530" y="3123474"/>
+                  </a:lnTo>
+                  <a:lnTo>
+                    <a:pt x="4071163" y="3138820"/>
+                  </a:lnTo>
+                  <a:lnTo>
+                    <a:pt x="4147795" y="3153511"/>
+                  </a:lnTo>
+                  <a:lnTo>
+                    <a:pt x="4224428" y="3167577"/>
+                  </a:lnTo>
+                  <a:lnTo>
+                    <a:pt x="4301061" y="3181044"/>
+                  </a:lnTo>
+                  <a:lnTo>
+                    <a:pt x="4377693" y="3193937"/>
+                  </a:lnTo>
+                  <a:lnTo>
+                    <a:pt x="4454326" y="3206281"/>
+                  </a:lnTo>
+                  <a:lnTo>
+                    <a:pt x="4530958" y="3218100"/>
+                  </a:lnTo>
+                  <a:lnTo>
+                    <a:pt x="4607591" y="3229414"/>
+                  </a:lnTo>
+                  <a:lnTo>
+                    <a:pt x="4684223" y="3240247"/>
+                  </a:lnTo>
+                  <a:lnTo>
+                    <a:pt x="4760856" y="3250619"/>
+                  </a:lnTo>
+                  <a:lnTo>
+                    <a:pt x="4837488" y="3260549"/>
+                  </a:lnTo>
+                  <a:lnTo>
+                    <a:pt x="4914121" y="3270056"/>
+                  </a:lnTo>
+                  <a:lnTo>
+                    <a:pt x="4990753" y="3279157"/>
+                  </a:lnTo>
+                  <a:lnTo>
+                    <a:pt x="5067386" y="3287872"/>
+                  </a:lnTo>
+                  <a:lnTo>
+                    <a:pt x="5144019" y="3296215"/>
+                  </a:lnTo>
+                  <a:lnTo>
+                    <a:pt x="5220651" y="3304202"/>
+                  </a:lnTo>
+                  <a:lnTo>
+                    <a:pt x="5297284" y="3311850"/>
+                  </a:lnTo>
+                  <a:lnTo>
+                    <a:pt x="5373916" y="3319171"/>
+                  </a:lnTo>
+                  <a:lnTo>
+                    <a:pt x="5450549" y="3326181"/>
+                  </a:lnTo>
+                  <a:lnTo>
+                    <a:pt x="5527181" y="3332893"/>
+                  </a:lnTo>
+                  <a:lnTo>
+                    <a:pt x="5603814" y="3339318"/>
+                  </a:lnTo>
+                  <a:lnTo>
+                    <a:pt x="5680446" y="3345470"/>
+                  </a:lnTo>
+                  <a:lnTo>
+                    <a:pt x="5757079" y="3351359"/>
+                  </a:lnTo>
+                  <a:lnTo>
+                    <a:pt x="5833712" y="3356998"/>
+                  </a:lnTo>
+                  <a:lnTo>
+                    <a:pt x="5910344" y="3362397"/>
+                  </a:lnTo>
+                  <a:lnTo>
+                    <a:pt x="5986977" y="3367566"/>
+                  </a:lnTo>
+                  <a:lnTo>
+                    <a:pt x="6063609" y="3372514"/>
+                  </a:lnTo>
+                  <a:lnTo>
+                    <a:pt x="6140242" y="3377252"/>
+                  </a:lnTo>
+                  <a:lnTo>
+                    <a:pt x="6216874" y="3381788"/>
+                  </a:lnTo>
+                  <a:lnTo>
+                    <a:pt x="6293507" y="3386131"/>
+                  </a:lnTo>
+                  <a:lnTo>
+                    <a:pt x="6370139" y="3390289"/>
+                  </a:lnTo>
+                  <a:lnTo>
+                    <a:pt x="6446772" y="3394269"/>
+                  </a:lnTo>
+                  <a:lnTo>
+                    <a:pt x="6523404" y="3398080"/>
+                  </a:lnTo>
+                  <a:lnTo>
+                    <a:pt x="6523404" y="3481326"/>
+                  </a:lnTo>
+                  <a:lnTo>
+                    <a:pt x="6446772" y="3481039"/>
+                  </a:lnTo>
+                  <a:lnTo>
+                    <a:pt x="6370139" y="3480718"/>
+                  </a:lnTo>
+                  <a:lnTo>
+                    <a:pt x="6293507" y="3480360"/>
+                  </a:lnTo>
+                  <a:lnTo>
+                    <a:pt x="6216874" y="3479959"/>
+                  </a:lnTo>
+                  <a:lnTo>
+                    <a:pt x="6140242" y="3479510"/>
+                  </a:lnTo>
+                  <a:lnTo>
+                    <a:pt x="6063609" y="3479009"/>
+                  </a:lnTo>
+                  <a:lnTo>
+                    <a:pt x="5986977" y="3478448"/>
+                  </a:lnTo>
+                  <a:lnTo>
+                    <a:pt x="5910344" y="3477820"/>
+                  </a:lnTo>
+                  <a:lnTo>
+                    <a:pt x="5833712" y="3477119"/>
+                  </a:lnTo>
+                  <a:lnTo>
+                    <a:pt x="5757079" y="3476334"/>
+                  </a:lnTo>
+                  <a:lnTo>
+                    <a:pt x="5680446" y="3475456"/>
+                  </a:lnTo>
+                  <a:lnTo>
+                    <a:pt x="5603814" y="3474475"/>
+                  </a:lnTo>
+                  <a:lnTo>
+                    <a:pt x="5527181" y="3473377"/>
+                  </a:lnTo>
+                  <a:lnTo>
+                    <a:pt x="5450549" y="3472149"/>
+                  </a:lnTo>
+                  <a:lnTo>
+                    <a:pt x="5373916" y="3470776"/>
+                  </a:lnTo>
+                  <a:lnTo>
+                    <a:pt x="5297284" y="3469240"/>
+                  </a:lnTo>
+                  <a:lnTo>
+                    <a:pt x="5220651" y="3467523"/>
+                  </a:lnTo>
+                  <a:lnTo>
+                    <a:pt x="5144019" y="3465602"/>
+                  </a:lnTo>
+                  <a:lnTo>
+                    <a:pt x="5067386" y="3463453"/>
+                  </a:lnTo>
+                  <a:lnTo>
+                    <a:pt x="4990753" y="3461051"/>
+                  </a:lnTo>
+                  <a:lnTo>
+                    <a:pt x="4914121" y="3458363"/>
+                  </a:lnTo>
+                  <a:lnTo>
+                    <a:pt x="4837488" y="3455358"/>
+                  </a:lnTo>
+                  <a:lnTo>
+                    <a:pt x="4760856" y="3451997"/>
+                  </a:lnTo>
+                  <a:lnTo>
+                    <a:pt x="4684223" y="3448237"/>
+                  </a:lnTo>
+                  <a:lnTo>
+                    <a:pt x="4607591" y="3444033"/>
+                  </a:lnTo>
+                  <a:lnTo>
+                    <a:pt x="4530958" y="3439331"/>
+                  </a:lnTo>
+                  <a:lnTo>
+                    <a:pt x="4454326" y="3434072"/>
+                  </a:lnTo>
+                  <a:lnTo>
+                    <a:pt x="4377693" y="3428190"/>
+                  </a:lnTo>
+                  <a:lnTo>
+                    <a:pt x="4301061" y="3421612"/>
+                  </a:lnTo>
+                  <a:lnTo>
+                    <a:pt x="4224428" y="3414255"/>
+                  </a:lnTo>
+                  <a:lnTo>
+                    <a:pt x="4147795" y="3406027"/>
+                  </a:lnTo>
+                  <a:lnTo>
+                    <a:pt x="4071163" y="3396825"/>
+                  </a:lnTo>
+                  <a:lnTo>
+                    <a:pt x="3994530" y="3386534"/>
+                  </a:lnTo>
+                  <a:lnTo>
+                    <a:pt x="3917898" y="3375023"/>
+                  </a:lnTo>
+                  <a:lnTo>
+                    <a:pt x="3841265" y="3362150"/>
+                  </a:lnTo>
+                  <a:lnTo>
+                    <a:pt x="3764633" y="3347753"/>
+                  </a:lnTo>
+                  <a:lnTo>
+                    <a:pt x="3688000" y="3331650"/>
+                  </a:lnTo>
+                  <a:lnTo>
+                    <a:pt x="3611368" y="3313642"/>
+                  </a:lnTo>
+                  <a:lnTo>
+                    <a:pt x="3534735" y="3293501"/>
+                  </a:lnTo>
+                  <a:lnTo>
+                    <a:pt x="3458103" y="3270975"/>
+                  </a:lnTo>
+                  <a:lnTo>
+                    <a:pt x="3381470" y="3245782"/>
+                  </a:lnTo>
+                  <a:lnTo>
+                    <a:pt x="3304837" y="3217607"/>
+                  </a:lnTo>
+                  <a:lnTo>
+                    <a:pt x="3228205" y="3186095"/>
+                  </a:lnTo>
+                  <a:lnTo>
+                    <a:pt x="3151572" y="3150852"/>
+                  </a:lnTo>
+                  <a:lnTo>
+                    <a:pt x="3074940" y="3111436"/>
+                  </a:lnTo>
+                  <a:lnTo>
+                    <a:pt x="2998307" y="3067353"/>
+                  </a:lnTo>
+                  <a:lnTo>
+                    <a:pt x="2921675" y="3018051"/>
+                  </a:lnTo>
+                  <a:lnTo>
+                    <a:pt x="2845042" y="2962911"/>
+                  </a:lnTo>
+                  <a:lnTo>
+                    <a:pt x="2768410" y="2901242"/>
+                  </a:lnTo>
+                  <a:lnTo>
+                    <a:pt x="2691777" y="2832272"/>
+                  </a:lnTo>
+                  <a:lnTo>
+                    <a:pt x="2615144" y="2755135"/>
+                  </a:lnTo>
+                  <a:lnTo>
+                    <a:pt x="2538512" y="2668865"/>
+                  </a:lnTo>
+                  <a:lnTo>
+                    <a:pt x="2461879" y="2623338"/>
+                  </a:lnTo>
+                  <a:lnTo>
+                    <a:pt x="2385247" y="2585060"/>
+                  </a:lnTo>
+                  <a:lnTo>
+                    <a:pt x="2308614" y="2545078"/>
+                  </a:lnTo>
+                  <a:lnTo>
+                    <a:pt x="2231982" y="2503318"/>
+                  </a:lnTo>
+                  <a:lnTo>
+                    <a:pt x="2155349" y="2459700"/>
+                  </a:lnTo>
+                  <a:lnTo>
+                    <a:pt x="2078717" y="2414142"/>
+                  </a:lnTo>
+                  <a:lnTo>
+                    <a:pt x="2002084" y="2366557"/>
+                  </a:lnTo>
+                  <a:lnTo>
+                    <a:pt x="1925452" y="2316855"/>
+                  </a:lnTo>
+                  <a:lnTo>
+                    <a:pt x="1848819" y="2264941"/>
+                  </a:lnTo>
+                  <a:lnTo>
+                    <a:pt x="1772186" y="2210718"/>
+                  </a:lnTo>
+                  <a:lnTo>
+                    <a:pt x="1695554" y="2154083"/>
+                  </a:lnTo>
+                  <a:lnTo>
+                    <a:pt x="1618921" y="2094928"/>
+                  </a:lnTo>
+                  <a:lnTo>
+                    <a:pt x="1542289" y="2033141"/>
+                  </a:lnTo>
+                  <a:lnTo>
+                    <a:pt x="1465656" y="1968606"/>
+                  </a:lnTo>
+                  <a:lnTo>
+                    <a:pt x="1389024" y="1901200"/>
+                  </a:lnTo>
+                  <a:lnTo>
+                    <a:pt x="1312391" y="1830794"/>
+                  </a:lnTo>
+                  <a:lnTo>
+                    <a:pt x="1235759" y="1757257"/>
+                  </a:lnTo>
+                  <a:lnTo>
+                    <a:pt x="1159126" y="1680448"/>
+                  </a:lnTo>
+                  <a:lnTo>
+                    <a:pt x="1082493" y="1600221"/>
+                  </a:lnTo>
+                  <a:lnTo>
+                    <a:pt x="1005861" y="1516426"/>
+                  </a:lnTo>
+                  <a:lnTo>
+                    <a:pt x="929228" y="1428903"/>
+                  </a:lnTo>
+                  <a:lnTo>
+                    <a:pt x="852596" y="1337486"/>
+                  </a:lnTo>
+                  <a:lnTo>
+                    <a:pt x="775963" y="1242001"/>
+                  </a:lnTo>
+                  <a:lnTo>
+                    <a:pt x="699331" y="1142269"/>
+                  </a:lnTo>
+                  <a:lnTo>
+                    <a:pt x="622698" y="1038100"/>
+                  </a:lnTo>
+                  <a:lnTo>
+                    <a:pt x="546066" y="929297"/>
+                  </a:lnTo>
+                  <a:lnTo>
+                    <a:pt x="469433" y="815653"/>
+                  </a:lnTo>
+                  <a:lnTo>
+                    <a:pt x="392801" y="696953"/>
+                  </a:lnTo>
+                  <a:lnTo>
+                    <a:pt x="316168" y="572973"/>
+                  </a:lnTo>
+                  <a:lnTo>
+                    <a:pt x="239535" y="443476"/>
+                  </a:lnTo>
+                  <a:lnTo>
+                    <a:pt x="162903" y="308219"/>
+                  </a:lnTo>
+                  <a:lnTo>
+                    <a:pt x="86270" y="166944"/>
+                  </a:lnTo>
+                  <a:lnTo>
+                    <a:pt x="9638" y="19384"/>
                   </a:lnTo>
                   <a:lnTo>
                     <a:pt x="0" y="0"/>
@@ -3492,210 +3492,210 @@
           </p:nvSpPr>
           <p:spPr>
             <a:xfrm>
-              <a:off x="3241562" y="1896563"/>
-              <a:ext cx="4979738" cy="3562824"/>
+              <a:off x="3241562" y="2073503"/>
+              <a:ext cx="4979738" cy="3398080"/>
             </a:xfrm>
             <a:custGeom>
               <a:avLst/>
               <a:pathLst>
-                <a:path w="4979738" h="3562824">
+                <a:path w="4979738" h="3398080">
                   <a:moveTo>
                     <a:pt x="0" y="0"/>
                   </a:moveTo>
                   <a:lnTo>
-                    <a:pt x="75254" y="380471"/>
-                  </a:lnTo>
-                  <a:lnTo>
-                    <a:pt x="151887" y="726890"/>
-                  </a:lnTo>
-                  <a:lnTo>
-                    <a:pt x="228520" y="1036634"/>
-                  </a:lnTo>
-                  <a:lnTo>
-                    <a:pt x="305152" y="1313586"/>
-                  </a:lnTo>
-                  <a:lnTo>
-                    <a:pt x="381785" y="1561218"/>
-                  </a:lnTo>
-                  <a:lnTo>
-                    <a:pt x="458417" y="1782633"/>
-                  </a:lnTo>
-                  <a:lnTo>
-                    <a:pt x="535050" y="1980608"/>
-                  </a:lnTo>
-                  <a:lnTo>
-                    <a:pt x="611682" y="2157623"/>
-                  </a:lnTo>
-                  <a:lnTo>
-                    <a:pt x="688315" y="2315898"/>
-                  </a:lnTo>
-                  <a:lnTo>
-                    <a:pt x="764947" y="2457417"/>
-                  </a:lnTo>
-                  <a:lnTo>
-                    <a:pt x="841580" y="2583953"/>
-                  </a:lnTo>
-                  <a:lnTo>
-                    <a:pt x="918213" y="2697093"/>
-                  </a:lnTo>
-                  <a:lnTo>
-                    <a:pt x="994845" y="2788946"/>
-                  </a:lnTo>
-                  <a:lnTo>
-                    <a:pt x="1071478" y="2825734"/>
-                  </a:lnTo>
-                  <a:lnTo>
-                    <a:pt x="1148110" y="2860955"/>
-                  </a:lnTo>
-                  <a:lnTo>
-                    <a:pt x="1224743" y="2894676"/>
-                  </a:lnTo>
-                  <a:lnTo>
-                    <a:pt x="1301375" y="2926960"/>
-                  </a:lnTo>
-                  <a:lnTo>
-                    <a:pt x="1378008" y="2957870"/>
-                  </a:lnTo>
-                  <a:lnTo>
-                    <a:pt x="1454640" y="2987463"/>
-                  </a:lnTo>
-                  <a:lnTo>
-                    <a:pt x="1531273" y="3015795"/>
-                  </a:lnTo>
-                  <a:lnTo>
-                    <a:pt x="1607905" y="3042921"/>
-                  </a:lnTo>
-                  <a:lnTo>
-                    <a:pt x="1684538" y="3068891"/>
-                  </a:lnTo>
-                  <a:lnTo>
-                    <a:pt x="1761171" y="3093756"/>
-                  </a:lnTo>
-                  <a:lnTo>
-                    <a:pt x="1837803" y="3117561"/>
-                  </a:lnTo>
-                  <a:lnTo>
-                    <a:pt x="1914436" y="3140352"/>
-                  </a:lnTo>
-                  <a:lnTo>
-                    <a:pt x="1991068" y="3162172"/>
-                  </a:lnTo>
-                  <a:lnTo>
-                    <a:pt x="2067701" y="3183063"/>
-                  </a:lnTo>
-                  <a:lnTo>
-                    <a:pt x="2144333" y="3203064"/>
-                  </a:lnTo>
-                  <a:lnTo>
-                    <a:pt x="2220966" y="3222213"/>
-                  </a:lnTo>
-                  <a:lnTo>
-                    <a:pt x="2297598" y="3240547"/>
-                  </a:lnTo>
-                  <a:lnTo>
-                    <a:pt x="2374231" y="3258100"/>
-                  </a:lnTo>
-                  <a:lnTo>
-                    <a:pt x="2450863" y="3274905"/>
-                  </a:lnTo>
-                  <a:lnTo>
-                    <a:pt x="2527496" y="3290994"/>
-                  </a:lnTo>
-                  <a:lnTo>
-                    <a:pt x="2604129" y="3306398"/>
-                  </a:lnTo>
-                  <a:lnTo>
-                    <a:pt x="2680761" y="3321146"/>
-                  </a:lnTo>
-                  <a:lnTo>
-                    <a:pt x="2757394" y="3335266"/>
-                  </a:lnTo>
-                  <a:lnTo>
-                    <a:pt x="2834026" y="3348784"/>
-                  </a:lnTo>
-                  <a:lnTo>
-                    <a:pt x="2910659" y="3361726"/>
-                  </a:lnTo>
-                  <a:lnTo>
-                    <a:pt x="2987291" y="3374118"/>
-                  </a:lnTo>
-                  <a:lnTo>
-                    <a:pt x="3063924" y="3385981"/>
-                  </a:lnTo>
-                  <a:lnTo>
-                    <a:pt x="3140556" y="3397339"/>
-                  </a:lnTo>
-                  <a:lnTo>
-                    <a:pt x="3217189" y="3408213"/>
-                  </a:lnTo>
-                  <a:lnTo>
-                    <a:pt x="3293822" y="3418625"/>
-                  </a:lnTo>
-                  <a:lnTo>
-                    <a:pt x="3370454" y="3428592"/>
-                  </a:lnTo>
-                  <a:lnTo>
-                    <a:pt x="3447087" y="3438136"/>
-                  </a:lnTo>
-                  <a:lnTo>
-                    <a:pt x="3523719" y="3447272"/>
-                  </a:lnTo>
-                  <a:lnTo>
-                    <a:pt x="3600352" y="3456020"/>
-                  </a:lnTo>
-                  <a:lnTo>
-                    <a:pt x="3676984" y="3464395"/>
-                  </a:lnTo>
-                  <a:lnTo>
-                    <a:pt x="3753617" y="3472413"/>
-                  </a:lnTo>
-                  <a:lnTo>
-                    <a:pt x="3830249" y="3480090"/>
-                  </a:lnTo>
-                  <a:lnTo>
-                    <a:pt x="3906882" y="3487439"/>
-                  </a:lnTo>
-                  <a:lnTo>
-                    <a:pt x="3983514" y="3494476"/>
-                  </a:lnTo>
-                  <a:lnTo>
-                    <a:pt x="4060147" y="3501213"/>
-                  </a:lnTo>
-                  <a:lnTo>
-                    <a:pt x="4136780" y="3507663"/>
-                  </a:lnTo>
-                  <a:lnTo>
-                    <a:pt x="4213412" y="3513838"/>
-                  </a:lnTo>
-                  <a:lnTo>
-                    <a:pt x="4290045" y="3519750"/>
-                  </a:lnTo>
-                  <a:lnTo>
-                    <a:pt x="4366677" y="3525411"/>
-                  </a:lnTo>
-                  <a:lnTo>
-                    <a:pt x="4443310" y="3530830"/>
-                  </a:lnTo>
-                  <a:lnTo>
-                    <a:pt x="4519942" y="3536018"/>
-                  </a:lnTo>
-                  <a:lnTo>
-                    <a:pt x="4596575" y="3540986"/>
-                  </a:lnTo>
-                  <a:lnTo>
-                    <a:pt x="4673207" y="3545742"/>
-                  </a:lnTo>
-                  <a:lnTo>
-                    <a:pt x="4749840" y="3550295"/>
-                  </a:lnTo>
-                  <a:lnTo>
-                    <a:pt x="4826473" y="3554655"/>
-                  </a:lnTo>
-                  <a:lnTo>
-                    <a:pt x="4903105" y="3558828"/>
-                  </a:lnTo>
-                  <a:lnTo>
-                    <a:pt x="4979738" y="3562824"/>
+                    <a:pt x="75254" y="362878"/>
+                  </a:lnTo>
+                  <a:lnTo>
+                    <a:pt x="151887" y="693279"/>
+                  </a:lnTo>
+                  <a:lnTo>
+                    <a:pt x="228520" y="988700"/>
+                  </a:lnTo>
+                  <a:lnTo>
+                    <a:pt x="305152" y="1252846"/>
+                  </a:lnTo>
+                  <a:lnTo>
+                    <a:pt x="381785" y="1489028"/>
+                  </a:lnTo>
+                  <a:lnTo>
+                    <a:pt x="458417" y="1700205"/>
+                  </a:lnTo>
+                  <a:lnTo>
+                    <a:pt x="535050" y="1889025"/>
+                  </a:lnTo>
+                  <a:lnTo>
+                    <a:pt x="611682" y="2057855"/>
+                  </a:lnTo>
+                  <a:lnTo>
+                    <a:pt x="688315" y="2208812"/>
+                  </a:lnTo>
+                  <a:lnTo>
+                    <a:pt x="764947" y="2343787"/>
+                  </a:lnTo>
+                  <a:lnTo>
+                    <a:pt x="841580" y="2464472"/>
+                  </a:lnTo>
+                  <a:lnTo>
+                    <a:pt x="918213" y="2572381"/>
+                  </a:lnTo>
+                  <a:lnTo>
+                    <a:pt x="994845" y="2659986"/>
+                  </a:lnTo>
+                  <a:lnTo>
+                    <a:pt x="1071478" y="2695073"/>
+                  </a:lnTo>
+                  <a:lnTo>
+                    <a:pt x="1148110" y="2728665"/>
+                  </a:lnTo>
+                  <a:lnTo>
+                    <a:pt x="1224743" y="2760827"/>
+                  </a:lnTo>
+                  <a:lnTo>
+                    <a:pt x="1301375" y="2791619"/>
+                  </a:lnTo>
+                  <a:lnTo>
+                    <a:pt x="1378008" y="2821099"/>
+                  </a:lnTo>
+                  <a:lnTo>
+                    <a:pt x="1454640" y="2849324"/>
+                  </a:lnTo>
+                  <a:lnTo>
+                    <a:pt x="1531273" y="2876346"/>
+                  </a:lnTo>
+                  <a:lnTo>
+                    <a:pt x="1607905" y="2902218"/>
+                  </a:lnTo>
+                  <a:lnTo>
+                    <a:pt x="1684538" y="2926987"/>
+                  </a:lnTo>
+                  <a:lnTo>
+                    <a:pt x="1761171" y="2950701"/>
+                  </a:lnTo>
+                  <a:lnTo>
+                    <a:pt x="1837803" y="2973406"/>
+                  </a:lnTo>
+                  <a:lnTo>
+                    <a:pt x="1914436" y="2995143"/>
+                  </a:lnTo>
+                  <a:lnTo>
+                    <a:pt x="1991068" y="3015954"/>
+                  </a:lnTo>
+                  <a:lnTo>
+                    <a:pt x="2067701" y="3035879"/>
+                  </a:lnTo>
+                  <a:lnTo>
+                    <a:pt x="2144333" y="3054956"/>
+                  </a:lnTo>
+                  <a:lnTo>
+                    <a:pt x="2220966" y="3073219"/>
+                  </a:lnTo>
+                  <a:lnTo>
+                    <a:pt x="2297598" y="3090705"/>
+                  </a:lnTo>
+                  <a:lnTo>
+                    <a:pt x="2374231" y="3107446"/>
+                  </a:lnTo>
+                  <a:lnTo>
+                    <a:pt x="2450863" y="3123474"/>
+                  </a:lnTo>
+                  <a:lnTo>
+                    <a:pt x="2527496" y="3138820"/>
+                  </a:lnTo>
+                  <a:lnTo>
+                    <a:pt x="2604129" y="3153511"/>
+                  </a:lnTo>
+                  <a:lnTo>
+                    <a:pt x="2680761" y="3167577"/>
+                  </a:lnTo>
+                  <a:lnTo>
+                    <a:pt x="2757394" y="3181044"/>
+                  </a:lnTo>
+                  <a:lnTo>
+                    <a:pt x="2834026" y="3193937"/>
+                  </a:lnTo>
+                  <a:lnTo>
+                    <a:pt x="2910659" y="3206281"/>
+                  </a:lnTo>
+                  <a:lnTo>
+                    <a:pt x="2987291" y="3218100"/>
+                  </a:lnTo>
+                  <a:lnTo>
+                    <a:pt x="3063924" y="3229414"/>
+                  </a:lnTo>
+                  <a:lnTo>
+                    <a:pt x="3140556" y="3240247"/>
+                  </a:lnTo>
+                  <a:lnTo>
+                    <a:pt x="3217189" y="3250619"/>
+                  </a:lnTo>
+                  <a:lnTo>
+                    <a:pt x="3293822" y="3260549"/>
+                  </a:lnTo>
+                  <a:lnTo>
+                    <a:pt x="3370454" y="3270056"/>
+                  </a:lnTo>
+                  <a:lnTo>
+                    <a:pt x="3447087" y="3279157"/>
+                  </a:lnTo>
+                  <a:lnTo>
+                    <a:pt x="3523719" y="3287872"/>
+                  </a:lnTo>
+                  <a:lnTo>
+                    <a:pt x="3600352" y="3296215"/>
+                  </a:lnTo>
+                  <a:lnTo>
+                    <a:pt x="3676984" y="3304202"/>
+                  </a:lnTo>
+                  <a:lnTo>
+                    <a:pt x="3753617" y="3311850"/>
+                  </a:lnTo>
+                  <a:lnTo>
+                    <a:pt x="3830249" y="3319171"/>
+                  </a:lnTo>
+                  <a:lnTo>
+                    <a:pt x="3906882" y="3326181"/>
+                  </a:lnTo>
+                  <a:lnTo>
+                    <a:pt x="3983514" y="3332893"/>
+                  </a:lnTo>
+                  <a:lnTo>
+                    <a:pt x="4060147" y="3339318"/>
+                  </a:lnTo>
+                  <a:lnTo>
+                    <a:pt x="4136780" y="3345470"/>
+                  </a:lnTo>
+                  <a:lnTo>
+                    <a:pt x="4213412" y="3351359"/>
+                  </a:lnTo>
+                  <a:lnTo>
+                    <a:pt x="4290045" y="3356998"/>
+                  </a:lnTo>
+                  <a:lnTo>
+                    <a:pt x="4366677" y="3362397"/>
+                  </a:lnTo>
+                  <a:lnTo>
+                    <a:pt x="4443310" y="3367566"/>
+                  </a:lnTo>
+                  <a:lnTo>
+                    <a:pt x="4519942" y="3372514"/>
+                  </a:lnTo>
+                  <a:lnTo>
+                    <a:pt x="4596575" y="3377252"/>
+                  </a:lnTo>
+                  <a:lnTo>
+                    <a:pt x="4673207" y="3381788"/>
+                  </a:lnTo>
+                  <a:lnTo>
+                    <a:pt x="4749840" y="3386131"/>
+                  </a:lnTo>
+                  <a:lnTo>
+                    <a:pt x="4826473" y="3390289"/>
+                  </a:lnTo>
+                  <a:lnTo>
+                    <a:pt x="4903105" y="3394269"/>
+                  </a:lnTo>
+                  <a:lnTo>
+                    <a:pt x="4979738" y="3398080"/>
                   </a:lnTo>
                 </a:path>
               </a:pathLst>
@@ -3715,270 +3715,270 @@
           </p:nvSpPr>
           <p:spPr>
             <a:xfrm>
-              <a:off x="1697896" y="1896563"/>
-              <a:ext cx="6523404" cy="3650105"/>
+              <a:off x="1697896" y="2073503"/>
+              <a:ext cx="6523404" cy="3481326"/>
             </a:xfrm>
             <a:custGeom>
               <a:avLst/>
               <a:pathLst>
-                <a:path w="6523404" h="3650105">
+                <a:path w="6523404" h="3481326">
                   <a:moveTo>
-                    <a:pt x="6523404" y="3650105"/>
+                    <a:pt x="6523404" y="3481326"/>
                   </a:moveTo>
                   <a:lnTo>
-                    <a:pt x="6446772" y="3649805"/>
-                  </a:lnTo>
-                  <a:lnTo>
-                    <a:pt x="6370139" y="3649468"/>
-                  </a:lnTo>
-                  <a:lnTo>
-                    <a:pt x="6293507" y="3649092"/>
-                  </a:lnTo>
-                  <a:lnTo>
-                    <a:pt x="6216874" y="3648672"/>
-                  </a:lnTo>
-                  <a:lnTo>
-                    <a:pt x="6140242" y="3648202"/>
-                  </a:lnTo>
-                  <a:lnTo>
-                    <a:pt x="6063609" y="3647676"/>
-                  </a:lnTo>
-                  <a:lnTo>
-                    <a:pt x="5986977" y="3647088"/>
-                  </a:lnTo>
-                  <a:lnTo>
-                    <a:pt x="5910344" y="3646430"/>
-                  </a:lnTo>
-                  <a:lnTo>
-                    <a:pt x="5833712" y="3645694"/>
-                  </a:lnTo>
-                  <a:lnTo>
-                    <a:pt x="5757079" y="3644872"/>
-                  </a:lnTo>
-                  <a:lnTo>
-                    <a:pt x="5680446" y="3643951"/>
-                  </a:lnTo>
-                  <a:lnTo>
-                    <a:pt x="5603814" y="3642922"/>
-                  </a:lnTo>
-                  <a:lnTo>
-                    <a:pt x="5527181" y="3641771"/>
-                  </a:lnTo>
-                  <a:lnTo>
-                    <a:pt x="5450549" y="3640484"/>
-                  </a:lnTo>
-                  <a:lnTo>
-                    <a:pt x="5373916" y="3639044"/>
-                  </a:lnTo>
-                  <a:lnTo>
-                    <a:pt x="5297284" y="3637434"/>
-                  </a:lnTo>
-                  <a:lnTo>
-                    <a:pt x="5220651" y="3635633"/>
-                  </a:lnTo>
-                  <a:lnTo>
-                    <a:pt x="5144019" y="3633619"/>
-                  </a:lnTo>
-                  <a:lnTo>
-                    <a:pt x="5067386" y="3631366"/>
-                  </a:lnTo>
-                  <a:lnTo>
-                    <a:pt x="4990753" y="3628847"/>
-                  </a:lnTo>
-                  <a:lnTo>
-                    <a:pt x="4914121" y="3626030"/>
-                  </a:lnTo>
-                  <a:lnTo>
-                    <a:pt x="4837488" y="3622879"/>
-                  </a:lnTo>
-                  <a:lnTo>
-                    <a:pt x="4760856" y="3619354"/>
-                  </a:lnTo>
-                  <a:lnTo>
-                    <a:pt x="4684223" y="3615413"/>
-                  </a:lnTo>
-                  <a:lnTo>
-                    <a:pt x="4607591" y="3611005"/>
-                  </a:lnTo>
-                  <a:lnTo>
-                    <a:pt x="4530958" y="3606074"/>
-                  </a:lnTo>
-                  <a:lnTo>
-                    <a:pt x="4454326" y="3600561"/>
-                  </a:lnTo>
-                  <a:lnTo>
-                    <a:pt x="4377693" y="3594394"/>
-                  </a:lnTo>
-                  <a:lnTo>
-                    <a:pt x="4301061" y="3587497"/>
-                  </a:lnTo>
-                  <a:lnTo>
-                    <a:pt x="4224428" y="3579783"/>
-                  </a:lnTo>
-                  <a:lnTo>
-                    <a:pt x="4147795" y="3571156"/>
-                  </a:lnTo>
-                  <a:lnTo>
-                    <a:pt x="4071163" y="3561508"/>
-                  </a:lnTo>
-                  <a:lnTo>
-                    <a:pt x="3994530" y="3550717"/>
-                  </a:lnTo>
-                  <a:lnTo>
-                    <a:pt x="3917898" y="3538649"/>
-                  </a:lnTo>
-                  <a:lnTo>
-                    <a:pt x="3841265" y="3525152"/>
-                  </a:lnTo>
-                  <a:lnTo>
-                    <a:pt x="3764633" y="3510056"/>
-                  </a:lnTo>
-                  <a:lnTo>
-                    <a:pt x="3688000" y="3493174"/>
-                  </a:lnTo>
-                  <a:lnTo>
-                    <a:pt x="3611368" y="3474292"/>
-                  </a:lnTo>
-                  <a:lnTo>
-                    <a:pt x="3534735" y="3453174"/>
-                  </a:lnTo>
-                  <a:lnTo>
-                    <a:pt x="3458103" y="3429557"/>
-                  </a:lnTo>
-                  <a:lnTo>
-                    <a:pt x="3381470" y="3403142"/>
-                  </a:lnTo>
-                  <a:lnTo>
-                    <a:pt x="3304837" y="3373601"/>
-                  </a:lnTo>
-                  <a:lnTo>
-                    <a:pt x="3228205" y="3340561"/>
-                  </a:lnTo>
-                  <a:lnTo>
-                    <a:pt x="3151572" y="3303610"/>
-                  </a:lnTo>
-                  <a:lnTo>
-                    <a:pt x="3074940" y="3262283"/>
-                  </a:lnTo>
-                  <a:lnTo>
-                    <a:pt x="2998307" y="3216063"/>
-                  </a:lnTo>
-                  <a:lnTo>
-                    <a:pt x="2921675" y="3164370"/>
-                  </a:lnTo>
-                  <a:lnTo>
-                    <a:pt x="2845042" y="3106557"/>
-                  </a:lnTo>
-                  <a:lnTo>
-                    <a:pt x="2768410" y="3041899"/>
-                  </a:lnTo>
-                  <a:lnTo>
-                    <a:pt x="2691777" y="2969585"/>
-                  </a:lnTo>
-                  <a:lnTo>
-                    <a:pt x="2615144" y="2888708"/>
-                  </a:lnTo>
-                  <a:lnTo>
-                    <a:pt x="2538512" y="2798256"/>
-                  </a:lnTo>
-                  <a:lnTo>
-                    <a:pt x="2461879" y="2750521"/>
-                  </a:lnTo>
-                  <a:lnTo>
-                    <a:pt x="2385247" y="2710387"/>
-                  </a:lnTo>
-                  <a:lnTo>
-                    <a:pt x="2308614" y="2668467"/>
-                  </a:lnTo>
-                  <a:lnTo>
-                    <a:pt x="2231982" y="2624683"/>
-                  </a:lnTo>
-                  <a:lnTo>
-                    <a:pt x="2155349" y="2578950"/>
-                  </a:lnTo>
-                  <a:lnTo>
-                    <a:pt x="2078717" y="2531183"/>
-                  </a:lnTo>
-                  <a:lnTo>
-                    <a:pt x="2002084" y="2481291"/>
-                  </a:lnTo>
-                  <a:lnTo>
-                    <a:pt x="1925452" y="2429179"/>
-                  </a:lnTo>
-                  <a:lnTo>
-                    <a:pt x="1848819" y="2374749"/>
-                  </a:lnTo>
-                  <a:lnTo>
-                    <a:pt x="1772186" y="2317897"/>
-                  </a:lnTo>
-                  <a:lnTo>
-                    <a:pt x="1695554" y="2258516"/>
-                  </a:lnTo>
-                  <a:lnTo>
-                    <a:pt x="1618921" y="2196493"/>
-                  </a:lnTo>
-                  <a:lnTo>
-                    <a:pt x="1542289" y="2131711"/>
-                  </a:lnTo>
-                  <a:lnTo>
-                    <a:pt x="1465656" y="2064047"/>
-                  </a:lnTo>
-                  <a:lnTo>
-                    <a:pt x="1389024" y="1993372"/>
-                  </a:lnTo>
-                  <a:lnTo>
-                    <a:pt x="1312391" y="1919554"/>
-                  </a:lnTo>
-                  <a:lnTo>
-                    <a:pt x="1235759" y="1842451"/>
-                  </a:lnTo>
-                  <a:lnTo>
-                    <a:pt x="1159126" y="1761918"/>
-                  </a:lnTo>
-                  <a:lnTo>
-                    <a:pt x="1082493" y="1677802"/>
-                  </a:lnTo>
-                  <a:lnTo>
-                    <a:pt x="1005861" y="1589944"/>
-                  </a:lnTo>
-                  <a:lnTo>
-                    <a:pt x="929228" y="1498178"/>
-                  </a:lnTo>
-                  <a:lnTo>
-                    <a:pt x="852596" y="1402329"/>
-                  </a:lnTo>
-                  <a:lnTo>
-                    <a:pt x="775963" y="1302215"/>
-                  </a:lnTo>
-                  <a:lnTo>
-                    <a:pt x="699331" y="1197648"/>
-                  </a:lnTo>
-                  <a:lnTo>
-                    <a:pt x="622698" y="1088429"/>
-                  </a:lnTo>
-                  <a:lnTo>
-                    <a:pt x="546066" y="974350"/>
-                  </a:lnTo>
-                  <a:lnTo>
-                    <a:pt x="469433" y="855197"/>
-                  </a:lnTo>
-                  <a:lnTo>
-                    <a:pt x="392801" y="730742"/>
-                  </a:lnTo>
-                  <a:lnTo>
-                    <a:pt x="316168" y="600751"/>
-                  </a:lnTo>
-                  <a:lnTo>
-                    <a:pt x="239535" y="464977"/>
-                  </a:lnTo>
-                  <a:lnTo>
-                    <a:pt x="162903" y="323162"/>
-                  </a:lnTo>
-                  <a:lnTo>
-                    <a:pt x="86270" y="175038"/>
-                  </a:lnTo>
-                  <a:lnTo>
-                    <a:pt x="9638" y="20324"/>
+                    <a:pt x="6446772" y="3481039"/>
+                  </a:lnTo>
+                  <a:lnTo>
+                    <a:pt x="6370139" y="3480718"/>
+                  </a:lnTo>
+                  <a:lnTo>
+                    <a:pt x="6293507" y="3480360"/>
+                  </a:lnTo>
+                  <a:lnTo>
+                    <a:pt x="6216874" y="3479959"/>
+                  </a:lnTo>
+                  <a:lnTo>
+                    <a:pt x="6140242" y="3479510"/>
+                  </a:lnTo>
+                  <a:lnTo>
+                    <a:pt x="6063609" y="3479009"/>
+                  </a:lnTo>
+                  <a:lnTo>
+                    <a:pt x="5986977" y="3478448"/>
+                  </a:lnTo>
+                  <a:lnTo>
+                    <a:pt x="5910344" y="3477820"/>
+                  </a:lnTo>
+                  <a:lnTo>
+                    <a:pt x="5833712" y="3477119"/>
+                  </a:lnTo>
+                  <a:lnTo>
+                    <a:pt x="5757079" y="3476334"/>
+                  </a:lnTo>
+                  <a:lnTo>
+                    <a:pt x="5680446" y="3475456"/>
+                  </a:lnTo>
+                  <a:lnTo>
+                    <a:pt x="5603814" y="3474475"/>
+                  </a:lnTo>
+                  <a:lnTo>
+                    <a:pt x="5527181" y="3473377"/>
+                  </a:lnTo>
+                  <a:lnTo>
+                    <a:pt x="5450549" y="3472149"/>
+                  </a:lnTo>
+                  <a:lnTo>
+                    <a:pt x="5373916" y="3470776"/>
+                  </a:lnTo>
+                  <a:lnTo>
+                    <a:pt x="5297284" y="3469240"/>
+                  </a:lnTo>
+                  <a:lnTo>
+                    <a:pt x="5220651" y="3467523"/>
+                  </a:lnTo>
+                  <a:lnTo>
+                    <a:pt x="5144019" y="3465602"/>
+                  </a:lnTo>
+                  <a:lnTo>
+                    <a:pt x="5067386" y="3463453"/>
+                  </a:lnTo>
+                  <a:lnTo>
+                    <a:pt x="4990753" y="3461051"/>
+                  </a:lnTo>
+                  <a:lnTo>
+                    <a:pt x="4914121" y="3458363"/>
+                  </a:lnTo>
+                  <a:lnTo>
+                    <a:pt x="4837488" y="3455358"/>
+                  </a:lnTo>
+                  <a:lnTo>
+                    <a:pt x="4760856" y="3451997"/>
+                  </a:lnTo>
+                  <a:lnTo>
+                    <a:pt x="4684223" y="3448237"/>
+                  </a:lnTo>
+                  <a:lnTo>
+                    <a:pt x="4607591" y="3444033"/>
+                  </a:lnTo>
+                  <a:lnTo>
+                    <a:pt x="4530958" y="3439331"/>
+                  </a:lnTo>
+                  <a:lnTo>
+                    <a:pt x="4454326" y="3434072"/>
+                  </a:lnTo>
+                  <a:lnTo>
+                    <a:pt x="4377693" y="3428190"/>
+                  </a:lnTo>
+                  <a:lnTo>
+                    <a:pt x="4301061" y="3421612"/>
+                  </a:lnTo>
+                  <a:lnTo>
+                    <a:pt x="4224428" y="3414255"/>
+                  </a:lnTo>
+                  <a:lnTo>
+                    <a:pt x="4147795" y="3406027"/>
+                  </a:lnTo>
+                  <a:lnTo>
+                    <a:pt x="4071163" y="3396825"/>
+                  </a:lnTo>
+                  <a:lnTo>
+                    <a:pt x="3994530" y="3386534"/>
+                  </a:lnTo>
+                  <a:lnTo>
+                    <a:pt x="3917898" y="3375023"/>
+                  </a:lnTo>
+                  <a:lnTo>
+                    <a:pt x="3841265" y="3362150"/>
+                  </a:lnTo>
+                  <a:lnTo>
+                    <a:pt x="3764633" y="3347753"/>
+                  </a:lnTo>
+                  <a:lnTo>
+                    <a:pt x="3688000" y="3331650"/>
+                  </a:lnTo>
+                  <a:lnTo>
+                    <a:pt x="3611368" y="3313642"/>
+                  </a:lnTo>
+                  <a:lnTo>
+                    <a:pt x="3534735" y="3293501"/>
+                  </a:lnTo>
+                  <a:lnTo>
+                    <a:pt x="3458103" y="3270975"/>
+                  </a:lnTo>
+                  <a:lnTo>
+                    <a:pt x="3381470" y="3245782"/>
+                  </a:lnTo>
+                  <a:lnTo>
+                    <a:pt x="3304837" y="3217607"/>
+                  </a:lnTo>
+                  <a:lnTo>
+                    <a:pt x="3228205" y="3186095"/>
+                  </a:lnTo>
+                  <a:lnTo>
+                    <a:pt x="3151572" y="3150852"/>
+                  </a:lnTo>
+                  <a:lnTo>
+                    <a:pt x="3074940" y="3111436"/>
+                  </a:lnTo>
+                  <a:lnTo>
+                    <a:pt x="2998307" y="3067353"/>
+                  </a:lnTo>
+                  <a:lnTo>
+                    <a:pt x="2921675" y="3018051"/>
+                  </a:lnTo>
+                  <a:lnTo>
+                    <a:pt x="2845042" y="2962911"/>
+                  </a:lnTo>
+                  <a:lnTo>
+                    <a:pt x="2768410" y="2901242"/>
+                  </a:lnTo>
+                  <a:lnTo>
+                    <a:pt x="2691777" y="2832272"/>
+                  </a:lnTo>
+                  <a:lnTo>
+                    <a:pt x="2615144" y="2755135"/>
+                  </a:lnTo>
+                  <a:lnTo>
+                    <a:pt x="2538512" y="2668865"/>
+                  </a:lnTo>
+                  <a:lnTo>
+                    <a:pt x="2461879" y="2623338"/>
+                  </a:lnTo>
+                  <a:lnTo>
+                    <a:pt x="2385247" y="2585060"/>
+                  </a:lnTo>
+                  <a:lnTo>
+                    <a:pt x="2308614" y="2545078"/>
+                  </a:lnTo>
+                  <a:lnTo>
+                    <a:pt x="2231982" y="2503318"/>
+                  </a:lnTo>
+                  <a:lnTo>
+                    <a:pt x="2155349" y="2459700"/>
+                  </a:lnTo>
+                  <a:lnTo>
+                    <a:pt x="2078717" y="2414142"/>
+                  </a:lnTo>
+                  <a:lnTo>
+                    <a:pt x="2002084" y="2366557"/>
+                  </a:lnTo>
+                  <a:lnTo>
+                    <a:pt x="1925452" y="2316855"/>
+                  </a:lnTo>
+                  <a:lnTo>
+                    <a:pt x="1848819" y="2264941"/>
+                  </a:lnTo>
+                  <a:lnTo>
+                    <a:pt x="1772186" y="2210718"/>
+                  </a:lnTo>
+                  <a:lnTo>
+                    <a:pt x="1695554" y="2154083"/>
+                  </a:lnTo>
+                  <a:lnTo>
+                    <a:pt x="1618921" y="2094928"/>
+                  </a:lnTo>
+                  <a:lnTo>
+                    <a:pt x="1542289" y="2033141"/>
+                  </a:lnTo>
+                  <a:lnTo>
+                    <a:pt x="1465656" y="1968606"/>
+                  </a:lnTo>
+                  <a:lnTo>
+                    <a:pt x="1389024" y="1901200"/>
+                  </a:lnTo>
+                  <a:lnTo>
+                    <a:pt x="1312391" y="1830794"/>
+                  </a:lnTo>
+                  <a:lnTo>
+                    <a:pt x="1235759" y="1757257"/>
+                  </a:lnTo>
+                  <a:lnTo>
+                    <a:pt x="1159126" y="1680448"/>
+                  </a:lnTo>
+                  <a:lnTo>
+                    <a:pt x="1082493" y="1600221"/>
+                  </a:lnTo>
+                  <a:lnTo>
+                    <a:pt x="1005861" y="1516426"/>
+                  </a:lnTo>
+                  <a:lnTo>
+                    <a:pt x="929228" y="1428903"/>
+                  </a:lnTo>
+                  <a:lnTo>
+                    <a:pt x="852596" y="1337486"/>
+                  </a:lnTo>
+                  <a:lnTo>
+                    <a:pt x="775963" y="1242001"/>
+                  </a:lnTo>
+                  <a:lnTo>
+                    <a:pt x="699331" y="1142269"/>
+                  </a:lnTo>
+                  <a:lnTo>
+                    <a:pt x="622698" y="1038100"/>
+                  </a:lnTo>
+                  <a:lnTo>
+                    <a:pt x="546066" y="929297"/>
+                  </a:lnTo>
+                  <a:lnTo>
+                    <a:pt x="469433" y="815653"/>
+                  </a:lnTo>
+                  <a:lnTo>
+                    <a:pt x="392801" y="696953"/>
+                  </a:lnTo>
+                  <a:lnTo>
+                    <a:pt x="316168" y="572973"/>
+                  </a:lnTo>
+                  <a:lnTo>
+                    <a:pt x="239535" y="443476"/>
+                  </a:lnTo>
+                  <a:lnTo>
+                    <a:pt x="162903" y="308219"/>
+                  </a:lnTo>
+                  <a:lnTo>
+                    <a:pt x="86270" y="166944"/>
+                  </a:lnTo>
+                  <a:lnTo>
+                    <a:pt x="9638" y="19384"/>
                   </a:lnTo>
                   <a:lnTo>
                     <a:pt x="0" y="0"/>
@@ -4001,228 +4001,228 @@
           </p:nvSpPr>
           <p:spPr>
             <a:xfrm>
-              <a:off x="2809861" y="1896563"/>
-              <a:ext cx="5411439" cy="3637544"/>
+              <a:off x="2809861" y="2073503"/>
+              <a:ext cx="5411439" cy="3469345"/>
             </a:xfrm>
             <a:custGeom>
               <a:avLst/>
               <a:pathLst>
-                <a:path w="5411439" h="3637544">
+                <a:path w="5411439" h="3469345">
                   <a:moveTo>
                     <a:pt x="0" y="0"/>
                   </a:moveTo>
                   <a:lnTo>
-                    <a:pt x="47161" y="173057"/>
-                  </a:lnTo>
-                  <a:lnTo>
-                    <a:pt x="123794" y="433231"/>
-                  </a:lnTo>
-                  <a:lnTo>
-                    <a:pt x="200426" y="673952"/>
-                  </a:lnTo>
-                  <a:lnTo>
-                    <a:pt x="277059" y="896674"/>
-                  </a:lnTo>
-                  <a:lnTo>
-                    <a:pt x="353691" y="1102742"/>
-                  </a:lnTo>
-                  <a:lnTo>
-                    <a:pt x="430324" y="1293403"/>
-                  </a:lnTo>
-                  <a:lnTo>
-                    <a:pt x="506956" y="1469807"/>
-                  </a:lnTo>
-                  <a:lnTo>
-                    <a:pt x="583589" y="1633021"/>
-                  </a:lnTo>
-                  <a:lnTo>
-                    <a:pt x="660221" y="1784032"/>
-                  </a:lnTo>
-                  <a:lnTo>
-                    <a:pt x="736854" y="1923751"/>
-                  </a:lnTo>
-                  <a:lnTo>
-                    <a:pt x="813487" y="2053023"/>
-                  </a:lnTo>
-                  <a:lnTo>
-                    <a:pt x="890119" y="2172629"/>
-                  </a:lnTo>
-                  <a:lnTo>
-                    <a:pt x="966752" y="2283292"/>
-                  </a:lnTo>
-                  <a:lnTo>
-                    <a:pt x="1043384" y="2385681"/>
-                  </a:lnTo>
-                  <a:lnTo>
-                    <a:pt x="1120017" y="2480414"/>
-                  </a:lnTo>
-                  <a:lnTo>
-                    <a:pt x="1196649" y="2568063"/>
-                  </a:lnTo>
-                  <a:lnTo>
-                    <a:pt x="1273282" y="2649159"/>
-                  </a:lnTo>
-                  <a:lnTo>
-                    <a:pt x="1349914" y="2724191"/>
-                  </a:lnTo>
-                  <a:lnTo>
-                    <a:pt x="1426547" y="2793613"/>
-                  </a:lnTo>
-                  <a:lnTo>
-                    <a:pt x="1503179" y="2857844"/>
-                  </a:lnTo>
-                  <a:lnTo>
-                    <a:pt x="1579812" y="2917273"/>
-                  </a:lnTo>
-                  <a:lnTo>
-                    <a:pt x="1656445" y="2972258"/>
-                  </a:lnTo>
-                  <a:lnTo>
-                    <a:pt x="1733077" y="3023131"/>
-                  </a:lnTo>
-                  <a:lnTo>
-                    <a:pt x="1809710" y="3070201"/>
-                  </a:lnTo>
-                  <a:lnTo>
-                    <a:pt x="1886342" y="3113751"/>
-                  </a:lnTo>
-                  <a:lnTo>
-                    <a:pt x="1962975" y="3154045"/>
-                  </a:lnTo>
-                  <a:lnTo>
-                    <a:pt x="2039607" y="3191326"/>
-                  </a:lnTo>
-                  <a:lnTo>
-                    <a:pt x="2116240" y="3225819"/>
-                  </a:lnTo>
-                  <a:lnTo>
-                    <a:pt x="2192872" y="3257734"/>
-                  </a:lnTo>
-                  <a:lnTo>
-                    <a:pt x="2269505" y="3287262"/>
-                  </a:lnTo>
-                  <a:lnTo>
-                    <a:pt x="2346137" y="3314582"/>
-                  </a:lnTo>
-                  <a:lnTo>
-                    <a:pt x="2422770" y="3339859"/>
-                  </a:lnTo>
-                  <a:lnTo>
-                    <a:pt x="2499403" y="3363247"/>
-                  </a:lnTo>
-                  <a:lnTo>
-                    <a:pt x="2576035" y="3384885"/>
-                  </a:lnTo>
-                  <a:lnTo>
-                    <a:pt x="2652668" y="3404906"/>
-                  </a:lnTo>
-                  <a:lnTo>
-                    <a:pt x="2729300" y="3423430"/>
-                  </a:lnTo>
-                  <a:lnTo>
-                    <a:pt x="2805933" y="3440569"/>
-                  </a:lnTo>
-                  <a:lnTo>
-                    <a:pt x="2882565" y="3456426"/>
-                  </a:lnTo>
-                  <a:lnTo>
-                    <a:pt x="2959198" y="3471097"/>
-                  </a:lnTo>
-                  <a:lnTo>
-                    <a:pt x="3035830" y="3484672"/>
-                  </a:lnTo>
-                  <a:lnTo>
-                    <a:pt x="3112463" y="3497231"/>
-                  </a:lnTo>
-                  <a:lnTo>
-                    <a:pt x="3189096" y="3508852"/>
-                  </a:lnTo>
-                  <a:lnTo>
-                    <a:pt x="3265728" y="3519603"/>
-                  </a:lnTo>
-                  <a:lnTo>
-                    <a:pt x="3342361" y="3529551"/>
-                  </a:lnTo>
-                  <a:lnTo>
-                    <a:pt x="3418993" y="3538755"/>
-                  </a:lnTo>
-                  <a:lnTo>
-                    <a:pt x="3495626" y="3547270"/>
-                  </a:lnTo>
-                  <a:lnTo>
-                    <a:pt x="3572258" y="3555149"/>
-                  </a:lnTo>
-                  <a:lnTo>
-                    <a:pt x="3648891" y="3562439"/>
-                  </a:lnTo>
-                  <a:lnTo>
-                    <a:pt x="3725523" y="3569184"/>
-                  </a:lnTo>
-                  <a:lnTo>
-                    <a:pt x="3802156" y="3575424"/>
-                  </a:lnTo>
-                  <a:lnTo>
-                    <a:pt x="3878788" y="3581198"/>
-                  </a:lnTo>
-                  <a:lnTo>
-                    <a:pt x="3955421" y="3586540"/>
-                  </a:lnTo>
-                  <a:lnTo>
-                    <a:pt x="4032054" y="3591483"/>
-                  </a:lnTo>
-                  <a:lnTo>
-                    <a:pt x="4108686" y="3596056"/>
-                  </a:lnTo>
-                  <a:lnTo>
-                    <a:pt x="4185319" y="3600287"/>
-                  </a:lnTo>
-                  <a:lnTo>
-                    <a:pt x="4261951" y="3604202"/>
-                  </a:lnTo>
-                  <a:lnTo>
-                    <a:pt x="4338584" y="3607824"/>
-                  </a:lnTo>
-                  <a:lnTo>
-                    <a:pt x="4415216" y="3611175"/>
-                  </a:lnTo>
-                  <a:lnTo>
-                    <a:pt x="4491849" y="3614276"/>
-                  </a:lnTo>
-                  <a:lnTo>
-                    <a:pt x="4568481" y="3617144"/>
-                  </a:lnTo>
-                  <a:lnTo>
-                    <a:pt x="4645114" y="3619799"/>
-                  </a:lnTo>
-                  <a:lnTo>
-                    <a:pt x="4721747" y="3622255"/>
-                  </a:lnTo>
-                  <a:lnTo>
-                    <a:pt x="4798379" y="3624527"/>
-                  </a:lnTo>
-                  <a:lnTo>
-                    <a:pt x="4875012" y="3626629"/>
-                  </a:lnTo>
-                  <a:lnTo>
-                    <a:pt x="4951644" y="3628574"/>
-                  </a:lnTo>
-                  <a:lnTo>
-                    <a:pt x="5028277" y="3630374"/>
-                  </a:lnTo>
-                  <a:lnTo>
-                    <a:pt x="5104909" y="3632039"/>
-                  </a:lnTo>
-                  <a:lnTo>
-                    <a:pt x="5181542" y="3633580"/>
-                  </a:lnTo>
-                  <a:lnTo>
-                    <a:pt x="5258174" y="3635005"/>
-                  </a:lnTo>
-                  <a:lnTo>
-                    <a:pt x="5334807" y="3636324"/>
-                  </a:lnTo>
-                  <a:lnTo>
-                    <a:pt x="5411439" y="3637544"/>
+                    <a:pt x="47161" y="165055"/>
+                  </a:lnTo>
+                  <a:lnTo>
+                    <a:pt x="123794" y="413199"/>
+                  </a:lnTo>
+                  <a:lnTo>
+                    <a:pt x="200426" y="642789"/>
+                  </a:lnTo>
+                  <a:lnTo>
+                    <a:pt x="277059" y="855212"/>
+                  </a:lnTo>
+                  <a:lnTo>
+                    <a:pt x="353691" y="1051752"/>
+                  </a:lnTo>
+                  <a:lnTo>
+                    <a:pt x="430324" y="1233596"/>
+                  </a:lnTo>
+                  <a:lnTo>
+                    <a:pt x="506956" y="1401844"/>
+                  </a:lnTo>
+                  <a:lnTo>
+                    <a:pt x="583589" y="1557511"/>
+                  </a:lnTo>
+                  <a:lnTo>
+                    <a:pt x="660221" y="1701539"/>
+                  </a:lnTo>
+                  <a:lnTo>
+                    <a:pt x="736854" y="1834797"/>
+                  </a:lnTo>
+                  <a:lnTo>
+                    <a:pt x="813487" y="1958092"/>
+                  </a:lnTo>
+                  <a:lnTo>
+                    <a:pt x="890119" y="2072168"/>
+                  </a:lnTo>
+                  <a:lnTo>
+                    <a:pt x="966752" y="2177714"/>
+                  </a:lnTo>
+                  <a:lnTo>
+                    <a:pt x="1043384" y="2275368"/>
+                  </a:lnTo>
+                  <a:lnTo>
+                    <a:pt x="1120017" y="2365721"/>
+                  </a:lnTo>
+                  <a:lnTo>
+                    <a:pt x="1196649" y="2449317"/>
+                  </a:lnTo>
+                  <a:lnTo>
+                    <a:pt x="1273282" y="2526663"/>
+                  </a:lnTo>
+                  <a:lnTo>
+                    <a:pt x="1349914" y="2598226"/>
+                  </a:lnTo>
+                  <a:lnTo>
+                    <a:pt x="1426547" y="2664438"/>
+                  </a:lnTo>
+                  <a:lnTo>
+                    <a:pt x="1503179" y="2725699"/>
+                  </a:lnTo>
+                  <a:lnTo>
+                    <a:pt x="1579812" y="2782379"/>
+                  </a:lnTo>
+                  <a:lnTo>
+                    <a:pt x="1656445" y="2834822"/>
+                  </a:lnTo>
+                  <a:lnTo>
+                    <a:pt x="1733077" y="2883343"/>
+                  </a:lnTo>
+                  <a:lnTo>
+                    <a:pt x="1809710" y="2928236"/>
+                  </a:lnTo>
+                  <a:lnTo>
+                    <a:pt x="1886342" y="2969772"/>
+                  </a:lnTo>
+                  <a:lnTo>
+                    <a:pt x="1962975" y="3008203"/>
+                  </a:lnTo>
+                  <a:lnTo>
+                    <a:pt x="2039607" y="3043760"/>
+                  </a:lnTo>
+                  <a:lnTo>
+                    <a:pt x="2116240" y="3076659"/>
+                  </a:lnTo>
+                  <a:lnTo>
+                    <a:pt x="2192872" y="3107097"/>
+                  </a:lnTo>
+                  <a:lnTo>
+                    <a:pt x="2269505" y="3135260"/>
+                  </a:lnTo>
+                  <a:lnTo>
+                    <a:pt x="2346137" y="3161317"/>
+                  </a:lnTo>
+                  <a:lnTo>
+                    <a:pt x="2422770" y="3185426"/>
+                  </a:lnTo>
+                  <a:lnTo>
+                    <a:pt x="2499403" y="3207732"/>
+                  </a:lnTo>
+                  <a:lnTo>
+                    <a:pt x="2576035" y="3228370"/>
+                  </a:lnTo>
+                  <a:lnTo>
+                    <a:pt x="2652668" y="3247465"/>
+                  </a:lnTo>
+                  <a:lnTo>
+                    <a:pt x="2729300" y="3265132"/>
+                  </a:lnTo>
+                  <a:lnTo>
+                    <a:pt x="2805933" y="3281478"/>
+                  </a:lnTo>
+                  <a:lnTo>
+                    <a:pt x="2882565" y="3296602"/>
+                  </a:lnTo>
+                  <a:lnTo>
+                    <a:pt x="2959198" y="3310595"/>
+                  </a:lnTo>
+                  <a:lnTo>
+                    <a:pt x="3035830" y="3323542"/>
+                  </a:lnTo>
+                  <a:lnTo>
+                    <a:pt x="3112463" y="3335521"/>
+                  </a:lnTo>
+                  <a:lnTo>
+                    <a:pt x="3189096" y="3346604"/>
+                  </a:lnTo>
+                  <a:lnTo>
+                    <a:pt x="3265728" y="3356858"/>
+                  </a:lnTo>
+                  <a:lnTo>
+                    <a:pt x="3342361" y="3366346"/>
+                  </a:lnTo>
+                  <a:lnTo>
+                    <a:pt x="3418993" y="3375124"/>
+                  </a:lnTo>
+                  <a:lnTo>
+                    <a:pt x="3495626" y="3383246"/>
+                  </a:lnTo>
+                  <a:lnTo>
+                    <a:pt x="3572258" y="3390760"/>
+                  </a:lnTo>
+                  <a:lnTo>
+                    <a:pt x="3648891" y="3397713"/>
+                  </a:lnTo>
+                  <a:lnTo>
+                    <a:pt x="3725523" y="3404146"/>
+                  </a:lnTo>
+                  <a:lnTo>
+                    <a:pt x="3802156" y="3410098"/>
+                  </a:lnTo>
+                  <a:lnTo>
+                    <a:pt x="3878788" y="3415605"/>
+                  </a:lnTo>
+                  <a:lnTo>
+                    <a:pt x="3955421" y="3420700"/>
+                  </a:lnTo>
+                  <a:lnTo>
+                    <a:pt x="4032054" y="3425414"/>
+                  </a:lnTo>
+                  <a:lnTo>
+                    <a:pt x="4108686" y="3429775"/>
+                  </a:lnTo>
+                  <a:lnTo>
+                    <a:pt x="4185319" y="3433811"/>
+                  </a:lnTo>
+                  <a:lnTo>
+                    <a:pt x="4261951" y="3437545"/>
+                  </a:lnTo>
+                  <a:lnTo>
+                    <a:pt x="4338584" y="3440999"/>
+                  </a:lnTo>
+                  <a:lnTo>
+                    <a:pt x="4415216" y="3444196"/>
+                  </a:lnTo>
+                  <a:lnTo>
+                    <a:pt x="4491849" y="3447153"/>
+                  </a:lnTo>
+                  <a:lnTo>
+                    <a:pt x="4568481" y="3449889"/>
+                  </a:lnTo>
+                  <a:lnTo>
+                    <a:pt x="4645114" y="3452421"/>
+                  </a:lnTo>
+                  <a:lnTo>
+                    <a:pt x="4721747" y="3454763"/>
+                  </a:lnTo>
+                  <a:lnTo>
+                    <a:pt x="4798379" y="3456930"/>
+                  </a:lnTo>
+                  <a:lnTo>
+                    <a:pt x="4875012" y="3458935"/>
+                  </a:lnTo>
+                  <a:lnTo>
+                    <a:pt x="4951644" y="3460790"/>
+                  </a:lnTo>
+                  <a:lnTo>
+                    <a:pt x="5028277" y="3462507"/>
+                  </a:lnTo>
+                  <a:lnTo>
+                    <a:pt x="5104909" y="3464095"/>
+                  </a:lnTo>
+                  <a:lnTo>
+                    <a:pt x="5181542" y="3465564"/>
+                  </a:lnTo>
+                  <a:lnTo>
+                    <a:pt x="5258174" y="3466924"/>
+                  </a:lnTo>
+                  <a:lnTo>
+                    <a:pt x="5334807" y="3468182"/>
+                  </a:lnTo>
+                  <a:lnTo>
+                    <a:pt x="5411439" y="3469345"/>
                   </a:lnTo>
                 </a:path>
               </a:pathLst>
@@ -4251,7 +4251,7 @@
           </p:nvSpPr>
           <p:spPr>
             <a:xfrm>
-              <a:off x="817517" y="4679530"/>
+              <a:off x="817517" y="4727786"/>
               <a:ext cx="7799693" cy="0"/>
             </a:xfrm>
             <a:custGeom>
@@ -4294,15 +4294,15 @@
           </p:nvSpPr>
           <p:spPr>
             <a:xfrm>
-              <a:off x="4224261" y="1896563"/>
-              <a:ext cx="0" cy="3826579"/>
+              <a:off x="4224261" y="2073503"/>
+              <a:ext cx="0" cy="3649639"/>
             </a:xfrm>
             <a:custGeom>
               <a:avLst/>
               <a:pathLst>
-                <a:path w="0" h="3826579">
+                <a:path w="0" h="3649639">
                   <a:moveTo>
-                    <a:pt x="0" y="3826579"/>
+                    <a:pt x="0" y="3649639"/>
                   </a:moveTo>
                   <a:lnTo>
                     <a:pt x="0" y="0"/>
@@ -4337,7 +4337,7 @@
           </p:nvSpPr>
           <p:spPr>
             <a:xfrm>
-              <a:off x="692708" y="5509156"/>
+              <a:off x="692708" y="5517199"/>
               <a:ext cx="62179" cy="80101"/>
             </a:xfrm>
             <a:prstGeom prst="rect">
@@ -4383,7 +4383,7 @@
           </p:nvSpPr>
           <p:spPr>
             <a:xfrm>
-              <a:off x="692708" y="4639479"/>
+              <a:off x="692708" y="4687735"/>
               <a:ext cx="62179" cy="80101"/>
             </a:xfrm>
             <a:prstGeom prst="rect">
@@ -4429,7 +4429,7 @@
           </p:nvSpPr>
           <p:spPr>
             <a:xfrm>
-              <a:off x="692708" y="3769802"/>
+              <a:off x="692708" y="3858272"/>
               <a:ext cx="62179" cy="80101"/>
             </a:xfrm>
             <a:prstGeom prst="rect">
@@ -4475,7 +4475,7 @@
           </p:nvSpPr>
           <p:spPr>
             <a:xfrm>
-              <a:off x="692708" y="2900125"/>
+              <a:off x="692708" y="3028808"/>
               <a:ext cx="62179" cy="80101"/>
             </a:xfrm>
             <a:prstGeom prst="rect">
@@ -4521,7 +4521,7 @@
           </p:nvSpPr>
           <p:spPr>
             <a:xfrm>
-              <a:off x="692708" y="2030448"/>
+              <a:off x="692708" y="2199345"/>
               <a:ext cx="62179" cy="80101"/>
             </a:xfrm>
             <a:prstGeom prst="rect">
@@ -4797,7 +4797,7 @@
           </p:nvSpPr>
           <p:spPr>
             <a:xfrm rot="-5400000">
-              <a:off x="181100" y="3759743"/>
+              <a:off x="181100" y="3848213"/>
               <a:ext cx="791596" cy="100218"/>
             </a:xfrm>
             <a:prstGeom prst="rect">
@@ -4838,6 +4838,52 @@
         <p:sp>
           <p:nvSpPr>
             <p:cNvPr id="38" name="tx38"/>
+            <p:cNvSpPr/>
+            <p:nvPr/>
+          </p:nvSpPr>
+          <p:spPr>
+            <a:xfrm>
+              <a:off x="817517" y="1896563"/>
+              <a:ext cx="5569061" cy="82021"/>
+            </a:xfrm>
+            <a:prstGeom prst="rect">
+              <a:avLst/>
+            </a:prstGeom>
+            <a:noFill/>
+          </p:spPr>
+          <p:txBody>
+            <a:bodyPr lIns="0" rIns="0" tIns="0" bIns="0" anchorCtr="1" anchor="ctr" wrap="none"/>
+            <a:lstStyle/>
+            <a:p>
+              <a:pPr algn="l" marL="0" marR="0" indent="0">
+                <a:lnSpc>
+                  <a:spcPts val="900"/>
+                </a:lnSpc>
+                <a:spcBef>
+                  <a:spcPts val="0"/>
+                </a:spcBef>
+                <a:spcAft>
+                  <a:spcPts val="0"/>
+                </a:spcAft>
+              </a:pPr>
+              <a:r>
+                <a:rPr sz="900">
+                  <a:solidFill>
+                    <a:srgbClr val="404040">
+                      <a:alpha val="100000"/>
+                    </a:srgbClr>
+                  </a:solidFill>
+                  <a:latin typeface="Helvetica"/>
+                  <a:cs typeface="Helvetica"/>
+                </a:rPr>
+                <a:t>HR per 0.1 ratio decline: 2.46 (1.65-3.65)  |  per IQR decline (Δ = 0.30): 14.72 (4.51-48.03)  |  IQR: [0.85, 1.15]</a:t>
+              </a:r>
+            </a:p>
+          </p:txBody>
+        </p:sp>
+        <p:sp>
+          <p:nvSpPr>
+            <p:cNvPr id="39" name="tx39"/>
             <p:cNvSpPr/>
             <p:nvPr/>
           </p:nvSpPr>

--- a/docs/pptx/carbo/jx-carbo-cox-linear-ratio-death.pptx
+++ b/docs/pptx/carbo/jx-carbo-cox-linear-ratio-death.pptx
@@ -4844,7 +4844,7 @@
           <p:spPr>
             <a:xfrm>
               <a:off x="817517" y="1896563"/>
-              <a:ext cx="5569061" cy="82021"/>
+              <a:ext cx="6178966" cy="82021"/>
             </a:xfrm>
             <a:prstGeom prst="rect">
               <a:avLst/>
@@ -4876,7 +4876,7 @@
                   <a:latin typeface="Helvetica"/>
                   <a:cs typeface="Helvetica"/>
                 </a:rPr>
-                <a:t>HR per 0.1 ratio decline: 2.46 (1.65-3.65)  |  per IQR decline (Δ = 0.30): 14.72 (4.51-48.03)  |  IQR: [0.85, 1.15]</a:t>
+                <a:t>HR per 0.1 ratio decline: 2.46 (1.65-3.65), p = &lt;0.001  |  per IQR decline (Δ = 0.30): 14.72 (4.51-48.03)  |  IQR: [0.85, 1.15]</a:t>
               </a:r>
             </a:p>
           </p:txBody>

--- a/docs/pptx/carbo/jx-carbo-cox-linear-ratio-death.pptx
+++ b/docs/pptx/carbo/jx-carbo-cox-linear-ratio-death.pptx
@@ -4844,7 +4844,7 @@
           <p:spPr>
             <a:xfrm>
               <a:off x="817517" y="1896563"/>
-              <a:ext cx="6178966" cy="82021"/>
+              <a:ext cx="6842729" cy="82021"/>
             </a:xfrm>
             <a:prstGeom prst="rect">
               <a:avLst/>
@@ -4876,7 +4876,7 @@
                   <a:latin typeface="Helvetica"/>
                   <a:cs typeface="Helvetica"/>
                 </a:rPr>
-                <a:t>HR per 0.1 ratio decline: 2.46 (1.65-3.65), p = &lt;0.001  |  per IQR decline (Δ = 0.30): 14.72 (4.51-48.03)  |  IQR: [0.85, 1.15]</a:t>
+                <a:t>HR per 0.1 ratio decline: 2.46 (1.65-3.65), p_Bonf = &lt;0.001 (n = 6)  |  per IQR decline (Δ = 0.30): 14.72 (4.51-48.03)  |  IQR: [0.85, 1.15]</a:t>
               </a:r>
             </a:p>
           </p:txBody>

--- a/docs/pptx/carbo/jx-carbo-cox-linear-ratio-death.pptx
+++ b/docs/pptx/carbo/jx-carbo-cox-linear-ratio-death.pptx
@@ -2443,7 +2443,7 @@
           </p:nvSpPr>
           <p:spPr>
             <a:xfrm>
-              <a:off x="1615213" y="2073503"/>
+              <a:off x="1467192" y="2073503"/>
               <a:ext cx="0" cy="3649639"/>
             </a:xfrm>
             <a:custGeom>
@@ -2486,7 +2486,7 @@
           </p:nvSpPr>
           <p:spPr>
             <a:xfrm>
-              <a:off x="3387871" y="2073503"/>
+              <a:off x="3538150" y="2073503"/>
               <a:ext cx="0" cy="3649639"/>
             </a:xfrm>
             <a:custGeom>
@@ -2529,7 +2529,7 @@
           </p:nvSpPr>
           <p:spPr>
             <a:xfrm>
-              <a:off x="5160528" y="2073503"/>
+              <a:off x="5609107" y="2073503"/>
               <a:ext cx="0" cy="3649639"/>
             </a:xfrm>
             <a:custGeom>
@@ -2572,7 +2572,7 @@
           </p:nvSpPr>
           <p:spPr>
             <a:xfrm>
-              <a:off x="6933186" y="2073503"/>
+              <a:off x="7680065" y="2073503"/>
               <a:ext cx="0" cy="3649639"/>
             </a:xfrm>
             <a:custGeom>
@@ -2830,7 +2830,7 @@
           </p:nvSpPr>
           <p:spPr>
             <a:xfrm>
-              <a:off x="2501542" y="2073503"/>
+              <a:off x="2502671" y="2073503"/>
               <a:ext cx="0" cy="3649639"/>
             </a:xfrm>
             <a:custGeom>
@@ -2873,7 +2873,7 @@
           </p:nvSpPr>
           <p:spPr>
             <a:xfrm>
-              <a:off x="4274200" y="2073503"/>
+              <a:off x="4573628" y="2073503"/>
               <a:ext cx="0" cy="3649639"/>
             </a:xfrm>
             <a:custGeom>
@@ -2916,7 +2916,7 @@
           </p:nvSpPr>
           <p:spPr>
             <a:xfrm>
-              <a:off x="6046857" y="2073503"/>
+              <a:off x="6644586" y="2073503"/>
               <a:ext cx="0" cy="3649639"/>
             </a:xfrm>
             <a:custGeom>
@@ -2953,517 +2953,474 @@
         </p:sp>
         <p:sp>
           <p:nvSpPr>
-            <p:cNvPr id="20" name="pl20"/>
+            <p:cNvPr id="20" name="pg20"/>
             <p:cNvSpPr/>
             <p:nvPr/>
           </p:nvSpPr>
           <p:spPr>
             <a:xfrm>
-              <a:off x="7819515" y="2073503"/>
-              <a:ext cx="0" cy="3649639"/>
+              <a:off x="2165756" y="2073503"/>
+              <a:ext cx="6096922" cy="3481326"/>
             </a:xfrm>
             <a:custGeom>
               <a:avLst/>
               <a:pathLst>
-                <a:path w="0" h="3649639">
+                <a:path w="6096922" h="3481326">
                   <a:moveTo>
-                    <a:pt x="0" y="3649639"/>
+                    <a:pt x="1442746" y="0"/>
                   </a:moveTo>
                   <a:lnTo>
-                    <a:pt x="0" y="0"/>
-                  </a:lnTo>
-                  <a:lnTo>
-                    <a:pt x="0" y="0"/>
-                  </a:lnTo>
-                </a:path>
-              </a:pathLst>
-            </a:custGeom>
-            <a:ln w="13550" cap="flat">
-              <a:solidFill>
-                <a:srgbClr val="EBEBEB">
-                  <a:alpha val="100000"/>
-                </a:srgbClr>
-              </a:solidFill>
-              <a:prstDash val="solid"/>
-              <a:round/>
-            </a:ln>
-          </p:spPr>
-          <p:txBody>
-            <a:bodyPr/>
-            <a:lstStyle/>
-            <a:p/>
-          </p:txBody>
-        </p:sp>
-        <p:sp>
-          <p:nvSpPr>
-            <p:cNvPr id="21" name="pg21"/>
-            <p:cNvSpPr/>
-            <p:nvPr/>
-          </p:nvSpPr>
-          <p:spPr>
-            <a:xfrm>
-              <a:off x="1697896" y="2073503"/>
-              <a:ext cx="6523404" cy="3481326"/>
-            </a:xfrm>
-            <a:custGeom>
-              <a:avLst/>
-              <a:pathLst>
-                <a:path w="6523404" h="3481326">
-                  <a:moveTo>
-                    <a:pt x="1543666" y="0"/>
-                  </a:moveTo>
-                  <a:lnTo>
-                    <a:pt x="1618921" y="362878"/>
-                  </a:lnTo>
-                  <a:lnTo>
-                    <a:pt x="1695554" y="693279"/>
-                  </a:lnTo>
-                  <a:lnTo>
-                    <a:pt x="1772186" y="988700"/>
-                  </a:lnTo>
-                  <a:lnTo>
-                    <a:pt x="1848819" y="1252846"/>
-                  </a:lnTo>
-                  <a:lnTo>
-                    <a:pt x="1925452" y="1489028"/>
-                  </a:lnTo>
-                  <a:lnTo>
-                    <a:pt x="2002084" y="1700205"/>
-                  </a:lnTo>
-                  <a:lnTo>
-                    <a:pt x="2078717" y="1889025"/>
-                  </a:lnTo>
-                  <a:lnTo>
-                    <a:pt x="2155349" y="2057855"/>
-                  </a:lnTo>
-                  <a:lnTo>
-                    <a:pt x="2231982" y="2208812"/>
-                  </a:lnTo>
-                  <a:lnTo>
-                    <a:pt x="2308614" y="2343787"/>
-                  </a:lnTo>
-                  <a:lnTo>
-                    <a:pt x="2385247" y="2464472"/>
-                  </a:lnTo>
-                  <a:lnTo>
-                    <a:pt x="2461879" y="2572381"/>
-                  </a:lnTo>
-                  <a:lnTo>
-                    <a:pt x="2538512" y="2659986"/>
-                  </a:lnTo>
-                  <a:lnTo>
-                    <a:pt x="2615144" y="2695073"/>
-                  </a:lnTo>
-                  <a:lnTo>
-                    <a:pt x="2691777" y="2728665"/>
-                  </a:lnTo>
-                  <a:lnTo>
-                    <a:pt x="2768410" y="2760827"/>
-                  </a:lnTo>
-                  <a:lnTo>
-                    <a:pt x="2845042" y="2791619"/>
-                  </a:lnTo>
-                  <a:lnTo>
-                    <a:pt x="2921675" y="2821099"/>
-                  </a:lnTo>
-                  <a:lnTo>
-                    <a:pt x="2998307" y="2849324"/>
-                  </a:lnTo>
-                  <a:lnTo>
-                    <a:pt x="3074940" y="2876346"/>
-                  </a:lnTo>
-                  <a:lnTo>
-                    <a:pt x="3151572" y="2902218"/>
-                  </a:lnTo>
-                  <a:lnTo>
-                    <a:pt x="3228205" y="2926987"/>
-                  </a:lnTo>
-                  <a:lnTo>
-                    <a:pt x="3304837" y="2950701"/>
-                  </a:lnTo>
-                  <a:lnTo>
-                    <a:pt x="3381470" y="2973406"/>
-                  </a:lnTo>
-                  <a:lnTo>
-                    <a:pt x="3458103" y="2995143"/>
-                  </a:lnTo>
-                  <a:lnTo>
-                    <a:pt x="3534735" y="3015954"/>
-                  </a:lnTo>
-                  <a:lnTo>
-                    <a:pt x="3611368" y="3035879"/>
-                  </a:lnTo>
-                  <a:lnTo>
-                    <a:pt x="3688000" y="3054956"/>
-                  </a:lnTo>
-                  <a:lnTo>
-                    <a:pt x="3764633" y="3073219"/>
-                  </a:lnTo>
-                  <a:lnTo>
-                    <a:pt x="3841265" y="3090705"/>
-                  </a:lnTo>
-                  <a:lnTo>
-                    <a:pt x="3917898" y="3107446"/>
-                  </a:lnTo>
-                  <a:lnTo>
-                    <a:pt x="3994530" y="3123474"/>
-                  </a:lnTo>
-                  <a:lnTo>
-                    <a:pt x="4071163" y="3138820"/>
-                  </a:lnTo>
-                  <a:lnTo>
-                    <a:pt x="4147795" y="3153511"/>
-                  </a:lnTo>
-                  <a:lnTo>
-                    <a:pt x="4224428" y="3167577"/>
-                  </a:lnTo>
-                  <a:lnTo>
-                    <a:pt x="4301061" y="3181044"/>
-                  </a:lnTo>
-                  <a:lnTo>
-                    <a:pt x="4377693" y="3193937"/>
-                  </a:lnTo>
-                  <a:lnTo>
-                    <a:pt x="4454326" y="3206281"/>
-                  </a:lnTo>
-                  <a:lnTo>
-                    <a:pt x="4530958" y="3218100"/>
-                  </a:lnTo>
-                  <a:lnTo>
-                    <a:pt x="4607591" y="3229414"/>
-                  </a:lnTo>
-                  <a:lnTo>
-                    <a:pt x="4684223" y="3240247"/>
-                  </a:lnTo>
-                  <a:lnTo>
-                    <a:pt x="4760856" y="3250619"/>
-                  </a:lnTo>
-                  <a:lnTo>
-                    <a:pt x="4837488" y="3260549"/>
-                  </a:lnTo>
-                  <a:lnTo>
-                    <a:pt x="4914121" y="3270056"/>
-                  </a:lnTo>
-                  <a:lnTo>
-                    <a:pt x="4990753" y="3279157"/>
-                  </a:lnTo>
-                  <a:lnTo>
-                    <a:pt x="5067386" y="3287872"/>
-                  </a:lnTo>
-                  <a:lnTo>
-                    <a:pt x="5144019" y="3296215"/>
-                  </a:lnTo>
-                  <a:lnTo>
-                    <a:pt x="5220651" y="3304202"/>
-                  </a:lnTo>
-                  <a:lnTo>
-                    <a:pt x="5297284" y="3311850"/>
-                  </a:lnTo>
-                  <a:lnTo>
-                    <a:pt x="5373916" y="3319171"/>
-                  </a:lnTo>
-                  <a:lnTo>
-                    <a:pt x="5450549" y="3326181"/>
-                  </a:lnTo>
-                  <a:lnTo>
-                    <a:pt x="5527181" y="3332893"/>
-                  </a:lnTo>
-                  <a:lnTo>
-                    <a:pt x="5603814" y="3339318"/>
-                  </a:lnTo>
-                  <a:lnTo>
-                    <a:pt x="5680446" y="3345470"/>
-                  </a:lnTo>
-                  <a:lnTo>
-                    <a:pt x="5757079" y="3351359"/>
-                  </a:lnTo>
-                  <a:lnTo>
-                    <a:pt x="5833712" y="3356998"/>
-                  </a:lnTo>
-                  <a:lnTo>
-                    <a:pt x="5910344" y="3362397"/>
-                  </a:lnTo>
-                  <a:lnTo>
-                    <a:pt x="5986977" y="3367566"/>
-                  </a:lnTo>
-                  <a:lnTo>
-                    <a:pt x="6063609" y="3372514"/>
-                  </a:lnTo>
-                  <a:lnTo>
-                    <a:pt x="6140242" y="3377252"/>
-                  </a:lnTo>
-                  <a:lnTo>
-                    <a:pt x="6216874" y="3381788"/>
-                  </a:lnTo>
-                  <a:lnTo>
-                    <a:pt x="6293507" y="3386131"/>
-                  </a:lnTo>
-                  <a:lnTo>
-                    <a:pt x="6370139" y="3390289"/>
-                  </a:lnTo>
-                  <a:lnTo>
-                    <a:pt x="6446772" y="3394269"/>
-                  </a:lnTo>
-                  <a:lnTo>
-                    <a:pt x="6523404" y="3398080"/>
-                  </a:lnTo>
-                  <a:lnTo>
-                    <a:pt x="6523404" y="3481326"/>
-                  </a:lnTo>
-                  <a:lnTo>
-                    <a:pt x="6446772" y="3481039"/>
-                  </a:lnTo>
-                  <a:lnTo>
-                    <a:pt x="6370139" y="3480718"/>
-                  </a:lnTo>
-                  <a:lnTo>
-                    <a:pt x="6293507" y="3480360"/>
-                  </a:lnTo>
-                  <a:lnTo>
-                    <a:pt x="6216874" y="3479959"/>
-                  </a:lnTo>
-                  <a:lnTo>
-                    <a:pt x="6140242" y="3479510"/>
-                  </a:lnTo>
-                  <a:lnTo>
-                    <a:pt x="6063609" y="3479009"/>
-                  </a:lnTo>
-                  <a:lnTo>
-                    <a:pt x="5986977" y="3478448"/>
-                  </a:lnTo>
-                  <a:lnTo>
-                    <a:pt x="5910344" y="3477820"/>
-                  </a:lnTo>
-                  <a:lnTo>
-                    <a:pt x="5833712" y="3477119"/>
-                  </a:lnTo>
-                  <a:lnTo>
-                    <a:pt x="5757079" y="3476334"/>
-                  </a:lnTo>
-                  <a:lnTo>
-                    <a:pt x="5680446" y="3475456"/>
-                  </a:lnTo>
-                  <a:lnTo>
-                    <a:pt x="5603814" y="3474475"/>
-                  </a:lnTo>
-                  <a:lnTo>
-                    <a:pt x="5527181" y="3473377"/>
-                  </a:lnTo>
-                  <a:lnTo>
-                    <a:pt x="5450549" y="3472149"/>
-                  </a:lnTo>
-                  <a:lnTo>
-                    <a:pt x="5373916" y="3470776"/>
-                  </a:lnTo>
-                  <a:lnTo>
-                    <a:pt x="5297284" y="3469240"/>
-                  </a:lnTo>
-                  <a:lnTo>
-                    <a:pt x="5220651" y="3467523"/>
-                  </a:lnTo>
-                  <a:lnTo>
-                    <a:pt x="5144019" y="3465602"/>
-                  </a:lnTo>
-                  <a:lnTo>
-                    <a:pt x="5067386" y="3463453"/>
-                  </a:lnTo>
-                  <a:lnTo>
-                    <a:pt x="4990753" y="3461051"/>
-                  </a:lnTo>
-                  <a:lnTo>
-                    <a:pt x="4914121" y="3458363"/>
-                  </a:lnTo>
-                  <a:lnTo>
-                    <a:pt x="4837488" y="3455358"/>
-                  </a:lnTo>
-                  <a:lnTo>
-                    <a:pt x="4760856" y="3451997"/>
-                  </a:lnTo>
-                  <a:lnTo>
-                    <a:pt x="4684223" y="3448237"/>
-                  </a:lnTo>
-                  <a:lnTo>
-                    <a:pt x="4607591" y="3444033"/>
-                  </a:lnTo>
-                  <a:lnTo>
-                    <a:pt x="4530958" y="3439331"/>
-                  </a:lnTo>
-                  <a:lnTo>
-                    <a:pt x="4454326" y="3434072"/>
-                  </a:lnTo>
-                  <a:lnTo>
-                    <a:pt x="4377693" y="3428190"/>
-                  </a:lnTo>
-                  <a:lnTo>
-                    <a:pt x="4301061" y="3421612"/>
-                  </a:lnTo>
-                  <a:lnTo>
-                    <a:pt x="4224428" y="3414255"/>
-                  </a:lnTo>
-                  <a:lnTo>
-                    <a:pt x="4147795" y="3406027"/>
-                  </a:lnTo>
-                  <a:lnTo>
-                    <a:pt x="4071163" y="3396825"/>
-                  </a:lnTo>
-                  <a:lnTo>
-                    <a:pt x="3994530" y="3386534"/>
-                  </a:lnTo>
-                  <a:lnTo>
-                    <a:pt x="3917898" y="3375023"/>
-                  </a:lnTo>
-                  <a:lnTo>
-                    <a:pt x="3841265" y="3362150"/>
-                  </a:lnTo>
-                  <a:lnTo>
-                    <a:pt x="3764633" y="3347753"/>
-                  </a:lnTo>
-                  <a:lnTo>
-                    <a:pt x="3688000" y="3331650"/>
-                  </a:lnTo>
-                  <a:lnTo>
-                    <a:pt x="3611368" y="3313642"/>
-                  </a:lnTo>
-                  <a:lnTo>
-                    <a:pt x="3534735" y="3293501"/>
-                  </a:lnTo>
-                  <a:lnTo>
-                    <a:pt x="3458103" y="3270975"/>
-                  </a:lnTo>
-                  <a:lnTo>
-                    <a:pt x="3381470" y="3245782"/>
-                  </a:lnTo>
-                  <a:lnTo>
-                    <a:pt x="3304837" y="3217607"/>
-                  </a:lnTo>
-                  <a:lnTo>
-                    <a:pt x="3228205" y="3186095"/>
-                  </a:lnTo>
-                  <a:lnTo>
-                    <a:pt x="3151572" y="3150852"/>
-                  </a:lnTo>
-                  <a:lnTo>
-                    <a:pt x="3074940" y="3111436"/>
-                  </a:lnTo>
-                  <a:lnTo>
-                    <a:pt x="2998307" y="3067353"/>
-                  </a:lnTo>
-                  <a:lnTo>
-                    <a:pt x="2921675" y="3018051"/>
-                  </a:lnTo>
-                  <a:lnTo>
-                    <a:pt x="2845042" y="2962911"/>
-                  </a:lnTo>
-                  <a:lnTo>
-                    <a:pt x="2768410" y="2901242"/>
-                  </a:lnTo>
-                  <a:lnTo>
-                    <a:pt x="2691777" y="2832272"/>
-                  </a:lnTo>
-                  <a:lnTo>
-                    <a:pt x="2615144" y="2755135"/>
-                  </a:lnTo>
-                  <a:lnTo>
-                    <a:pt x="2538512" y="2668865"/>
-                  </a:lnTo>
-                  <a:lnTo>
-                    <a:pt x="2461879" y="2623338"/>
-                  </a:lnTo>
-                  <a:lnTo>
-                    <a:pt x="2385247" y="2585060"/>
-                  </a:lnTo>
-                  <a:lnTo>
-                    <a:pt x="2308614" y="2545078"/>
-                  </a:lnTo>
-                  <a:lnTo>
-                    <a:pt x="2231982" y="2503318"/>
-                  </a:lnTo>
-                  <a:lnTo>
-                    <a:pt x="2155349" y="2459700"/>
-                  </a:lnTo>
-                  <a:lnTo>
-                    <a:pt x="2078717" y="2414142"/>
-                  </a:lnTo>
-                  <a:lnTo>
-                    <a:pt x="2002084" y="2366557"/>
-                  </a:lnTo>
-                  <a:lnTo>
-                    <a:pt x="1925452" y="2316855"/>
-                  </a:lnTo>
-                  <a:lnTo>
-                    <a:pt x="1848819" y="2264941"/>
-                  </a:lnTo>
-                  <a:lnTo>
-                    <a:pt x="1772186" y="2210718"/>
-                  </a:lnTo>
-                  <a:lnTo>
-                    <a:pt x="1695554" y="2154083"/>
-                  </a:lnTo>
-                  <a:lnTo>
-                    <a:pt x="1618921" y="2094928"/>
-                  </a:lnTo>
-                  <a:lnTo>
-                    <a:pt x="1542289" y="2033141"/>
-                  </a:lnTo>
-                  <a:lnTo>
-                    <a:pt x="1465656" y="1968606"/>
-                  </a:lnTo>
-                  <a:lnTo>
-                    <a:pt x="1389024" y="1901200"/>
-                  </a:lnTo>
-                  <a:lnTo>
-                    <a:pt x="1312391" y="1830794"/>
-                  </a:lnTo>
-                  <a:lnTo>
-                    <a:pt x="1235759" y="1757257"/>
-                  </a:lnTo>
-                  <a:lnTo>
-                    <a:pt x="1159126" y="1680448"/>
-                  </a:lnTo>
-                  <a:lnTo>
-                    <a:pt x="1082493" y="1600221"/>
-                  </a:lnTo>
-                  <a:lnTo>
-                    <a:pt x="1005861" y="1516426"/>
-                  </a:lnTo>
-                  <a:lnTo>
-                    <a:pt x="929228" y="1428903"/>
-                  </a:lnTo>
-                  <a:lnTo>
-                    <a:pt x="852596" y="1337486"/>
-                  </a:lnTo>
-                  <a:lnTo>
-                    <a:pt x="775963" y="1242001"/>
-                  </a:lnTo>
-                  <a:lnTo>
-                    <a:pt x="699331" y="1142269"/>
-                  </a:lnTo>
-                  <a:lnTo>
-                    <a:pt x="622698" y="1038100"/>
-                  </a:lnTo>
-                  <a:lnTo>
-                    <a:pt x="546066" y="929297"/>
-                  </a:lnTo>
-                  <a:lnTo>
-                    <a:pt x="469433" y="815653"/>
-                  </a:lnTo>
-                  <a:lnTo>
-                    <a:pt x="392801" y="696953"/>
-                  </a:lnTo>
-                  <a:lnTo>
-                    <a:pt x="316168" y="572973"/>
-                  </a:lnTo>
-                  <a:lnTo>
-                    <a:pt x="239535" y="443476"/>
-                  </a:lnTo>
-                  <a:lnTo>
-                    <a:pt x="162903" y="308219"/>
-                  </a:lnTo>
-                  <a:lnTo>
-                    <a:pt x="86270" y="166944"/>
-                  </a:lnTo>
-                  <a:lnTo>
-                    <a:pt x="9638" y="19384"/>
+                    <a:pt x="1513081" y="362878"/>
+                  </a:lnTo>
+                  <a:lnTo>
+                    <a:pt x="1584703" y="693279"/>
+                  </a:lnTo>
+                  <a:lnTo>
+                    <a:pt x="1656326" y="988700"/>
+                  </a:lnTo>
+                  <a:lnTo>
+                    <a:pt x="1727948" y="1252846"/>
+                  </a:lnTo>
+                  <a:lnTo>
+                    <a:pt x="1799571" y="1489028"/>
+                  </a:lnTo>
+                  <a:lnTo>
+                    <a:pt x="1871193" y="1700205"/>
+                  </a:lnTo>
+                  <a:lnTo>
+                    <a:pt x="1942816" y="1889025"/>
+                  </a:lnTo>
+                  <a:lnTo>
+                    <a:pt x="2014438" y="2057855"/>
+                  </a:lnTo>
+                  <a:lnTo>
+                    <a:pt x="2086061" y="2208812"/>
+                  </a:lnTo>
+                  <a:lnTo>
+                    <a:pt x="2157683" y="2343787"/>
+                  </a:lnTo>
+                  <a:lnTo>
+                    <a:pt x="2229306" y="2464472"/>
+                  </a:lnTo>
+                  <a:lnTo>
+                    <a:pt x="2300929" y="2572381"/>
+                  </a:lnTo>
+                  <a:lnTo>
+                    <a:pt x="2372551" y="2659986"/>
+                  </a:lnTo>
+                  <a:lnTo>
+                    <a:pt x="2444174" y="2695073"/>
+                  </a:lnTo>
+                  <a:lnTo>
+                    <a:pt x="2515796" y="2728665"/>
+                  </a:lnTo>
+                  <a:lnTo>
+                    <a:pt x="2587419" y="2760827"/>
+                  </a:lnTo>
+                  <a:lnTo>
+                    <a:pt x="2659041" y="2791619"/>
+                  </a:lnTo>
+                  <a:lnTo>
+                    <a:pt x="2730664" y="2821099"/>
+                  </a:lnTo>
+                  <a:lnTo>
+                    <a:pt x="2802286" y="2849324"/>
+                  </a:lnTo>
+                  <a:lnTo>
+                    <a:pt x="2873909" y="2876346"/>
+                  </a:lnTo>
+                  <a:lnTo>
+                    <a:pt x="2945531" y="2902218"/>
+                  </a:lnTo>
+                  <a:lnTo>
+                    <a:pt x="3017154" y="2926987"/>
+                  </a:lnTo>
+                  <a:lnTo>
+                    <a:pt x="3088776" y="2950701"/>
+                  </a:lnTo>
+                  <a:lnTo>
+                    <a:pt x="3160399" y="2973406"/>
+                  </a:lnTo>
+                  <a:lnTo>
+                    <a:pt x="3232021" y="2995143"/>
+                  </a:lnTo>
+                  <a:lnTo>
+                    <a:pt x="3303644" y="3015954"/>
+                  </a:lnTo>
+                  <a:lnTo>
+                    <a:pt x="3375266" y="3035879"/>
+                  </a:lnTo>
+                  <a:lnTo>
+                    <a:pt x="3446889" y="3054956"/>
+                  </a:lnTo>
+                  <a:lnTo>
+                    <a:pt x="3518511" y="3073219"/>
+                  </a:lnTo>
+                  <a:lnTo>
+                    <a:pt x="3590134" y="3090705"/>
+                  </a:lnTo>
+                  <a:lnTo>
+                    <a:pt x="3661757" y="3107446"/>
+                  </a:lnTo>
+                  <a:lnTo>
+                    <a:pt x="3733379" y="3123474"/>
+                  </a:lnTo>
+                  <a:lnTo>
+                    <a:pt x="3805002" y="3138820"/>
+                  </a:lnTo>
+                  <a:lnTo>
+                    <a:pt x="3876624" y="3153511"/>
+                  </a:lnTo>
+                  <a:lnTo>
+                    <a:pt x="3948247" y="3167577"/>
+                  </a:lnTo>
+                  <a:lnTo>
+                    <a:pt x="4019869" y="3181044"/>
+                  </a:lnTo>
+                  <a:lnTo>
+                    <a:pt x="4091492" y="3193937"/>
+                  </a:lnTo>
+                  <a:lnTo>
+                    <a:pt x="4163114" y="3206281"/>
+                  </a:lnTo>
+                  <a:lnTo>
+                    <a:pt x="4234737" y="3218100"/>
+                  </a:lnTo>
+                  <a:lnTo>
+                    <a:pt x="4306359" y="3229414"/>
+                  </a:lnTo>
+                  <a:lnTo>
+                    <a:pt x="4377982" y="3240247"/>
+                  </a:lnTo>
+                  <a:lnTo>
+                    <a:pt x="4449604" y="3250619"/>
+                  </a:lnTo>
+                  <a:lnTo>
+                    <a:pt x="4521227" y="3260549"/>
+                  </a:lnTo>
+                  <a:lnTo>
+                    <a:pt x="4592849" y="3270056"/>
+                  </a:lnTo>
+                  <a:lnTo>
+                    <a:pt x="4664472" y="3279157"/>
+                  </a:lnTo>
+                  <a:lnTo>
+                    <a:pt x="4736094" y="3287872"/>
+                  </a:lnTo>
+                  <a:lnTo>
+                    <a:pt x="4807717" y="3296215"/>
+                  </a:lnTo>
+                  <a:lnTo>
+                    <a:pt x="4879339" y="3304202"/>
+                  </a:lnTo>
+                  <a:lnTo>
+                    <a:pt x="4950962" y="3311850"/>
+                  </a:lnTo>
+                  <a:lnTo>
+                    <a:pt x="5022585" y="3319171"/>
+                  </a:lnTo>
+                  <a:lnTo>
+                    <a:pt x="5094207" y="3326181"/>
+                  </a:lnTo>
+                  <a:lnTo>
+                    <a:pt x="5165830" y="3332893"/>
+                  </a:lnTo>
+                  <a:lnTo>
+                    <a:pt x="5237452" y="3339318"/>
+                  </a:lnTo>
+                  <a:lnTo>
+                    <a:pt x="5309075" y="3345470"/>
+                  </a:lnTo>
+                  <a:lnTo>
+                    <a:pt x="5380697" y="3351359"/>
+                  </a:lnTo>
+                  <a:lnTo>
+                    <a:pt x="5452320" y="3356998"/>
+                  </a:lnTo>
+                  <a:lnTo>
+                    <a:pt x="5523942" y="3362397"/>
+                  </a:lnTo>
+                  <a:lnTo>
+                    <a:pt x="5595565" y="3367566"/>
+                  </a:lnTo>
+                  <a:lnTo>
+                    <a:pt x="5667187" y="3372514"/>
+                  </a:lnTo>
+                  <a:lnTo>
+                    <a:pt x="5738810" y="3377252"/>
+                  </a:lnTo>
+                  <a:lnTo>
+                    <a:pt x="5810432" y="3381788"/>
+                  </a:lnTo>
+                  <a:lnTo>
+                    <a:pt x="5882055" y="3386131"/>
+                  </a:lnTo>
+                  <a:lnTo>
+                    <a:pt x="5953677" y="3390289"/>
+                  </a:lnTo>
+                  <a:lnTo>
+                    <a:pt x="6025300" y="3394269"/>
+                  </a:lnTo>
+                  <a:lnTo>
+                    <a:pt x="6096922" y="3398080"/>
+                  </a:lnTo>
+                  <a:lnTo>
+                    <a:pt x="6096922" y="3481326"/>
+                  </a:lnTo>
+                  <a:lnTo>
+                    <a:pt x="6025300" y="3481039"/>
+                  </a:lnTo>
+                  <a:lnTo>
+                    <a:pt x="5953677" y="3480718"/>
+                  </a:lnTo>
+                  <a:lnTo>
+                    <a:pt x="5882055" y="3480360"/>
+                  </a:lnTo>
+                  <a:lnTo>
+                    <a:pt x="5810432" y="3479959"/>
+                  </a:lnTo>
+                  <a:lnTo>
+                    <a:pt x="5738810" y="3479510"/>
+                  </a:lnTo>
+                  <a:lnTo>
+                    <a:pt x="5667187" y="3479009"/>
+                  </a:lnTo>
+                  <a:lnTo>
+                    <a:pt x="5595565" y="3478448"/>
+                  </a:lnTo>
+                  <a:lnTo>
+                    <a:pt x="5523942" y="3477820"/>
+                  </a:lnTo>
+                  <a:lnTo>
+                    <a:pt x="5452320" y="3477119"/>
+                  </a:lnTo>
+                  <a:lnTo>
+                    <a:pt x="5380697" y="3476334"/>
+                  </a:lnTo>
+                  <a:lnTo>
+                    <a:pt x="5309075" y="3475456"/>
+                  </a:lnTo>
+                  <a:lnTo>
+                    <a:pt x="5237452" y="3474475"/>
+                  </a:lnTo>
+                  <a:lnTo>
+                    <a:pt x="5165830" y="3473377"/>
+                  </a:lnTo>
+                  <a:lnTo>
+                    <a:pt x="5094207" y="3472149"/>
+                  </a:lnTo>
+                  <a:lnTo>
+                    <a:pt x="5022585" y="3470776"/>
+                  </a:lnTo>
+                  <a:lnTo>
+                    <a:pt x="4950962" y="3469240"/>
+                  </a:lnTo>
+                  <a:lnTo>
+                    <a:pt x="4879339" y="3467523"/>
+                  </a:lnTo>
+                  <a:lnTo>
+                    <a:pt x="4807717" y="3465602"/>
+                  </a:lnTo>
+                  <a:lnTo>
+                    <a:pt x="4736094" y="3463453"/>
+                  </a:lnTo>
+                  <a:lnTo>
+                    <a:pt x="4664472" y="3461051"/>
+                  </a:lnTo>
+                  <a:lnTo>
+                    <a:pt x="4592849" y="3458363"/>
+                  </a:lnTo>
+                  <a:lnTo>
+                    <a:pt x="4521227" y="3455358"/>
+                  </a:lnTo>
+                  <a:lnTo>
+                    <a:pt x="4449604" y="3451997"/>
+                  </a:lnTo>
+                  <a:lnTo>
+                    <a:pt x="4377982" y="3448237"/>
+                  </a:lnTo>
+                  <a:lnTo>
+                    <a:pt x="4306359" y="3444033"/>
+                  </a:lnTo>
+                  <a:lnTo>
+                    <a:pt x="4234737" y="3439331"/>
+                  </a:lnTo>
+                  <a:lnTo>
+                    <a:pt x="4163114" y="3434072"/>
+                  </a:lnTo>
+                  <a:lnTo>
+                    <a:pt x="4091492" y="3428190"/>
+                  </a:lnTo>
+                  <a:lnTo>
+                    <a:pt x="4019869" y="3421612"/>
+                  </a:lnTo>
+                  <a:lnTo>
+                    <a:pt x="3948247" y="3414255"/>
+                  </a:lnTo>
+                  <a:lnTo>
+                    <a:pt x="3876624" y="3406027"/>
+                  </a:lnTo>
+                  <a:lnTo>
+                    <a:pt x="3805002" y="3396825"/>
+                  </a:lnTo>
+                  <a:lnTo>
+                    <a:pt x="3733379" y="3386534"/>
+                  </a:lnTo>
+                  <a:lnTo>
+                    <a:pt x="3661757" y="3375023"/>
+                  </a:lnTo>
+                  <a:lnTo>
+                    <a:pt x="3590134" y="3362150"/>
+                  </a:lnTo>
+                  <a:lnTo>
+                    <a:pt x="3518511" y="3347753"/>
+                  </a:lnTo>
+                  <a:lnTo>
+                    <a:pt x="3446889" y="3331650"/>
+                  </a:lnTo>
+                  <a:lnTo>
+                    <a:pt x="3375266" y="3313642"/>
+                  </a:lnTo>
+                  <a:lnTo>
+                    <a:pt x="3303644" y="3293501"/>
+                  </a:lnTo>
+                  <a:lnTo>
+                    <a:pt x="3232021" y="3270975"/>
+                  </a:lnTo>
+                  <a:lnTo>
+                    <a:pt x="3160399" y="3245782"/>
+                  </a:lnTo>
+                  <a:lnTo>
+                    <a:pt x="3088776" y="3217607"/>
+                  </a:lnTo>
+                  <a:lnTo>
+                    <a:pt x="3017154" y="3186095"/>
+                  </a:lnTo>
+                  <a:lnTo>
+                    <a:pt x="2945531" y="3150852"/>
+                  </a:lnTo>
+                  <a:lnTo>
+                    <a:pt x="2873909" y="3111436"/>
+                  </a:lnTo>
+                  <a:lnTo>
+                    <a:pt x="2802286" y="3067353"/>
+                  </a:lnTo>
+                  <a:lnTo>
+                    <a:pt x="2730664" y="3018051"/>
+                  </a:lnTo>
+                  <a:lnTo>
+                    <a:pt x="2659041" y="2962911"/>
+                  </a:lnTo>
+                  <a:lnTo>
+                    <a:pt x="2587419" y="2901242"/>
+                  </a:lnTo>
+                  <a:lnTo>
+                    <a:pt x="2515796" y="2832272"/>
+                  </a:lnTo>
+                  <a:lnTo>
+                    <a:pt x="2444174" y="2755135"/>
+                  </a:lnTo>
+                  <a:lnTo>
+                    <a:pt x="2372551" y="2668865"/>
+                  </a:lnTo>
+                  <a:lnTo>
+                    <a:pt x="2300929" y="2623338"/>
+                  </a:lnTo>
+                  <a:lnTo>
+                    <a:pt x="2229306" y="2585060"/>
+                  </a:lnTo>
+                  <a:lnTo>
+                    <a:pt x="2157683" y="2545078"/>
+                  </a:lnTo>
+                  <a:lnTo>
+                    <a:pt x="2086061" y="2503318"/>
+                  </a:lnTo>
+                  <a:lnTo>
+                    <a:pt x="2014438" y="2459700"/>
+                  </a:lnTo>
+                  <a:lnTo>
+                    <a:pt x="1942816" y="2414142"/>
+                  </a:lnTo>
+                  <a:lnTo>
+                    <a:pt x="1871193" y="2366557"/>
+                  </a:lnTo>
+                  <a:lnTo>
+                    <a:pt x="1799571" y="2316855"/>
+                  </a:lnTo>
+                  <a:lnTo>
+                    <a:pt x="1727948" y="2264941"/>
+                  </a:lnTo>
+                  <a:lnTo>
+                    <a:pt x="1656326" y="2210718"/>
+                  </a:lnTo>
+                  <a:lnTo>
+                    <a:pt x="1584703" y="2154083"/>
+                  </a:lnTo>
+                  <a:lnTo>
+                    <a:pt x="1513081" y="2094928"/>
+                  </a:lnTo>
+                  <a:lnTo>
+                    <a:pt x="1441458" y="2033141"/>
+                  </a:lnTo>
+                  <a:lnTo>
+                    <a:pt x="1369836" y="1968606"/>
+                  </a:lnTo>
+                  <a:lnTo>
+                    <a:pt x="1298213" y="1901200"/>
+                  </a:lnTo>
+                  <a:lnTo>
+                    <a:pt x="1226591" y="1830794"/>
+                  </a:lnTo>
+                  <a:lnTo>
+                    <a:pt x="1154968" y="1757257"/>
+                  </a:lnTo>
+                  <a:lnTo>
+                    <a:pt x="1083346" y="1680448"/>
+                  </a:lnTo>
+                  <a:lnTo>
+                    <a:pt x="1011723" y="1600221"/>
+                  </a:lnTo>
+                  <a:lnTo>
+                    <a:pt x="940101" y="1516426"/>
+                  </a:lnTo>
+                  <a:lnTo>
+                    <a:pt x="868478" y="1428903"/>
+                  </a:lnTo>
+                  <a:lnTo>
+                    <a:pt x="796855" y="1337486"/>
+                  </a:lnTo>
+                  <a:lnTo>
+                    <a:pt x="725233" y="1242001"/>
+                  </a:lnTo>
+                  <a:lnTo>
+                    <a:pt x="653610" y="1142269"/>
+                  </a:lnTo>
+                  <a:lnTo>
+                    <a:pt x="581988" y="1038100"/>
+                  </a:lnTo>
+                  <a:lnTo>
+                    <a:pt x="510365" y="929297"/>
+                  </a:lnTo>
+                  <a:lnTo>
+                    <a:pt x="438743" y="815653"/>
+                  </a:lnTo>
+                  <a:lnTo>
+                    <a:pt x="367120" y="696953"/>
+                  </a:lnTo>
+                  <a:lnTo>
+                    <a:pt x="295498" y="572973"/>
+                  </a:lnTo>
+                  <a:lnTo>
+                    <a:pt x="223875" y="443476"/>
+                  </a:lnTo>
+                  <a:lnTo>
+                    <a:pt x="152253" y="308219"/>
+                  </a:lnTo>
+                  <a:lnTo>
+                    <a:pt x="80630" y="166944"/>
+                  </a:lnTo>
+                  <a:lnTo>
+                    <a:pt x="9008" y="19384"/>
                   </a:lnTo>
                   <a:lnTo>
                     <a:pt x="0" y="0"/>
@@ -3486,216 +3443,502 @@
         </p:sp>
         <p:sp>
           <p:nvSpPr>
+            <p:cNvPr id="21" name="pl21"/>
+            <p:cNvSpPr/>
+            <p:nvPr/>
+          </p:nvSpPr>
+          <p:spPr>
+            <a:xfrm>
+              <a:off x="3608502" y="2073503"/>
+              <a:ext cx="4654176" cy="3398080"/>
+            </a:xfrm>
+            <a:custGeom>
+              <a:avLst/>
+              <a:pathLst>
+                <a:path w="4654176" h="3398080">
+                  <a:moveTo>
+                    <a:pt x="0" y="0"/>
+                  </a:moveTo>
+                  <a:lnTo>
+                    <a:pt x="70335" y="362878"/>
+                  </a:lnTo>
+                  <a:lnTo>
+                    <a:pt x="141957" y="693279"/>
+                  </a:lnTo>
+                  <a:lnTo>
+                    <a:pt x="213580" y="988700"/>
+                  </a:lnTo>
+                  <a:lnTo>
+                    <a:pt x="285202" y="1252846"/>
+                  </a:lnTo>
+                  <a:lnTo>
+                    <a:pt x="356825" y="1489028"/>
+                  </a:lnTo>
+                  <a:lnTo>
+                    <a:pt x="428447" y="1700205"/>
+                  </a:lnTo>
+                  <a:lnTo>
+                    <a:pt x="500070" y="1889025"/>
+                  </a:lnTo>
+                  <a:lnTo>
+                    <a:pt x="571692" y="2057855"/>
+                  </a:lnTo>
+                  <a:lnTo>
+                    <a:pt x="643315" y="2208812"/>
+                  </a:lnTo>
+                  <a:lnTo>
+                    <a:pt x="714937" y="2343787"/>
+                  </a:lnTo>
+                  <a:lnTo>
+                    <a:pt x="786560" y="2464472"/>
+                  </a:lnTo>
+                  <a:lnTo>
+                    <a:pt x="858182" y="2572381"/>
+                  </a:lnTo>
+                  <a:lnTo>
+                    <a:pt x="929805" y="2659986"/>
+                  </a:lnTo>
+                  <a:lnTo>
+                    <a:pt x="1001427" y="2695073"/>
+                  </a:lnTo>
+                  <a:lnTo>
+                    <a:pt x="1073050" y="2728665"/>
+                  </a:lnTo>
+                  <a:lnTo>
+                    <a:pt x="1144672" y="2760827"/>
+                  </a:lnTo>
+                  <a:lnTo>
+                    <a:pt x="1216295" y="2791619"/>
+                  </a:lnTo>
+                  <a:lnTo>
+                    <a:pt x="1287917" y="2821099"/>
+                  </a:lnTo>
+                  <a:lnTo>
+                    <a:pt x="1359540" y="2849324"/>
+                  </a:lnTo>
+                  <a:lnTo>
+                    <a:pt x="1431163" y="2876346"/>
+                  </a:lnTo>
+                  <a:lnTo>
+                    <a:pt x="1502785" y="2902218"/>
+                  </a:lnTo>
+                  <a:lnTo>
+                    <a:pt x="1574408" y="2926987"/>
+                  </a:lnTo>
+                  <a:lnTo>
+                    <a:pt x="1646030" y="2950701"/>
+                  </a:lnTo>
+                  <a:lnTo>
+                    <a:pt x="1717653" y="2973406"/>
+                  </a:lnTo>
+                  <a:lnTo>
+                    <a:pt x="1789275" y="2995143"/>
+                  </a:lnTo>
+                  <a:lnTo>
+                    <a:pt x="1860898" y="3015954"/>
+                  </a:lnTo>
+                  <a:lnTo>
+                    <a:pt x="1932520" y="3035879"/>
+                  </a:lnTo>
+                  <a:lnTo>
+                    <a:pt x="2004143" y="3054956"/>
+                  </a:lnTo>
+                  <a:lnTo>
+                    <a:pt x="2075765" y="3073219"/>
+                  </a:lnTo>
+                  <a:lnTo>
+                    <a:pt x="2147388" y="3090705"/>
+                  </a:lnTo>
+                  <a:lnTo>
+                    <a:pt x="2219010" y="3107446"/>
+                  </a:lnTo>
+                  <a:lnTo>
+                    <a:pt x="2290633" y="3123474"/>
+                  </a:lnTo>
+                  <a:lnTo>
+                    <a:pt x="2362255" y="3138820"/>
+                  </a:lnTo>
+                  <a:lnTo>
+                    <a:pt x="2433878" y="3153511"/>
+                  </a:lnTo>
+                  <a:lnTo>
+                    <a:pt x="2505500" y="3167577"/>
+                  </a:lnTo>
+                  <a:lnTo>
+                    <a:pt x="2577123" y="3181044"/>
+                  </a:lnTo>
+                  <a:lnTo>
+                    <a:pt x="2648745" y="3193937"/>
+                  </a:lnTo>
+                  <a:lnTo>
+                    <a:pt x="2720368" y="3206281"/>
+                  </a:lnTo>
+                  <a:lnTo>
+                    <a:pt x="2791991" y="3218100"/>
+                  </a:lnTo>
+                  <a:lnTo>
+                    <a:pt x="2863613" y="3229414"/>
+                  </a:lnTo>
+                  <a:lnTo>
+                    <a:pt x="2935236" y="3240247"/>
+                  </a:lnTo>
+                  <a:lnTo>
+                    <a:pt x="3006858" y="3250619"/>
+                  </a:lnTo>
+                  <a:lnTo>
+                    <a:pt x="3078481" y="3260549"/>
+                  </a:lnTo>
+                  <a:lnTo>
+                    <a:pt x="3150103" y="3270056"/>
+                  </a:lnTo>
+                  <a:lnTo>
+                    <a:pt x="3221726" y="3279157"/>
+                  </a:lnTo>
+                  <a:lnTo>
+                    <a:pt x="3293348" y="3287872"/>
+                  </a:lnTo>
+                  <a:lnTo>
+                    <a:pt x="3364971" y="3296215"/>
+                  </a:lnTo>
+                  <a:lnTo>
+                    <a:pt x="3436593" y="3304202"/>
+                  </a:lnTo>
+                  <a:lnTo>
+                    <a:pt x="3508216" y="3311850"/>
+                  </a:lnTo>
+                  <a:lnTo>
+                    <a:pt x="3579838" y="3319171"/>
+                  </a:lnTo>
+                  <a:lnTo>
+                    <a:pt x="3651461" y="3326181"/>
+                  </a:lnTo>
+                  <a:lnTo>
+                    <a:pt x="3723083" y="3332893"/>
+                  </a:lnTo>
+                  <a:lnTo>
+                    <a:pt x="3794706" y="3339318"/>
+                  </a:lnTo>
+                  <a:lnTo>
+                    <a:pt x="3866328" y="3345470"/>
+                  </a:lnTo>
+                  <a:lnTo>
+                    <a:pt x="3937951" y="3351359"/>
+                  </a:lnTo>
+                  <a:lnTo>
+                    <a:pt x="4009573" y="3356998"/>
+                  </a:lnTo>
+                  <a:lnTo>
+                    <a:pt x="4081196" y="3362397"/>
+                  </a:lnTo>
+                  <a:lnTo>
+                    <a:pt x="4152819" y="3367566"/>
+                  </a:lnTo>
+                  <a:lnTo>
+                    <a:pt x="4224441" y="3372514"/>
+                  </a:lnTo>
+                  <a:lnTo>
+                    <a:pt x="4296064" y="3377252"/>
+                  </a:lnTo>
+                  <a:lnTo>
+                    <a:pt x="4367686" y="3381788"/>
+                  </a:lnTo>
+                  <a:lnTo>
+                    <a:pt x="4439309" y="3386131"/>
+                  </a:lnTo>
+                  <a:lnTo>
+                    <a:pt x="4510931" y="3390289"/>
+                  </a:lnTo>
+                  <a:lnTo>
+                    <a:pt x="4582554" y="3394269"/>
+                  </a:lnTo>
+                  <a:lnTo>
+                    <a:pt x="4654176" y="3398080"/>
+                  </a:lnTo>
+                </a:path>
+              </a:pathLst>
+            </a:custGeom>
+          </p:spPr>
+          <p:txBody>
+            <a:bodyPr/>
+            <a:lstStyle/>
+            <a:p/>
+          </p:txBody>
+        </p:sp>
+        <p:sp>
+          <p:nvSpPr>
             <p:cNvPr id="22" name="pl22"/>
             <p:cNvSpPr/>
             <p:nvPr/>
           </p:nvSpPr>
           <p:spPr>
             <a:xfrm>
-              <a:off x="3241562" y="2073503"/>
-              <a:ext cx="4979738" cy="3398080"/>
+              <a:off x="2165756" y="2073503"/>
+              <a:ext cx="6096922" cy="3481326"/>
             </a:xfrm>
             <a:custGeom>
               <a:avLst/>
               <a:pathLst>
-                <a:path w="4979738" h="3398080">
+                <a:path w="6096922" h="3481326">
                   <a:moveTo>
+                    <a:pt x="6096922" y="3481326"/>
+                  </a:moveTo>
+                  <a:lnTo>
+                    <a:pt x="6025300" y="3481039"/>
+                  </a:lnTo>
+                  <a:lnTo>
+                    <a:pt x="5953677" y="3480718"/>
+                  </a:lnTo>
+                  <a:lnTo>
+                    <a:pt x="5882055" y="3480360"/>
+                  </a:lnTo>
+                  <a:lnTo>
+                    <a:pt x="5810432" y="3479959"/>
+                  </a:lnTo>
+                  <a:lnTo>
+                    <a:pt x="5738810" y="3479510"/>
+                  </a:lnTo>
+                  <a:lnTo>
+                    <a:pt x="5667187" y="3479009"/>
+                  </a:lnTo>
+                  <a:lnTo>
+                    <a:pt x="5595565" y="3478448"/>
+                  </a:lnTo>
+                  <a:lnTo>
+                    <a:pt x="5523942" y="3477820"/>
+                  </a:lnTo>
+                  <a:lnTo>
+                    <a:pt x="5452320" y="3477119"/>
+                  </a:lnTo>
+                  <a:lnTo>
+                    <a:pt x="5380697" y="3476334"/>
+                  </a:lnTo>
+                  <a:lnTo>
+                    <a:pt x="5309075" y="3475456"/>
+                  </a:lnTo>
+                  <a:lnTo>
+                    <a:pt x="5237452" y="3474475"/>
+                  </a:lnTo>
+                  <a:lnTo>
+                    <a:pt x="5165830" y="3473377"/>
+                  </a:lnTo>
+                  <a:lnTo>
+                    <a:pt x="5094207" y="3472149"/>
+                  </a:lnTo>
+                  <a:lnTo>
+                    <a:pt x="5022585" y="3470776"/>
+                  </a:lnTo>
+                  <a:lnTo>
+                    <a:pt x="4950962" y="3469240"/>
+                  </a:lnTo>
+                  <a:lnTo>
+                    <a:pt x="4879339" y="3467523"/>
+                  </a:lnTo>
+                  <a:lnTo>
+                    <a:pt x="4807717" y="3465602"/>
+                  </a:lnTo>
+                  <a:lnTo>
+                    <a:pt x="4736094" y="3463453"/>
+                  </a:lnTo>
+                  <a:lnTo>
+                    <a:pt x="4664472" y="3461051"/>
+                  </a:lnTo>
+                  <a:lnTo>
+                    <a:pt x="4592849" y="3458363"/>
+                  </a:lnTo>
+                  <a:lnTo>
+                    <a:pt x="4521227" y="3455358"/>
+                  </a:lnTo>
+                  <a:lnTo>
+                    <a:pt x="4449604" y="3451997"/>
+                  </a:lnTo>
+                  <a:lnTo>
+                    <a:pt x="4377982" y="3448237"/>
+                  </a:lnTo>
+                  <a:lnTo>
+                    <a:pt x="4306359" y="3444033"/>
+                  </a:lnTo>
+                  <a:lnTo>
+                    <a:pt x="4234737" y="3439331"/>
+                  </a:lnTo>
+                  <a:lnTo>
+                    <a:pt x="4163114" y="3434072"/>
+                  </a:lnTo>
+                  <a:lnTo>
+                    <a:pt x="4091492" y="3428190"/>
+                  </a:lnTo>
+                  <a:lnTo>
+                    <a:pt x="4019869" y="3421612"/>
+                  </a:lnTo>
+                  <a:lnTo>
+                    <a:pt x="3948247" y="3414255"/>
+                  </a:lnTo>
+                  <a:lnTo>
+                    <a:pt x="3876624" y="3406027"/>
+                  </a:lnTo>
+                  <a:lnTo>
+                    <a:pt x="3805002" y="3396825"/>
+                  </a:lnTo>
+                  <a:lnTo>
+                    <a:pt x="3733379" y="3386534"/>
+                  </a:lnTo>
+                  <a:lnTo>
+                    <a:pt x="3661757" y="3375023"/>
+                  </a:lnTo>
+                  <a:lnTo>
+                    <a:pt x="3590134" y="3362150"/>
+                  </a:lnTo>
+                  <a:lnTo>
+                    <a:pt x="3518511" y="3347753"/>
+                  </a:lnTo>
+                  <a:lnTo>
+                    <a:pt x="3446889" y="3331650"/>
+                  </a:lnTo>
+                  <a:lnTo>
+                    <a:pt x="3375266" y="3313642"/>
+                  </a:lnTo>
+                  <a:lnTo>
+                    <a:pt x="3303644" y="3293501"/>
+                  </a:lnTo>
+                  <a:lnTo>
+                    <a:pt x="3232021" y="3270975"/>
+                  </a:lnTo>
+                  <a:lnTo>
+                    <a:pt x="3160399" y="3245782"/>
+                  </a:lnTo>
+                  <a:lnTo>
+                    <a:pt x="3088776" y="3217607"/>
+                  </a:lnTo>
+                  <a:lnTo>
+                    <a:pt x="3017154" y="3186095"/>
+                  </a:lnTo>
+                  <a:lnTo>
+                    <a:pt x="2945531" y="3150852"/>
+                  </a:lnTo>
+                  <a:lnTo>
+                    <a:pt x="2873909" y="3111436"/>
+                  </a:lnTo>
+                  <a:lnTo>
+                    <a:pt x="2802286" y="3067353"/>
+                  </a:lnTo>
+                  <a:lnTo>
+                    <a:pt x="2730664" y="3018051"/>
+                  </a:lnTo>
+                  <a:lnTo>
+                    <a:pt x="2659041" y="2962911"/>
+                  </a:lnTo>
+                  <a:lnTo>
+                    <a:pt x="2587419" y="2901242"/>
+                  </a:lnTo>
+                  <a:lnTo>
+                    <a:pt x="2515796" y="2832272"/>
+                  </a:lnTo>
+                  <a:lnTo>
+                    <a:pt x="2444174" y="2755135"/>
+                  </a:lnTo>
+                  <a:lnTo>
+                    <a:pt x="2372551" y="2668865"/>
+                  </a:lnTo>
+                  <a:lnTo>
+                    <a:pt x="2300929" y="2623338"/>
+                  </a:lnTo>
+                  <a:lnTo>
+                    <a:pt x="2229306" y="2585060"/>
+                  </a:lnTo>
+                  <a:lnTo>
+                    <a:pt x="2157683" y="2545078"/>
+                  </a:lnTo>
+                  <a:lnTo>
+                    <a:pt x="2086061" y="2503318"/>
+                  </a:lnTo>
+                  <a:lnTo>
+                    <a:pt x="2014438" y="2459700"/>
+                  </a:lnTo>
+                  <a:lnTo>
+                    <a:pt x="1942816" y="2414142"/>
+                  </a:lnTo>
+                  <a:lnTo>
+                    <a:pt x="1871193" y="2366557"/>
+                  </a:lnTo>
+                  <a:lnTo>
+                    <a:pt x="1799571" y="2316855"/>
+                  </a:lnTo>
+                  <a:lnTo>
+                    <a:pt x="1727948" y="2264941"/>
+                  </a:lnTo>
+                  <a:lnTo>
+                    <a:pt x="1656326" y="2210718"/>
+                  </a:lnTo>
+                  <a:lnTo>
+                    <a:pt x="1584703" y="2154083"/>
+                  </a:lnTo>
+                  <a:lnTo>
+                    <a:pt x="1513081" y="2094928"/>
+                  </a:lnTo>
+                  <a:lnTo>
+                    <a:pt x="1441458" y="2033141"/>
+                  </a:lnTo>
+                  <a:lnTo>
+                    <a:pt x="1369836" y="1968606"/>
+                  </a:lnTo>
+                  <a:lnTo>
+                    <a:pt x="1298213" y="1901200"/>
+                  </a:lnTo>
+                  <a:lnTo>
+                    <a:pt x="1226591" y="1830794"/>
+                  </a:lnTo>
+                  <a:lnTo>
+                    <a:pt x="1154968" y="1757257"/>
+                  </a:lnTo>
+                  <a:lnTo>
+                    <a:pt x="1083346" y="1680448"/>
+                  </a:lnTo>
+                  <a:lnTo>
+                    <a:pt x="1011723" y="1600221"/>
+                  </a:lnTo>
+                  <a:lnTo>
+                    <a:pt x="940101" y="1516426"/>
+                  </a:lnTo>
+                  <a:lnTo>
+                    <a:pt x="868478" y="1428903"/>
+                  </a:lnTo>
+                  <a:lnTo>
+                    <a:pt x="796855" y="1337486"/>
+                  </a:lnTo>
+                  <a:lnTo>
+                    <a:pt x="725233" y="1242001"/>
+                  </a:lnTo>
+                  <a:lnTo>
+                    <a:pt x="653610" y="1142269"/>
+                  </a:lnTo>
+                  <a:lnTo>
+                    <a:pt x="581988" y="1038100"/>
+                  </a:lnTo>
+                  <a:lnTo>
+                    <a:pt x="510365" y="929297"/>
+                  </a:lnTo>
+                  <a:lnTo>
+                    <a:pt x="438743" y="815653"/>
+                  </a:lnTo>
+                  <a:lnTo>
+                    <a:pt x="367120" y="696953"/>
+                  </a:lnTo>
+                  <a:lnTo>
+                    <a:pt x="295498" y="572973"/>
+                  </a:lnTo>
+                  <a:lnTo>
+                    <a:pt x="223875" y="443476"/>
+                  </a:lnTo>
+                  <a:lnTo>
+                    <a:pt x="152253" y="308219"/>
+                  </a:lnTo>
+                  <a:lnTo>
+                    <a:pt x="80630" y="166944"/>
+                  </a:lnTo>
+                  <a:lnTo>
+                    <a:pt x="9008" y="19384"/>
+                  </a:lnTo>
+                  <a:lnTo>
                     <a:pt x="0" y="0"/>
-                  </a:moveTo>
-                  <a:lnTo>
-                    <a:pt x="75254" y="362878"/>
-                  </a:lnTo>
-                  <a:lnTo>
-                    <a:pt x="151887" y="693279"/>
-                  </a:lnTo>
-                  <a:lnTo>
-                    <a:pt x="228520" y="988700"/>
-                  </a:lnTo>
-                  <a:lnTo>
-                    <a:pt x="305152" y="1252846"/>
-                  </a:lnTo>
-                  <a:lnTo>
-                    <a:pt x="381785" y="1489028"/>
-                  </a:lnTo>
-                  <a:lnTo>
-                    <a:pt x="458417" y="1700205"/>
-                  </a:lnTo>
-                  <a:lnTo>
-                    <a:pt x="535050" y="1889025"/>
-                  </a:lnTo>
-                  <a:lnTo>
-                    <a:pt x="611682" y="2057855"/>
-                  </a:lnTo>
-                  <a:lnTo>
-                    <a:pt x="688315" y="2208812"/>
-                  </a:lnTo>
-                  <a:lnTo>
-                    <a:pt x="764947" y="2343787"/>
-                  </a:lnTo>
-                  <a:lnTo>
-                    <a:pt x="841580" y="2464472"/>
-                  </a:lnTo>
-                  <a:lnTo>
-                    <a:pt x="918213" y="2572381"/>
-                  </a:lnTo>
-                  <a:lnTo>
-                    <a:pt x="994845" y="2659986"/>
-                  </a:lnTo>
-                  <a:lnTo>
-                    <a:pt x="1071478" y="2695073"/>
-                  </a:lnTo>
-                  <a:lnTo>
-                    <a:pt x="1148110" y="2728665"/>
-                  </a:lnTo>
-                  <a:lnTo>
-                    <a:pt x="1224743" y="2760827"/>
-                  </a:lnTo>
-                  <a:lnTo>
-                    <a:pt x="1301375" y="2791619"/>
-                  </a:lnTo>
-                  <a:lnTo>
-                    <a:pt x="1378008" y="2821099"/>
-                  </a:lnTo>
-                  <a:lnTo>
-                    <a:pt x="1454640" y="2849324"/>
-                  </a:lnTo>
-                  <a:lnTo>
-                    <a:pt x="1531273" y="2876346"/>
-                  </a:lnTo>
-                  <a:lnTo>
-                    <a:pt x="1607905" y="2902218"/>
-                  </a:lnTo>
-                  <a:lnTo>
-                    <a:pt x="1684538" y="2926987"/>
-                  </a:lnTo>
-                  <a:lnTo>
-                    <a:pt x="1761171" y="2950701"/>
-                  </a:lnTo>
-                  <a:lnTo>
-                    <a:pt x="1837803" y="2973406"/>
-                  </a:lnTo>
-                  <a:lnTo>
-                    <a:pt x="1914436" y="2995143"/>
-                  </a:lnTo>
-                  <a:lnTo>
-                    <a:pt x="1991068" y="3015954"/>
-                  </a:lnTo>
-                  <a:lnTo>
-                    <a:pt x="2067701" y="3035879"/>
-                  </a:lnTo>
-                  <a:lnTo>
-                    <a:pt x="2144333" y="3054956"/>
-                  </a:lnTo>
-                  <a:lnTo>
-                    <a:pt x="2220966" y="3073219"/>
-                  </a:lnTo>
-                  <a:lnTo>
-                    <a:pt x="2297598" y="3090705"/>
-                  </a:lnTo>
-                  <a:lnTo>
-                    <a:pt x="2374231" y="3107446"/>
-                  </a:lnTo>
-                  <a:lnTo>
-                    <a:pt x="2450863" y="3123474"/>
-                  </a:lnTo>
-                  <a:lnTo>
-                    <a:pt x="2527496" y="3138820"/>
-                  </a:lnTo>
-                  <a:lnTo>
-                    <a:pt x="2604129" y="3153511"/>
-                  </a:lnTo>
-                  <a:lnTo>
-                    <a:pt x="2680761" y="3167577"/>
-                  </a:lnTo>
-                  <a:lnTo>
-                    <a:pt x="2757394" y="3181044"/>
-                  </a:lnTo>
-                  <a:lnTo>
-                    <a:pt x="2834026" y="3193937"/>
-                  </a:lnTo>
-                  <a:lnTo>
-                    <a:pt x="2910659" y="3206281"/>
-                  </a:lnTo>
-                  <a:lnTo>
-                    <a:pt x="2987291" y="3218100"/>
-                  </a:lnTo>
-                  <a:lnTo>
-                    <a:pt x="3063924" y="3229414"/>
-                  </a:lnTo>
-                  <a:lnTo>
-                    <a:pt x="3140556" y="3240247"/>
-                  </a:lnTo>
-                  <a:lnTo>
-                    <a:pt x="3217189" y="3250619"/>
-                  </a:lnTo>
-                  <a:lnTo>
-                    <a:pt x="3293822" y="3260549"/>
-                  </a:lnTo>
-                  <a:lnTo>
-                    <a:pt x="3370454" y="3270056"/>
-                  </a:lnTo>
-                  <a:lnTo>
-                    <a:pt x="3447087" y="3279157"/>
-                  </a:lnTo>
-                  <a:lnTo>
-                    <a:pt x="3523719" y="3287872"/>
-                  </a:lnTo>
-                  <a:lnTo>
-                    <a:pt x="3600352" y="3296215"/>
-                  </a:lnTo>
-                  <a:lnTo>
-                    <a:pt x="3676984" y="3304202"/>
-                  </a:lnTo>
-                  <a:lnTo>
-                    <a:pt x="3753617" y="3311850"/>
-                  </a:lnTo>
-                  <a:lnTo>
-                    <a:pt x="3830249" y="3319171"/>
-                  </a:lnTo>
-                  <a:lnTo>
-                    <a:pt x="3906882" y="3326181"/>
-                  </a:lnTo>
-                  <a:lnTo>
-                    <a:pt x="3983514" y="3332893"/>
-                  </a:lnTo>
-                  <a:lnTo>
-                    <a:pt x="4060147" y="3339318"/>
-                  </a:lnTo>
-                  <a:lnTo>
-                    <a:pt x="4136780" y="3345470"/>
-                  </a:lnTo>
-                  <a:lnTo>
-                    <a:pt x="4213412" y="3351359"/>
-                  </a:lnTo>
-                  <a:lnTo>
-                    <a:pt x="4290045" y="3356998"/>
-                  </a:lnTo>
-                  <a:lnTo>
-                    <a:pt x="4366677" y="3362397"/>
-                  </a:lnTo>
-                  <a:lnTo>
-                    <a:pt x="4443310" y="3367566"/>
-                  </a:lnTo>
-                  <a:lnTo>
-                    <a:pt x="4519942" y="3372514"/>
-                  </a:lnTo>
-                  <a:lnTo>
-                    <a:pt x="4596575" y="3377252"/>
-                  </a:lnTo>
-                  <a:lnTo>
-                    <a:pt x="4673207" y="3381788"/>
-                  </a:lnTo>
-                  <a:lnTo>
-                    <a:pt x="4749840" y="3386131"/>
-                  </a:lnTo>
-                  <a:lnTo>
-                    <a:pt x="4826473" y="3390289"/>
-                  </a:lnTo>
-                  <a:lnTo>
-                    <a:pt x="4903105" y="3394269"/>
-                  </a:lnTo>
-                  <a:lnTo>
-                    <a:pt x="4979738" y="3398080"/>
                   </a:lnTo>
                 </a:path>
               </a:pathLst>
@@ -3715,514 +3958,228 @@
           </p:nvSpPr>
           <p:spPr>
             <a:xfrm>
-              <a:off x="1697896" y="2073503"/>
-              <a:ext cx="6523404" cy="3481326"/>
+              <a:off x="3205024" y="2073503"/>
+              <a:ext cx="5057655" cy="3469345"/>
             </a:xfrm>
             <a:custGeom>
               <a:avLst/>
               <a:pathLst>
-                <a:path w="6523404" h="3481326">
-                  <a:moveTo>
-                    <a:pt x="6523404" y="3481326"/>
-                  </a:moveTo>
-                  <a:lnTo>
-                    <a:pt x="6446772" y="3481039"/>
-                  </a:lnTo>
-                  <a:lnTo>
-                    <a:pt x="6370139" y="3480718"/>
-                  </a:lnTo>
-                  <a:lnTo>
-                    <a:pt x="6293507" y="3480360"/>
-                  </a:lnTo>
-                  <a:lnTo>
-                    <a:pt x="6216874" y="3479959"/>
-                  </a:lnTo>
-                  <a:lnTo>
-                    <a:pt x="6140242" y="3479510"/>
-                  </a:lnTo>
-                  <a:lnTo>
-                    <a:pt x="6063609" y="3479009"/>
-                  </a:lnTo>
-                  <a:lnTo>
-                    <a:pt x="5986977" y="3478448"/>
-                  </a:lnTo>
-                  <a:lnTo>
-                    <a:pt x="5910344" y="3477820"/>
-                  </a:lnTo>
-                  <a:lnTo>
-                    <a:pt x="5833712" y="3477119"/>
-                  </a:lnTo>
-                  <a:lnTo>
-                    <a:pt x="5757079" y="3476334"/>
-                  </a:lnTo>
-                  <a:lnTo>
-                    <a:pt x="5680446" y="3475456"/>
-                  </a:lnTo>
-                  <a:lnTo>
-                    <a:pt x="5603814" y="3474475"/>
-                  </a:lnTo>
-                  <a:lnTo>
-                    <a:pt x="5527181" y="3473377"/>
-                  </a:lnTo>
-                  <a:lnTo>
-                    <a:pt x="5450549" y="3472149"/>
-                  </a:lnTo>
-                  <a:lnTo>
-                    <a:pt x="5373916" y="3470776"/>
-                  </a:lnTo>
-                  <a:lnTo>
-                    <a:pt x="5297284" y="3469240"/>
-                  </a:lnTo>
-                  <a:lnTo>
-                    <a:pt x="5220651" y="3467523"/>
-                  </a:lnTo>
-                  <a:lnTo>
-                    <a:pt x="5144019" y="3465602"/>
-                  </a:lnTo>
-                  <a:lnTo>
-                    <a:pt x="5067386" y="3463453"/>
-                  </a:lnTo>
-                  <a:lnTo>
-                    <a:pt x="4990753" y="3461051"/>
-                  </a:lnTo>
-                  <a:lnTo>
-                    <a:pt x="4914121" y="3458363"/>
-                  </a:lnTo>
-                  <a:lnTo>
-                    <a:pt x="4837488" y="3455358"/>
-                  </a:lnTo>
-                  <a:lnTo>
-                    <a:pt x="4760856" y="3451997"/>
-                  </a:lnTo>
-                  <a:lnTo>
-                    <a:pt x="4684223" y="3448237"/>
-                  </a:lnTo>
-                  <a:lnTo>
-                    <a:pt x="4607591" y="3444033"/>
-                  </a:lnTo>
-                  <a:lnTo>
-                    <a:pt x="4530958" y="3439331"/>
-                  </a:lnTo>
-                  <a:lnTo>
-                    <a:pt x="4454326" y="3434072"/>
-                  </a:lnTo>
-                  <a:lnTo>
-                    <a:pt x="4377693" y="3428190"/>
-                  </a:lnTo>
-                  <a:lnTo>
-                    <a:pt x="4301061" y="3421612"/>
-                  </a:lnTo>
-                  <a:lnTo>
-                    <a:pt x="4224428" y="3414255"/>
-                  </a:lnTo>
-                  <a:lnTo>
-                    <a:pt x="4147795" y="3406027"/>
-                  </a:lnTo>
-                  <a:lnTo>
-                    <a:pt x="4071163" y="3396825"/>
-                  </a:lnTo>
-                  <a:lnTo>
-                    <a:pt x="3994530" y="3386534"/>
-                  </a:lnTo>
-                  <a:lnTo>
-                    <a:pt x="3917898" y="3375023"/>
-                  </a:lnTo>
-                  <a:lnTo>
-                    <a:pt x="3841265" y="3362150"/>
-                  </a:lnTo>
-                  <a:lnTo>
-                    <a:pt x="3764633" y="3347753"/>
-                  </a:lnTo>
-                  <a:lnTo>
-                    <a:pt x="3688000" y="3331650"/>
-                  </a:lnTo>
-                  <a:lnTo>
-                    <a:pt x="3611368" y="3313642"/>
-                  </a:lnTo>
-                  <a:lnTo>
-                    <a:pt x="3534735" y="3293501"/>
-                  </a:lnTo>
-                  <a:lnTo>
-                    <a:pt x="3458103" y="3270975"/>
-                  </a:lnTo>
-                  <a:lnTo>
-                    <a:pt x="3381470" y="3245782"/>
-                  </a:lnTo>
-                  <a:lnTo>
-                    <a:pt x="3304837" y="3217607"/>
-                  </a:lnTo>
-                  <a:lnTo>
-                    <a:pt x="3228205" y="3186095"/>
-                  </a:lnTo>
-                  <a:lnTo>
-                    <a:pt x="3151572" y="3150852"/>
-                  </a:lnTo>
-                  <a:lnTo>
-                    <a:pt x="3074940" y="3111436"/>
-                  </a:lnTo>
-                  <a:lnTo>
-                    <a:pt x="2998307" y="3067353"/>
-                  </a:lnTo>
-                  <a:lnTo>
-                    <a:pt x="2921675" y="3018051"/>
-                  </a:lnTo>
-                  <a:lnTo>
-                    <a:pt x="2845042" y="2962911"/>
-                  </a:lnTo>
-                  <a:lnTo>
-                    <a:pt x="2768410" y="2901242"/>
-                  </a:lnTo>
-                  <a:lnTo>
-                    <a:pt x="2691777" y="2832272"/>
-                  </a:lnTo>
-                  <a:lnTo>
-                    <a:pt x="2615144" y="2755135"/>
-                  </a:lnTo>
-                  <a:lnTo>
-                    <a:pt x="2538512" y="2668865"/>
-                  </a:lnTo>
-                  <a:lnTo>
-                    <a:pt x="2461879" y="2623338"/>
-                  </a:lnTo>
-                  <a:lnTo>
-                    <a:pt x="2385247" y="2585060"/>
-                  </a:lnTo>
-                  <a:lnTo>
-                    <a:pt x="2308614" y="2545078"/>
-                  </a:lnTo>
-                  <a:lnTo>
-                    <a:pt x="2231982" y="2503318"/>
-                  </a:lnTo>
-                  <a:lnTo>
-                    <a:pt x="2155349" y="2459700"/>
-                  </a:lnTo>
-                  <a:lnTo>
-                    <a:pt x="2078717" y="2414142"/>
-                  </a:lnTo>
-                  <a:lnTo>
-                    <a:pt x="2002084" y="2366557"/>
-                  </a:lnTo>
-                  <a:lnTo>
-                    <a:pt x="1925452" y="2316855"/>
-                  </a:lnTo>
-                  <a:lnTo>
-                    <a:pt x="1848819" y="2264941"/>
-                  </a:lnTo>
-                  <a:lnTo>
-                    <a:pt x="1772186" y="2210718"/>
-                  </a:lnTo>
-                  <a:lnTo>
-                    <a:pt x="1695554" y="2154083"/>
-                  </a:lnTo>
-                  <a:lnTo>
-                    <a:pt x="1618921" y="2094928"/>
-                  </a:lnTo>
-                  <a:lnTo>
-                    <a:pt x="1542289" y="2033141"/>
-                  </a:lnTo>
-                  <a:lnTo>
-                    <a:pt x="1465656" y="1968606"/>
-                  </a:lnTo>
-                  <a:lnTo>
-                    <a:pt x="1389024" y="1901200"/>
-                  </a:lnTo>
-                  <a:lnTo>
-                    <a:pt x="1312391" y="1830794"/>
-                  </a:lnTo>
-                  <a:lnTo>
-                    <a:pt x="1235759" y="1757257"/>
-                  </a:lnTo>
-                  <a:lnTo>
-                    <a:pt x="1159126" y="1680448"/>
-                  </a:lnTo>
-                  <a:lnTo>
-                    <a:pt x="1082493" y="1600221"/>
-                  </a:lnTo>
-                  <a:lnTo>
-                    <a:pt x="1005861" y="1516426"/>
-                  </a:lnTo>
-                  <a:lnTo>
-                    <a:pt x="929228" y="1428903"/>
-                  </a:lnTo>
-                  <a:lnTo>
-                    <a:pt x="852596" y="1337486"/>
-                  </a:lnTo>
-                  <a:lnTo>
-                    <a:pt x="775963" y="1242001"/>
-                  </a:lnTo>
-                  <a:lnTo>
-                    <a:pt x="699331" y="1142269"/>
-                  </a:lnTo>
-                  <a:lnTo>
-                    <a:pt x="622698" y="1038100"/>
-                  </a:lnTo>
-                  <a:lnTo>
-                    <a:pt x="546066" y="929297"/>
-                  </a:lnTo>
-                  <a:lnTo>
-                    <a:pt x="469433" y="815653"/>
-                  </a:lnTo>
-                  <a:lnTo>
-                    <a:pt x="392801" y="696953"/>
-                  </a:lnTo>
-                  <a:lnTo>
-                    <a:pt x="316168" y="572973"/>
-                  </a:lnTo>
-                  <a:lnTo>
-                    <a:pt x="239535" y="443476"/>
-                  </a:lnTo>
-                  <a:lnTo>
-                    <a:pt x="162903" y="308219"/>
-                  </a:lnTo>
-                  <a:lnTo>
-                    <a:pt x="86270" y="166944"/>
-                  </a:lnTo>
-                  <a:lnTo>
-                    <a:pt x="9638" y="19384"/>
-                  </a:lnTo>
-                  <a:lnTo>
-                    <a:pt x="0" y="0"/>
-                  </a:lnTo>
-                </a:path>
-              </a:pathLst>
-            </a:custGeom>
-          </p:spPr>
-          <p:txBody>
-            <a:bodyPr/>
-            <a:lstStyle/>
-            <a:p/>
-          </p:txBody>
-        </p:sp>
-        <p:sp>
-          <p:nvSpPr>
-            <p:cNvPr id="24" name="pl24"/>
-            <p:cNvSpPr/>
-            <p:nvPr/>
-          </p:nvSpPr>
-          <p:spPr>
-            <a:xfrm>
-              <a:off x="2809861" y="2073503"/>
-              <a:ext cx="5411439" cy="3469345"/>
-            </a:xfrm>
-            <a:custGeom>
-              <a:avLst/>
-              <a:pathLst>
-                <a:path w="5411439" h="3469345">
+                <a:path w="5057655" h="3469345">
                   <a:moveTo>
                     <a:pt x="0" y="0"/>
                   </a:moveTo>
                   <a:lnTo>
-                    <a:pt x="47161" y="165055"/>
-                  </a:lnTo>
-                  <a:lnTo>
-                    <a:pt x="123794" y="413199"/>
-                  </a:lnTo>
-                  <a:lnTo>
-                    <a:pt x="200426" y="642789"/>
-                  </a:lnTo>
-                  <a:lnTo>
-                    <a:pt x="277059" y="855212"/>
-                  </a:lnTo>
-                  <a:lnTo>
-                    <a:pt x="353691" y="1051752"/>
-                  </a:lnTo>
-                  <a:lnTo>
-                    <a:pt x="430324" y="1233596"/>
-                  </a:lnTo>
-                  <a:lnTo>
-                    <a:pt x="506956" y="1401844"/>
-                  </a:lnTo>
-                  <a:lnTo>
-                    <a:pt x="583589" y="1557511"/>
-                  </a:lnTo>
-                  <a:lnTo>
-                    <a:pt x="660221" y="1701539"/>
-                  </a:lnTo>
-                  <a:lnTo>
-                    <a:pt x="736854" y="1834797"/>
-                  </a:lnTo>
-                  <a:lnTo>
-                    <a:pt x="813487" y="1958092"/>
-                  </a:lnTo>
-                  <a:lnTo>
-                    <a:pt x="890119" y="2072168"/>
-                  </a:lnTo>
-                  <a:lnTo>
-                    <a:pt x="966752" y="2177714"/>
-                  </a:lnTo>
-                  <a:lnTo>
-                    <a:pt x="1043384" y="2275368"/>
-                  </a:lnTo>
-                  <a:lnTo>
-                    <a:pt x="1120017" y="2365721"/>
-                  </a:lnTo>
-                  <a:lnTo>
-                    <a:pt x="1196649" y="2449317"/>
-                  </a:lnTo>
-                  <a:lnTo>
-                    <a:pt x="1273282" y="2526663"/>
-                  </a:lnTo>
-                  <a:lnTo>
-                    <a:pt x="1349914" y="2598226"/>
-                  </a:lnTo>
-                  <a:lnTo>
-                    <a:pt x="1426547" y="2664438"/>
-                  </a:lnTo>
-                  <a:lnTo>
-                    <a:pt x="1503179" y="2725699"/>
-                  </a:lnTo>
-                  <a:lnTo>
-                    <a:pt x="1579812" y="2782379"/>
-                  </a:lnTo>
-                  <a:lnTo>
-                    <a:pt x="1656445" y="2834822"/>
-                  </a:lnTo>
-                  <a:lnTo>
-                    <a:pt x="1733077" y="2883343"/>
-                  </a:lnTo>
-                  <a:lnTo>
-                    <a:pt x="1809710" y="2928236"/>
-                  </a:lnTo>
-                  <a:lnTo>
-                    <a:pt x="1886342" y="2969772"/>
-                  </a:lnTo>
-                  <a:lnTo>
-                    <a:pt x="1962975" y="3008203"/>
-                  </a:lnTo>
-                  <a:lnTo>
-                    <a:pt x="2039607" y="3043760"/>
-                  </a:lnTo>
-                  <a:lnTo>
-                    <a:pt x="2116240" y="3076659"/>
-                  </a:lnTo>
-                  <a:lnTo>
-                    <a:pt x="2192872" y="3107097"/>
-                  </a:lnTo>
-                  <a:lnTo>
-                    <a:pt x="2269505" y="3135260"/>
-                  </a:lnTo>
-                  <a:lnTo>
-                    <a:pt x="2346137" y="3161317"/>
-                  </a:lnTo>
-                  <a:lnTo>
-                    <a:pt x="2422770" y="3185426"/>
-                  </a:lnTo>
-                  <a:lnTo>
-                    <a:pt x="2499403" y="3207732"/>
-                  </a:lnTo>
-                  <a:lnTo>
-                    <a:pt x="2576035" y="3228370"/>
-                  </a:lnTo>
-                  <a:lnTo>
-                    <a:pt x="2652668" y="3247465"/>
-                  </a:lnTo>
-                  <a:lnTo>
-                    <a:pt x="2729300" y="3265132"/>
-                  </a:lnTo>
-                  <a:lnTo>
-                    <a:pt x="2805933" y="3281478"/>
-                  </a:lnTo>
-                  <a:lnTo>
-                    <a:pt x="2882565" y="3296602"/>
-                  </a:lnTo>
-                  <a:lnTo>
-                    <a:pt x="2959198" y="3310595"/>
-                  </a:lnTo>
-                  <a:lnTo>
-                    <a:pt x="3035830" y="3323542"/>
-                  </a:lnTo>
-                  <a:lnTo>
-                    <a:pt x="3112463" y="3335521"/>
-                  </a:lnTo>
-                  <a:lnTo>
-                    <a:pt x="3189096" y="3346604"/>
-                  </a:lnTo>
-                  <a:lnTo>
-                    <a:pt x="3265728" y="3356858"/>
-                  </a:lnTo>
-                  <a:lnTo>
-                    <a:pt x="3342361" y="3366346"/>
-                  </a:lnTo>
-                  <a:lnTo>
-                    <a:pt x="3418993" y="3375124"/>
-                  </a:lnTo>
-                  <a:lnTo>
-                    <a:pt x="3495626" y="3383246"/>
-                  </a:lnTo>
-                  <a:lnTo>
-                    <a:pt x="3572258" y="3390760"/>
-                  </a:lnTo>
-                  <a:lnTo>
-                    <a:pt x="3648891" y="3397713"/>
-                  </a:lnTo>
-                  <a:lnTo>
-                    <a:pt x="3725523" y="3404146"/>
-                  </a:lnTo>
-                  <a:lnTo>
-                    <a:pt x="3802156" y="3410098"/>
-                  </a:lnTo>
-                  <a:lnTo>
-                    <a:pt x="3878788" y="3415605"/>
-                  </a:lnTo>
-                  <a:lnTo>
-                    <a:pt x="3955421" y="3420700"/>
-                  </a:lnTo>
-                  <a:lnTo>
-                    <a:pt x="4032054" y="3425414"/>
-                  </a:lnTo>
-                  <a:lnTo>
-                    <a:pt x="4108686" y="3429775"/>
-                  </a:lnTo>
-                  <a:lnTo>
-                    <a:pt x="4185319" y="3433811"/>
-                  </a:lnTo>
-                  <a:lnTo>
-                    <a:pt x="4261951" y="3437545"/>
-                  </a:lnTo>
-                  <a:lnTo>
-                    <a:pt x="4338584" y="3440999"/>
-                  </a:lnTo>
-                  <a:lnTo>
-                    <a:pt x="4415216" y="3444196"/>
-                  </a:lnTo>
-                  <a:lnTo>
-                    <a:pt x="4491849" y="3447153"/>
-                  </a:lnTo>
-                  <a:lnTo>
-                    <a:pt x="4568481" y="3449889"/>
-                  </a:lnTo>
-                  <a:lnTo>
-                    <a:pt x="4645114" y="3452421"/>
-                  </a:lnTo>
-                  <a:lnTo>
-                    <a:pt x="4721747" y="3454763"/>
-                  </a:lnTo>
-                  <a:lnTo>
-                    <a:pt x="4798379" y="3456930"/>
-                  </a:lnTo>
-                  <a:lnTo>
-                    <a:pt x="4875012" y="3458935"/>
-                  </a:lnTo>
-                  <a:lnTo>
-                    <a:pt x="4951644" y="3460790"/>
-                  </a:lnTo>
-                  <a:lnTo>
-                    <a:pt x="5028277" y="3462507"/>
-                  </a:lnTo>
-                  <a:lnTo>
-                    <a:pt x="5104909" y="3464095"/>
-                  </a:lnTo>
-                  <a:lnTo>
-                    <a:pt x="5181542" y="3465564"/>
-                  </a:lnTo>
-                  <a:lnTo>
-                    <a:pt x="5258174" y="3466924"/>
-                  </a:lnTo>
-                  <a:lnTo>
-                    <a:pt x="5334807" y="3468182"/>
-                  </a:lnTo>
-                  <a:lnTo>
-                    <a:pt x="5411439" y="3469345"/>
+                    <a:pt x="44078" y="165055"/>
+                  </a:lnTo>
+                  <a:lnTo>
+                    <a:pt x="115700" y="413199"/>
+                  </a:lnTo>
+                  <a:lnTo>
+                    <a:pt x="187323" y="642789"/>
+                  </a:lnTo>
+                  <a:lnTo>
+                    <a:pt x="258945" y="855212"/>
+                  </a:lnTo>
+                  <a:lnTo>
+                    <a:pt x="330568" y="1051752"/>
+                  </a:lnTo>
+                  <a:lnTo>
+                    <a:pt x="402190" y="1233596"/>
+                  </a:lnTo>
+                  <a:lnTo>
+                    <a:pt x="473813" y="1401844"/>
+                  </a:lnTo>
+                  <a:lnTo>
+                    <a:pt x="545435" y="1557511"/>
+                  </a:lnTo>
+                  <a:lnTo>
+                    <a:pt x="617058" y="1701539"/>
+                  </a:lnTo>
+                  <a:lnTo>
+                    <a:pt x="688680" y="1834797"/>
+                  </a:lnTo>
+                  <a:lnTo>
+                    <a:pt x="760303" y="1958092"/>
+                  </a:lnTo>
+                  <a:lnTo>
+                    <a:pt x="831926" y="2072168"/>
+                  </a:lnTo>
+                  <a:lnTo>
+                    <a:pt x="903548" y="2177714"/>
+                  </a:lnTo>
+                  <a:lnTo>
+                    <a:pt x="975171" y="2275368"/>
+                  </a:lnTo>
+                  <a:lnTo>
+                    <a:pt x="1046793" y="2365721"/>
+                  </a:lnTo>
+                  <a:lnTo>
+                    <a:pt x="1118416" y="2449317"/>
+                  </a:lnTo>
+                  <a:lnTo>
+                    <a:pt x="1190038" y="2526663"/>
+                  </a:lnTo>
+                  <a:lnTo>
+                    <a:pt x="1261661" y="2598226"/>
+                  </a:lnTo>
+                  <a:lnTo>
+                    <a:pt x="1333283" y="2664438"/>
+                  </a:lnTo>
+                  <a:lnTo>
+                    <a:pt x="1404906" y="2725699"/>
+                  </a:lnTo>
+                  <a:lnTo>
+                    <a:pt x="1476528" y="2782379"/>
+                  </a:lnTo>
+                  <a:lnTo>
+                    <a:pt x="1548151" y="2834822"/>
+                  </a:lnTo>
+                  <a:lnTo>
+                    <a:pt x="1619773" y="2883343"/>
+                  </a:lnTo>
+                  <a:lnTo>
+                    <a:pt x="1691396" y="2928236"/>
+                  </a:lnTo>
+                  <a:lnTo>
+                    <a:pt x="1763018" y="2969772"/>
+                  </a:lnTo>
+                  <a:lnTo>
+                    <a:pt x="1834641" y="3008203"/>
+                  </a:lnTo>
+                  <a:lnTo>
+                    <a:pt x="1906263" y="3043760"/>
+                  </a:lnTo>
+                  <a:lnTo>
+                    <a:pt x="1977886" y="3076659"/>
+                  </a:lnTo>
+                  <a:lnTo>
+                    <a:pt x="2049508" y="3107097"/>
+                  </a:lnTo>
+                  <a:lnTo>
+                    <a:pt x="2121131" y="3135260"/>
+                  </a:lnTo>
+                  <a:lnTo>
+                    <a:pt x="2192754" y="3161317"/>
+                  </a:lnTo>
+                  <a:lnTo>
+                    <a:pt x="2264376" y="3185426"/>
+                  </a:lnTo>
+                  <a:lnTo>
+                    <a:pt x="2335999" y="3207732"/>
+                  </a:lnTo>
+                  <a:lnTo>
+                    <a:pt x="2407621" y="3228370"/>
+                  </a:lnTo>
+                  <a:lnTo>
+                    <a:pt x="2479244" y="3247465"/>
+                  </a:lnTo>
+                  <a:lnTo>
+                    <a:pt x="2550866" y="3265132"/>
+                  </a:lnTo>
+                  <a:lnTo>
+                    <a:pt x="2622489" y="3281478"/>
+                  </a:lnTo>
+                  <a:lnTo>
+                    <a:pt x="2694111" y="3296602"/>
+                  </a:lnTo>
+                  <a:lnTo>
+                    <a:pt x="2765734" y="3310595"/>
+                  </a:lnTo>
+                  <a:lnTo>
+                    <a:pt x="2837356" y="3323542"/>
+                  </a:lnTo>
+                  <a:lnTo>
+                    <a:pt x="2908979" y="3335521"/>
+                  </a:lnTo>
+                  <a:lnTo>
+                    <a:pt x="2980601" y="3346604"/>
+                  </a:lnTo>
+                  <a:lnTo>
+                    <a:pt x="3052224" y="3356858"/>
+                  </a:lnTo>
+                  <a:lnTo>
+                    <a:pt x="3123846" y="3366346"/>
+                  </a:lnTo>
+                  <a:lnTo>
+                    <a:pt x="3195469" y="3375124"/>
+                  </a:lnTo>
+                  <a:lnTo>
+                    <a:pt x="3267091" y="3383246"/>
+                  </a:lnTo>
+                  <a:lnTo>
+                    <a:pt x="3338714" y="3390760"/>
+                  </a:lnTo>
+                  <a:lnTo>
+                    <a:pt x="3410336" y="3397713"/>
+                  </a:lnTo>
+                  <a:lnTo>
+                    <a:pt x="3481959" y="3404146"/>
+                  </a:lnTo>
+                  <a:lnTo>
+                    <a:pt x="3553582" y="3410098"/>
+                  </a:lnTo>
+                  <a:lnTo>
+                    <a:pt x="3625204" y="3415605"/>
+                  </a:lnTo>
+                  <a:lnTo>
+                    <a:pt x="3696827" y="3420700"/>
+                  </a:lnTo>
+                  <a:lnTo>
+                    <a:pt x="3768449" y="3425414"/>
+                  </a:lnTo>
+                  <a:lnTo>
+                    <a:pt x="3840072" y="3429775"/>
+                  </a:lnTo>
+                  <a:lnTo>
+                    <a:pt x="3911694" y="3433811"/>
+                  </a:lnTo>
+                  <a:lnTo>
+                    <a:pt x="3983317" y="3437545"/>
+                  </a:lnTo>
+                  <a:lnTo>
+                    <a:pt x="4054939" y="3440999"/>
+                  </a:lnTo>
+                  <a:lnTo>
+                    <a:pt x="4126562" y="3444196"/>
+                  </a:lnTo>
+                  <a:lnTo>
+                    <a:pt x="4198184" y="3447153"/>
+                  </a:lnTo>
+                  <a:lnTo>
+                    <a:pt x="4269807" y="3449889"/>
+                  </a:lnTo>
+                  <a:lnTo>
+                    <a:pt x="4341429" y="3452421"/>
+                  </a:lnTo>
+                  <a:lnTo>
+                    <a:pt x="4413052" y="3454763"/>
+                  </a:lnTo>
+                  <a:lnTo>
+                    <a:pt x="4484674" y="3456930"/>
+                  </a:lnTo>
+                  <a:lnTo>
+                    <a:pt x="4556297" y="3458935"/>
+                  </a:lnTo>
+                  <a:lnTo>
+                    <a:pt x="4627919" y="3460790"/>
+                  </a:lnTo>
+                  <a:lnTo>
+                    <a:pt x="4699542" y="3462507"/>
+                  </a:lnTo>
+                  <a:lnTo>
+                    <a:pt x="4771164" y="3464095"/>
+                  </a:lnTo>
+                  <a:lnTo>
+                    <a:pt x="4842787" y="3465564"/>
+                  </a:lnTo>
+                  <a:lnTo>
+                    <a:pt x="4914410" y="3466924"/>
+                  </a:lnTo>
+                  <a:lnTo>
+                    <a:pt x="4986032" y="3468182"/>
+                  </a:lnTo>
+                  <a:lnTo>
+                    <a:pt x="5057655" y="3469345"/>
                   </a:lnTo>
                 </a:path>
               </a:pathLst>
@@ -4245,7 +4202,7 @@
         </p:sp>
         <p:sp>
           <p:nvSpPr>
-            <p:cNvPr id="25" name="pl25"/>
+            <p:cNvPr id="24" name="pl24"/>
             <p:cNvSpPr/>
             <p:nvPr/>
           </p:nvSpPr>
@@ -4288,13 +4245,13 @@
         </p:sp>
         <p:sp>
           <p:nvSpPr>
-            <p:cNvPr id="26" name="pl26"/>
+            <p:cNvPr id="25" name="pl25"/>
             <p:cNvSpPr/>
             <p:nvPr/>
           </p:nvSpPr>
           <p:spPr>
             <a:xfrm>
-              <a:off x="4224261" y="2073503"/>
+              <a:off x="4526955" y="2073503"/>
               <a:ext cx="0" cy="3649639"/>
             </a:xfrm>
             <a:custGeom>
@@ -4331,7 +4288,7 @@
         </p:sp>
         <p:sp>
           <p:nvSpPr>
-            <p:cNvPr id="27" name="tx27"/>
+            <p:cNvPr id="26" name="tx26"/>
             <p:cNvSpPr/>
             <p:nvPr/>
           </p:nvSpPr>
@@ -4377,7 +4334,7 @@
         </p:sp>
         <p:sp>
           <p:nvSpPr>
-            <p:cNvPr id="28" name="tx28"/>
+            <p:cNvPr id="27" name="tx27"/>
             <p:cNvSpPr/>
             <p:nvPr/>
           </p:nvSpPr>
@@ -4423,7 +4380,7 @@
         </p:sp>
         <p:sp>
           <p:nvSpPr>
-            <p:cNvPr id="29" name="tx29"/>
+            <p:cNvPr id="28" name="tx28"/>
             <p:cNvSpPr/>
             <p:nvPr/>
           </p:nvSpPr>
@@ -4469,7 +4426,7 @@
         </p:sp>
         <p:sp>
           <p:nvSpPr>
-            <p:cNvPr id="30" name="tx30"/>
+            <p:cNvPr id="29" name="tx29"/>
             <p:cNvSpPr/>
             <p:nvPr/>
           </p:nvSpPr>
@@ -4515,7 +4472,7 @@
         </p:sp>
         <p:sp>
           <p:nvSpPr>
-            <p:cNvPr id="31" name="tx31"/>
+            <p:cNvPr id="30" name="tx30"/>
             <p:cNvSpPr/>
             <p:nvPr/>
           </p:nvSpPr>
@@ -4561,14 +4518,14 @@
         </p:sp>
         <p:sp>
           <p:nvSpPr>
-            <p:cNvPr id="32" name="tx32"/>
+            <p:cNvPr id="31" name="tx31"/>
             <p:cNvSpPr/>
             <p:nvPr/>
           </p:nvSpPr>
           <p:spPr>
             <a:xfrm>
-              <a:off x="2423864" y="5785772"/>
-              <a:ext cx="155356" cy="80101"/>
+              <a:off x="2421884" y="5785772"/>
+              <a:ext cx="161574" cy="80101"/>
             </a:xfrm>
             <a:prstGeom prst="rect">
               <a:avLst/>
@@ -4600,21 +4557,21 @@
                   <a:latin typeface="Helvetica"/>
                   <a:cs typeface="Helvetica"/>
                 </a:rPr>
-                <a:t>0.8</a:t>
+                <a:t>-25</a:t>
               </a:r>
             </a:p>
           </p:txBody>
         </p:sp>
         <p:sp>
           <p:nvSpPr>
-            <p:cNvPr id="33" name="tx33"/>
+            <p:cNvPr id="32" name="tx32"/>
             <p:cNvSpPr/>
             <p:nvPr/>
           </p:nvSpPr>
           <p:spPr>
             <a:xfrm>
-              <a:off x="4196521" y="5785772"/>
-              <a:ext cx="155356" cy="80101"/>
+              <a:off x="4542539" y="5785772"/>
+              <a:ext cx="62179" cy="80101"/>
             </a:xfrm>
             <a:prstGeom prst="rect">
               <a:avLst/>
@@ -4646,21 +4603,21 @@
                   <a:latin typeface="Helvetica"/>
                   <a:cs typeface="Helvetica"/>
                 </a:rPr>
-                <a:t>1.0</a:t>
+                <a:t>0</a:t>
               </a:r>
             </a:p>
           </p:txBody>
         </p:sp>
         <p:sp>
           <p:nvSpPr>
-            <p:cNvPr id="34" name="tx34"/>
+            <p:cNvPr id="33" name="tx33"/>
             <p:cNvSpPr/>
             <p:nvPr/>
           </p:nvSpPr>
           <p:spPr>
             <a:xfrm>
-              <a:off x="5969179" y="5785772"/>
-              <a:ext cx="155356" cy="80101"/>
+              <a:off x="6582407" y="5785772"/>
+              <a:ext cx="124358" cy="80101"/>
             </a:xfrm>
             <a:prstGeom prst="rect">
               <a:avLst/>
@@ -4692,67 +4649,21 @@
                   <a:latin typeface="Helvetica"/>
                   <a:cs typeface="Helvetica"/>
                 </a:rPr>
-                <a:t>1.2</a:t>
+                <a:t>25</a:t>
               </a:r>
             </a:p>
           </p:txBody>
         </p:sp>
         <p:sp>
           <p:nvSpPr>
-            <p:cNvPr id="35" name="tx35"/>
+            <p:cNvPr id="34" name="tx34"/>
             <p:cNvSpPr/>
             <p:nvPr/>
           </p:nvSpPr>
           <p:spPr>
             <a:xfrm>
-              <a:off x="7741836" y="5785772"/>
-              <a:ext cx="155356" cy="80101"/>
-            </a:xfrm>
-            <a:prstGeom prst="rect">
-              <a:avLst/>
-            </a:prstGeom>
-            <a:noFill/>
-          </p:spPr>
-          <p:txBody>
-            <a:bodyPr lIns="0" rIns="0" tIns="0" bIns="0" anchorCtr="1" anchor="ctr" wrap="none"/>
-            <a:lstStyle/>
-            <a:p>
-              <a:pPr algn="l" marL="0" marR="0" indent="0">
-                <a:lnSpc>
-                  <a:spcPts val="880"/>
-                </a:lnSpc>
-                <a:spcBef>
-                  <a:spcPts val="0"/>
-                </a:spcBef>
-                <a:spcAft>
-                  <a:spcPts val="0"/>
-                </a:spcAft>
-              </a:pPr>
-              <a:r>
-                <a:rPr sz="880">
-                  <a:solidFill>
-                    <a:srgbClr val="4D4D4D">
-                      <a:alpha val="100000"/>
-                    </a:srgbClr>
-                  </a:solidFill>
-                  <a:latin typeface="Helvetica"/>
-                  <a:cs typeface="Helvetica"/>
-                </a:rPr>
-                <a:t>1.4</a:t>
-              </a:r>
-            </a:p>
-          </p:txBody>
-        </p:sp>
-        <p:sp>
-          <p:nvSpPr>
-            <p:cNvPr id="36" name="tx36"/>
-            <p:cNvSpPr/>
-            <p:nvPr/>
-          </p:nvSpPr>
-          <p:spPr>
-            <a:xfrm>
-              <a:off x="3879271" y="5925448"/>
-              <a:ext cx="1676186" cy="100218"/>
+              <a:off x="2928340" y="5925448"/>
+              <a:ext cx="3578047" cy="100218"/>
             </a:xfrm>
             <a:prstGeom prst="rect">
               <a:avLst/>
@@ -4784,14 +4695,14 @@
                   <a:latin typeface="Helvetica"/>
                   <a:cs typeface="Helvetica"/>
                 </a:rPr>
-                <a:t>CKD-EPI Cr-Cys / CG ratio</a:t>
+                <a:t>eGFR difference (%): 100 × (CKD-EPI Cr-Cys − CG) / CG</a:t>
               </a:r>
             </a:p>
           </p:txBody>
         </p:sp>
         <p:sp>
           <p:nvSpPr>
-            <p:cNvPr id="37" name="tx37"/>
+            <p:cNvPr id="35" name="tx35"/>
             <p:cNvSpPr/>
             <p:nvPr/>
           </p:nvSpPr>
@@ -4837,14 +4748,14 @@
         </p:sp>
         <p:sp>
           <p:nvSpPr>
-            <p:cNvPr id="38" name="tx38"/>
+            <p:cNvPr id="36" name="tx36"/>
             <p:cNvSpPr/>
             <p:nvPr/>
           </p:nvSpPr>
           <p:spPr>
             <a:xfrm>
               <a:off x="817517" y="1896563"/>
-              <a:ext cx="6842729" cy="82021"/>
+              <a:ext cx="6994977" cy="82021"/>
             </a:xfrm>
             <a:prstGeom prst="rect">
               <a:avLst/>
@@ -4876,14 +4787,14 @@
                   <a:latin typeface="Helvetica"/>
                   <a:cs typeface="Helvetica"/>
                 </a:rPr>
-                <a:t>HR per 0.1 ratio decline: 2.46 (1.65-3.65), p_Bonf = &lt;0.001 (n = 6)  |  per IQR decline (Δ = 0.30): 14.72 (4.51-48.03)  |  IQR: [0.85, 1.15]</a:t>
+                <a:t>HR per 10 % decline: 2.46 (1.65-3.65), p_Bonf = &lt;0.001 (n = 6)  |  per IQR decline (Δ = 29.9 %): 14.72 (4.51-48.03)  |  IQR: [-15.0, 14.9] %</a:t>
               </a:r>
             </a:p>
           </p:txBody>
         </p:sp>
         <p:sp>
           <p:nvSpPr>
-            <p:cNvPr id="39" name="tx39"/>
+            <p:cNvPr id="37" name="tx37"/>
             <p:cNvSpPr/>
             <p:nvPr/>
           </p:nvSpPr>

--- a/docs/pptx/carbo/jx-carbo-cox-linear-ratio-death.pptx
+++ b/docs/pptx/carbo/jx-carbo-cox-linear-ratio-death.pptx
@@ -2265,27 +2265,62 @@
         </p:sp>
         <p:sp>
           <p:nvSpPr>
-            <p:cNvPr id="4" name="pl4"/>
+            <p:cNvPr id="4" name="rc4"/>
             <p:cNvSpPr/>
             <p:nvPr/>
           </p:nvSpPr>
           <p:spPr>
             <a:xfrm>
-              <a:off x="817517" y="5142518"/>
-              <a:ext cx="7799693" cy="0"/>
+              <a:off x="457200" y="1600200"/>
+              <a:ext cx="8229600" cy="4525962"/>
+            </a:xfrm>
+            <a:prstGeom prst="rect">
+              <a:avLst/>
+            </a:prstGeom>
+            <a:solidFill>
+              <a:srgbClr val="FFFFFF">
+                <a:alpha val="100000"/>
+              </a:srgbClr>
+            </a:solidFill>
+            <a:ln w="13550" cap="rnd">
+              <a:solidFill>
+                <a:srgbClr val="FFFFFF">
+                  <a:alpha val="100000"/>
+                </a:srgbClr>
+              </a:solidFill>
+              <a:prstDash val="solid"/>
+              <a:round/>
+            </a:ln>
+          </p:spPr>
+          <p:txBody>
+            <a:bodyPr/>
+            <a:lstStyle/>
+            <a:p/>
+          </p:txBody>
+        </p:sp>
+        <p:sp>
+          <p:nvSpPr>
+            <p:cNvPr id="5" name="pl5"/>
+            <p:cNvSpPr/>
+            <p:nvPr/>
+          </p:nvSpPr>
+          <p:spPr>
+            <a:xfrm>
+              <a:off x="887106" y="3250627"/>
+              <a:ext cx="7660515" cy="0"/>
             </a:xfrm>
             <a:custGeom>
               <a:avLst/>
               <a:pathLst>
-                <a:path w="7799693" h="0">
+                <a:path w="7660515" h="0">
                   <a:moveTo>
                     <a:pt x="0" y="0"/>
                   </a:moveTo>
                   <a:lnTo>
-                    <a:pt x="7799693" y="0"/>
-                  </a:lnTo>
-                  <a:lnTo>
-                    <a:pt x="7799693" y="0"/>
+                    <a:pt x="7660515" y="0"/>
+                  </a:lnTo>
+                  <a:lnTo>
+                    <a:pt x="7660515" y="0"/>
                   </a:lnTo>
                 </a:path>
               </a:pathLst>
@@ -2308,27 +2343,27 @@
         </p:sp>
         <p:sp>
           <p:nvSpPr>
-            <p:cNvPr id="5" name="pl5"/>
+            <p:cNvPr id="6" name="pl6"/>
             <p:cNvSpPr/>
             <p:nvPr/>
           </p:nvSpPr>
           <p:spPr>
             <a:xfrm>
-              <a:off x="817517" y="4313054"/>
-              <a:ext cx="7799693" cy="0"/>
+              <a:off x="887106" y="2951293"/>
+              <a:ext cx="7660515" cy="0"/>
             </a:xfrm>
             <a:custGeom>
               <a:avLst/>
               <a:pathLst>
-                <a:path w="7799693" h="0">
+                <a:path w="7660515" h="0">
                   <a:moveTo>
                     <a:pt x="0" y="0"/>
                   </a:moveTo>
                   <a:lnTo>
-                    <a:pt x="7799693" y="0"/>
-                  </a:lnTo>
-                  <a:lnTo>
-                    <a:pt x="7799693" y="0"/>
+                    <a:pt x="7660515" y="0"/>
+                  </a:lnTo>
+                  <a:lnTo>
+                    <a:pt x="7660515" y="0"/>
                   </a:lnTo>
                 </a:path>
               </a:pathLst>
@@ -2351,27 +2386,27 @@
         </p:sp>
         <p:sp>
           <p:nvSpPr>
-            <p:cNvPr id="6" name="pl6"/>
+            <p:cNvPr id="7" name="pl7"/>
             <p:cNvSpPr/>
             <p:nvPr/>
           </p:nvSpPr>
           <p:spPr>
             <a:xfrm>
-              <a:off x="817517" y="3483591"/>
-              <a:ext cx="7799693" cy="0"/>
+              <a:off x="887106" y="2651959"/>
+              <a:ext cx="7660515" cy="0"/>
             </a:xfrm>
             <a:custGeom>
               <a:avLst/>
               <a:pathLst>
-                <a:path w="7799693" h="0">
+                <a:path w="7660515" h="0">
                   <a:moveTo>
                     <a:pt x="0" y="0"/>
                   </a:moveTo>
                   <a:lnTo>
-                    <a:pt x="7799693" y="0"/>
-                  </a:lnTo>
-                  <a:lnTo>
-                    <a:pt x="7799693" y="0"/>
+                    <a:pt x="7660515" y="0"/>
+                  </a:lnTo>
+                  <a:lnTo>
+                    <a:pt x="7660515" y="0"/>
                   </a:lnTo>
                 </a:path>
               </a:pathLst>
@@ -2394,27 +2429,27 @@
         </p:sp>
         <p:sp>
           <p:nvSpPr>
-            <p:cNvPr id="7" name="pl7"/>
+            <p:cNvPr id="8" name="pl8"/>
             <p:cNvSpPr/>
             <p:nvPr/>
           </p:nvSpPr>
           <p:spPr>
             <a:xfrm>
-              <a:off x="817517" y="2654127"/>
-              <a:ext cx="7799693" cy="0"/>
+              <a:off x="887106" y="2352625"/>
+              <a:ext cx="7660515" cy="0"/>
             </a:xfrm>
             <a:custGeom>
               <a:avLst/>
               <a:pathLst>
-                <a:path w="7799693" h="0">
+                <a:path w="7660515" h="0">
                   <a:moveTo>
                     <a:pt x="0" y="0"/>
                   </a:moveTo>
                   <a:lnTo>
-                    <a:pt x="7799693" y="0"/>
-                  </a:lnTo>
-                  <a:lnTo>
-                    <a:pt x="7799693" y="0"/>
+                    <a:pt x="7660515" y="0"/>
+                  </a:lnTo>
+                  <a:lnTo>
+                    <a:pt x="7660515" y="0"/>
                   </a:lnTo>
                 </a:path>
               </a:pathLst>
@@ -2437,21 +2472,21 @@
         </p:sp>
         <p:sp>
           <p:nvSpPr>
-            <p:cNvPr id="8" name="pl8"/>
+            <p:cNvPr id="9" name="pl9"/>
             <p:cNvSpPr/>
             <p:nvPr/>
           </p:nvSpPr>
           <p:spPr>
             <a:xfrm>
-              <a:off x="1467192" y="2073503"/>
-              <a:ext cx="0" cy="3649639"/>
+              <a:off x="1525188" y="2143092"/>
+              <a:ext cx="0" cy="1317069"/>
             </a:xfrm>
             <a:custGeom>
               <a:avLst/>
               <a:pathLst>
-                <a:path w="0" h="3649639">
+                <a:path w="0" h="1317069">
                   <a:moveTo>
-                    <a:pt x="0" y="3649639"/>
+                    <a:pt x="0" y="1317069"/>
                   </a:moveTo>
                   <a:lnTo>
                     <a:pt x="0" y="0"/>
@@ -2480,21 +2515,21 @@
         </p:sp>
         <p:sp>
           <p:nvSpPr>
-            <p:cNvPr id="9" name="pl9"/>
+            <p:cNvPr id="10" name="pl10"/>
             <p:cNvSpPr/>
             <p:nvPr/>
           </p:nvSpPr>
           <p:spPr>
             <a:xfrm>
-              <a:off x="3538150" y="2073503"/>
-              <a:ext cx="0" cy="3649639"/>
+              <a:off x="3559192" y="2143092"/>
+              <a:ext cx="0" cy="1317069"/>
             </a:xfrm>
             <a:custGeom>
               <a:avLst/>
               <a:pathLst>
-                <a:path w="0" h="3649639">
+                <a:path w="0" h="1317069">
                   <a:moveTo>
-                    <a:pt x="0" y="3649639"/>
+                    <a:pt x="0" y="1317069"/>
                   </a:moveTo>
                   <a:lnTo>
                     <a:pt x="0" y="0"/>
@@ -2523,21 +2558,21 @@
         </p:sp>
         <p:sp>
           <p:nvSpPr>
-            <p:cNvPr id="10" name="pl10"/>
+            <p:cNvPr id="11" name="pl11"/>
             <p:cNvSpPr/>
             <p:nvPr/>
           </p:nvSpPr>
           <p:spPr>
             <a:xfrm>
-              <a:off x="5609107" y="2073503"/>
-              <a:ext cx="0" cy="3649639"/>
+              <a:off x="5593195" y="2143092"/>
+              <a:ext cx="0" cy="1317069"/>
             </a:xfrm>
             <a:custGeom>
               <a:avLst/>
               <a:pathLst>
-                <a:path w="0" h="3649639">
+                <a:path w="0" h="1317069">
                   <a:moveTo>
-                    <a:pt x="0" y="3649639"/>
+                    <a:pt x="0" y="1317069"/>
                   </a:moveTo>
                   <a:lnTo>
                     <a:pt x="0" y="0"/>
@@ -2566,21 +2601,21 @@
         </p:sp>
         <p:sp>
           <p:nvSpPr>
-            <p:cNvPr id="11" name="pl11"/>
+            <p:cNvPr id="12" name="pl12"/>
             <p:cNvSpPr/>
             <p:nvPr/>
           </p:nvSpPr>
           <p:spPr>
             <a:xfrm>
-              <a:off x="7680065" y="2073503"/>
-              <a:ext cx="0" cy="3649639"/>
+              <a:off x="7627198" y="2143092"/>
+              <a:ext cx="0" cy="1317069"/>
             </a:xfrm>
             <a:custGeom>
               <a:avLst/>
               <a:pathLst>
-                <a:path w="0" h="3649639">
+                <a:path w="0" h="1317069">
                   <a:moveTo>
-                    <a:pt x="0" y="3649639"/>
+                    <a:pt x="0" y="1317069"/>
                   </a:moveTo>
                   <a:lnTo>
                     <a:pt x="0" y="0"/>
@@ -2609,27 +2644,27 @@
         </p:sp>
         <p:sp>
           <p:nvSpPr>
-            <p:cNvPr id="12" name="pl12"/>
+            <p:cNvPr id="13" name="pl13"/>
             <p:cNvSpPr/>
             <p:nvPr/>
           </p:nvSpPr>
           <p:spPr>
             <a:xfrm>
-              <a:off x="817517" y="5557249"/>
-              <a:ext cx="7799693" cy="0"/>
+              <a:off x="887106" y="3400294"/>
+              <a:ext cx="7660515" cy="0"/>
             </a:xfrm>
             <a:custGeom>
               <a:avLst/>
               <a:pathLst>
-                <a:path w="7799693" h="0">
+                <a:path w="7660515" h="0">
                   <a:moveTo>
                     <a:pt x="0" y="0"/>
                   </a:moveTo>
                   <a:lnTo>
-                    <a:pt x="7799693" y="0"/>
-                  </a:lnTo>
-                  <a:lnTo>
-                    <a:pt x="7799693" y="0"/>
+                    <a:pt x="7660515" y="0"/>
+                  </a:lnTo>
+                  <a:lnTo>
+                    <a:pt x="7660515" y="0"/>
                   </a:lnTo>
                 </a:path>
               </a:pathLst>
@@ -2652,27 +2687,27 @@
         </p:sp>
         <p:sp>
           <p:nvSpPr>
-            <p:cNvPr id="13" name="pl13"/>
+            <p:cNvPr id="14" name="pl14"/>
             <p:cNvSpPr/>
             <p:nvPr/>
           </p:nvSpPr>
           <p:spPr>
             <a:xfrm>
-              <a:off x="817517" y="4727786"/>
-              <a:ext cx="7799693" cy="0"/>
+              <a:off x="887106" y="3100960"/>
+              <a:ext cx="7660515" cy="0"/>
             </a:xfrm>
             <a:custGeom>
               <a:avLst/>
               <a:pathLst>
-                <a:path w="7799693" h="0">
+                <a:path w="7660515" h="0">
                   <a:moveTo>
                     <a:pt x="0" y="0"/>
                   </a:moveTo>
                   <a:lnTo>
-                    <a:pt x="7799693" y="0"/>
-                  </a:lnTo>
-                  <a:lnTo>
-                    <a:pt x="7799693" y="0"/>
+                    <a:pt x="7660515" y="0"/>
+                  </a:lnTo>
+                  <a:lnTo>
+                    <a:pt x="7660515" y="0"/>
                   </a:lnTo>
                 </a:path>
               </a:pathLst>
@@ -2695,27 +2730,27 @@
         </p:sp>
         <p:sp>
           <p:nvSpPr>
-            <p:cNvPr id="14" name="pl14"/>
+            <p:cNvPr id="15" name="pl15"/>
             <p:cNvSpPr/>
             <p:nvPr/>
           </p:nvSpPr>
           <p:spPr>
             <a:xfrm>
-              <a:off x="817517" y="3898322"/>
-              <a:ext cx="7799693" cy="0"/>
+              <a:off x="887106" y="2801626"/>
+              <a:ext cx="7660515" cy="0"/>
             </a:xfrm>
             <a:custGeom>
               <a:avLst/>
               <a:pathLst>
-                <a:path w="7799693" h="0">
+                <a:path w="7660515" h="0">
                   <a:moveTo>
                     <a:pt x="0" y="0"/>
                   </a:moveTo>
                   <a:lnTo>
-                    <a:pt x="7799693" y="0"/>
-                  </a:lnTo>
-                  <a:lnTo>
-                    <a:pt x="7799693" y="0"/>
+                    <a:pt x="7660515" y="0"/>
+                  </a:lnTo>
+                  <a:lnTo>
+                    <a:pt x="7660515" y="0"/>
                   </a:lnTo>
                 </a:path>
               </a:pathLst>
@@ -2738,27 +2773,27 @@
         </p:sp>
         <p:sp>
           <p:nvSpPr>
-            <p:cNvPr id="15" name="pl15"/>
+            <p:cNvPr id="16" name="pl16"/>
             <p:cNvSpPr/>
             <p:nvPr/>
           </p:nvSpPr>
           <p:spPr>
             <a:xfrm>
-              <a:off x="817517" y="3068859"/>
-              <a:ext cx="7799693" cy="0"/>
+              <a:off x="887106" y="2502292"/>
+              <a:ext cx="7660515" cy="0"/>
             </a:xfrm>
             <a:custGeom>
               <a:avLst/>
               <a:pathLst>
-                <a:path w="7799693" h="0">
+                <a:path w="7660515" h="0">
                   <a:moveTo>
                     <a:pt x="0" y="0"/>
                   </a:moveTo>
                   <a:lnTo>
-                    <a:pt x="7799693" y="0"/>
-                  </a:lnTo>
-                  <a:lnTo>
-                    <a:pt x="7799693" y="0"/>
+                    <a:pt x="7660515" y="0"/>
+                  </a:lnTo>
+                  <a:lnTo>
+                    <a:pt x="7660515" y="0"/>
                   </a:lnTo>
                 </a:path>
               </a:pathLst>
@@ -2781,27 +2816,27 @@
         </p:sp>
         <p:sp>
           <p:nvSpPr>
-            <p:cNvPr id="16" name="pl16"/>
+            <p:cNvPr id="17" name="pl17"/>
             <p:cNvSpPr/>
             <p:nvPr/>
           </p:nvSpPr>
           <p:spPr>
             <a:xfrm>
-              <a:off x="817517" y="2239395"/>
-              <a:ext cx="7799693" cy="0"/>
+              <a:off x="887106" y="2202958"/>
+              <a:ext cx="7660515" cy="0"/>
             </a:xfrm>
             <a:custGeom>
               <a:avLst/>
               <a:pathLst>
-                <a:path w="7799693" h="0">
+                <a:path w="7660515" h="0">
                   <a:moveTo>
                     <a:pt x="0" y="0"/>
                   </a:moveTo>
                   <a:lnTo>
-                    <a:pt x="7799693" y="0"/>
-                  </a:lnTo>
-                  <a:lnTo>
-                    <a:pt x="7799693" y="0"/>
+                    <a:pt x="7660515" y="0"/>
+                  </a:lnTo>
+                  <a:lnTo>
+                    <a:pt x="7660515" y="0"/>
                   </a:lnTo>
                 </a:path>
               </a:pathLst>
@@ -2824,21 +2859,21 @@
         </p:sp>
         <p:sp>
           <p:nvSpPr>
-            <p:cNvPr id="17" name="pl17"/>
+            <p:cNvPr id="18" name="pl18"/>
             <p:cNvSpPr/>
             <p:nvPr/>
           </p:nvSpPr>
           <p:spPr>
             <a:xfrm>
-              <a:off x="2502671" y="2073503"/>
-              <a:ext cx="0" cy="3649639"/>
+              <a:off x="2542190" y="2143092"/>
+              <a:ext cx="0" cy="1317069"/>
             </a:xfrm>
             <a:custGeom>
               <a:avLst/>
               <a:pathLst>
-                <a:path w="0" h="3649639">
+                <a:path w="0" h="1317069">
                   <a:moveTo>
-                    <a:pt x="0" y="3649639"/>
+                    <a:pt x="0" y="1317069"/>
                   </a:moveTo>
                   <a:lnTo>
                     <a:pt x="0" y="0"/>
@@ -2867,21 +2902,21 @@
         </p:sp>
         <p:sp>
           <p:nvSpPr>
-            <p:cNvPr id="18" name="pl18"/>
+            <p:cNvPr id="19" name="pl19"/>
             <p:cNvSpPr/>
             <p:nvPr/>
           </p:nvSpPr>
           <p:spPr>
             <a:xfrm>
-              <a:off x="4573628" y="2073503"/>
-              <a:ext cx="0" cy="3649639"/>
+              <a:off x="4576193" y="2143092"/>
+              <a:ext cx="0" cy="1317069"/>
             </a:xfrm>
             <a:custGeom>
               <a:avLst/>
               <a:pathLst>
-                <a:path w="0" h="3649639">
+                <a:path w="0" h="1317069">
                   <a:moveTo>
-                    <a:pt x="0" y="3649639"/>
+                    <a:pt x="0" y="1317069"/>
                   </a:moveTo>
                   <a:lnTo>
                     <a:pt x="0" y="0"/>
@@ -2910,21 +2945,21 @@
         </p:sp>
         <p:sp>
           <p:nvSpPr>
-            <p:cNvPr id="19" name="pl19"/>
+            <p:cNvPr id="20" name="pl20"/>
             <p:cNvSpPr/>
             <p:nvPr/>
           </p:nvSpPr>
           <p:spPr>
             <a:xfrm>
-              <a:off x="6644586" y="2073503"/>
-              <a:ext cx="0" cy="3649639"/>
+              <a:off x="6610197" y="2143092"/>
+              <a:ext cx="0" cy="1317069"/>
             </a:xfrm>
             <a:custGeom>
               <a:avLst/>
               <a:pathLst>
-                <a:path w="0" h="3649639">
+                <a:path w="0" h="1317069">
                   <a:moveTo>
-                    <a:pt x="0" y="3649639"/>
+                    <a:pt x="0" y="1317069"/>
                   </a:moveTo>
                   <a:lnTo>
                     <a:pt x="0" y="0"/>
@@ -2953,474 +2988,474 @@
         </p:sp>
         <p:sp>
           <p:nvSpPr>
-            <p:cNvPr id="20" name="pg20"/>
+            <p:cNvPr id="21" name="pg21"/>
             <p:cNvSpPr/>
             <p:nvPr/>
           </p:nvSpPr>
           <p:spPr>
             <a:xfrm>
-              <a:off x="2165756" y="2073503"/>
-              <a:ext cx="6096922" cy="3481326"/>
+              <a:off x="2211287" y="2143092"/>
+              <a:ext cx="5988129" cy="1256328"/>
             </a:xfrm>
             <a:custGeom>
               <a:avLst/>
               <a:pathLst>
-                <a:path w="6096922" h="3481326">
+                <a:path w="5988129" h="1256328">
                   <a:moveTo>
-                    <a:pt x="1442746" y="0"/>
+                    <a:pt x="1417001" y="0"/>
                   </a:moveTo>
                   <a:lnTo>
-                    <a:pt x="1513081" y="362878"/>
-                  </a:lnTo>
-                  <a:lnTo>
-                    <a:pt x="1584703" y="693279"/>
-                  </a:lnTo>
-                  <a:lnTo>
-                    <a:pt x="1656326" y="988700"/>
-                  </a:lnTo>
-                  <a:lnTo>
-                    <a:pt x="1727948" y="1252846"/>
-                  </a:lnTo>
-                  <a:lnTo>
-                    <a:pt x="1799571" y="1489028"/>
-                  </a:lnTo>
-                  <a:lnTo>
-                    <a:pt x="1871193" y="1700205"/>
-                  </a:lnTo>
-                  <a:lnTo>
-                    <a:pt x="1942816" y="1889025"/>
-                  </a:lnTo>
-                  <a:lnTo>
-                    <a:pt x="2014438" y="2057855"/>
-                  </a:lnTo>
-                  <a:lnTo>
-                    <a:pt x="2086061" y="2208812"/>
-                  </a:lnTo>
-                  <a:lnTo>
-                    <a:pt x="2157683" y="2343787"/>
-                  </a:lnTo>
-                  <a:lnTo>
-                    <a:pt x="2229306" y="2464472"/>
-                  </a:lnTo>
-                  <a:lnTo>
-                    <a:pt x="2300929" y="2572381"/>
-                  </a:lnTo>
-                  <a:lnTo>
-                    <a:pt x="2372551" y="2659986"/>
-                  </a:lnTo>
-                  <a:lnTo>
-                    <a:pt x="2444174" y="2695073"/>
-                  </a:lnTo>
-                  <a:lnTo>
-                    <a:pt x="2515796" y="2728665"/>
-                  </a:lnTo>
-                  <a:lnTo>
-                    <a:pt x="2587419" y="2760827"/>
-                  </a:lnTo>
-                  <a:lnTo>
-                    <a:pt x="2659041" y="2791619"/>
-                  </a:lnTo>
-                  <a:lnTo>
-                    <a:pt x="2730664" y="2821099"/>
-                  </a:lnTo>
-                  <a:lnTo>
-                    <a:pt x="2802286" y="2849324"/>
-                  </a:lnTo>
-                  <a:lnTo>
-                    <a:pt x="2873909" y="2876346"/>
-                  </a:lnTo>
-                  <a:lnTo>
-                    <a:pt x="2945531" y="2902218"/>
-                  </a:lnTo>
-                  <a:lnTo>
-                    <a:pt x="3017154" y="2926987"/>
-                  </a:lnTo>
-                  <a:lnTo>
-                    <a:pt x="3088776" y="2950701"/>
-                  </a:lnTo>
-                  <a:lnTo>
-                    <a:pt x="3160399" y="2973406"/>
-                  </a:lnTo>
-                  <a:lnTo>
-                    <a:pt x="3232021" y="2995143"/>
-                  </a:lnTo>
-                  <a:lnTo>
-                    <a:pt x="3303644" y="3015954"/>
-                  </a:lnTo>
-                  <a:lnTo>
-                    <a:pt x="3375266" y="3035879"/>
-                  </a:lnTo>
-                  <a:lnTo>
-                    <a:pt x="3446889" y="3054956"/>
-                  </a:lnTo>
-                  <a:lnTo>
-                    <a:pt x="3518511" y="3073219"/>
-                  </a:lnTo>
-                  <a:lnTo>
-                    <a:pt x="3590134" y="3090705"/>
-                  </a:lnTo>
-                  <a:lnTo>
-                    <a:pt x="3661757" y="3107446"/>
-                  </a:lnTo>
-                  <a:lnTo>
-                    <a:pt x="3733379" y="3123474"/>
-                  </a:lnTo>
-                  <a:lnTo>
-                    <a:pt x="3805002" y="3138820"/>
-                  </a:lnTo>
-                  <a:lnTo>
-                    <a:pt x="3876624" y="3153511"/>
-                  </a:lnTo>
-                  <a:lnTo>
-                    <a:pt x="3948247" y="3167577"/>
-                  </a:lnTo>
-                  <a:lnTo>
-                    <a:pt x="4019869" y="3181044"/>
-                  </a:lnTo>
-                  <a:lnTo>
-                    <a:pt x="4091492" y="3193937"/>
-                  </a:lnTo>
-                  <a:lnTo>
-                    <a:pt x="4163114" y="3206281"/>
-                  </a:lnTo>
-                  <a:lnTo>
-                    <a:pt x="4234737" y="3218100"/>
-                  </a:lnTo>
-                  <a:lnTo>
-                    <a:pt x="4306359" y="3229414"/>
-                  </a:lnTo>
-                  <a:lnTo>
-                    <a:pt x="4377982" y="3240247"/>
-                  </a:lnTo>
-                  <a:lnTo>
-                    <a:pt x="4449604" y="3250619"/>
-                  </a:lnTo>
-                  <a:lnTo>
-                    <a:pt x="4521227" y="3260549"/>
-                  </a:lnTo>
-                  <a:lnTo>
-                    <a:pt x="4592849" y="3270056"/>
-                  </a:lnTo>
-                  <a:lnTo>
-                    <a:pt x="4664472" y="3279157"/>
-                  </a:lnTo>
-                  <a:lnTo>
-                    <a:pt x="4736094" y="3287872"/>
-                  </a:lnTo>
-                  <a:lnTo>
-                    <a:pt x="4807717" y="3296215"/>
-                  </a:lnTo>
-                  <a:lnTo>
-                    <a:pt x="4879339" y="3304202"/>
-                  </a:lnTo>
-                  <a:lnTo>
-                    <a:pt x="4950962" y="3311850"/>
-                  </a:lnTo>
-                  <a:lnTo>
-                    <a:pt x="5022585" y="3319171"/>
-                  </a:lnTo>
-                  <a:lnTo>
-                    <a:pt x="5094207" y="3326181"/>
-                  </a:lnTo>
-                  <a:lnTo>
-                    <a:pt x="5165830" y="3332893"/>
-                  </a:lnTo>
-                  <a:lnTo>
-                    <a:pt x="5237452" y="3339318"/>
-                  </a:lnTo>
-                  <a:lnTo>
-                    <a:pt x="5309075" y="3345470"/>
-                  </a:lnTo>
-                  <a:lnTo>
-                    <a:pt x="5380697" y="3351359"/>
-                  </a:lnTo>
-                  <a:lnTo>
-                    <a:pt x="5452320" y="3356998"/>
-                  </a:lnTo>
-                  <a:lnTo>
-                    <a:pt x="5523942" y="3362397"/>
-                  </a:lnTo>
-                  <a:lnTo>
-                    <a:pt x="5595565" y="3367566"/>
-                  </a:lnTo>
-                  <a:lnTo>
-                    <a:pt x="5667187" y="3372514"/>
-                  </a:lnTo>
-                  <a:lnTo>
-                    <a:pt x="5738810" y="3377252"/>
-                  </a:lnTo>
-                  <a:lnTo>
-                    <a:pt x="5810432" y="3381788"/>
-                  </a:lnTo>
-                  <a:lnTo>
-                    <a:pt x="5882055" y="3386131"/>
-                  </a:lnTo>
-                  <a:lnTo>
-                    <a:pt x="5953677" y="3390289"/>
-                  </a:lnTo>
-                  <a:lnTo>
-                    <a:pt x="6025300" y="3394269"/>
-                  </a:lnTo>
-                  <a:lnTo>
-                    <a:pt x="6096922" y="3398080"/>
-                  </a:lnTo>
-                  <a:lnTo>
-                    <a:pt x="6096922" y="3481326"/>
-                  </a:lnTo>
-                  <a:lnTo>
-                    <a:pt x="6025300" y="3481039"/>
-                  </a:lnTo>
-                  <a:lnTo>
-                    <a:pt x="5953677" y="3480718"/>
-                  </a:lnTo>
-                  <a:lnTo>
-                    <a:pt x="5882055" y="3480360"/>
-                  </a:lnTo>
-                  <a:lnTo>
-                    <a:pt x="5810432" y="3479959"/>
-                  </a:lnTo>
-                  <a:lnTo>
-                    <a:pt x="5738810" y="3479510"/>
-                  </a:lnTo>
-                  <a:lnTo>
-                    <a:pt x="5667187" y="3479009"/>
-                  </a:lnTo>
-                  <a:lnTo>
-                    <a:pt x="5595565" y="3478448"/>
-                  </a:lnTo>
-                  <a:lnTo>
-                    <a:pt x="5523942" y="3477820"/>
-                  </a:lnTo>
-                  <a:lnTo>
-                    <a:pt x="5452320" y="3477119"/>
-                  </a:lnTo>
-                  <a:lnTo>
-                    <a:pt x="5380697" y="3476334"/>
-                  </a:lnTo>
-                  <a:lnTo>
-                    <a:pt x="5309075" y="3475456"/>
-                  </a:lnTo>
-                  <a:lnTo>
-                    <a:pt x="5237452" y="3474475"/>
-                  </a:lnTo>
-                  <a:lnTo>
-                    <a:pt x="5165830" y="3473377"/>
-                  </a:lnTo>
-                  <a:lnTo>
-                    <a:pt x="5094207" y="3472149"/>
-                  </a:lnTo>
-                  <a:lnTo>
-                    <a:pt x="5022585" y="3470776"/>
-                  </a:lnTo>
-                  <a:lnTo>
-                    <a:pt x="4950962" y="3469240"/>
-                  </a:lnTo>
-                  <a:lnTo>
-                    <a:pt x="4879339" y="3467523"/>
-                  </a:lnTo>
-                  <a:lnTo>
-                    <a:pt x="4807717" y="3465602"/>
-                  </a:lnTo>
-                  <a:lnTo>
-                    <a:pt x="4736094" y="3463453"/>
-                  </a:lnTo>
-                  <a:lnTo>
-                    <a:pt x="4664472" y="3461051"/>
-                  </a:lnTo>
-                  <a:lnTo>
-                    <a:pt x="4592849" y="3458363"/>
-                  </a:lnTo>
-                  <a:lnTo>
-                    <a:pt x="4521227" y="3455358"/>
-                  </a:lnTo>
-                  <a:lnTo>
-                    <a:pt x="4449604" y="3451997"/>
-                  </a:lnTo>
-                  <a:lnTo>
-                    <a:pt x="4377982" y="3448237"/>
-                  </a:lnTo>
-                  <a:lnTo>
-                    <a:pt x="4306359" y="3444033"/>
-                  </a:lnTo>
-                  <a:lnTo>
-                    <a:pt x="4234737" y="3439331"/>
-                  </a:lnTo>
-                  <a:lnTo>
-                    <a:pt x="4163114" y="3434072"/>
-                  </a:lnTo>
-                  <a:lnTo>
-                    <a:pt x="4091492" y="3428190"/>
-                  </a:lnTo>
-                  <a:lnTo>
-                    <a:pt x="4019869" y="3421612"/>
-                  </a:lnTo>
-                  <a:lnTo>
-                    <a:pt x="3948247" y="3414255"/>
-                  </a:lnTo>
-                  <a:lnTo>
-                    <a:pt x="3876624" y="3406027"/>
-                  </a:lnTo>
-                  <a:lnTo>
-                    <a:pt x="3805002" y="3396825"/>
-                  </a:lnTo>
-                  <a:lnTo>
-                    <a:pt x="3733379" y="3386534"/>
-                  </a:lnTo>
-                  <a:lnTo>
-                    <a:pt x="3661757" y="3375023"/>
-                  </a:lnTo>
-                  <a:lnTo>
-                    <a:pt x="3590134" y="3362150"/>
-                  </a:lnTo>
-                  <a:lnTo>
-                    <a:pt x="3518511" y="3347753"/>
-                  </a:lnTo>
-                  <a:lnTo>
-                    <a:pt x="3446889" y="3331650"/>
-                  </a:lnTo>
-                  <a:lnTo>
-                    <a:pt x="3375266" y="3313642"/>
-                  </a:lnTo>
-                  <a:lnTo>
-                    <a:pt x="3303644" y="3293501"/>
-                  </a:lnTo>
-                  <a:lnTo>
-                    <a:pt x="3232021" y="3270975"/>
-                  </a:lnTo>
-                  <a:lnTo>
-                    <a:pt x="3160399" y="3245782"/>
-                  </a:lnTo>
-                  <a:lnTo>
-                    <a:pt x="3088776" y="3217607"/>
-                  </a:lnTo>
-                  <a:lnTo>
-                    <a:pt x="3017154" y="3186095"/>
-                  </a:lnTo>
-                  <a:lnTo>
-                    <a:pt x="2945531" y="3150852"/>
-                  </a:lnTo>
-                  <a:lnTo>
-                    <a:pt x="2873909" y="3111436"/>
-                  </a:lnTo>
-                  <a:lnTo>
-                    <a:pt x="2802286" y="3067353"/>
-                  </a:lnTo>
-                  <a:lnTo>
-                    <a:pt x="2730664" y="3018051"/>
-                  </a:lnTo>
-                  <a:lnTo>
-                    <a:pt x="2659041" y="2962911"/>
-                  </a:lnTo>
-                  <a:lnTo>
-                    <a:pt x="2587419" y="2901242"/>
-                  </a:lnTo>
-                  <a:lnTo>
-                    <a:pt x="2515796" y="2832272"/>
-                  </a:lnTo>
-                  <a:lnTo>
-                    <a:pt x="2444174" y="2755135"/>
-                  </a:lnTo>
-                  <a:lnTo>
-                    <a:pt x="2372551" y="2668865"/>
-                  </a:lnTo>
-                  <a:lnTo>
-                    <a:pt x="2300929" y="2623338"/>
-                  </a:lnTo>
-                  <a:lnTo>
-                    <a:pt x="2229306" y="2585060"/>
-                  </a:lnTo>
-                  <a:lnTo>
-                    <a:pt x="2157683" y="2545078"/>
-                  </a:lnTo>
-                  <a:lnTo>
-                    <a:pt x="2086061" y="2503318"/>
-                  </a:lnTo>
-                  <a:lnTo>
-                    <a:pt x="2014438" y="2459700"/>
-                  </a:lnTo>
-                  <a:lnTo>
-                    <a:pt x="1942816" y="2414142"/>
-                  </a:lnTo>
-                  <a:lnTo>
-                    <a:pt x="1871193" y="2366557"/>
-                  </a:lnTo>
-                  <a:lnTo>
-                    <a:pt x="1799571" y="2316855"/>
-                  </a:lnTo>
-                  <a:lnTo>
-                    <a:pt x="1727948" y="2264941"/>
-                  </a:lnTo>
-                  <a:lnTo>
-                    <a:pt x="1656326" y="2210718"/>
-                  </a:lnTo>
-                  <a:lnTo>
-                    <a:pt x="1584703" y="2154083"/>
-                  </a:lnTo>
-                  <a:lnTo>
-                    <a:pt x="1513081" y="2094928"/>
-                  </a:lnTo>
-                  <a:lnTo>
-                    <a:pt x="1441458" y="2033141"/>
-                  </a:lnTo>
-                  <a:lnTo>
-                    <a:pt x="1369836" y="1968606"/>
-                  </a:lnTo>
-                  <a:lnTo>
-                    <a:pt x="1298213" y="1901200"/>
-                  </a:lnTo>
-                  <a:lnTo>
-                    <a:pt x="1226591" y="1830794"/>
-                  </a:lnTo>
-                  <a:lnTo>
-                    <a:pt x="1154968" y="1757257"/>
-                  </a:lnTo>
-                  <a:lnTo>
-                    <a:pt x="1083346" y="1680448"/>
-                  </a:lnTo>
-                  <a:lnTo>
-                    <a:pt x="1011723" y="1600221"/>
-                  </a:lnTo>
-                  <a:lnTo>
-                    <a:pt x="940101" y="1516426"/>
-                  </a:lnTo>
-                  <a:lnTo>
-                    <a:pt x="868478" y="1428903"/>
-                  </a:lnTo>
-                  <a:lnTo>
-                    <a:pt x="796855" y="1337486"/>
-                  </a:lnTo>
-                  <a:lnTo>
-                    <a:pt x="725233" y="1242001"/>
-                  </a:lnTo>
-                  <a:lnTo>
-                    <a:pt x="653610" y="1142269"/>
-                  </a:lnTo>
-                  <a:lnTo>
-                    <a:pt x="581988" y="1038100"/>
-                  </a:lnTo>
-                  <a:lnTo>
-                    <a:pt x="510365" y="929297"/>
-                  </a:lnTo>
-                  <a:lnTo>
-                    <a:pt x="438743" y="815653"/>
-                  </a:lnTo>
-                  <a:lnTo>
-                    <a:pt x="367120" y="696953"/>
-                  </a:lnTo>
-                  <a:lnTo>
-                    <a:pt x="295498" y="572973"/>
-                  </a:lnTo>
-                  <a:lnTo>
-                    <a:pt x="223875" y="443476"/>
-                  </a:lnTo>
-                  <a:lnTo>
-                    <a:pt x="152253" y="308219"/>
-                  </a:lnTo>
-                  <a:lnTo>
-                    <a:pt x="80630" y="166944"/>
-                  </a:lnTo>
-                  <a:lnTo>
-                    <a:pt x="9008" y="19384"/>
+                    <a:pt x="1486081" y="130954"/>
+                  </a:lnTo>
+                  <a:lnTo>
+                    <a:pt x="1556426" y="250188"/>
+                  </a:lnTo>
+                  <a:lnTo>
+                    <a:pt x="1626770" y="356798"/>
+                  </a:lnTo>
+                  <a:lnTo>
+                    <a:pt x="1697115" y="452122"/>
+                  </a:lnTo>
+                  <a:lnTo>
+                    <a:pt x="1767459" y="537355"/>
+                  </a:lnTo>
+                  <a:lnTo>
+                    <a:pt x="1837804" y="613564"/>
+                  </a:lnTo>
+                  <a:lnTo>
+                    <a:pt x="1908148" y="681704"/>
+                  </a:lnTo>
+                  <a:lnTo>
+                    <a:pt x="1978493" y="742631"/>
+                  </a:lnTo>
+                  <a:lnTo>
+                    <a:pt x="2048837" y="797108"/>
+                  </a:lnTo>
+                  <a:lnTo>
+                    <a:pt x="2119182" y="845817"/>
+                  </a:lnTo>
+                  <a:lnTo>
+                    <a:pt x="2189526" y="889370"/>
+                  </a:lnTo>
+                  <a:lnTo>
+                    <a:pt x="2259871" y="928311"/>
+                  </a:lnTo>
+                  <a:lnTo>
+                    <a:pt x="2330215" y="959926"/>
+                  </a:lnTo>
+                  <a:lnTo>
+                    <a:pt x="2400560" y="972588"/>
+                  </a:lnTo>
+                  <a:lnTo>
+                    <a:pt x="2470904" y="984711"/>
+                  </a:lnTo>
+                  <a:lnTo>
+                    <a:pt x="2541249" y="996317"/>
+                  </a:lnTo>
+                  <a:lnTo>
+                    <a:pt x="2611593" y="1007429"/>
+                  </a:lnTo>
+                  <a:lnTo>
+                    <a:pt x="2681938" y="1018068"/>
+                  </a:lnTo>
+                  <a:lnTo>
+                    <a:pt x="2752282" y="1028254"/>
+                  </a:lnTo>
+                  <a:lnTo>
+                    <a:pt x="2822627" y="1038005"/>
+                  </a:lnTo>
+                  <a:lnTo>
+                    <a:pt x="2892971" y="1047342"/>
+                  </a:lnTo>
+                  <a:lnTo>
+                    <a:pt x="2963316" y="1056280"/>
+                  </a:lnTo>
+                  <a:lnTo>
+                    <a:pt x="3033660" y="1064838"/>
+                  </a:lnTo>
+                  <a:lnTo>
+                    <a:pt x="3104005" y="1073032"/>
+                  </a:lnTo>
+                  <a:lnTo>
+                    <a:pt x="3174349" y="1080876"/>
+                  </a:lnTo>
+                  <a:lnTo>
+                    <a:pt x="3244693" y="1088387"/>
+                  </a:lnTo>
+                  <a:lnTo>
+                    <a:pt x="3315038" y="1095577"/>
+                  </a:lnTo>
+                  <a:lnTo>
+                    <a:pt x="3385382" y="1102461"/>
+                  </a:lnTo>
+                  <a:lnTo>
+                    <a:pt x="3455727" y="1109052"/>
+                  </a:lnTo>
+                  <a:lnTo>
+                    <a:pt x="3526071" y="1115363"/>
+                  </a:lnTo>
+                  <a:lnTo>
+                    <a:pt x="3596416" y="1121404"/>
+                  </a:lnTo>
+                  <a:lnTo>
+                    <a:pt x="3666760" y="1127188"/>
+                  </a:lnTo>
+                  <a:lnTo>
+                    <a:pt x="3737105" y="1132726"/>
+                  </a:lnTo>
+                  <a:lnTo>
+                    <a:pt x="3807449" y="1138028"/>
+                  </a:lnTo>
+                  <a:lnTo>
+                    <a:pt x="3877794" y="1143104"/>
+                  </a:lnTo>
+                  <a:lnTo>
+                    <a:pt x="3948138" y="1147964"/>
+                  </a:lnTo>
+                  <a:lnTo>
+                    <a:pt x="4018483" y="1152617"/>
+                  </a:lnTo>
+                  <a:lnTo>
+                    <a:pt x="4088827" y="1157071"/>
+                  </a:lnTo>
+                  <a:lnTo>
+                    <a:pt x="4159172" y="1161336"/>
+                  </a:lnTo>
+                  <a:lnTo>
+                    <a:pt x="4229516" y="1165419"/>
+                  </a:lnTo>
+                  <a:lnTo>
+                    <a:pt x="4299861" y="1169329"/>
+                  </a:lnTo>
+                  <a:lnTo>
+                    <a:pt x="4370205" y="1173072"/>
+                  </a:lnTo>
+                  <a:lnTo>
+                    <a:pt x="4440550" y="1176655"/>
+                  </a:lnTo>
+                  <a:lnTo>
+                    <a:pt x="4510894" y="1180086"/>
+                  </a:lnTo>
+                  <a:lnTo>
+                    <a:pt x="4581239" y="1183370"/>
+                  </a:lnTo>
+                  <a:lnTo>
+                    <a:pt x="4651583" y="1186515"/>
+                  </a:lnTo>
+                  <a:lnTo>
+                    <a:pt x="4721928" y="1189526"/>
+                  </a:lnTo>
+                  <a:lnTo>
+                    <a:pt x="4792272" y="1192409"/>
+                  </a:lnTo>
+                  <a:lnTo>
+                    <a:pt x="4862617" y="1195168"/>
+                  </a:lnTo>
+                  <a:lnTo>
+                    <a:pt x="4932961" y="1197811"/>
+                  </a:lnTo>
+                  <a:lnTo>
+                    <a:pt x="5003306" y="1200340"/>
+                  </a:lnTo>
+                  <a:lnTo>
+                    <a:pt x="5073650" y="1202762"/>
+                  </a:lnTo>
+                  <a:lnTo>
+                    <a:pt x="5143995" y="1205081"/>
+                  </a:lnTo>
+                  <a:lnTo>
+                    <a:pt x="5214339" y="1207301"/>
+                  </a:lnTo>
+                  <a:lnTo>
+                    <a:pt x="5284684" y="1209426"/>
+                  </a:lnTo>
+                  <a:lnTo>
+                    <a:pt x="5355028" y="1211461"/>
+                  </a:lnTo>
+                  <a:lnTo>
+                    <a:pt x="5425373" y="1213410"/>
+                  </a:lnTo>
+                  <a:lnTo>
+                    <a:pt x="5495717" y="1215275"/>
+                  </a:lnTo>
+                  <a:lnTo>
+                    <a:pt x="5566062" y="1217061"/>
+                  </a:lnTo>
+                  <a:lnTo>
+                    <a:pt x="5636406" y="1218770"/>
+                  </a:lnTo>
+                  <a:lnTo>
+                    <a:pt x="5706751" y="1220407"/>
+                  </a:lnTo>
+                  <a:lnTo>
+                    <a:pt x="5777095" y="1221975"/>
+                  </a:lnTo>
+                  <a:lnTo>
+                    <a:pt x="5847440" y="1223475"/>
+                  </a:lnTo>
+                  <a:lnTo>
+                    <a:pt x="5917784" y="1224912"/>
+                  </a:lnTo>
+                  <a:lnTo>
+                    <a:pt x="5988129" y="1226287"/>
+                  </a:lnTo>
+                  <a:lnTo>
+                    <a:pt x="5988129" y="1256328"/>
+                  </a:lnTo>
+                  <a:lnTo>
+                    <a:pt x="5917784" y="1256225"/>
+                  </a:lnTo>
+                  <a:lnTo>
+                    <a:pt x="5847440" y="1256109"/>
+                  </a:lnTo>
+                  <a:lnTo>
+                    <a:pt x="5777095" y="1255980"/>
+                  </a:lnTo>
+                  <a:lnTo>
+                    <a:pt x="5706751" y="1255835"/>
+                  </a:lnTo>
+                  <a:lnTo>
+                    <a:pt x="5636406" y="1255673"/>
+                  </a:lnTo>
+                  <a:lnTo>
+                    <a:pt x="5566062" y="1255492"/>
+                  </a:lnTo>
+                  <a:lnTo>
+                    <a:pt x="5495717" y="1255290"/>
+                  </a:lnTo>
+                  <a:lnTo>
+                    <a:pt x="5425373" y="1255063"/>
+                  </a:lnTo>
+                  <a:lnTo>
+                    <a:pt x="5355028" y="1254810"/>
+                  </a:lnTo>
+                  <a:lnTo>
+                    <a:pt x="5284684" y="1254527"/>
+                  </a:lnTo>
+                  <a:lnTo>
+                    <a:pt x="5214339" y="1254210"/>
+                  </a:lnTo>
+                  <a:lnTo>
+                    <a:pt x="5143995" y="1253856"/>
+                  </a:lnTo>
+                  <a:lnTo>
+                    <a:pt x="5073650" y="1253460"/>
+                  </a:lnTo>
+                  <a:lnTo>
+                    <a:pt x="5003306" y="1253017"/>
+                  </a:lnTo>
+                  <a:lnTo>
+                    <a:pt x="4932961" y="1252521"/>
+                  </a:lnTo>
+                  <a:lnTo>
+                    <a:pt x="4862617" y="1251967"/>
+                  </a:lnTo>
+                  <a:lnTo>
+                    <a:pt x="4792272" y="1251347"/>
+                  </a:lnTo>
+                  <a:lnTo>
+                    <a:pt x="4721928" y="1250654"/>
+                  </a:lnTo>
+                  <a:lnTo>
+                    <a:pt x="4651583" y="1249879"/>
+                  </a:lnTo>
+                  <a:lnTo>
+                    <a:pt x="4581239" y="1249011"/>
+                  </a:lnTo>
+                  <a:lnTo>
+                    <a:pt x="4510894" y="1248042"/>
+                  </a:lnTo>
+                  <a:lnTo>
+                    <a:pt x="4440550" y="1246957"/>
+                  </a:lnTo>
+                  <a:lnTo>
+                    <a:pt x="4370205" y="1245744"/>
+                  </a:lnTo>
+                  <a:lnTo>
+                    <a:pt x="4299861" y="1244387"/>
+                  </a:lnTo>
+                  <a:lnTo>
+                    <a:pt x="4229516" y="1242870"/>
+                  </a:lnTo>
+                  <a:lnTo>
+                    <a:pt x="4159172" y="1241173"/>
+                  </a:lnTo>
+                  <a:lnTo>
+                    <a:pt x="4088827" y="1239275"/>
+                  </a:lnTo>
+                  <a:lnTo>
+                    <a:pt x="4018483" y="1237153"/>
+                  </a:lnTo>
+                  <a:lnTo>
+                    <a:pt x="3948138" y="1234779"/>
+                  </a:lnTo>
+                  <a:lnTo>
+                    <a:pt x="3877794" y="1232124"/>
+                  </a:lnTo>
+                  <a:lnTo>
+                    <a:pt x="3807449" y="1229155"/>
+                  </a:lnTo>
+                  <a:lnTo>
+                    <a:pt x="3737105" y="1225834"/>
+                  </a:lnTo>
+                  <a:lnTo>
+                    <a:pt x="3666760" y="1222120"/>
+                  </a:lnTo>
+                  <a:lnTo>
+                    <a:pt x="3596416" y="1217966"/>
+                  </a:lnTo>
+                  <a:lnTo>
+                    <a:pt x="3526071" y="1213321"/>
+                  </a:lnTo>
+                  <a:lnTo>
+                    <a:pt x="3455727" y="1208125"/>
+                  </a:lnTo>
+                  <a:lnTo>
+                    <a:pt x="3385382" y="1202314"/>
+                  </a:lnTo>
+                  <a:lnTo>
+                    <a:pt x="3315038" y="1195815"/>
+                  </a:lnTo>
+                  <a:lnTo>
+                    <a:pt x="3244693" y="1188547"/>
+                  </a:lnTo>
+                  <a:lnTo>
+                    <a:pt x="3174349" y="1180418"/>
+                  </a:lnTo>
+                  <a:lnTo>
+                    <a:pt x="3104005" y="1171326"/>
+                  </a:lnTo>
+                  <a:lnTo>
+                    <a:pt x="3033660" y="1161158"/>
+                  </a:lnTo>
+                  <a:lnTo>
+                    <a:pt x="2963316" y="1149786"/>
+                  </a:lnTo>
+                  <a:lnTo>
+                    <a:pt x="2892971" y="1137068"/>
+                  </a:lnTo>
+                  <a:lnTo>
+                    <a:pt x="2822627" y="1122844"/>
+                  </a:lnTo>
+                  <a:lnTo>
+                    <a:pt x="2752282" y="1106935"/>
+                  </a:lnTo>
+                  <a:lnTo>
+                    <a:pt x="2681938" y="1089143"/>
+                  </a:lnTo>
+                  <a:lnTo>
+                    <a:pt x="2611593" y="1069245"/>
+                  </a:lnTo>
+                  <a:lnTo>
+                    <a:pt x="2541249" y="1046990"/>
+                  </a:lnTo>
+                  <a:lnTo>
+                    <a:pt x="2470904" y="1022100"/>
+                  </a:lnTo>
+                  <a:lnTo>
+                    <a:pt x="2400560" y="994263"/>
+                  </a:lnTo>
+                  <a:lnTo>
+                    <a:pt x="2330215" y="963130"/>
+                  </a:lnTo>
+                  <a:lnTo>
+                    <a:pt x="2259871" y="946701"/>
+                  </a:lnTo>
+                  <a:lnTo>
+                    <a:pt x="2189526" y="932887"/>
+                  </a:lnTo>
+                  <a:lnTo>
+                    <a:pt x="2119182" y="918459"/>
+                  </a:lnTo>
+                  <a:lnTo>
+                    <a:pt x="2048837" y="903388"/>
+                  </a:lnTo>
+                  <a:lnTo>
+                    <a:pt x="1978493" y="887648"/>
+                  </a:lnTo>
+                  <a:lnTo>
+                    <a:pt x="1908148" y="871207"/>
+                  </a:lnTo>
+                  <a:lnTo>
+                    <a:pt x="1837804" y="854034"/>
+                  </a:lnTo>
+                  <a:lnTo>
+                    <a:pt x="1767459" y="836098"/>
+                  </a:lnTo>
+                  <a:lnTo>
+                    <a:pt x="1697115" y="817364"/>
+                  </a:lnTo>
+                  <a:lnTo>
+                    <a:pt x="1626770" y="797796"/>
+                  </a:lnTo>
+                  <a:lnTo>
+                    <a:pt x="1556426" y="777358"/>
+                  </a:lnTo>
+                  <a:lnTo>
+                    <a:pt x="1486081" y="756010"/>
+                  </a:lnTo>
+                  <a:lnTo>
+                    <a:pt x="1415737" y="733713"/>
+                  </a:lnTo>
+                  <a:lnTo>
+                    <a:pt x="1345392" y="710423"/>
+                  </a:lnTo>
+                  <a:lnTo>
+                    <a:pt x="1275048" y="686098"/>
+                  </a:lnTo>
+                  <a:lnTo>
+                    <a:pt x="1204703" y="660690"/>
+                  </a:lnTo>
+                  <a:lnTo>
+                    <a:pt x="1134359" y="634152"/>
+                  </a:lnTo>
+                  <a:lnTo>
+                    <a:pt x="1064014" y="606434"/>
+                  </a:lnTo>
+                  <a:lnTo>
+                    <a:pt x="993670" y="577482"/>
+                  </a:lnTo>
+                  <a:lnTo>
+                    <a:pt x="923325" y="547242"/>
+                  </a:lnTo>
+                  <a:lnTo>
+                    <a:pt x="852981" y="515657"/>
+                  </a:lnTo>
+                  <a:lnTo>
+                    <a:pt x="782636" y="482667"/>
+                  </a:lnTo>
+                  <a:lnTo>
+                    <a:pt x="712292" y="448209"/>
+                  </a:lnTo>
+                  <a:lnTo>
+                    <a:pt x="641947" y="412218"/>
+                  </a:lnTo>
+                  <a:lnTo>
+                    <a:pt x="571603" y="374626"/>
+                  </a:lnTo>
+                  <a:lnTo>
+                    <a:pt x="501258" y="335361"/>
+                  </a:lnTo>
+                  <a:lnTo>
+                    <a:pt x="430914" y="294350"/>
+                  </a:lnTo>
+                  <a:lnTo>
+                    <a:pt x="360569" y="251514"/>
+                  </a:lnTo>
+                  <a:lnTo>
+                    <a:pt x="290225" y="206772"/>
+                  </a:lnTo>
+                  <a:lnTo>
+                    <a:pt x="219880" y="160040"/>
+                  </a:lnTo>
+                  <a:lnTo>
+                    <a:pt x="149536" y="111229"/>
+                  </a:lnTo>
+                  <a:lnTo>
+                    <a:pt x="79191" y="60246"/>
+                  </a:lnTo>
+                  <a:lnTo>
+                    <a:pt x="8847" y="6995"/>
                   </a:lnTo>
                   <a:lnTo>
                     <a:pt x="0" y="0"/>
@@ -3443,216 +3478,216 @@
         </p:sp>
         <p:sp>
           <p:nvSpPr>
-            <p:cNvPr id="21" name="pl21"/>
+            <p:cNvPr id="22" name="pl22"/>
             <p:cNvSpPr/>
             <p:nvPr/>
           </p:nvSpPr>
           <p:spPr>
             <a:xfrm>
-              <a:off x="3608502" y="2073503"/>
-              <a:ext cx="4654176" cy="3398080"/>
+              <a:off x="3628289" y="2143092"/>
+              <a:ext cx="4571127" cy="1226287"/>
             </a:xfrm>
             <a:custGeom>
               <a:avLst/>
               <a:pathLst>
-                <a:path w="4654176" h="3398080">
+                <a:path w="4571127" h="1226287">
                   <a:moveTo>
                     <a:pt x="0" y="0"/>
                   </a:moveTo>
                   <a:lnTo>
-                    <a:pt x="70335" y="362878"/>
-                  </a:lnTo>
-                  <a:lnTo>
-                    <a:pt x="141957" y="693279"/>
-                  </a:lnTo>
-                  <a:lnTo>
-                    <a:pt x="213580" y="988700"/>
-                  </a:lnTo>
-                  <a:lnTo>
-                    <a:pt x="285202" y="1252846"/>
-                  </a:lnTo>
-                  <a:lnTo>
-                    <a:pt x="356825" y="1489028"/>
-                  </a:lnTo>
-                  <a:lnTo>
-                    <a:pt x="428447" y="1700205"/>
-                  </a:lnTo>
-                  <a:lnTo>
-                    <a:pt x="500070" y="1889025"/>
-                  </a:lnTo>
-                  <a:lnTo>
-                    <a:pt x="571692" y="2057855"/>
-                  </a:lnTo>
-                  <a:lnTo>
-                    <a:pt x="643315" y="2208812"/>
-                  </a:lnTo>
-                  <a:lnTo>
-                    <a:pt x="714937" y="2343787"/>
-                  </a:lnTo>
-                  <a:lnTo>
-                    <a:pt x="786560" y="2464472"/>
-                  </a:lnTo>
-                  <a:lnTo>
-                    <a:pt x="858182" y="2572381"/>
-                  </a:lnTo>
-                  <a:lnTo>
-                    <a:pt x="929805" y="2659986"/>
-                  </a:lnTo>
-                  <a:lnTo>
-                    <a:pt x="1001427" y="2695073"/>
-                  </a:lnTo>
-                  <a:lnTo>
-                    <a:pt x="1073050" y="2728665"/>
-                  </a:lnTo>
-                  <a:lnTo>
-                    <a:pt x="1144672" y="2760827"/>
-                  </a:lnTo>
-                  <a:lnTo>
-                    <a:pt x="1216295" y="2791619"/>
-                  </a:lnTo>
-                  <a:lnTo>
-                    <a:pt x="1287917" y="2821099"/>
-                  </a:lnTo>
-                  <a:lnTo>
-                    <a:pt x="1359540" y="2849324"/>
-                  </a:lnTo>
-                  <a:lnTo>
-                    <a:pt x="1431163" y="2876346"/>
-                  </a:lnTo>
-                  <a:lnTo>
-                    <a:pt x="1502785" y="2902218"/>
-                  </a:lnTo>
-                  <a:lnTo>
-                    <a:pt x="1574408" y="2926987"/>
-                  </a:lnTo>
-                  <a:lnTo>
-                    <a:pt x="1646030" y="2950701"/>
-                  </a:lnTo>
-                  <a:lnTo>
-                    <a:pt x="1717653" y="2973406"/>
-                  </a:lnTo>
-                  <a:lnTo>
-                    <a:pt x="1789275" y="2995143"/>
-                  </a:lnTo>
-                  <a:lnTo>
-                    <a:pt x="1860898" y="3015954"/>
-                  </a:lnTo>
-                  <a:lnTo>
-                    <a:pt x="1932520" y="3035879"/>
-                  </a:lnTo>
-                  <a:lnTo>
-                    <a:pt x="2004143" y="3054956"/>
-                  </a:lnTo>
-                  <a:lnTo>
-                    <a:pt x="2075765" y="3073219"/>
-                  </a:lnTo>
-                  <a:lnTo>
-                    <a:pt x="2147388" y="3090705"/>
-                  </a:lnTo>
-                  <a:lnTo>
-                    <a:pt x="2219010" y="3107446"/>
-                  </a:lnTo>
-                  <a:lnTo>
-                    <a:pt x="2290633" y="3123474"/>
-                  </a:lnTo>
-                  <a:lnTo>
-                    <a:pt x="2362255" y="3138820"/>
-                  </a:lnTo>
-                  <a:lnTo>
-                    <a:pt x="2433878" y="3153511"/>
-                  </a:lnTo>
-                  <a:lnTo>
-                    <a:pt x="2505500" y="3167577"/>
-                  </a:lnTo>
-                  <a:lnTo>
-                    <a:pt x="2577123" y="3181044"/>
-                  </a:lnTo>
-                  <a:lnTo>
-                    <a:pt x="2648745" y="3193937"/>
-                  </a:lnTo>
-                  <a:lnTo>
-                    <a:pt x="2720368" y="3206281"/>
-                  </a:lnTo>
-                  <a:lnTo>
-                    <a:pt x="2791991" y="3218100"/>
-                  </a:lnTo>
-                  <a:lnTo>
-                    <a:pt x="2863613" y="3229414"/>
-                  </a:lnTo>
-                  <a:lnTo>
-                    <a:pt x="2935236" y="3240247"/>
-                  </a:lnTo>
-                  <a:lnTo>
-                    <a:pt x="3006858" y="3250619"/>
-                  </a:lnTo>
-                  <a:lnTo>
-                    <a:pt x="3078481" y="3260549"/>
-                  </a:lnTo>
-                  <a:lnTo>
-                    <a:pt x="3150103" y="3270056"/>
-                  </a:lnTo>
-                  <a:lnTo>
-                    <a:pt x="3221726" y="3279157"/>
-                  </a:lnTo>
-                  <a:lnTo>
-                    <a:pt x="3293348" y="3287872"/>
-                  </a:lnTo>
-                  <a:lnTo>
-                    <a:pt x="3364971" y="3296215"/>
-                  </a:lnTo>
-                  <a:lnTo>
-                    <a:pt x="3436593" y="3304202"/>
-                  </a:lnTo>
-                  <a:lnTo>
-                    <a:pt x="3508216" y="3311850"/>
-                  </a:lnTo>
-                  <a:lnTo>
-                    <a:pt x="3579838" y="3319171"/>
-                  </a:lnTo>
-                  <a:lnTo>
-                    <a:pt x="3651461" y="3326181"/>
-                  </a:lnTo>
-                  <a:lnTo>
-                    <a:pt x="3723083" y="3332893"/>
-                  </a:lnTo>
-                  <a:lnTo>
-                    <a:pt x="3794706" y="3339318"/>
-                  </a:lnTo>
-                  <a:lnTo>
-                    <a:pt x="3866328" y="3345470"/>
-                  </a:lnTo>
-                  <a:lnTo>
-                    <a:pt x="3937951" y="3351359"/>
-                  </a:lnTo>
-                  <a:lnTo>
-                    <a:pt x="4009573" y="3356998"/>
-                  </a:lnTo>
-                  <a:lnTo>
-                    <a:pt x="4081196" y="3362397"/>
-                  </a:lnTo>
-                  <a:lnTo>
-                    <a:pt x="4152819" y="3367566"/>
-                  </a:lnTo>
-                  <a:lnTo>
-                    <a:pt x="4224441" y="3372514"/>
-                  </a:lnTo>
-                  <a:lnTo>
-                    <a:pt x="4296064" y="3377252"/>
-                  </a:lnTo>
-                  <a:lnTo>
-                    <a:pt x="4367686" y="3381788"/>
-                  </a:lnTo>
-                  <a:lnTo>
-                    <a:pt x="4439309" y="3386131"/>
-                  </a:lnTo>
-                  <a:lnTo>
-                    <a:pt x="4510931" y="3390289"/>
-                  </a:lnTo>
-                  <a:lnTo>
-                    <a:pt x="4582554" y="3394269"/>
-                  </a:lnTo>
-                  <a:lnTo>
-                    <a:pt x="4654176" y="3398080"/>
+                    <a:pt x="69079" y="130954"/>
+                  </a:lnTo>
+                  <a:lnTo>
+                    <a:pt x="139424" y="250188"/>
+                  </a:lnTo>
+                  <a:lnTo>
+                    <a:pt x="209768" y="356798"/>
+                  </a:lnTo>
+                  <a:lnTo>
+                    <a:pt x="280113" y="452122"/>
+                  </a:lnTo>
+                  <a:lnTo>
+                    <a:pt x="350457" y="537355"/>
+                  </a:lnTo>
+                  <a:lnTo>
+                    <a:pt x="420802" y="613564"/>
+                  </a:lnTo>
+                  <a:lnTo>
+                    <a:pt x="491146" y="681704"/>
+                  </a:lnTo>
+                  <a:lnTo>
+                    <a:pt x="561491" y="742631"/>
+                  </a:lnTo>
+                  <a:lnTo>
+                    <a:pt x="631835" y="797108"/>
+                  </a:lnTo>
+                  <a:lnTo>
+                    <a:pt x="702180" y="845817"/>
+                  </a:lnTo>
+                  <a:lnTo>
+                    <a:pt x="772524" y="889370"/>
+                  </a:lnTo>
+                  <a:lnTo>
+                    <a:pt x="842869" y="928311"/>
+                  </a:lnTo>
+                  <a:lnTo>
+                    <a:pt x="913213" y="959926"/>
+                  </a:lnTo>
+                  <a:lnTo>
+                    <a:pt x="983558" y="972588"/>
+                  </a:lnTo>
+                  <a:lnTo>
+                    <a:pt x="1053902" y="984711"/>
+                  </a:lnTo>
+                  <a:lnTo>
+                    <a:pt x="1124247" y="996317"/>
+                  </a:lnTo>
+                  <a:lnTo>
+                    <a:pt x="1194591" y="1007429"/>
+                  </a:lnTo>
+                  <a:lnTo>
+                    <a:pt x="1264936" y="1018068"/>
+                  </a:lnTo>
+                  <a:lnTo>
+                    <a:pt x="1335280" y="1028254"/>
+                  </a:lnTo>
+                  <a:lnTo>
+                    <a:pt x="1405625" y="1038005"/>
+                  </a:lnTo>
+                  <a:lnTo>
+                    <a:pt x="1475969" y="1047342"/>
+                  </a:lnTo>
+                  <a:lnTo>
+                    <a:pt x="1546314" y="1056280"/>
+                  </a:lnTo>
+                  <a:lnTo>
+                    <a:pt x="1616658" y="1064838"/>
+                  </a:lnTo>
+                  <a:lnTo>
+                    <a:pt x="1687003" y="1073032"/>
+                  </a:lnTo>
+                  <a:lnTo>
+                    <a:pt x="1757347" y="1080876"/>
+                  </a:lnTo>
+                  <a:lnTo>
+                    <a:pt x="1827692" y="1088387"/>
+                  </a:lnTo>
+                  <a:lnTo>
+                    <a:pt x="1898036" y="1095577"/>
+                  </a:lnTo>
+                  <a:lnTo>
+                    <a:pt x="1968381" y="1102461"/>
+                  </a:lnTo>
+                  <a:lnTo>
+                    <a:pt x="2038725" y="1109052"/>
+                  </a:lnTo>
+                  <a:lnTo>
+                    <a:pt x="2109070" y="1115363"/>
+                  </a:lnTo>
+                  <a:lnTo>
+                    <a:pt x="2179414" y="1121404"/>
+                  </a:lnTo>
+                  <a:lnTo>
+                    <a:pt x="2249759" y="1127188"/>
+                  </a:lnTo>
+                  <a:lnTo>
+                    <a:pt x="2320103" y="1132726"/>
+                  </a:lnTo>
+                  <a:lnTo>
+                    <a:pt x="2390448" y="1138028"/>
+                  </a:lnTo>
+                  <a:lnTo>
+                    <a:pt x="2460792" y="1143104"/>
+                  </a:lnTo>
+                  <a:lnTo>
+                    <a:pt x="2531137" y="1147964"/>
+                  </a:lnTo>
+                  <a:lnTo>
+                    <a:pt x="2601481" y="1152617"/>
+                  </a:lnTo>
+                  <a:lnTo>
+                    <a:pt x="2671826" y="1157071"/>
+                  </a:lnTo>
+                  <a:lnTo>
+                    <a:pt x="2742170" y="1161336"/>
+                  </a:lnTo>
+                  <a:lnTo>
+                    <a:pt x="2812515" y="1165419"/>
+                  </a:lnTo>
+                  <a:lnTo>
+                    <a:pt x="2882859" y="1169329"/>
+                  </a:lnTo>
+                  <a:lnTo>
+                    <a:pt x="2953204" y="1173072"/>
+                  </a:lnTo>
+                  <a:lnTo>
+                    <a:pt x="3023548" y="1176655"/>
+                  </a:lnTo>
+                  <a:lnTo>
+                    <a:pt x="3093893" y="1180086"/>
+                  </a:lnTo>
+                  <a:lnTo>
+                    <a:pt x="3164237" y="1183370"/>
+                  </a:lnTo>
+                  <a:lnTo>
+                    <a:pt x="3234582" y="1186515"/>
+                  </a:lnTo>
+                  <a:lnTo>
+                    <a:pt x="3304926" y="1189526"/>
+                  </a:lnTo>
+                  <a:lnTo>
+                    <a:pt x="3375271" y="1192409"/>
+                  </a:lnTo>
+                  <a:lnTo>
+                    <a:pt x="3445615" y="1195168"/>
+                  </a:lnTo>
+                  <a:lnTo>
+                    <a:pt x="3515959" y="1197811"/>
+                  </a:lnTo>
+                  <a:lnTo>
+                    <a:pt x="3586304" y="1200340"/>
+                  </a:lnTo>
+                  <a:lnTo>
+                    <a:pt x="3656648" y="1202762"/>
+                  </a:lnTo>
+                  <a:lnTo>
+                    <a:pt x="3726993" y="1205081"/>
+                  </a:lnTo>
+                  <a:lnTo>
+                    <a:pt x="3797337" y="1207301"/>
+                  </a:lnTo>
+                  <a:lnTo>
+                    <a:pt x="3867682" y="1209426"/>
+                  </a:lnTo>
+                  <a:lnTo>
+                    <a:pt x="3938026" y="1211461"/>
+                  </a:lnTo>
+                  <a:lnTo>
+                    <a:pt x="4008371" y="1213410"/>
+                  </a:lnTo>
+                  <a:lnTo>
+                    <a:pt x="4078715" y="1215275"/>
+                  </a:lnTo>
+                  <a:lnTo>
+                    <a:pt x="4149060" y="1217061"/>
+                  </a:lnTo>
+                  <a:lnTo>
+                    <a:pt x="4219404" y="1218770"/>
+                  </a:lnTo>
+                  <a:lnTo>
+                    <a:pt x="4289749" y="1220407"/>
+                  </a:lnTo>
+                  <a:lnTo>
+                    <a:pt x="4360093" y="1221975"/>
+                  </a:lnTo>
+                  <a:lnTo>
+                    <a:pt x="4430438" y="1223475"/>
+                  </a:lnTo>
+                  <a:lnTo>
+                    <a:pt x="4500782" y="1224912"/>
+                  </a:lnTo>
+                  <a:lnTo>
+                    <a:pt x="4571127" y="1226287"/>
                   </a:lnTo>
                 </a:path>
               </a:pathLst>
@@ -3666,276 +3701,276 @@
         </p:sp>
         <p:sp>
           <p:nvSpPr>
-            <p:cNvPr id="22" name="pl22"/>
+            <p:cNvPr id="23" name="pl23"/>
             <p:cNvSpPr/>
             <p:nvPr/>
           </p:nvSpPr>
           <p:spPr>
             <a:xfrm>
-              <a:off x="2165756" y="2073503"/>
-              <a:ext cx="6096922" cy="3481326"/>
+              <a:off x="2211287" y="2143092"/>
+              <a:ext cx="5988129" cy="1256328"/>
             </a:xfrm>
             <a:custGeom>
               <a:avLst/>
               <a:pathLst>
-                <a:path w="6096922" h="3481326">
+                <a:path w="5988129" h="1256328">
                   <a:moveTo>
-                    <a:pt x="6096922" y="3481326"/>
+                    <a:pt x="5988129" y="1256328"/>
                   </a:moveTo>
                   <a:lnTo>
-                    <a:pt x="6025300" y="3481039"/>
-                  </a:lnTo>
-                  <a:lnTo>
-                    <a:pt x="5953677" y="3480718"/>
-                  </a:lnTo>
-                  <a:lnTo>
-                    <a:pt x="5882055" y="3480360"/>
-                  </a:lnTo>
-                  <a:lnTo>
-                    <a:pt x="5810432" y="3479959"/>
-                  </a:lnTo>
-                  <a:lnTo>
-                    <a:pt x="5738810" y="3479510"/>
-                  </a:lnTo>
-                  <a:lnTo>
-                    <a:pt x="5667187" y="3479009"/>
-                  </a:lnTo>
-                  <a:lnTo>
-                    <a:pt x="5595565" y="3478448"/>
-                  </a:lnTo>
-                  <a:lnTo>
-                    <a:pt x="5523942" y="3477820"/>
-                  </a:lnTo>
-                  <a:lnTo>
-                    <a:pt x="5452320" y="3477119"/>
-                  </a:lnTo>
-                  <a:lnTo>
-                    <a:pt x="5380697" y="3476334"/>
-                  </a:lnTo>
-                  <a:lnTo>
-                    <a:pt x="5309075" y="3475456"/>
-                  </a:lnTo>
-                  <a:lnTo>
-                    <a:pt x="5237452" y="3474475"/>
-                  </a:lnTo>
-                  <a:lnTo>
-                    <a:pt x="5165830" y="3473377"/>
-                  </a:lnTo>
-                  <a:lnTo>
-                    <a:pt x="5094207" y="3472149"/>
-                  </a:lnTo>
-                  <a:lnTo>
-                    <a:pt x="5022585" y="3470776"/>
-                  </a:lnTo>
-                  <a:lnTo>
-                    <a:pt x="4950962" y="3469240"/>
-                  </a:lnTo>
-                  <a:lnTo>
-                    <a:pt x="4879339" y="3467523"/>
-                  </a:lnTo>
-                  <a:lnTo>
-                    <a:pt x="4807717" y="3465602"/>
-                  </a:lnTo>
-                  <a:lnTo>
-                    <a:pt x="4736094" y="3463453"/>
-                  </a:lnTo>
-                  <a:lnTo>
-                    <a:pt x="4664472" y="3461051"/>
-                  </a:lnTo>
-                  <a:lnTo>
-                    <a:pt x="4592849" y="3458363"/>
-                  </a:lnTo>
-                  <a:lnTo>
-                    <a:pt x="4521227" y="3455358"/>
-                  </a:lnTo>
-                  <a:lnTo>
-                    <a:pt x="4449604" y="3451997"/>
-                  </a:lnTo>
-                  <a:lnTo>
-                    <a:pt x="4377982" y="3448237"/>
-                  </a:lnTo>
-                  <a:lnTo>
-                    <a:pt x="4306359" y="3444033"/>
-                  </a:lnTo>
-                  <a:lnTo>
-                    <a:pt x="4234737" y="3439331"/>
-                  </a:lnTo>
-                  <a:lnTo>
-                    <a:pt x="4163114" y="3434072"/>
-                  </a:lnTo>
-                  <a:lnTo>
-                    <a:pt x="4091492" y="3428190"/>
-                  </a:lnTo>
-                  <a:lnTo>
-                    <a:pt x="4019869" y="3421612"/>
-                  </a:lnTo>
-                  <a:lnTo>
-                    <a:pt x="3948247" y="3414255"/>
-                  </a:lnTo>
-                  <a:lnTo>
-                    <a:pt x="3876624" y="3406027"/>
-                  </a:lnTo>
-                  <a:lnTo>
-                    <a:pt x="3805002" y="3396825"/>
-                  </a:lnTo>
-                  <a:lnTo>
-                    <a:pt x="3733379" y="3386534"/>
-                  </a:lnTo>
-                  <a:lnTo>
-                    <a:pt x="3661757" y="3375023"/>
-                  </a:lnTo>
-                  <a:lnTo>
-                    <a:pt x="3590134" y="3362150"/>
-                  </a:lnTo>
-                  <a:lnTo>
-                    <a:pt x="3518511" y="3347753"/>
-                  </a:lnTo>
-                  <a:lnTo>
-                    <a:pt x="3446889" y="3331650"/>
-                  </a:lnTo>
-                  <a:lnTo>
-                    <a:pt x="3375266" y="3313642"/>
-                  </a:lnTo>
-                  <a:lnTo>
-                    <a:pt x="3303644" y="3293501"/>
-                  </a:lnTo>
-                  <a:lnTo>
-                    <a:pt x="3232021" y="3270975"/>
-                  </a:lnTo>
-                  <a:lnTo>
-                    <a:pt x="3160399" y="3245782"/>
-                  </a:lnTo>
-                  <a:lnTo>
-                    <a:pt x="3088776" y="3217607"/>
-                  </a:lnTo>
-                  <a:lnTo>
-                    <a:pt x="3017154" y="3186095"/>
-                  </a:lnTo>
-                  <a:lnTo>
-                    <a:pt x="2945531" y="3150852"/>
-                  </a:lnTo>
-                  <a:lnTo>
-                    <a:pt x="2873909" y="3111436"/>
-                  </a:lnTo>
-                  <a:lnTo>
-                    <a:pt x="2802286" y="3067353"/>
-                  </a:lnTo>
-                  <a:lnTo>
-                    <a:pt x="2730664" y="3018051"/>
-                  </a:lnTo>
-                  <a:lnTo>
-                    <a:pt x="2659041" y="2962911"/>
-                  </a:lnTo>
-                  <a:lnTo>
-                    <a:pt x="2587419" y="2901242"/>
-                  </a:lnTo>
-                  <a:lnTo>
-                    <a:pt x="2515796" y="2832272"/>
-                  </a:lnTo>
-                  <a:lnTo>
-                    <a:pt x="2444174" y="2755135"/>
-                  </a:lnTo>
-                  <a:lnTo>
-                    <a:pt x="2372551" y="2668865"/>
-                  </a:lnTo>
-                  <a:lnTo>
-                    <a:pt x="2300929" y="2623338"/>
-                  </a:lnTo>
-                  <a:lnTo>
-                    <a:pt x="2229306" y="2585060"/>
-                  </a:lnTo>
-                  <a:lnTo>
-                    <a:pt x="2157683" y="2545078"/>
-                  </a:lnTo>
-                  <a:lnTo>
-                    <a:pt x="2086061" y="2503318"/>
-                  </a:lnTo>
-                  <a:lnTo>
-                    <a:pt x="2014438" y="2459700"/>
-                  </a:lnTo>
-                  <a:lnTo>
-                    <a:pt x="1942816" y="2414142"/>
-                  </a:lnTo>
-                  <a:lnTo>
-                    <a:pt x="1871193" y="2366557"/>
-                  </a:lnTo>
-                  <a:lnTo>
-                    <a:pt x="1799571" y="2316855"/>
-                  </a:lnTo>
-                  <a:lnTo>
-                    <a:pt x="1727948" y="2264941"/>
-                  </a:lnTo>
-                  <a:lnTo>
-                    <a:pt x="1656326" y="2210718"/>
-                  </a:lnTo>
-                  <a:lnTo>
-                    <a:pt x="1584703" y="2154083"/>
-                  </a:lnTo>
-                  <a:lnTo>
-                    <a:pt x="1513081" y="2094928"/>
-                  </a:lnTo>
-                  <a:lnTo>
-                    <a:pt x="1441458" y="2033141"/>
-                  </a:lnTo>
-                  <a:lnTo>
-                    <a:pt x="1369836" y="1968606"/>
-                  </a:lnTo>
-                  <a:lnTo>
-                    <a:pt x="1298213" y="1901200"/>
-                  </a:lnTo>
-                  <a:lnTo>
-                    <a:pt x="1226591" y="1830794"/>
-                  </a:lnTo>
-                  <a:lnTo>
-                    <a:pt x="1154968" y="1757257"/>
-                  </a:lnTo>
-                  <a:lnTo>
-                    <a:pt x="1083346" y="1680448"/>
-                  </a:lnTo>
-                  <a:lnTo>
-                    <a:pt x="1011723" y="1600221"/>
-                  </a:lnTo>
-                  <a:lnTo>
-                    <a:pt x="940101" y="1516426"/>
-                  </a:lnTo>
-                  <a:lnTo>
-                    <a:pt x="868478" y="1428903"/>
-                  </a:lnTo>
-                  <a:lnTo>
-                    <a:pt x="796855" y="1337486"/>
-                  </a:lnTo>
-                  <a:lnTo>
-                    <a:pt x="725233" y="1242001"/>
-                  </a:lnTo>
-                  <a:lnTo>
-                    <a:pt x="653610" y="1142269"/>
-                  </a:lnTo>
-                  <a:lnTo>
-                    <a:pt x="581988" y="1038100"/>
-                  </a:lnTo>
-                  <a:lnTo>
-                    <a:pt x="510365" y="929297"/>
-                  </a:lnTo>
-                  <a:lnTo>
-                    <a:pt x="438743" y="815653"/>
-                  </a:lnTo>
-                  <a:lnTo>
-                    <a:pt x="367120" y="696953"/>
-                  </a:lnTo>
-                  <a:lnTo>
-                    <a:pt x="295498" y="572973"/>
-                  </a:lnTo>
-                  <a:lnTo>
-                    <a:pt x="223875" y="443476"/>
-                  </a:lnTo>
-                  <a:lnTo>
-                    <a:pt x="152253" y="308219"/>
-                  </a:lnTo>
-                  <a:lnTo>
-                    <a:pt x="80630" y="166944"/>
-                  </a:lnTo>
-                  <a:lnTo>
-                    <a:pt x="9008" y="19384"/>
+                    <a:pt x="5917784" y="1256225"/>
+                  </a:lnTo>
+                  <a:lnTo>
+                    <a:pt x="5847440" y="1256109"/>
+                  </a:lnTo>
+                  <a:lnTo>
+                    <a:pt x="5777095" y="1255980"/>
+                  </a:lnTo>
+                  <a:lnTo>
+                    <a:pt x="5706751" y="1255835"/>
+                  </a:lnTo>
+                  <a:lnTo>
+                    <a:pt x="5636406" y="1255673"/>
+                  </a:lnTo>
+                  <a:lnTo>
+                    <a:pt x="5566062" y="1255492"/>
+                  </a:lnTo>
+                  <a:lnTo>
+                    <a:pt x="5495717" y="1255290"/>
+                  </a:lnTo>
+                  <a:lnTo>
+                    <a:pt x="5425373" y="1255063"/>
+                  </a:lnTo>
+                  <a:lnTo>
+                    <a:pt x="5355028" y="1254810"/>
+                  </a:lnTo>
+                  <a:lnTo>
+                    <a:pt x="5284684" y="1254527"/>
+                  </a:lnTo>
+                  <a:lnTo>
+                    <a:pt x="5214339" y="1254210"/>
+                  </a:lnTo>
+                  <a:lnTo>
+                    <a:pt x="5143995" y="1253856"/>
+                  </a:lnTo>
+                  <a:lnTo>
+                    <a:pt x="5073650" y="1253460"/>
+                  </a:lnTo>
+                  <a:lnTo>
+                    <a:pt x="5003306" y="1253017"/>
+                  </a:lnTo>
+                  <a:lnTo>
+                    <a:pt x="4932961" y="1252521"/>
+                  </a:lnTo>
+                  <a:lnTo>
+                    <a:pt x="4862617" y="1251967"/>
+                  </a:lnTo>
+                  <a:lnTo>
+                    <a:pt x="4792272" y="1251347"/>
+                  </a:lnTo>
+                  <a:lnTo>
+                    <a:pt x="4721928" y="1250654"/>
+                  </a:lnTo>
+                  <a:lnTo>
+                    <a:pt x="4651583" y="1249879"/>
+                  </a:lnTo>
+                  <a:lnTo>
+                    <a:pt x="4581239" y="1249011"/>
+                  </a:lnTo>
+                  <a:lnTo>
+                    <a:pt x="4510894" y="1248042"/>
+                  </a:lnTo>
+                  <a:lnTo>
+                    <a:pt x="4440550" y="1246957"/>
+                  </a:lnTo>
+                  <a:lnTo>
+                    <a:pt x="4370205" y="1245744"/>
+                  </a:lnTo>
+                  <a:lnTo>
+                    <a:pt x="4299861" y="1244387"/>
+                  </a:lnTo>
+                  <a:lnTo>
+                    <a:pt x="4229516" y="1242870"/>
+                  </a:lnTo>
+                  <a:lnTo>
+                    <a:pt x="4159172" y="1241173"/>
+                  </a:lnTo>
+                  <a:lnTo>
+                    <a:pt x="4088827" y="1239275"/>
+                  </a:lnTo>
+                  <a:lnTo>
+                    <a:pt x="4018483" y="1237153"/>
+                  </a:lnTo>
+                  <a:lnTo>
+                    <a:pt x="3948138" y="1234779"/>
+                  </a:lnTo>
+                  <a:lnTo>
+                    <a:pt x="3877794" y="1232124"/>
+                  </a:lnTo>
+                  <a:lnTo>
+                    <a:pt x="3807449" y="1229155"/>
+                  </a:lnTo>
+                  <a:lnTo>
+                    <a:pt x="3737105" y="1225834"/>
+                  </a:lnTo>
+                  <a:lnTo>
+                    <a:pt x="3666760" y="1222120"/>
+                  </a:lnTo>
+                  <a:lnTo>
+                    <a:pt x="3596416" y="1217966"/>
+                  </a:lnTo>
+                  <a:lnTo>
+                    <a:pt x="3526071" y="1213321"/>
+                  </a:lnTo>
+                  <a:lnTo>
+                    <a:pt x="3455727" y="1208125"/>
+                  </a:lnTo>
+                  <a:lnTo>
+                    <a:pt x="3385382" y="1202314"/>
+                  </a:lnTo>
+                  <a:lnTo>
+                    <a:pt x="3315038" y="1195815"/>
+                  </a:lnTo>
+                  <a:lnTo>
+                    <a:pt x="3244693" y="1188547"/>
+                  </a:lnTo>
+                  <a:lnTo>
+                    <a:pt x="3174349" y="1180418"/>
+                  </a:lnTo>
+                  <a:lnTo>
+                    <a:pt x="3104005" y="1171326"/>
+                  </a:lnTo>
+                  <a:lnTo>
+                    <a:pt x="3033660" y="1161158"/>
+                  </a:lnTo>
+                  <a:lnTo>
+                    <a:pt x="2963316" y="1149786"/>
+                  </a:lnTo>
+                  <a:lnTo>
+                    <a:pt x="2892971" y="1137068"/>
+                  </a:lnTo>
+                  <a:lnTo>
+                    <a:pt x="2822627" y="1122844"/>
+                  </a:lnTo>
+                  <a:lnTo>
+                    <a:pt x="2752282" y="1106935"/>
+                  </a:lnTo>
+                  <a:lnTo>
+                    <a:pt x="2681938" y="1089143"/>
+                  </a:lnTo>
+                  <a:lnTo>
+                    <a:pt x="2611593" y="1069245"/>
+                  </a:lnTo>
+                  <a:lnTo>
+                    <a:pt x="2541249" y="1046990"/>
+                  </a:lnTo>
+                  <a:lnTo>
+                    <a:pt x="2470904" y="1022100"/>
+                  </a:lnTo>
+                  <a:lnTo>
+                    <a:pt x="2400560" y="994263"/>
+                  </a:lnTo>
+                  <a:lnTo>
+                    <a:pt x="2330215" y="963130"/>
+                  </a:lnTo>
+                  <a:lnTo>
+                    <a:pt x="2259871" y="946701"/>
+                  </a:lnTo>
+                  <a:lnTo>
+                    <a:pt x="2189526" y="932887"/>
+                  </a:lnTo>
+                  <a:lnTo>
+                    <a:pt x="2119182" y="918459"/>
+                  </a:lnTo>
+                  <a:lnTo>
+                    <a:pt x="2048837" y="903388"/>
+                  </a:lnTo>
+                  <a:lnTo>
+                    <a:pt x="1978493" y="887648"/>
+                  </a:lnTo>
+                  <a:lnTo>
+                    <a:pt x="1908148" y="871207"/>
+                  </a:lnTo>
+                  <a:lnTo>
+                    <a:pt x="1837804" y="854034"/>
+                  </a:lnTo>
+                  <a:lnTo>
+                    <a:pt x="1767459" y="836098"/>
+                  </a:lnTo>
+                  <a:lnTo>
+                    <a:pt x="1697115" y="817364"/>
+                  </a:lnTo>
+                  <a:lnTo>
+                    <a:pt x="1626770" y="797796"/>
+                  </a:lnTo>
+                  <a:lnTo>
+                    <a:pt x="1556426" y="777358"/>
+                  </a:lnTo>
+                  <a:lnTo>
+                    <a:pt x="1486081" y="756010"/>
+                  </a:lnTo>
+                  <a:lnTo>
+                    <a:pt x="1415737" y="733713"/>
+                  </a:lnTo>
+                  <a:lnTo>
+                    <a:pt x="1345392" y="710423"/>
+                  </a:lnTo>
+                  <a:lnTo>
+                    <a:pt x="1275048" y="686098"/>
+                  </a:lnTo>
+                  <a:lnTo>
+                    <a:pt x="1204703" y="660690"/>
+                  </a:lnTo>
+                  <a:lnTo>
+                    <a:pt x="1134359" y="634152"/>
+                  </a:lnTo>
+                  <a:lnTo>
+                    <a:pt x="1064014" y="606434"/>
+                  </a:lnTo>
+                  <a:lnTo>
+                    <a:pt x="993670" y="577482"/>
+                  </a:lnTo>
+                  <a:lnTo>
+                    <a:pt x="923325" y="547242"/>
+                  </a:lnTo>
+                  <a:lnTo>
+                    <a:pt x="852981" y="515657"/>
+                  </a:lnTo>
+                  <a:lnTo>
+                    <a:pt x="782636" y="482667"/>
+                  </a:lnTo>
+                  <a:lnTo>
+                    <a:pt x="712292" y="448209"/>
+                  </a:lnTo>
+                  <a:lnTo>
+                    <a:pt x="641947" y="412218"/>
+                  </a:lnTo>
+                  <a:lnTo>
+                    <a:pt x="571603" y="374626"/>
+                  </a:lnTo>
+                  <a:lnTo>
+                    <a:pt x="501258" y="335361"/>
+                  </a:lnTo>
+                  <a:lnTo>
+                    <a:pt x="430914" y="294350"/>
+                  </a:lnTo>
+                  <a:lnTo>
+                    <a:pt x="360569" y="251514"/>
+                  </a:lnTo>
+                  <a:lnTo>
+                    <a:pt x="290225" y="206772"/>
+                  </a:lnTo>
+                  <a:lnTo>
+                    <a:pt x="219880" y="160040"/>
+                  </a:lnTo>
+                  <a:lnTo>
+                    <a:pt x="149536" y="111229"/>
+                  </a:lnTo>
+                  <a:lnTo>
+                    <a:pt x="79191" y="60246"/>
+                  </a:lnTo>
+                  <a:lnTo>
+                    <a:pt x="8847" y="6995"/>
                   </a:lnTo>
                   <a:lnTo>
                     <a:pt x="0" y="0"/>
@@ -3952,234 +3987,234 @@
         </p:sp>
         <p:sp>
           <p:nvSpPr>
-            <p:cNvPr id="23" name="pl23"/>
+            <p:cNvPr id="24" name="pl24"/>
             <p:cNvSpPr/>
             <p:nvPr/>
           </p:nvSpPr>
           <p:spPr>
             <a:xfrm>
-              <a:off x="3205024" y="2073503"/>
-              <a:ext cx="5057655" cy="3469345"/>
+              <a:off x="3232010" y="2143092"/>
+              <a:ext cx="4967406" cy="1252005"/>
             </a:xfrm>
             <a:custGeom>
               <a:avLst/>
               <a:pathLst>
-                <a:path w="5057655" h="3469345">
+                <a:path w="4967406" h="1252005">
                   <a:moveTo>
                     <a:pt x="0" y="0"/>
                   </a:moveTo>
                   <a:lnTo>
-                    <a:pt x="44078" y="165055"/>
-                  </a:lnTo>
-                  <a:lnTo>
-                    <a:pt x="115700" y="413199"/>
-                  </a:lnTo>
-                  <a:lnTo>
-                    <a:pt x="187323" y="642789"/>
-                  </a:lnTo>
-                  <a:lnTo>
-                    <a:pt x="258945" y="855212"/>
-                  </a:lnTo>
-                  <a:lnTo>
-                    <a:pt x="330568" y="1051752"/>
-                  </a:lnTo>
-                  <a:lnTo>
-                    <a:pt x="402190" y="1233596"/>
-                  </a:lnTo>
-                  <a:lnTo>
-                    <a:pt x="473813" y="1401844"/>
-                  </a:lnTo>
-                  <a:lnTo>
-                    <a:pt x="545435" y="1557511"/>
-                  </a:lnTo>
-                  <a:lnTo>
-                    <a:pt x="617058" y="1701539"/>
-                  </a:lnTo>
-                  <a:lnTo>
-                    <a:pt x="688680" y="1834797"/>
-                  </a:lnTo>
-                  <a:lnTo>
-                    <a:pt x="760303" y="1958092"/>
-                  </a:lnTo>
-                  <a:lnTo>
-                    <a:pt x="831926" y="2072168"/>
-                  </a:lnTo>
-                  <a:lnTo>
-                    <a:pt x="903548" y="2177714"/>
-                  </a:lnTo>
-                  <a:lnTo>
-                    <a:pt x="975171" y="2275368"/>
-                  </a:lnTo>
-                  <a:lnTo>
-                    <a:pt x="1046793" y="2365721"/>
-                  </a:lnTo>
-                  <a:lnTo>
-                    <a:pt x="1118416" y="2449317"/>
-                  </a:lnTo>
-                  <a:lnTo>
-                    <a:pt x="1190038" y="2526663"/>
-                  </a:lnTo>
-                  <a:lnTo>
-                    <a:pt x="1261661" y="2598226"/>
-                  </a:lnTo>
-                  <a:lnTo>
-                    <a:pt x="1333283" y="2664438"/>
-                  </a:lnTo>
-                  <a:lnTo>
-                    <a:pt x="1404906" y="2725699"/>
-                  </a:lnTo>
-                  <a:lnTo>
-                    <a:pt x="1476528" y="2782379"/>
-                  </a:lnTo>
-                  <a:lnTo>
-                    <a:pt x="1548151" y="2834822"/>
-                  </a:lnTo>
-                  <a:lnTo>
-                    <a:pt x="1619773" y="2883343"/>
-                  </a:lnTo>
-                  <a:lnTo>
-                    <a:pt x="1691396" y="2928236"/>
-                  </a:lnTo>
-                  <a:lnTo>
-                    <a:pt x="1763018" y="2969772"/>
-                  </a:lnTo>
-                  <a:lnTo>
-                    <a:pt x="1834641" y="3008203"/>
-                  </a:lnTo>
-                  <a:lnTo>
-                    <a:pt x="1906263" y="3043760"/>
-                  </a:lnTo>
-                  <a:lnTo>
-                    <a:pt x="1977886" y="3076659"/>
-                  </a:lnTo>
-                  <a:lnTo>
-                    <a:pt x="2049508" y="3107097"/>
-                  </a:lnTo>
-                  <a:lnTo>
-                    <a:pt x="2121131" y="3135260"/>
-                  </a:lnTo>
-                  <a:lnTo>
-                    <a:pt x="2192754" y="3161317"/>
-                  </a:lnTo>
-                  <a:lnTo>
-                    <a:pt x="2264376" y="3185426"/>
-                  </a:lnTo>
-                  <a:lnTo>
-                    <a:pt x="2335999" y="3207732"/>
-                  </a:lnTo>
-                  <a:lnTo>
-                    <a:pt x="2407621" y="3228370"/>
-                  </a:lnTo>
-                  <a:lnTo>
-                    <a:pt x="2479244" y="3247465"/>
-                  </a:lnTo>
-                  <a:lnTo>
-                    <a:pt x="2550866" y="3265132"/>
-                  </a:lnTo>
-                  <a:lnTo>
-                    <a:pt x="2622489" y="3281478"/>
-                  </a:lnTo>
-                  <a:lnTo>
-                    <a:pt x="2694111" y="3296602"/>
-                  </a:lnTo>
-                  <a:lnTo>
-                    <a:pt x="2765734" y="3310595"/>
-                  </a:lnTo>
-                  <a:lnTo>
-                    <a:pt x="2837356" y="3323542"/>
-                  </a:lnTo>
-                  <a:lnTo>
-                    <a:pt x="2908979" y="3335521"/>
-                  </a:lnTo>
-                  <a:lnTo>
-                    <a:pt x="2980601" y="3346604"/>
-                  </a:lnTo>
-                  <a:lnTo>
-                    <a:pt x="3052224" y="3356858"/>
-                  </a:lnTo>
-                  <a:lnTo>
-                    <a:pt x="3123846" y="3366346"/>
-                  </a:lnTo>
-                  <a:lnTo>
-                    <a:pt x="3195469" y="3375124"/>
-                  </a:lnTo>
-                  <a:lnTo>
-                    <a:pt x="3267091" y="3383246"/>
-                  </a:lnTo>
-                  <a:lnTo>
-                    <a:pt x="3338714" y="3390760"/>
-                  </a:lnTo>
-                  <a:lnTo>
-                    <a:pt x="3410336" y="3397713"/>
-                  </a:lnTo>
-                  <a:lnTo>
-                    <a:pt x="3481959" y="3404146"/>
-                  </a:lnTo>
-                  <a:lnTo>
-                    <a:pt x="3553582" y="3410098"/>
-                  </a:lnTo>
-                  <a:lnTo>
-                    <a:pt x="3625204" y="3415605"/>
-                  </a:lnTo>
-                  <a:lnTo>
-                    <a:pt x="3696827" y="3420700"/>
-                  </a:lnTo>
-                  <a:lnTo>
-                    <a:pt x="3768449" y="3425414"/>
-                  </a:lnTo>
-                  <a:lnTo>
-                    <a:pt x="3840072" y="3429775"/>
-                  </a:lnTo>
-                  <a:lnTo>
-                    <a:pt x="3911694" y="3433811"/>
-                  </a:lnTo>
-                  <a:lnTo>
-                    <a:pt x="3983317" y="3437545"/>
-                  </a:lnTo>
-                  <a:lnTo>
-                    <a:pt x="4054939" y="3440999"/>
-                  </a:lnTo>
-                  <a:lnTo>
-                    <a:pt x="4126562" y="3444196"/>
-                  </a:lnTo>
-                  <a:lnTo>
-                    <a:pt x="4198184" y="3447153"/>
-                  </a:lnTo>
-                  <a:lnTo>
-                    <a:pt x="4269807" y="3449889"/>
-                  </a:lnTo>
-                  <a:lnTo>
-                    <a:pt x="4341429" y="3452421"/>
-                  </a:lnTo>
-                  <a:lnTo>
-                    <a:pt x="4413052" y="3454763"/>
-                  </a:lnTo>
-                  <a:lnTo>
-                    <a:pt x="4484674" y="3456930"/>
-                  </a:lnTo>
-                  <a:lnTo>
-                    <a:pt x="4556297" y="3458935"/>
-                  </a:lnTo>
-                  <a:lnTo>
-                    <a:pt x="4627919" y="3460790"/>
-                  </a:lnTo>
-                  <a:lnTo>
-                    <a:pt x="4699542" y="3462507"/>
-                  </a:lnTo>
-                  <a:lnTo>
-                    <a:pt x="4771164" y="3464095"/>
-                  </a:lnTo>
-                  <a:lnTo>
-                    <a:pt x="4842787" y="3465564"/>
-                  </a:lnTo>
-                  <a:lnTo>
-                    <a:pt x="4914410" y="3466924"/>
-                  </a:lnTo>
-                  <a:lnTo>
-                    <a:pt x="4986032" y="3468182"/>
-                  </a:lnTo>
-                  <a:lnTo>
-                    <a:pt x="5057655" y="3469345"/>
+                    <a:pt x="43291" y="59564"/>
+                  </a:lnTo>
+                  <a:lnTo>
+                    <a:pt x="113636" y="149113"/>
+                  </a:lnTo>
+                  <a:lnTo>
+                    <a:pt x="183980" y="231967"/>
+                  </a:lnTo>
+                  <a:lnTo>
+                    <a:pt x="254325" y="308626"/>
+                  </a:lnTo>
+                  <a:lnTo>
+                    <a:pt x="324669" y="379552"/>
+                  </a:lnTo>
+                  <a:lnTo>
+                    <a:pt x="395014" y="445176"/>
+                  </a:lnTo>
+                  <a:lnTo>
+                    <a:pt x="465358" y="505892"/>
+                  </a:lnTo>
+                  <a:lnTo>
+                    <a:pt x="535703" y="562069"/>
+                  </a:lnTo>
+                  <a:lnTo>
+                    <a:pt x="606047" y="614045"/>
+                  </a:lnTo>
+                  <a:lnTo>
+                    <a:pt x="676392" y="662135"/>
+                  </a:lnTo>
+                  <a:lnTo>
+                    <a:pt x="746736" y="706629"/>
+                  </a:lnTo>
+                  <a:lnTo>
+                    <a:pt x="817081" y="747796"/>
+                  </a:lnTo>
+                  <a:lnTo>
+                    <a:pt x="887425" y="785885"/>
+                  </a:lnTo>
+                  <a:lnTo>
+                    <a:pt x="957770" y="821126"/>
+                  </a:lnTo>
+                  <a:lnTo>
+                    <a:pt x="1028114" y="853733"/>
+                  </a:lnTo>
+                  <a:lnTo>
+                    <a:pt x="1098459" y="883901"/>
+                  </a:lnTo>
+                  <a:lnTo>
+                    <a:pt x="1168803" y="911813"/>
+                  </a:lnTo>
+                  <a:lnTo>
+                    <a:pt x="1239148" y="937638"/>
+                  </a:lnTo>
+                  <a:lnTo>
+                    <a:pt x="1309492" y="961533"/>
+                  </a:lnTo>
+                  <a:lnTo>
+                    <a:pt x="1379837" y="983640"/>
+                  </a:lnTo>
+                  <a:lnTo>
+                    <a:pt x="1450181" y="1004095"/>
+                  </a:lnTo>
+                  <a:lnTo>
+                    <a:pt x="1520526" y="1023020"/>
+                  </a:lnTo>
+                  <a:lnTo>
+                    <a:pt x="1590870" y="1040530"/>
+                  </a:lnTo>
+                  <a:lnTo>
+                    <a:pt x="1661214" y="1056731"/>
+                  </a:lnTo>
+                  <a:lnTo>
+                    <a:pt x="1731559" y="1071721"/>
+                  </a:lnTo>
+                  <a:lnTo>
+                    <a:pt x="1801903" y="1085589"/>
+                  </a:lnTo>
+                  <a:lnTo>
+                    <a:pt x="1872248" y="1098421"/>
+                  </a:lnTo>
+                  <a:lnTo>
+                    <a:pt x="1942592" y="1110293"/>
+                  </a:lnTo>
+                  <a:lnTo>
+                    <a:pt x="2012937" y="1121278"/>
+                  </a:lnTo>
+                  <a:lnTo>
+                    <a:pt x="2083281" y="1131441"/>
+                  </a:lnTo>
+                  <a:lnTo>
+                    <a:pt x="2153626" y="1140845"/>
+                  </a:lnTo>
+                  <a:lnTo>
+                    <a:pt x="2223970" y="1149545"/>
+                  </a:lnTo>
+                  <a:lnTo>
+                    <a:pt x="2294315" y="1157595"/>
+                  </a:lnTo>
+                  <a:lnTo>
+                    <a:pt x="2364659" y="1165042"/>
+                  </a:lnTo>
+                  <a:lnTo>
+                    <a:pt x="2435004" y="1171933"/>
+                  </a:lnTo>
+                  <a:lnTo>
+                    <a:pt x="2505348" y="1178309"/>
+                  </a:lnTo>
+                  <a:lnTo>
+                    <a:pt x="2575693" y="1184208"/>
+                  </a:lnTo>
+                  <a:lnTo>
+                    <a:pt x="2646037" y="1189666"/>
+                  </a:lnTo>
+                  <a:lnTo>
+                    <a:pt x="2716382" y="1194716"/>
+                  </a:lnTo>
+                  <a:lnTo>
+                    <a:pt x="2786726" y="1199388"/>
+                  </a:lnTo>
+                  <a:lnTo>
+                    <a:pt x="2857071" y="1203711"/>
+                  </a:lnTo>
+                  <a:lnTo>
+                    <a:pt x="2927415" y="1207710"/>
+                  </a:lnTo>
+                  <a:lnTo>
+                    <a:pt x="2997760" y="1211411"/>
+                  </a:lnTo>
+                  <a:lnTo>
+                    <a:pt x="3068104" y="1214835"/>
+                  </a:lnTo>
+                  <a:lnTo>
+                    <a:pt x="3138449" y="1218003"/>
+                  </a:lnTo>
+                  <a:lnTo>
+                    <a:pt x="3208793" y="1220934"/>
+                  </a:lnTo>
+                  <a:lnTo>
+                    <a:pt x="3279138" y="1223645"/>
+                  </a:lnTo>
+                  <a:lnTo>
+                    <a:pt x="3349482" y="1226154"/>
+                  </a:lnTo>
+                  <a:lnTo>
+                    <a:pt x="3419827" y="1228476"/>
+                  </a:lnTo>
+                  <a:lnTo>
+                    <a:pt x="3490171" y="1230624"/>
+                  </a:lnTo>
+                  <a:lnTo>
+                    <a:pt x="3560516" y="1232611"/>
+                  </a:lnTo>
+                  <a:lnTo>
+                    <a:pt x="3630860" y="1234450"/>
+                  </a:lnTo>
+                  <a:lnTo>
+                    <a:pt x="3701205" y="1236151"/>
+                  </a:lnTo>
+                  <a:lnTo>
+                    <a:pt x="3771549" y="1237725"/>
+                  </a:lnTo>
+                  <a:lnTo>
+                    <a:pt x="3841894" y="1239181"/>
+                  </a:lnTo>
+                  <a:lnTo>
+                    <a:pt x="3912238" y="1240529"/>
+                  </a:lnTo>
+                  <a:lnTo>
+                    <a:pt x="3982583" y="1241775"/>
+                  </a:lnTo>
+                  <a:lnTo>
+                    <a:pt x="4052927" y="1242929"/>
+                  </a:lnTo>
+                  <a:lnTo>
+                    <a:pt x="4123272" y="1243996"/>
+                  </a:lnTo>
+                  <a:lnTo>
+                    <a:pt x="4193616" y="1244983"/>
+                  </a:lnTo>
+                  <a:lnTo>
+                    <a:pt x="4263961" y="1245897"/>
+                  </a:lnTo>
+                  <a:lnTo>
+                    <a:pt x="4334305" y="1246742"/>
+                  </a:lnTo>
+                  <a:lnTo>
+                    <a:pt x="4404650" y="1247524"/>
+                  </a:lnTo>
+                  <a:lnTo>
+                    <a:pt x="4474994" y="1248248"/>
+                  </a:lnTo>
+                  <a:lnTo>
+                    <a:pt x="4545339" y="1248917"/>
+                  </a:lnTo>
+                  <a:lnTo>
+                    <a:pt x="4615683" y="1249537"/>
+                  </a:lnTo>
+                  <a:lnTo>
+                    <a:pt x="4686028" y="1250110"/>
+                  </a:lnTo>
+                  <a:lnTo>
+                    <a:pt x="4756372" y="1250640"/>
+                  </a:lnTo>
+                  <a:lnTo>
+                    <a:pt x="4826717" y="1251131"/>
+                  </a:lnTo>
+                  <a:lnTo>
+                    <a:pt x="4897061" y="1251585"/>
+                  </a:lnTo>
+                  <a:lnTo>
+                    <a:pt x="4967406" y="1252005"/>
                   </a:lnTo>
                 </a:path>
               </a:pathLst>
@@ -4202,27 +4237,27 @@
         </p:sp>
         <p:sp>
           <p:nvSpPr>
-            <p:cNvPr id="24" name="pl24"/>
+            <p:cNvPr id="25" name="pl25"/>
             <p:cNvSpPr/>
             <p:nvPr/>
           </p:nvSpPr>
           <p:spPr>
             <a:xfrm>
-              <a:off x="817517" y="4727786"/>
-              <a:ext cx="7799693" cy="0"/>
+              <a:off x="887106" y="3100960"/>
+              <a:ext cx="7660515" cy="0"/>
             </a:xfrm>
             <a:custGeom>
               <a:avLst/>
               <a:pathLst>
-                <a:path w="7799693" h="0">
+                <a:path w="7660515" h="0">
                   <a:moveTo>
                     <a:pt x="0" y="0"/>
                   </a:moveTo>
                   <a:lnTo>
-                    <a:pt x="7799693" y="0"/>
-                  </a:lnTo>
-                  <a:lnTo>
-                    <a:pt x="7799693" y="0"/>
+                    <a:pt x="7660515" y="0"/>
+                  </a:lnTo>
+                  <a:lnTo>
+                    <a:pt x="7660515" y="0"/>
                   </a:lnTo>
                 </a:path>
               </a:pathLst>
@@ -4245,21 +4280,21 @@
         </p:sp>
         <p:sp>
           <p:nvSpPr>
-            <p:cNvPr id="25" name="pl25"/>
+            <p:cNvPr id="26" name="pl26"/>
             <p:cNvSpPr/>
             <p:nvPr/>
           </p:nvSpPr>
           <p:spPr>
             <a:xfrm>
-              <a:off x="4526955" y="2073503"/>
-              <a:ext cx="0" cy="3649639"/>
+              <a:off x="4530353" y="2143092"/>
+              <a:ext cx="0" cy="1317069"/>
             </a:xfrm>
             <a:custGeom>
               <a:avLst/>
               <a:pathLst>
-                <a:path w="0" h="3649639">
+                <a:path w="0" h="1317069">
                   <a:moveTo>
-                    <a:pt x="0" y="3649639"/>
+                    <a:pt x="0" y="1317069"/>
                   </a:moveTo>
                   <a:lnTo>
                     <a:pt x="0" y="0"/>
@@ -4288,13 +4323,13 @@
         </p:sp>
         <p:sp>
           <p:nvSpPr>
-            <p:cNvPr id="26" name="tx26"/>
+            <p:cNvPr id="27" name="tx27"/>
             <p:cNvSpPr/>
             <p:nvPr/>
           </p:nvSpPr>
           <p:spPr>
             <a:xfrm>
-              <a:off x="692708" y="5517199"/>
+              <a:off x="762297" y="3360243"/>
               <a:ext cx="62179" cy="80101"/>
             </a:xfrm>
             <a:prstGeom prst="rect">
@@ -4334,13 +4369,13 @@
         </p:sp>
         <p:sp>
           <p:nvSpPr>
-            <p:cNvPr id="27" name="tx27"/>
+            <p:cNvPr id="28" name="tx28"/>
             <p:cNvSpPr/>
             <p:nvPr/>
           </p:nvSpPr>
           <p:spPr>
             <a:xfrm>
-              <a:off x="692708" y="4687735"/>
+              <a:off x="762297" y="3060909"/>
               <a:ext cx="62179" cy="80101"/>
             </a:xfrm>
             <a:prstGeom prst="rect">
@@ -4380,13 +4415,13 @@
         </p:sp>
         <p:sp>
           <p:nvSpPr>
-            <p:cNvPr id="28" name="tx28"/>
+            <p:cNvPr id="29" name="tx29"/>
             <p:cNvSpPr/>
             <p:nvPr/>
           </p:nvSpPr>
           <p:spPr>
             <a:xfrm>
-              <a:off x="692708" y="3858272"/>
+              <a:off x="762297" y="2761575"/>
               <a:ext cx="62179" cy="80101"/>
             </a:xfrm>
             <a:prstGeom prst="rect">
@@ -4426,13 +4461,13 @@
         </p:sp>
         <p:sp>
           <p:nvSpPr>
-            <p:cNvPr id="29" name="tx29"/>
+            <p:cNvPr id="30" name="tx30"/>
             <p:cNvSpPr/>
             <p:nvPr/>
           </p:nvSpPr>
           <p:spPr>
             <a:xfrm>
-              <a:off x="692708" y="3028808"/>
+              <a:off x="762297" y="2462242"/>
               <a:ext cx="62179" cy="80101"/>
             </a:xfrm>
             <a:prstGeom prst="rect">
@@ -4472,13 +4507,13 @@
         </p:sp>
         <p:sp>
           <p:nvSpPr>
-            <p:cNvPr id="30" name="tx30"/>
+            <p:cNvPr id="31" name="tx31"/>
             <p:cNvSpPr/>
             <p:nvPr/>
           </p:nvSpPr>
           <p:spPr>
             <a:xfrm>
-              <a:off x="692708" y="2199345"/>
+              <a:off x="762297" y="2162908"/>
               <a:ext cx="62179" cy="80101"/>
             </a:xfrm>
             <a:prstGeom prst="rect">
@@ -4518,13 +4553,13 @@
         </p:sp>
         <p:sp>
           <p:nvSpPr>
-            <p:cNvPr id="31" name="tx31"/>
+            <p:cNvPr id="32" name="tx32"/>
             <p:cNvSpPr/>
             <p:nvPr/>
           </p:nvSpPr>
           <p:spPr>
             <a:xfrm>
-              <a:off x="2421884" y="5785772"/>
+              <a:off x="2461403" y="3522791"/>
               <a:ext cx="161574" cy="80101"/>
             </a:xfrm>
             <a:prstGeom prst="rect">
@@ -4564,13 +4599,13 @@
         </p:sp>
         <p:sp>
           <p:nvSpPr>
-            <p:cNvPr id="32" name="tx32"/>
+            <p:cNvPr id="33" name="tx33"/>
             <p:cNvSpPr/>
             <p:nvPr/>
           </p:nvSpPr>
           <p:spPr>
             <a:xfrm>
-              <a:off x="4542539" y="5785772"/>
+              <a:off x="4545104" y="3522791"/>
               <a:ext cx="62179" cy="80101"/>
             </a:xfrm>
             <a:prstGeom prst="rect">
@@ -4610,13 +4645,13 @@
         </p:sp>
         <p:sp>
           <p:nvSpPr>
-            <p:cNvPr id="33" name="tx33"/>
+            <p:cNvPr id="34" name="tx34"/>
             <p:cNvSpPr/>
             <p:nvPr/>
           </p:nvSpPr>
           <p:spPr>
             <a:xfrm>
-              <a:off x="6582407" y="5785772"/>
+              <a:off x="6548017" y="3522791"/>
               <a:ext cx="124358" cy="80101"/>
             </a:xfrm>
             <a:prstGeom prst="rect">
@@ -4656,13 +4691,13 @@
         </p:sp>
         <p:sp>
           <p:nvSpPr>
-            <p:cNvPr id="34" name="tx34"/>
+            <p:cNvPr id="35" name="tx35"/>
             <p:cNvSpPr/>
             <p:nvPr/>
           </p:nvSpPr>
           <p:spPr>
             <a:xfrm>
-              <a:off x="2928340" y="5925448"/>
+              <a:off x="2928340" y="3662467"/>
               <a:ext cx="3578047" cy="100218"/>
             </a:xfrm>
             <a:prstGeom prst="rect">
@@ -4702,13 +4737,13 @@
         </p:sp>
         <p:sp>
           <p:nvSpPr>
-            <p:cNvPr id="35" name="tx35"/>
+            <p:cNvPr id="36" name="tx36"/>
             <p:cNvSpPr/>
             <p:nvPr/>
           </p:nvSpPr>
           <p:spPr>
             <a:xfrm rot="-5400000">
-              <a:off x="181100" y="3848213"/>
+              <a:off x="250689" y="2751517"/>
               <a:ext cx="791596" cy="100218"/>
             </a:xfrm>
             <a:prstGeom prst="rect">
@@ -4748,13 +4783,13 @@
         </p:sp>
         <p:sp>
           <p:nvSpPr>
-            <p:cNvPr id="36" name="tx36"/>
+            <p:cNvPr id="37" name="tx37"/>
             <p:cNvSpPr/>
             <p:nvPr/>
           </p:nvSpPr>
           <p:spPr>
             <a:xfrm>
-              <a:off x="817517" y="1896563"/>
+              <a:off x="887106" y="1966152"/>
               <a:ext cx="6994977" cy="82021"/>
             </a:xfrm>
             <a:prstGeom prst="rect">
@@ -4794,13 +4829,3380 @@
         </p:sp>
         <p:sp>
           <p:nvSpPr>
-            <p:cNvPr id="37" name="tx37"/>
+            <p:cNvPr id="38" name="tx38"/>
             <p:cNvSpPr/>
             <p:nvPr/>
           </p:nvSpPr>
           <p:spPr>
             <a:xfrm>
-              <a:off x="817517" y="1669789"/>
+              <a:off x="887106" y="1739378"/>
+              <a:ext cx="2783799" cy="120152"/>
+            </a:xfrm>
+            <a:prstGeom prst="rect">
+              <a:avLst/>
+            </a:prstGeom>
+            <a:noFill/>
+          </p:spPr>
+          <p:txBody>
+            <a:bodyPr lIns="0" rIns="0" tIns="0" bIns="0" anchorCtr="1" anchor="ctr" wrap="none"/>
+            <a:lstStyle/>
+            <a:p>
+              <a:pPr algn="l" marL="0" marR="0" indent="0">
+                <a:lnSpc>
+                  <a:spcPts val="1320"/>
+                </a:lnSpc>
+                <a:spcBef>
+                  <a:spcPts val="0"/>
+                </a:spcBef>
+                <a:spcAft>
+                  <a:spcPts val="0"/>
+                </a:spcAft>
+              </a:pPr>
+              <a:r>
+                <a:rPr sz="1320">
+                  <a:solidFill>
+                    <a:srgbClr val="000000">
+                      <a:alpha val="100000"/>
+                    </a:srgbClr>
+                  </a:solidFill>
+                  <a:latin typeface="Helvetica"/>
+                  <a:cs typeface="Helvetica"/>
+                </a:rPr>
+                <a:t>90-Day Death (Cox PH) (Carboplatin)</a:t>
+              </a:r>
+            </a:p>
+          </p:txBody>
+        </p:sp>
+        <p:sp>
+          <p:nvSpPr>
+            <p:cNvPr id="39" name="pl39"/>
+            <p:cNvSpPr/>
+            <p:nvPr/>
+          </p:nvSpPr>
+          <p:spPr>
+            <a:xfrm>
+              <a:off x="887106" y="5444019"/>
+              <a:ext cx="7660515" cy="0"/>
+            </a:xfrm>
+            <a:custGeom>
+              <a:avLst/>
+              <a:pathLst>
+                <a:path w="7660515" h="0">
+                  <a:moveTo>
+                    <a:pt x="0" y="0"/>
+                  </a:moveTo>
+                  <a:lnTo>
+                    <a:pt x="7660515" y="0"/>
+                  </a:lnTo>
+                  <a:lnTo>
+                    <a:pt x="7660515" y="0"/>
+                  </a:lnTo>
+                </a:path>
+              </a:pathLst>
+            </a:custGeom>
+            <a:ln w="6775" cap="flat">
+              <a:solidFill>
+                <a:srgbClr val="EBEBEB">
+                  <a:alpha val="100000"/>
+                </a:srgbClr>
+              </a:solidFill>
+              <a:prstDash val="solid"/>
+              <a:round/>
+            </a:ln>
+          </p:spPr>
+          <p:txBody>
+            <a:bodyPr/>
+            <a:lstStyle/>
+            <a:p/>
+          </p:txBody>
+        </p:sp>
+        <p:sp>
+          <p:nvSpPr>
+            <p:cNvPr id="40" name="pl40"/>
+            <p:cNvSpPr/>
+            <p:nvPr/>
+          </p:nvSpPr>
+          <p:spPr>
+            <a:xfrm>
+              <a:off x="887106" y="5144686"/>
+              <a:ext cx="7660515" cy="0"/>
+            </a:xfrm>
+            <a:custGeom>
+              <a:avLst/>
+              <a:pathLst>
+                <a:path w="7660515" h="0">
+                  <a:moveTo>
+                    <a:pt x="0" y="0"/>
+                  </a:moveTo>
+                  <a:lnTo>
+                    <a:pt x="7660515" y="0"/>
+                  </a:lnTo>
+                  <a:lnTo>
+                    <a:pt x="7660515" y="0"/>
+                  </a:lnTo>
+                </a:path>
+              </a:pathLst>
+            </a:custGeom>
+            <a:ln w="6775" cap="flat">
+              <a:solidFill>
+                <a:srgbClr val="EBEBEB">
+                  <a:alpha val="100000"/>
+                </a:srgbClr>
+              </a:solidFill>
+              <a:prstDash val="solid"/>
+              <a:round/>
+            </a:ln>
+          </p:spPr>
+          <p:txBody>
+            <a:bodyPr/>
+            <a:lstStyle/>
+            <a:p/>
+          </p:txBody>
+        </p:sp>
+        <p:sp>
+          <p:nvSpPr>
+            <p:cNvPr id="41" name="pl41"/>
+            <p:cNvSpPr/>
+            <p:nvPr/>
+          </p:nvSpPr>
+          <p:spPr>
+            <a:xfrm>
+              <a:off x="887106" y="4845352"/>
+              <a:ext cx="7660515" cy="0"/>
+            </a:xfrm>
+            <a:custGeom>
+              <a:avLst/>
+              <a:pathLst>
+                <a:path w="7660515" h="0">
+                  <a:moveTo>
+                    <a:pt x="0" y="0"/>
+                  </a:moveTo>
+                  <a:lnTo>
+                    <a:pt x="7660515" y="0"/>
+                  </a:lnTo>
+                  <a:lnTo>
+                    <a:pt x="7660515" y="0"/>
+                  </a:lnTo>
+                </a:path>
+              </a:pathLst>
+            </a:custGeom>
+            <a:ln w="6775" cap="flat">
+              <a:solidFill>
+                <a:srgbClr val="EBEBEB">
+                  <a:alpha val="100000"/>
+                </a:srgbClr>
+              </a:solidFill>
+              <a:prstDash val="solid"/>
+              <a:round/>
+            </a:ln>
+          </p:spPr>
+          <p:txBody>
+            <a:bodyPr/>
+            <a:lstStyle/>
+            <a:p/>
+          </p:txBody>
+        </p:sp>
+        <p:sp>
+          <p:nvSpPr>
+            <p:cNvPr id="42" name="pl42"/>
+            <p:cNvSpPr/>
+            <p:nvPr/>
+          </p:nvSpPr>
+          <p:spPr>
+            <a:xfrm>
+              <a:off x="887106" y="4546018"/>
+              <a:ext cx="7660515" cy="0"/>
+            </a:xfrm>
+            <a:custGeom>
+              <a:avLst/>
+              <a:pathLst>
+                <a:path w="7660515" h="0">
+                  <a:moveTo>
+                    <a:pt x="0" y="0"/>
+                  </a:moveTo>
+                  <a:lnTo>
+                    <a:pt x="7660515" y="0"/>
+                  </a:lnTo>
+                  <a:lnTo>
+                    <a:pt x="7660515" y="0"/>
+                  </a:lnTo>
+                </a:path>
+              </a:pathLst>
+            </a:custGeom>
+            <a:ln w="6775" cap="flat">
+              <a:solidFill>
+                <a:srgbClr val="EBEBEB">
+                  <a:alpha val="100000"/>
+                </a:srgbClr>
+              </a:solidFill>
+              <a:prstDash val="solid"/>
+              <a:round/>
+            </a:ln>
+          </p:spPr>
+          <p:txBody>
+            <a:bodyPr/>
+            <a:lstStyle/>
+            <a:p/>
+          </p:txBody>
+        </p:sp>
+        <p:sp>
+          <p:nvSpPr>
+            <p:cNvPr id="43" name="pl43"/>
+            <p:cNvSpPr/>
+            <p:nvPr/>
+          </p:nvSpPr>
+          <p:spPr>
+            <a:xfrm>
+              <a:off x="914987" y="4336484"/>
+              <a:ext cx="0" cy="1317069"/>
+            </a:xfrm>
+            <a:custGeom>
+              <a:avLst/>
+              <a:pathLst>
+                <a:path w="0" h="1317069">
+                  <a:moveTo>
+                    <a:pt x="0" y="1317069"/>
+                  </a:moveTo>
+                  <a:lnTo>
+                    <a:pt x="0" y="0"/>
+                  </a:lnTo>
+                  <a:lnTo>
+                    <a:pt x="0" y="0"/>
+                  </a:lnTo>
+                </a:path>
+              </a:pathLst>
+            </a:custGeom>
+            <a:ln w="6775" cap="flat">
+              <a:solidFill>
+                <a:srgbClr val="EBEBEB">
+                  <a:alpha val="100000"/>
+                </a:srgbClr>
+              </a:solidFill>
+              <a:prstDash val="solid"/>
+              <a:round/>
+            </a:ln>
+          </p:spPr>
+          <p:txBody>
+            <a:bodyPr/>
+            <a:lstStyle/>
+            <a:p/>
+          </p:txBody>
+        </p:sp>
+        <p:sp>
+          <p:nvSpPr>
+            <p:cNvPr id="44" name="pl44"/>
+            <p:cNvSpPr/>
+            <p:nvPr/>
+          </p:nvSpPr>
+          <p:spPr>
+            <a:xfrm>
+              <a:off x="1728588" y="4336484"/>
+              <a:ext cx="0" cy="1317069"/>
+            </a:xfrm>
+            <a:custGeom>
+              <a:avLst/>
+              <a:pathLst>
+                <a:path w="0" h="1317069">
+                  <a:moveTo>
+                    <a:pt x="0" y="1317069"/>
+                  </a:moveTo>
+                  <a:lnTo>
+                    <a:pt x="0" y="0"/>
+                  </a:lnTo>
+                  <a:lnTo>
+                    <a:pt x="0" y="0"/>
+                  </a:lnTo>
+                </a:path>
+              </a:pathLst>
+            </a:custGeom>
+            <a:ln w="6775" cap="flat">
+              <a:solidFill>
+                <a:srgbClr val="EBEBEB">
+                  <a:alpha val="100000"/>
+                </a:srgbClr>
+              </a:solidFill>
+              <a:prstDash val="solid"/>
+              <a:round/>
+            </a:ln>
+          </p:spPr>
+          <p:txBody>
+            <a:bodyPr/>
+            <a:lstStyle/>
+            <a:p/>
+          </p:txBody>
+        </p:sp>
+        <p:sp>
+          <p:nvSpPr>
+            <p:cNvPr id="45" name="pl45"/>
+            <p:cNvSpPr/>
+            <p:nvPr/>
+          </p:nvSpPr>
+          <p:spPr>
+            <a:xfrm>
+              <a:off x="2542190" y="4336484"/>
+              <a:ext cx="0" cy="1317069"/>
+            </a:xfrm>
+            <a:custGeom>
+              <a:avLst/>
+              <a:pathLst>
+                <a:path w="0" h="1317069">
+                  <a:moveTo>
+                    <a:pt x="0" y="1317069"/>
+                  </a:moveTo>
+                  <a:lnTo>
+                    <a:pt x="0" y="0"/>
+                  </a:lnTo>
+                  <a:lnTo>
+                    <a:pt x="0" y="0"/>
+                  </a:lnTo>
+                </a:path>
+              </a:pathLst>
+            </a:custGeom>
+            <a:ln w="6775" cap="flat">
+              <a:solidFill>
+                <a:srgbClr val="EBEBEB">
+                  <a:alpha val="100000"/>
+                </a:srgbClr>
+              </a:solidFill>
+              <a:prstDash val="solid"/>
+              <a:round/>
+            </a:ln>
+          </p:spPr>
+          <p:txBody>
+            <a:bodyPr/>
+            <a:lstStyle/>
+            <a:p/>
+          </p:txBody>
+        </p:sp>
+        <p:sp>
+          <p:nvSpPr>
+            <p:cNvPr id="46" name="pl46"/>
+            <p:cNvSpPr/>
+            <p:nvPr/>
+          </p:nvSpPr>
+          <p:spPr>
+            <a:xfrm>
+              <a:off x="3355791" y="4336484"/>
+              <a:ext cx="0" cy="1317069"/>
+            </a:xfrm>
+            <a:custGeom>
+              <a:avLst/>
+              <a:pathLst>
+                <a:path w="0" h="1317069">
+                  <a:moveTo>
+                    <a:pt x="0" y="1317069"/>
+                  </a:moveTo>
+                  <a:lnTo>
+                    <a:pt x="0" y="0"/>
+                  </a:lnTo>
+                  <a:lnTo>
+                    <a:pt x="0" y="0"/>
+                  </a:lnTo>
+                </a:path>
+              </a:pathLst>
+            </a:custGeom>
+            <a:ln w="6775" cap="flat">
+              <a:solidFill>
+                <a:srgbClr val="EBEBEB">
+                  <a:alpha val="100000"/>
+                </a:srgbClr>
+              </a:solidFill>
+              <a:prstDash val="solid"/>
+              <a:round/>
+            </a:ln>
+          </p:spPr>
+          <p:txBody>
+            <a:bodyPr/>
+            <a:lstStyle/>
+            <a:p/>
+          </p:txBody>
+        </p:sp>
+        <p:sp>
+          <p:nvSpPr>
+            <p:cNvPr id="47" name="pl47"/>
+            <p:cNvSpPr/>
+            <p:nvPr/>
+          </p:nvSpPr>
+          <p:spPr>
+            <a:xfrm>
+              <a:off x="4169393" y="4336484"/>
+              <a:ext cx="0" cy="1317069"/>
+            </a:xfrm>
+            <a:custGeom>
+              <a:avLst/>
+              <a:pathLst>
+                <a:path w="0" h="1317069">
+                  <a:moveTo>
+                    <a:pt x="0" y="1317069"/>
+                  </a:moveTo>
+                  <a:lnTo>
+                    <a:pt x="0" y="0"/>
+                  </a:lnTo>
+                  <a:lnTo>
+                    <a:pt x="0" y="0"/>
+                  </a:lnTo>
+                </a:path>
+              </a:pathLst>
+            </a:custGeom>
+            <a:ln w="6775" cap="flat">
+              <a:solidFill>
+                <a:srgbClr val="EBEBEB">
+                  <a:alpha val="100000"/>
+                </a:srgbClr>
+              </a:solidFill>
+              <a:prstDash val="solid"/>
+              <a:round/>
+            </a:ln>
+          </p:spPr>
+          <p:txBody>
+            <a:bodyPr/>
+            <a:lstStyle/>
+            <a:p/>
+          </p:txBody>
+        </p:sp>
+        <p:sp>
+          <p:nvSpPr>
+            <p:cNvPr id="48" name="pl48"/>
+            <p:cNvSpPr/>
+            <p:nvPr/>
+          </p:nvSpPr>
+          <p:spPr>
+            <a:xfrm>
+              <a:off x="4982994" y="4336484"/>
+              <a:ext cx="0" cy="1317069"/>
+            </a:xfrm>
+            <a:custGeom>
+              <a:avLst/>
+              <a:pathLst>
+                <a:path w="0" h="1317069">
+                  <a:moveTo>
+                    <a:pt x="0" y="1317069"/>
+                  </a:moveTo>
+                  <a:lnTo>
+                    <a:pt x="0" y="0"/>
+                  </a:lnTo>
+                  <a:lnTo>
+                    <a:pt x="0" y="0"/>
+                  </a:lnTo>
+                </a:path>
+              </a:pathLst>
+            </a:custGeom>
+            <a:ln w="6775" cap="flat">
+              <a:solidFill>
+                <a:srgbClr val="EBEBEB">
+                  <a:alpha val="100000"/>
+                </a:srgbClr>
+              </a:solidFill>
+              <a:prstDash val="solid"/>
+              <a:round/>
+            </a:ln>
+          </p:spPr>
+          <p:txBody>
+            <a:bodyPr/>
+            <a:lstStyle/>
+            <a:p/>
+          </p:txBody>
+        </p:sp>
+        <p:sp>
+          <p:nvSpPr>
+            <p:cNvPr id="49" name="pl49"/>
+            <p:cNvSpPr/>
+            <p:nvPr/>
+          </p:nvSpPr>
+          <p:spPr>
+            <a:xfrm>
+              <a:off x="5796595" y="4336484"/>
+              <a:ext cx="0" cy="1317069"/>
+            </a:xfrm>
+            <a:custGeom>
+              <a:avLst/>
+              <a:pathLst>
+                <a:path w="0" h="1317069">
+                  <a:moveTo>
+                    <a:pt x="0" y="1317069"/>
+                  </a:moveTo>
+                  <a:lnTo>
+                    <a:pt x="0" y="0"/>
+                  </a:lnTo>
+                  <a:lnTo>
+                    <a:pt x="0" y="0"/>
+                  </a:lnTo>
+                </a:path>
+              </a:pathLst>
+            </a:custGeom>
+            <a:ln w="6775" cap="flat">
+              <a:solidFill>
+                <a:srgbClr val="EBEBEB">
+                  <a:alpha val="100000"/>
+                </a:srgbClr>
+              </a:solidFill>
+              <a:prstDash val="solid"/>
+              <a:round/>
+            </a:ln>
+          </p:spPr>
+          <p:txBody>
+            <a:bodyPr/>
+            <a:lstStyle/>
+            <a:p/>
+          </p:txBody>
+        </p:sp>
+        <p:sp>
+          <p:nvSpPr>
+            <p:cNvPr id="50" name="pl50"/>
+            <p:cNvSpPr/>
+            <p:nvPr/>
+          </p:nvSpPr>
+          <p:spPr>
+            <a:xfrm>
+              <a:off x="6610197" y="4336484"/>
+              <a:ext cx="0" cy="1317069"/>
+            </a:xfrm>
+            <a:custGeom>
+              <a:avLst/>
+              <a:pathLst>
+                <a:path w="0" h="1317069">
+                  <a:moveTo>
+                    <a:pt x="0" y="1317069"/>
+                  </a:moveTo>
+                  <a:lnTo>
+                    <a:pt x="0" y="0"/>
+                  </a:lnTo>
+                  <a:lnTo>
+                    <a:pt x="0" y="0"/>
+                  </a:lnTo>
+                </a:path>
+              </a:pathLst>
+            </a:custGeom>
+            <a:ln w="6775" cap="flat">
+              <a:solidFill>
+                <a:srgbClr val="EBEBEB">
+                  <a:alpha val="100000"/>
+                </a:srgbClr>
+              </a:solidFill>
+              <a:prstDash val="solid"/>
+              <a:round/>
+            </a:ln>
+          </p:spPr>
+          <p:txBody>
+            <a:bodyPr/>
+            <a:lstStyle/>
+            <a:p/>
+          </p:txBody>
+        </p:sp>
+        <p:sp>
+          <p:nvSpPr>
+            <p:cNvPr id="51" name="pl51"/>
+            <p:cNvSpPr/>
+            <p:nvPr/>
+          </p:nvSpPr>
+          <p:spPr>
+            <a:xfrm>
+              <a:off x="7423798" y="4336484"/>
+              <a:ext cx="0" cy="1317069"/>
+            </a:xfrm>
+            <a:custGeom>
+              <a:avLst/>
+              <a:pathLst>
+                <a:path w="0" h="1317069">
+                  <a:moveTo>
+                    <a:pt x="0" y="1317069"/>
+                  </a:moveTo>
+                  <a:lnTo>
+                    <a:pt x="0" y="0"/>
+                  </a:lnTo>
+                  <a:lnTo>
+                    <a:pt x="0" y="0"/>
+                  </a:lnTo>
+                </a:path>
+              </a:pathLst>
+            </a:custGeom>
+            <a:ln w="6775" cap="flat">
+              <a:solidFill>
+                <a:srgbClr val="EBEBEB">
+                  <a:alpha val="100000"/>
+                </a:srgbClr>
+              </a:solidFill>
+              <a:prstDash val="solid"/>
+              <a:round/>
+            </a:ln>
+          </p:spPr>
+          <p:txBody>
+            <a:bodyPr/>
+            <a:lstStyle/>
+            <a:p/>
+          </p:txBody>
+        </p:sp>
+        <p:sp>
+          <p:nvSpPr>
+            <p:cNvPr id="52" name="pl52"/>
+            <p:cNvSpPr/>
+            <p:nvPr/>
+          </p:nvSpPr>
+          <p:spPr>
+            <a:xfrm>
+              <a:off x="8237399" y="4336484"/>
+              <a:ext cx="0" cy="1317069"/>
+            </a:xfrm>
+            <a:custGeom>
+              <a:avLst/>
+              <a:pathLst>
+                <a:path w="0" h="1317069">
+                  <a:moveTo>
+                    <a:pt x="0" y="1317069"/>
+                  </a:moveTo>
+                  <a:lnTo>
+                    <a:pt x="0" y="0"/>
+                  </a:lnTo>
+                  <a:lnTo>
+                    <a:pt x="0" y="0"/>
+                  </a:lnTo>
+                </a:path>
+              </a:pathLst>
+            </a:custGeom>
+            <a:ln w="6775" cap="flat">
+              <a:solidFill>
+                <a:srgbClr val="EBEBEB">
+                  <a:alpha val="100000"/>
+                </a:srgbClr>
+              </a:solidFill>
+              <a:prstDash val="solid"/>
+              <a:round/>
+            </a:ln>
+          </p:spPr>
+          <p:txBody>
+            <a:bodyPr/>
+            <a:lstStyle/>
+            <a:p/>
+          </p:txBody>
+        </p:sp>
+        <p:sp>
+          <p:nvSpPr>
+            <p:cNvPr id="53" name="pl53"/>
+            <p:cNvSpPr/>
+            <p:nvPr/>
+          </p:nvSpPr>
+          <p:spPr>
+            <a:xfrm>
+              <a:off x="887106" y="5593686"/>
+              <a:ext cx="7660515" cy="0"/>
+            </a:xfrm>
+            <a:custGeom>
+              <a:avLst/>
+              <a:pathLst>
+                <a:path w="7660515" h="0">
+                  <a:moveTo>
+                    <a:pt x="0" y="0"/>
+                  </a:moveTo>
+                  <a:lnTo>
+                    <a:pt x="7660515" y="0"/>
+                  </a:lnTo>
+                  <a:lnTo>
+                    <a:pt x="7660515" y="0"/>
+                  </a:lnTo>
+                </a:path>
+              </a:pathLst>
+            </a:custGeom>
+            <a:ln w="13550" cap="flat">
+              <a:solidFill>
+                <a:srgbClr val="EBEBEB">
+                  <a:alpha val="100000"/>
+                </a:srgbClr>
+              </a:solidFill>
+              <a:prstDash val="solid"/>
+              <a:round/>
+            </a:ln>
+          </p:spPr>
+          <p:txBody>
+            <a:bodyPr/>
+            <a:lstStyle/>
+            <a:p/>
+          </p:txBody>
+        </p:sp>
+        <p:sp>
+          <p:nvSpPr>
+            <p:cNvPr id="54" name="pl54"/>
+            <p:cNvSpPr/>
+            <p:nvPr/>
+          </p:nvSpPr>
+          <p:spPr>
+            <a:xfrm>
+              <a:off x="887106" y="5294352"/>
+              <a:ext cx="7660515" cy="0"/>
+            </a:xfrm>
+            <a:custGeom>
+              <a:avLst/>
+              <a:pathLst>
+                <a:path w="7660515" h="0">
+                  <a:moveTo>
+                    <a:pt x="0" y="0"/>
+                  </a:moveTo>
+                  <a:lnTo>
+                    <a:pt x="7660515" y="0"/>
+                  </a:lnTo>
+                  <a:lnTo>
+                    <a:pt x="7660515" y="0"/>
+                  </a:lnTo>
+                </a:path>
+              </a:pathLst>
+            </a:custGeom>
+            <a:ln w="13550" cap="flat">
+              <a:solidFill>
+                <a:srgbClr val="EBEBEB">
+                  <a:alpha val="100000"/>
+                </a:srgbClr>
+              </a:solidFill>
+              <a:prstDash val="solid"/>
+              <a:round/>
+            </a:ln>
+          </p:spPr>
+          <p:txBody>
+            <a:bodyPr/>
+            <a:lstStyle/>
+            <a:p/>
+          </p:txBody>
+        </p:sp>
+        <p:sp>
+          <p:nvSpPr>
+            <p:cNvPr id="55" name="pl55"/>
+            <p:cNvSpPr/>
+            <p:nvPr/>
+          </p:nvSpPr>
+          <p:spPr>
+            <a:xfrm>
+              <a:off x="887106" y="4995019"/>
+              <a:ext cx="7660515" cy="0"/>
+            </a:xfrm>
+            <a:custGeom>
+              <a:avLst/>
+              <a:pathLst>
+                <a:path w="7660515" h="0">
+                  <a:moveTo>
+                    <a:pt x="0" y="0"/>
+                  </a:moveTo>
+                  <a:lnTo>
+                    <a:pt x="7660515" y="0"/>
+                  </a:lnTo>
+                  <a:lnTo>
+                    <a:pt x="7660515" y="0"/>
+                  </a:lnTo>
+                </a:path>
+              </a:pathLst>
+            </a:custGeom>
+            <a:ln w="13550" cap="flat">
+              <a:solidFill>
+                <a:srgbClr val="EBEBEB">
+                  <a:alpha val="100000"/>
+                </a:srgbClr>
+              </a:solidFill>
+              <a:prstDash val="solid"/>
+              <a:round/>
+            </a:ln>
+          </p:spPr>
+          <p:txBody>
+            <a:bodyPr/>
+            <a:lstStyle/>
+            <a:p/>
+          </p:txBody>
+        </p:sp>
+        <p:sp>
+          <p:nvSpPr>
+            <p:cNvPr id="56" name="pl56"/>
+            <p:cNvSpPr/>
+            <p:nvPr/>
+          </p:nvSpPr>
+          <p:spPr>
+            <a:xfrm>
+              <a:off x="887106" y="4695685"/>
+              <a:ext cx="7660515" cy="0"/>
+            </a:xfrm>
+            <a:custGeom>
+              <a:avLst/>
+              <a:pathLst>
+                <a:path w="7660515" h="0">
+                  <a:moveTo>
+                    <a:pt x="0" y="0"/>
+                  </a:moveTo>
+                  <a:lnTo>
+                    <a:pt x="7660515" y="0"/>
+                  </a:lnTo>
+                  <a:lnTo>
+                    <a:pt x="7660515" y="0"/>
+                  </a:lnTo>
+                </a:path>
+              </a:pathLst>
+            </a:custGeom>
+            <a:ln w="13550" cap="flat">
+              <a:solidFill>
+                <a:srgbClr val="EBEBEB">
+                  <a:alpha val="100000"/>
+                </a:srgbClr>
+              </a:solidFill>
+              <a:prstDash val="solid"/>
+              <a:round/>
+            </a:ln>
+          </p:spPr>
+          <p:txBody>
+            <a:bodyPr/>
+            <a:lstStyle/>
+            <a:p/>
+          </p:txBody>
+        </p:sp>
+        <p:sp>
+          <p:nvSpPr>
+            <p:cNvPr id="57" name="pl57"/>
+            <p:cNvSpPr/>
+            <p:nvPr/>
+          </p:nvSpPr>
+          <p:spPr>
+            <a:xfrm>
+              <a:off x="887106" y="4396351"/>
+              <a:ext cx="7660515" cy="0"/>
+            </a:xfrm>
+            <a:custGeom>
+              <a:avLst/>
+              <a:pathLst>
+                <a:path w="7660515" h="0">
+                  <a:moveTo>
+                    <a:pt x="0" y="0"/>
+                  </a:moveTo>
+                  <a:lnTo>
+                    <a:pt x="7660515" y="0"/>
+                  </a:lnTo>
+                  <a:lnTo>
+                    <a:pt x="7660515" y="0"/>
+                  </a:lnTo>
+                </a:path>
+              </a:pathLst>
+            </a:custGeom>
+            <a:ln w="13550" cap="flat">
+              <a:solidFill>
+                <a:srgbClr val="EBEBEB">
+                  <a:alpha val="100000"/>
+                </a:srgbClr>
+              </a:solidFill>
+              <a:prstDash val="solid"/>
+              <a:round/>
+            </a:ln>
+          </p:spPr>
+          <p:txBody>
+            <a:bodyPr/>
+            <a:lstStyle/>
+            <a:p/>
+          </p:txBody>
+        </p:sp>
+        <p:sp>
+          <p:nvSpPr>
+            <p:cNvPr id="58" name="pl58"/>
+            <p:cNvSpPr/>
+            <p:nvPr/>
+          </p:nvSpPr>
+          <p:spPr>
+            <a:xfrm>
+              <a:off x="1321788" y="4336484"/>
+              <a:ext cx="0" cy="1317069"/>
+            </a:xfrm>
+            <a:custGeom>
+              <a:avLst/>
+              <a:pathLst>
+                <a:path w="0" h="1317069">
+                  <a:moveTo>
+                    <a:pt x="0" y="1317069"/>
+                  </a:moveTo>
+                  <a:lnTo>
+                    <a:pt x="0" y="0"/>
+                  </a:lnTo>
+                  <a:lnTo>
+                    <a:pt x="0" y="0"/>
+                  </a:lnTo>
+                </a:path>
+              </a:pathLst>
+            </a:custGeom>
+            <a:ln w="13550" cap="flat">
+              <a:solidFill>
+                <a:srgbClr val="EBEBEB">
+                  <a:alpha val="100000"/>
+                </a:srgbClr>
+              </a:solidFill>
+              <a:prstDash val="solid"/>
+              <a:round/>
+            </a:ln>
+          </p:spPr>
+          <p:txBody>
+            <a:bodyPr/>
+            <a:lstStyle/>
+            <a:p/>
+          </p:txBody>
+        </p:sp>
+        <p:sp>
+          <p:nvSpPr>
+            <p:cNvPr id="59" name="pl59"/>
+            <p:cNvSpPr/>
+            <p:nvPr/>
+          </p:nvSpPr>
+          <p:spPr>
+            <a:xfrm>
+              <a:off x="2135389" y="4336484"/>
+              <a:ext cx="0" cy="1317069"/>
+            </a:xfrm>
+            <a:custGeom>
+              <a:avLst/>
+              <a:pathLst>
+                <a:path w="0" h="1317069">
+                  <a:moveTo>
+                    <a:pt x="0" y="1317069"/>
+                  </a:moveTo>
+                  <a:lnTo>
+                    <a:pt x="0" y="0"/>
+                  </a:lnTo>
+                  <a:lnTo>
+                    <a:pt x="0" y="0"/>
+                  </a:lnTo>
+                </a:path>
+              </a:pathLst>
+            </a:custGeom>
+            <a:ln w="13550" cap="flat">
+              <a:solidFill>
+                <a:srgbClr val="EBEBEB">
+                  <a:alpha val="100000"/>
+                </a:srgbClr>
+              </a:solidFill>
+              <a:prstDash val="solid"/>
+              <a:round/>
+            </a:ln>
+          </p:spPr>
+          <p:txBody>
+            <a:bodyPr/>
+            <a:lstStyle/>
+            <a:p/>
+          </p:txBody>
+        </p:sp>
+        <p:sp>
+          <p:nvSpPr>
+            <p:cNvPr id="60" name="pl60"/>
+            <p:cNvSpPr/>
+            <p:nvPr/>
+          </p:nvSpPr>
+          <p:spPr>
+            <a:xfrm>
+              <a:off x="2948991" y="4336484"/>
+              <a:ext cx="0" cy="1317069"/>
+            </a:xfrm>
+            <a:custGeom>
+              <a:avLst/>
+              <a:pathLst>
+                <a:path w="0" h="1317069">
+                  <a:moveTo>
+                    <a:pt x="0" y="1317069"/>
+                  </a:moveTo>
+                  <a:lnTo>
+                    <a:pt x="0" y="0"/>
+                  </a:lnTo>
+                  <a:lnTo>
+                    <a:pt x="0" y="0"/>
+                  </a:lnTo>
+                </a:path>
+              </a:pathLst>
+            </a:custGeom>
+            <a:ln w="13550" cap="flat">
+              <a:solidFill>
+                <a:srgbClr val="EBEBEB">
+                  <a:alpha val="100000"/>
+                </a:srgbClr>
+              </a:solidFill>
+              <a:prstDash val="solid"/>
+              <a:round/>
+            </a:ln>
+          </p:spPr>
+          <p:txBody>
+            <a:bodyPr/>
+            <a:lstStyle/>
+            <a:p/>
+          </p:txBody>
+        </p:sp>
+        <p:sp>
+          <p:nvSpPr>
+            <p:cNvPr id="61" name="pl61"/>
+            <p:cNvSpPr/>
+            <p:nvPr/>
+          </p:nvSpPr>
+          <p:spPr>
+            <a:xfrm>
+              <a:off x="3762592" y="4336484"/>
+              <a:ext cx="0" cy="1317069"/>
+            </a:xfrm>
+            <a:custGeom>
+              <a:avLst/>
+              <a:pathLst>
+                <a:path w="0" h="1317069">
+                  <a:moveTo>
+                    <a:pt x="0" y="1317069"/>
+                  </a:moveTo>
+                  <a:lnTo>
+                    <a:pt x="0" y="0"/>
+                  </a:lnTo>
+                  <a:lnTo>
+                    <a:pt x="0" y="0"/>
+                  </a:lnTo>
+                </a:path>
+              </a:pathLst>
+            </a:custGeom>
+            <a:ln w="13550" cap="flat">
+              <a:solidFill>
+                <a:srgbClr val="EBEBEB">
+                  <a:alpha val="100000"/>
+                </a:srgbClr>
+              </a:solidFill>
+              <a:prstDash val="solid"/>
+              <a:round/>
+            </a:ln>
+          </p:spPr>
+          <p:txBody>
+            <a:bodyPr/>
+            <a:lstStyle/>
+            <a:p/>
+          </p:txBody>
+        </p:sp>
+        <p:sp>
+          <p:nvSpPr>
+            <p:cNvPr id="62" name="pl62"/>
+            <p:cNvSpPr/>
+            <p:nvPr/>
+          </p:nvSpPr>
+          <p:spPr>
+            <a:xfrm>
+              <a:off x="4576193" y="4336484"/>
+              <a:ext cx="0" cy="1317069"/>
+            </a:xfrm>
+            <a:custGeom>
+              <a:avLst/>
+              <a:pathLst>
+                <a:path w="0" h="1317069">
+                  <a:moveTo>
+                    <a:pt x="0" y="1317069"/>
+                  </a:moveTo>
+                  <a:lnTo>
+                    <a:pt x="0" y="0"/>
+                  </a:lnTo>
+                  <a:lnTo>
+                    <a:pt x="0" y="0"/>
+                  </a:lnTo>
+                </a:path>
+              </a:pathLst>
+            </a:custGeom>
+            <a:ln w="13550" cap="flat">
+              <a:solidFill>
+                <a:srgbClr val="EBEBEB">
+                  <a:alpha val="100000"/>
+                </a:srgbClr>
+              </a:solidFill>
+              <a:prstDash val="solid"/>
+              <a:round/>
+            </a:ln>
+          </p:spPr>
+          <p:txBody>
+            <a:bodyPr/>
+            <a:lstStyle/>
+            <a:p/>
+          </p:txBody>
+        </p:sp>
+        <p:sp>
+          <p:nvSpPr>
+            <p:cNvPr id="63" name="pl63"/>
+            <p:cNvSpPr/>
+            <p:nvPr/>
+          </p:nvSpPr>
+          <p:spPr>
+            <a:xfrm>
+              <a:off x="5389795" y="4336484"/>
+              <a:ext cx="0" cy="1317069"/>
+            </a:xfrm>
+            <a:custGeom>
+              <a:avLst/>
+              <a:pathLst>
+                <a:path w="0" h="1317069">
+                  <a:moveTo>
+                    <a:pt x="0" y="1317069"/>
+                  </a:moveTo>
+                  <a:lnTo>
+                    <a:pt x="0" y="0"/>
+                  </a:lnTo>
+                  <a:lnTo>
+                    <a:pt x="0" y="0"/>
+                  </a:lnTo>
+                </a:path>
+              </a:pathLst>
+            </a:custGeom>
+            <a:ln w="13550" cap="flat">
+              <a:solidFill>
+                <a:srgbClr val="EBEBEB">
+                  <a:alpha val="100000"/>
+                </a:srgbClr>
+              </a:solidFill>
+              <a:prstDash val="solid"/>
+              <a:round/>
+            </a:ln>
+          </p:spPr>
+          <p:txBody>
+            <a:bodyPr/>
+            <a:lstStyle/>
+            <a:p/>
+          </p:txBody>
+        </p:sp>
+        <p:sp>
+          <p:nvSpPr>
+            <p:cNvPr id="64" name="pl64"/>
+            <p:cNvSpPr/>
+            <p:nvPr/>
+          </p:nvSpPr>
+          <p:spPr>
+            <a:xfrm>
+              <a:off x="6203396" y="4336484"/>
+              <a:ext cx="0" cy="1317069"/>
+            </a:xfrm>
+            <a:custGeom>
+              <a:avLst/>
+              <a:pathLst>
+                <a:path w="0" h="1317069">
+                  <a:moveTo>
+                    <a:pt x="0" y="1317069"/>
+                  </a:moveTo>
+                  <a:lnTo>
+                    <a:pt x="0" y="0"/>
+                  </a:lnTo>
+                  <a:lnTo>
+                    <a:pt x="0" y="0"/>
+                  </a:lnTo>
+                </a:path>
+              </a:pathLst>
+            </a:custGeom>
+            <a:ln w="13550" cap="flat">
+              <a:solidFill>
+                <a:srgbClr val="EBEBEB">
+                  <a:alpha val="100000"/>
+                </a:srgbClr>
+              </a:solidFill>
+              <a:prstDash val="solid"/>
+              <a:round/>
+            </a:ln>
+          </p:spPr>
+          <p:txBody>
+            <a:bodyPr/>
+            <a:lstStyle/>
+            <a:p/>
+          </p:txBody>
+        </p:sp>
+        <p:sp>
+          <p:nvSpPr>
+            <p:cNvPr id="65" name="pl65"/>
+            <p:cNvSpPr/>
+            <p:nvPr/>
+          </p:nvSpPr>
+          <p:spPr>
+            <a:xfrm>
+              <a:off x="7016997" y="4336484"/>
+              <a:ext cx="0" cy="1317069"/>
+            </a:xfrm>
+            <a:custGeom>
+              <a:avLst/>
+              <a:pathLst>
+                <a:path w="0" h="1317069">
+                  <a:moveTo>
+                    <a:pt x="0" y="1317069"/>
+                  </a:moveTo>
+                  <a:lnTo>
+                    <a:pt x="0" y="0"/>
+                  </a:lnTo>
+                  <a:lnTo>
+                    <a:pt x="0" y="0"/>
+                  </a:lnTo>
+                </a:path>
+              </a:pathLst>
+            </a:custGeom>
+            <a:ln w="13550" cap="flat">
+              <a:solidFill>
+                <a:srgbClr val="EBEBEB">
+                  <a:alpha val="100000"/>
+                </a:srgbClr>
+              </a:solidFill>
+              <a:prstDash val="solid"/>
+              <a:round/>
+            </a:ln>
+          </p:spPr>
+          <p:txBody>
+            <a:bodyPr/>
+            <a:lstStyle/>
+            <a:p/>
+          </p:txBody>
+        </p:sp>
+        <p:sp>
+          <p:nvSpPr>
+            <p:cNvPr id="66" name="pl66"/>
+            <p:cNvSpPr/>
+            <p:nvPr/>
+          </p:nvSpPr>
+          <p:spPr>
+            <a:xfrm>
+              <a:off x="7830599" y="4336484"/>
+              <a:ext cx="0" cy="1317069"/>
+            </a:xfrm>
+            <a:custGeom>
+              <a:avLst/>
+              <a:pathLst>
+                <a:path w="0" h="1317069">
+                  <a:moveTo>
+                    <a:pt x="0" y="1317069"/>
+                  </a:moveTo>
+                  <a:lnTo>
+                    <a:pt x="0" y="0"/>
+                  </a:lnTo>
+                  <a:lnTo>
+                    <a:pt x="0" y="0"/>
+                  </a:lnTo>
+                </a:path>
+              </a:pathLst>
+            </a:custGeom>
+            <a:ln w="13550" cap="flat">
+              <a:solidFill>
+                <a:srgbClr val="EBEBEB">
+                  <a:alpha val="100000"/>
+                </a:srgbClr>
+              </a:solidFill>
+              <a:prstDash val="solid"/>
+              <a:round/>
+            </a:ln>
+          </p:spPr>
+          <p:txBody>
+            <a:bodyPr/>
+            <a:lstStyle/>
+            <a:p/>
+          </p:txBody>
+        </p:sp>
+        <p:sp>
+          <p:nvSpPr>
+            <p:cNvPr id="67" name="pg67"/>
+            <p:cNvSpPr/>
+            <p:nvPr/>
+          </p:nvSpPr>
+          <p:spPr>
+            <a:xfrm>
+              <a:off x="2211287" y="4336484"/>
+              <a:ext cx="5988129" cy="1256328"/>
+            </a:xfrm>
+            <a:custGeom>
+              <a:avLst/>
+              <a:pathLst>
+                <a:path w="5988129" h="1256328">
+                  <a:moveTo>
+                    <a:pt x="1417001" y="0"/>
+                  </a:moveTo>
+                  <a:lnTo>
+                    <a:pt x="1486081" y="130954"/>
+                  </a:lnTo>
+                  <a:lnTo>
+                    <a:pt x="1556426" y="250188"/>
+                  </a:lnTo>
+                  <a:lnTo>
+                    <a:pt x="1626770" y="356798"/>
+                  </a:lnTo>
+                  <a:lnTo>
+                    <a:pt x="1697115" y="452122"/>
+                  </a:lnTo>
+                  <a:lnTo>
+                    <a:pt x="1767459" y="537355"/>
+                  </a:lnTo>
+                  <a:lnTo>
+                    <a:pt x="1837804" y="613564"/>
+                  </a:lnTo>
+                  <a:lnTo>
+                    <a:pt x="1908148" y="681704"/>
+                  </a:lnTo>
+                  <a:lnTo>
+                    <a:pt x="1978493" y="742631"/>
+                  </a:lnTo>
+                  <a:lnTo>
+                    <a:pt x="2048837" y="797108"/>
+                  </a:lnTo>
+                  <a:lnTo>
+                    <a:pt x="2119182" y="845817"/>
+                  </a:lnTo>
+                  <a:lnTo>
+                    <a:pt x="2189526" y="889370"/>
+                  </a:lnTo>
+                  <a:lnTo>
+                    <a:pt x="2259871" y="928311"/>
+                  </a:lnTo>
+                  <a:lnTo>
+                    <a:pt x="2330215" y="959926"/>
+                  </a:lnTo>
+                  <a:lnTo>
+                    <a:pt x="2400560" y="972588"/>
+                  </a:lnTo>
+                  <a:lnTo>
+                    <a:pt x="2470904" y="984711"/>
+                  </a:lnTo>
+                  <a:lnTo>
+                    <a:pt x="2541249" y="996317"/>
+                  </a:lnTo>
+                  <a:lnTo>
+                    <a:pt x="2611593" y="1007429"/>
+                  </a:lnTo>
+                  <a:lnTo>
+                    <a:pt x="2681938" y="1018068"/>
+                  </a:lnTo>
+                  <a:lnTo>
+                    <a:pt x="2752282" y="1028254"/>
+                  </a:lnTo>
+                  <a:lnTo>
+                    <a:pt x="2822627" y="1038005"/>
+                  </a:lnTo>
+                  <a:lnTo>
+                    <a:pt x="2892971" y="1047342"/>
+                  </a:lnTo>
+                  <a:lnTo>
+                    <a:pt x="2963316" y="1056280"/>
+                  </a:lnTo>
+                  <a:lnTo>
+                    <a:pt x="3033660" y="1064838"/>
+                  </a:lnTo>
+                  <a:lnTo>
+                    <a:pt x="3104005" y="1073032"/>
+                  </a:lnTo>
+                  <a:lnTo>
+                    <a:pt x="3174349" y="1080876"/>
+                  </a:lnTo>
+                  <a:lnTo>
+                    <a:pt x="3244693" y="1088387"/>
+                  </a:lnTo>
+                  <a:lnTo>
+                    <a:pt x="3315038" y="1095577"/>
+                  </a:lnTo>
+                  <a:lnTo>
+                    <a:pt x="3385382" y="1102461"/>
+                  </a:lnTo>
+                  <a:lnTo>
+                    <a:pt x="3455727" y="1109052"/>
+                  </a:lnTo>
+                  <a:lnTo>
+                    <a:pt x="3526071" y="1115363"/>
+                  </a:lnTo>
+                  <a:lnTo>
+                    <a:pt x="3596416" y="1121404"/>
+                  </a:lnTo>
+                  <a:lnTo>
+                    <a:pt x="3666760" y="1127188"/>
+                  </a:lnTo>
+                  <a:lnTo>
+                    <a:pt x="3737105" y="1132726"/>
+                  </a:lnTo>
+                  <a:lnTo>
+                    <a:pt x="3807449" y="1138028"/>
+                  </a:lnTo>
+                  <a:lnTo>
+                    <a:pt x="3877794" y="1143104"/>
+                  </a:lnTo>
+                  <a:lnTo>
+                    <a:pt x="3948138" y="1147964"/>
+                  </a:lnTo>
+                  <a:lnTo>
+                    <a:pt x="4018483" y="1152617"/>
+                  </a:lnTo>
+                  <a:lnTo>
+                    <a:pt x="4088827" y="1157071"/>
+                  </a:lnTo>
+                  <a:lnTo>
+                    <a:pt x="4159172" y="1161336"/>
+                  </a:lnTo>
+                  <a:lnTo>
+                    <a:pt x="4229516" y="1165419"/>
+                  </a:lnTo>
+                  <a:lnTo>
+                    <a:pt x="4299861" y="1169329"/>
+                  </a:lnTo>
+                  <a:lnTo>
+                    <a:pt x="4370205" y="1173072"/>
+                  </a:lnTo>
+                  <a:lnTo>
+                    <a:pt x="4440550" y="1176655"/>
+                  </a:lnTo>
+                  <a:lnTo>
+                    <a:pt x="4510894" y="1180086"/>
+                  </a:lnTo>
+                  <a:lnTo>
+                    <a:pt x="4581239" y="1183370"/>
+                  </a:lnTo>
+                  <a:lnTo>
+                    <a:pt x="4651583" y="1186515"/>
+                  </a:lnTo>
+                  <a:lnTo>
+                    <a:pt x="4721928" y="1189526"/>
+                  </a:lnTo>
+                  <a:lnTo>
+                    <a:pt x="4792272" y="1192409"/>
+                  </a:lnTo>
+                  <a:lnTo>
+                    <a:pt x="4862617" y="1195168"/>
+                  </a:lnTo>
+                  <a:lnTo>
+                    <a:pt x="4932961" y="1197811"/>
+                  </a:lnTo>
+                  <a:lnTo>
+                    <a:pt x="5003306" y="1200340"/>
+                  </a:lnTo>
+                  <a:lnTo>
+                    <a:pt x="5073650" y="1202762"/>
+                  </a:lnTo>
+                  <a:lnTo>
+                    <a:pt x="5143995" y="1205081"/>
+                  </a:lnTo>
+                  <a:lnTo>
+                    <a:pt x="5214339" y="1207301"/>
+                  </a:lnTo>
+                  <a:lnTo>
+                    <a:pt x="5284684" y="1209426"/>
+                  </a:lnTo>
+                  <a:lnTo>
+                    <a:pt x="5355028" y="1211461"/>
+                  </a:lnTo>
+                  <a:lnTo>
+                    <a:pt x="5425373" y="1213410"/>
+                  </a:lnTo>
+                  <a:lnTo>
+                    <a:pt x="5495717" y="1215275"/>
+                  </a:lnTo>
+                  <a:lnTo>
+                    <a:pt x="5566062" y="1217061"/>
+                  </a:lnTo>
+                  <a:lnTo>
+                    <a:pt x="5636406" y="1218770"/>
+                  </a:lnTo>
+                  <a:lnTo>
+                    <a:pt x="5706751" y="1220407"/>
+                  </a:lnTo>
+                  <a:lnTo>
+                    <a:pt x="5777095" y="1221975"/>
+                  </a:lnTo>
+                  <a:lnTo>
+                    <a:pt x="5847440" y="1223475"/>
+                  </a:lnTo>
+                  <a:lnTo>
+                    <a:pt x="5917784" y="1224912"/>
+                  </a:lnTo>
+                  <a:lnTo>
+                    <a:pt x="5988129" y="1226287"/>
+                  </a:lnTo>
+                  <a:lnTo>
+                    <a:pt x="5988129" y="1256328"/>
+                  </a:lnTo>
+                  <a:lnTo>
+                    <a:pt x="5917784" y="1256225"/>
+                  </a:lnTo>
+                  <a:lnTo>
+                    <a:pt x="5847440" y="1256109"/>
+                  </a:lnTo>
+                  <a:lnTo>
+                    <a:pt x="5777095" y="1255980"/>
+                  </a:lnTo>
+                  <a:lnTo>
+                    <a:pt x="5706751" y="1255835"/>
+                  </a:lnTo>
+                  <a:lnTo>
+                    <a:pt x="5636406" y="1255673"/>
+                  </a:lnTo>
+                  <a:lnTo>
+                    <a:pt x="5566062" y="1255492"/>
+                  </a:lnTo>
+                  <a:lnTo>
+                    <a:pt x="5495717" y="1255290"/>
+                  </a:lnTo>
+                  <a:lnTo>
+                    <a:pt x="5425373" y="1255063"/>
+                  </a:lnTo>
+                  <a:lnTo>
+                    <a:pt x="5355028" y="1254810"/>
+                  </a:lnTo>
+                  <a:lnTo>
+                    <a:pt x="5284684" y="1254527"/>
+                  </a:lnTo>
+                  <a:lnTo>
+                    <a:pt x="5214339" y="1254210"/>
+                  </a:lnTo>
+                  <a:lnTo>
+                    <a:pt x="5143995" y="1253856"/>
+                  </a:lnTo>
+                  <a:lnTo>
+                    <a:pt x="5073650" y="1253460"/>
+                  </a:lnTo>
+                  <a:lnTo>
+                    <a:pt x="5003306" y="1253017"/>
+                  </a:lnTo>
+                  <a:lnTo>
+                    <a:pt x="4932961" y="1252521"/>
+                  </a:lnTo>
+                  <a:lnTo>
+                    <a:pt x="4862617" y="1251967"/>
+                  </a:lnTo>
+                  <a:lnTo>
+                    <a:pt x="4792272" y="1251347"/>
+                  </a:lnTo>
+                  <a:lnTo>
+                    <a:pt x="4721928" y="1250654"/>
+                  </a:lnTo>
+                  <a:lnTo>
+                    <a:pt x="4651583" y="1249879"/>
+                  </a:lnTo>
+                  <a:lnTo>
+                    <a:pt x="4581239" y="1249011"/>
+                  </a:lnTo>
+                  <a:lnTo>
+                    <a:pt x="4510894" y="1248042"/>
+                  </a:lnTo>
+                  <a:lnTo>
+                    <a:pt x="4440550" y="1246957"/>
+                  </a:lnTo>
+                  <a:lnTo>
+                    <a:pt x="4370205" y="1245744"/>
+                  </a:lnTo>
+                  <a:lnTo>
+                    <a:pt x="4299861" y="1244387"/>
+                  </a:lnTo>
+                  <a:lnTo>
+                    <a:pt x="4229516" y="1242870"/>
+                  </a:lnTo>
+                  <a:lnTo>
+                    <a:pt x="4159172" y="1241173"/>
+                  </a:lnTo>
+                  <a:lnTo>
+                    <a:pt x="4088827" y="1239275"/>
+                  </a:lnTo>
+                  <a:lnTo>
+                    <a:pt x="4018483" y="1237153"/>
+                  </a:lnTo>
+                  <a:lnTo>
+                    <a:pt x="3948138" y="1234779"/>
+                  </a:lnTo>
+                  <a:lnTo>
+                    <a:pt x="3877794" y="1232124"/>
+                  </a:lnTo>
+                  <a:lnTo>
+                    <a:pt x="3807449" y="1229155"/>
+                  </a:lnTo>
+                  <a:lnTo>
+                    <a:pt x="3737105" y="1225834"/>
+                  </a:lnTo>
+                  <a:lnTo>
+                    <a:pt x="3666760" y="1222120"/>
+                  </a:lnTo>
+                  <a:lnTo>
+                    <a:pt x="3596416" y="1217966"/>
+                  </a:lnTo>
+                  <a:lnTo>
+                    <a:pt x="3526071" y="1213321"/>
+                  </a:lnTo>
+                  <a:lnTo>
+                    <a:pt x="3455727" y="1208125"/>
+                  </a:lnTo>
+                  <a:lnTo>
+                    <a:pt x="3385382" y="1202314"/>
+                  </a:lnTo>
+                  <a:lnTo>
+                    <a:pt x="3315038" y="1195815"/>
+                  </a:lnTo>
+                  <a:lnTo>
+                    <a:pt x="3244693" y="1188547"/>
+                  </a:lnTo>
+                  <a:lnTo>
+                    <a:pt x="3174349" y="1180418"/>
+                  </a:lnTo>
+                  <a:lnTo>
+                    <a:pt x="3104005" y="1171326"/>
+                  </a:lnTo>
+                  <a:lnTo>
+                    <a:pt x="3033660" y="1161158"/>
+                  </a:lnTo>
+                  <a:lnTo>
+                    <a:pt x="2963316" y="1149786"/>
+                  </a:lnTo>
+                  <a:lnTo>
+                    <a:pt x="2892971" y="1137068"/>
+                  </a:lnTo>
+                  <a:lnTo>
+                    <a:pt x="2822627" y="1122844"/>
+                  </a:lnTo>
+                  <a:lnTo>
+                    <a:pt x="2752282" y="1106935"/>
+                  </a:lnTo>
+                  <a:lnTo>
+                    <a:pt x="2681938" y="1089143"/>
+                  </a:lnTo>
+                  <a:lnTo>
+                    <a:pt x="2611593" y="1069245"/>
+                  </a:lnTo>
+                  <a:lnTo>
+                    <a:pt x="2541249" y="1046990"/>
+                  </a:lnTo>
+                  <a:lnTo>
+                    <a:pt x="2470904" y="1022100"/>
+                  </a:lnTo>
+                  <a:lnTo>
+                    <a:pt x="2400560" y="994263"/>
+                  </a:lnTo>
+                  <a:lnTo>
+                    <a:pt x="2330215" y="963130"/>
+                  </a:lnTo>
+                  <a:lnTo>
+                    <a:pt x="2259871" y="946701"/>
+                  </a:lnTo>
+                  <a:lnTo>
+                    <a:pt x="2189526" y="932887"/>
+                  </a:lnTo>
+                  <a:lnTo>
+                    <a:pt x="2119182" y="918459"/>
+                  </a:lnTo>
+                  <a:lnTo>
+                    <a:pt x="2048837" y="903388"/>
+                  </a:lnTo>
+                  <a:lnTo>
+                    <a:pt x="1978493" y="887648"/>
+                  </a:lnTo>
+                  <a:lnTo>
+                    <a:pt x="1908148" y="871207"/>
+                  </a:lnTo>
+                  <a:lnTo>
+                    <a:pt x="1837804" y="854034"/>
+                  </a:lnTo>
+                  <a:lnTo>
+                    <a:pt x="1767459" y="836098"/>
+                  </a:lnTo>
+                  <a:lnTo>
+                    <a:pt x="1697115" y="817364"/>
+                  </a:lnTo>
+                  <a:lnTo>
+                    <a:pt x="1626770" y="797796"/>
+                  </a:lnTo>
+                  <a:lnTo>
+                    <a:pt x="1556426" y="777358"/>
+                  </a:lnTo>
+                  <a:lnTo>
+                    <a:pt x="1486081" y="756010"/>
+                  </a:lnTo>
+                  <a:lnTo>
+                    <a:pt x="1415737" y="733713"/>
+                  </a:lnTo>
+                  <a:lnTo>
+                    <a:pt x="1345392" y="710423"/>
+                  </a:lnTo>
+                  <a:lnTo>
+                    <a:pt x="1275048" y="686098"/>
+                  </a:lnTo>
+                  <a:lnTo>
+                    <a:pt x="1204703" y="660690"/>
+                  </a:lnTo>
+                  <a:lnTo>
+                    <a:pt x="1134359" y="634152"/>
+                  </a:lnTo>
+                  <a:lnTo>
+                    <a:pt x="1064014" y="606434"/>
+                  </a:lnTo>
+                  <a:lnTo>
+                    <a:pt x="993670" y="577482"/>
+                  </a:lnTo>
+                  <a:lnTo>
+                    <a:pt x="923325" y="547242"/>
+                  </a:lnTo>
+                  <a:lnTo>
+                    <a:pt x="852981" y="515657"/>
+                  </a:lnTo>
+                  <a:lnTo>
+                    <a:pt x="782636" y="482667"/>
+                  </a:lnTo>
+                  <a:lnTo>
+                    <a:pt x="712292" y="448209"/>
+                  </a:lnTo>
+                  <a:lnTo>
+                    <a:pt x="641947" y="412218"/>
+                  </a:lnTo>
+                  <a:lnTo>
+                    <a:pt x="571603" y="374626"/>
+                  </a:lnTo>
+                  <a:lnTo>
+                    <a:pt x="501258" y="335361"/>
+                  </a:lnTo>
+                  <a:lnTo>
+                    <a:pt x="430914" y="294350"/>
+                  </a:lnTo>
+                  <a:lnTo>
+                    <a:pt x="360569" y="251514"/>
+                  </a:lnTo>
+                  <a:lnTo>
+                    <a:pt x="290225" y="206772"/>
+                  </a:lnTo>
+                  <a:lnTo>
+                    <a:pt x="219880" y="160040"/>
+                  </a:lnTo>
+                  <a:lnTo>
+                    <a:pt x="149536" y="111229"/>
+                  </a:lnTo>
+                  <a:lnTo>
+                    <a:pt x="79191" y="60246"/>
+                  </a:lnTo>
+                  <a:lnTo>
+                    <a:pt x="8847" y="6995"/>
+                  </a:lnTo>
+                  <a:lnTo>
+                    <a:pt x="0" y="0"/>
+                  </a:lnTo>
+                  <a:close/>
+                </a:path>
+              </a:pathLst>
+            </a:custGeom>
+            <a:solidFill>
+              <a:srgbClr val="FF8C00">
+                <a:alpha val="20000"/>
+              </a:srgbClr>
+            </a:solidFill>
+          </p:spPr>
+          <p:txBody>
+            <a:bodyPr/>
+            <a:lstStyle/>
+            <a:p/>
+          </p:txBody>
+        </p:sp>
+        <p:sp>
+          <p:nvSpPr>
+            <p:cNvPr id="68" name="pl68"/>
+            <p:cNvSpPr/>
+            <p:nvPr/>
+          </p:nvSpPr>
+          <p:spPr>
+            <a:xfrm>
+              <a:off x="3628289" y="4336484"/>
+              <a:ext cx="4571127" cy="1226287"/>
+            </a:xfrm>
+            <a:custGeom>
+              <a:avLst/>
+              <a:pathLst>
+                <a:path w="4571127" h="1226287">
+                  <a:moveTo>
+                    <a:pt x="0" y="0"/>
+                  </a:moveTo>
+                  <a:lnTo>
+                    <a:pt x="69079" y="130954"/>
+                  </a:lnTo>
+                  <a:lnTo>
+                    <a:pt x="139424" y="250188"/>
+                  </a:lnTo>
+                  <a:lnTo>
+                    <a:pt x="209768" y="356798"/>
+                  </a:lnTo>
+                  <a:lnTo>
+                    <a:pt x="280113" y="452122"/>
+                  </a:lnTo>
+                  <a:lnTo>
+                    <a:pt x="350457" y="537355"/>
+                  </a:lnTo>
+                  <a:lnTo>
+                    <a:pt x="420802" y="613564"/>
+                  </a:lnTo>
+                  <a:lnTo>
+                    <a:pt x="491146" y="681704"/>
+                  </a:lnTo>
+                  <a:lnTo>
+                    <a:pt x="561491" y="742631"/>
+                  </a:lnTo>
+                  <a:lnTo>
+                    <a:pt x="631835" y="797108"/>
+                  </a:lnTo>
+                  <a:lnTo>
+                    <a:pt x="702180" y="845817"/>
+                  </a:lnTo>
+                  <a:lnTo>
+                    <a:pt x="772524" y="889370"/>
+                  </a:lnTo>
+                  <a:lnTo>
+                    <a:pt x="842869" y="928311"/>
+                  </a:lnTo>
+                  <a:lnTo>
+                    <a:pt x="913213" y="959926"/>
+                  </a:lnTo>
+                  <a:lnTo>
+                    <a:pt x="983558" y="972588"/>
+                  </a:lnTo>
+                  <a:lnTo>
+                    <a:pt x="1053902" y="984711"/>
+                  </a:lnTo>
+                  <a:lnTo>
+                    <a:pt x="1124247" y="996317"/>
+                  </a:lnTo>
+                  <a:lnTo>
+                    <a:pt x="1194591" y="1007429"/>
+                  </a:lnTo>
+                  <a:lnTo>
+                    <a:pt x="1264936" y="1018068"/>
+                  </a:lnTo>
+                  <a:lnTo>
+                    <a:pt x="1335280" y="1028254"/>
+                  </a:lnTo>
+                  <a:lnTo>
+                    <a:pt x="1405625" y="1038005"/>
+                  </a:lnTo>
+                  <a:lnTo>
+                    <a:pt x="1475969" y="1047342"/>
+                  </a:lnTo>
+                  <a:lnTo>
+                    <a:pt x="1546314" y="1056280"/>
+                  </a:lnTo>
+                  <a:lnTo>
+                    <a:pt x="1616658" y="1064838"/>
+                  </a:lnTo>
+                  <a:lnTo>
+                    <a:pt x="1687003" y="1073032"/>
+                  </a:lnTo>
+                  <a:lnTo>
+                    <a:pt x="1757347" y="1080876"/>
+                  </a:lnTo>
+                  <a:lnTo>
+                    <a:pt x="1827692" y="1088387"/>
+                  </a:lnTo>
+                  <a:lnTo>
+                    <a:pt x="1898036" y="1095577"/>
+                  </a:lnTo>
+                  <a:lnTo>
+                    <a:pt x="1968381" y="1102461"/>
+                  </a:lnTo>
+                  <a:lnTo>
+                    <a:pt x="2038725" y="1109052"/>
+                  </a:lnTo>
+                  <a:lnTo>
+                    <a:pt x="2109070" y="1115363"/>
+                  </a:lnTo>
+                  <a:lnTo>
+                    <a:pt x="2179414" y="1121404"/>
+                  </a:lnTo>
+                  <a:lnTo>
+                    <a:pt x="2249759" y="1127188"/>
+                  </a:lnTo>
+                  <a:lnTo>
+                    <a:pt x="2320103" y="1132726"/>
+                  </a:lnTo>
+                  <a:lnTo>
+                    <a:pt x="2390448" y="1138028"/>
+                  </a:lnTo>
+                  <a:lnTo>
+                    <a:pt x="2460792" y="1143104"/>
+                  </a:lnTo>
+                  <a:lnTo>
+                    <a:pt x="2531137" y="1147964"/>
+                  </a:lnTo>
+                  <a:lnTo>
+                    <a:pt x="2601481" y="1152617"/>
+                  </a:lnTo>
+                  <a:lnTo>
+                    <a:pt x="2671826" y="1157071"/>
+                  </a:lnTo>
+                  <a:lnTo>
+                    <a:pt x="2742170" y="1161336"/>
+                  </a:lnTo>
+                  <a:lnTo>
+                    <a:pt x="2812515" y="1165419"/>
+                  </a:lnTo>
+                  <a:lnTo>
+                    <a:pt x="2882859" y="1169329"/>
+                  </a:lnTo>
+                  <a:lnTo>
+                    <a:pt x="2953204" y="1173072"/>
+                  </a:lnTo>
+                  <a:lnTo>
+                    <a:pt x="3023548" y="1176655"/>
+                  </a:lnTo>
+                  <a:lnTo>
+                    <a:pt x="3093893" y="1180086"/>
+                  </a:lnTo>
+                  <a:lnTo>
+                    <a:pt x="3164237" y="1183370"/>
+                  </a:lnTo>
+                  <a:lnTo>
+                    <a:pt x="3234582" y="1186515"/>
+                  </a:lnTo>
+                  <a:lnTo>
+                    <a:pt x="3304926" y="1189526"/>
+                  </a:lnTo>
+                  <a:lnTo>
+                    <a:pt x="3375271" y="1192409"/>
+                  </a:lnTo>
+                  <a:lnTo>
+                    <a:pt x="3445615" y="1195168"/>
+                  </a:lnTo>
+                  <a:lnTo>
+                    <a:pt x="3515959" y="1197811"/>
+                  </a:lnTo>
+                  <a:lnTo>
+                    <a:pt x="3586304" y="1200340"/>
+                  </a:lnTo>
+                  <a:lnTo>
+                    <a:pt x="3656648" y="1202762"/>
+                  </a:lnTo>
+                  <a:lnTo>
+                    <a:pt x="3726993" y="1205081"/>
+                  </a:lnTo>
+                  <a:lnTo>
+                    <a:pt x="3797337" y="1207301"/>
+                  </a:lnTo>
+                  <a:lnTo>
+                    <a:pt x="3867682" y="1209426"/>
+                  </a:lnTo>
+                  <a:lnTo>
+                    <a:pt x="3938026" y="1211461"/>
+                  </a:lnTo>
+                  <a:lnTo>
+                    <a:pt x="4008371" y="1213410"/>
+                  </a:lnTo>
+                  <a:lnTo>
+                    <a:pt x="4078715" y="1215275"/>
+                  </a:lnTo>
+                  <a:lnTo>
+                    <a:pt x="4149060" y="1217061"/>
+                  </a:lnTo>
+                  <a:lnTo>
+                    <a:pt x="4219404" y="1218770"/>
+                  </a:lnTo>
+                  <a:lnTo>
+                    <a:pt x="4289749" y="1220407"/>
+                  </a:lnTo>
+                  <a:lnTo>
+                    <a:pt x="4360093" y="1221975"/>
+                  </a:lnTo>
+                  <a:lnTo>
+                    <a:pt x="4430438" y="1223475"/>
+                  </a:lnTo>
+                  <a:lnTo>
+                    <a:pt x="4500782" y="1224912"/>
+                  </a:lnTo>
+                  <a:lnTo>
+                    <a:pt x="4571127" y="1226287"/>
+                  </a:lnTo>
+                </a:path>
+              </a:pathLst>
+            </a:custGeom>
+          </p:spPr>
+          <p:txBody>
+            <a:bodyPr/>
+            <a:lstStyle/>
+            <a:p/>
+          </p:txBody>
+        </p:sp>
+        <p:sp>
+          <p:nvSpPr>
+            <p:cNvPr id="69" name="pl69"/>
+            <p:cNvSpPr/>
+            <p:nvPr/>
+          </p:nvSpPr>
+          <p:spPr>
+            <a:xfrm>
+              <a:off x="2211287" y="4336484"/>
+              <a:ext cx="5988129" cy="1256328"/>
+            </a:xfrm>
+            <a:custGeom>
+              <a:avLst/>
+              <a:pathLst>
+                <a:path w="5988129" h="1256328">
+                  <a:moveTo>
+                    <a:pt x="5988129" y="1256328"/>
+                  </a:moveTo>
+                  <a:lnTo>
+                    <a:pt x="5917784" y="1256225"/>
+                  </a:lnTo>
+                  <a:lnTo>
+                    <a:pt x="5847440" y="1256109"/>
+                  </a:lnTo>
+                  <a:lnTo>
+                    <a:pt x="5777095" y="1255980"/>
+                  </a:lnTo>
+                  <a:lnTo>
+                    <a:pt x="5706751" y="1255835"/>
+                  </a:lnTo>
+                  <a:lnTo>
+                    <a:pt x="5636406" y="1255673"/>
+                  </a:lnTo>
+                  <a:lnTo>
+                    <a:pt x="5566062" y="1255492"/>
+                  </a:lnTo>
+                  <a:lnTo>
+                    <a:pt x="5495717" y="1255290"/>
+                  </a:lnTo>
+                  <a:lnTo>
+                    <a:pt x="5425373" y="1255063"/>
+                  </a:lnTo>
+                  <a:lnTo>
+                    <a:pt x="5355028" y="1254810"/>
+                  </a:lnTo>
+                  <a:lnTo>
+                    <a:pt x="5284684" y="1254527"/>
+                  </a:lnTo>
+                  <a:lnTo>
+                    <a:pt x="5214339" y="1254210"/>
+                  </a:lnTo>
+                  <a:lnTo>
+                    <a:pt x="5143995" y="1253856"/>
+                  </a:lnTo>
+                  <a:lnTo>
+                    <a:pt x="5073650" y="1253460"/>
+                  </a:lnTo>
+                  <a:lnTo>
+                    <a:pt x="5003306" y="1253017"/>
+                  </a:lnTo>
+                  <a:lnTo>
+                    <a:pt x="4932961" y="1252521"/>
+                  </a:lnTo>
+                  <a:lnTo>
+                    <a:pt x="4862617" y="1251967"/>
+                  </a:lnTo>
+                  <a:lnTo>
+                    <a:pt x="4792272" y="1251347"/>
+                  </a:lnTo>
+                  <a:lnTo>
+                    <a:pt x="4721928" y="1250654"/>
+                  </a:lnTo>
+                  <a:lnTo>
+                    <a:pt x="4651583" y="1249879"/>
+                  </a:lnTo>
+                  <a:lnTo>
+                    <a:pt x="4581239" y="1249011"/>
+                  </a:lnTo>
+                  <a:lnTo>
+                    <a:pt x="4510894" y="1248042"/>
+                  </a:lnTo>
+                  <a:lnTo>
+                    <a:pt x="4440550" y="1246957"/>
+                  </a:lnTo>
+                  <a:lnTo>
+                    <a:pt x="4370205" y="1245744"/>
+                  </a:lnTo>
+                  <a:lnTo>
+                    <a:pt x="4299861" y="1244387"/>
+                  </a:lnTo>
+                  <a:lnTo>
+                    <a:pt x="4229516" y="1242870"/>
+                  </a:lnTo>
+                  <a:lnTo>
+                    <a:pt x="4159172" y="1241173"/>
+                  </a:lnTo>
+                  <a:lnTo>
+                    <a:pt x="4088827" y="1239275"/>
+                  </a:lnTo>
+                  <a:lnTo>
+                    <a:pt x="4018483" y="1237153"/>
+                  </a:lnTo>
+                  <a:lnTo>
+                    <a:pt x="3948138" y="1234779"/>
+                  </a:lnTo>
+                  <a:lnTo>
+                    <a:pt x="3877794" y="1232124"/>
+                  </a:lnTo>
+                  <a:lnTo>
+                    <a:pt x="3807449" y="1229155"/>
+                  </a:lnTo>
+                  <a:lnTo>
+                    <a:pt x="3737105" y="1225834"/>
+                  </a:lnTo>
+                  <a:lnTo>
+                    <a:pt x="3666760" y="1222120"/>
+                  </a:lnTo>
+                  <a:lnTo>
+                    <a:pt x="3596416" y="1217966"/>
+                  </a:lnTo>
+                  <a:lnTo>
+                    <a:pt x="3526071" y="1213321"/>
+                  </a:lnTo>
+                  <a:lnTo>
+                    <a:pt x="3455727" y="1208125"/>
+                  </a:lnTo>
+                  <a:lnTo>
+                    <a:pt x="3385382" y="1202314"/>
+                  </a:lnTo>
+                  <a:lnTo>
+                    <a:pt x="3315038" y="1195815"/>
+                  </a:lnTo>
+                  <a:lnTo>
+                    <a:pt x="3244693" y="1188547"/>
+                  </a:lnTo>
+                  <a:lnTo>
+                    <a:pt x="3174349" y="1180418"/>
+                  </a:lnTo>
+                  <a:lnTo>
+                    <a:pt x="3104005" y="1171326"/>
+                  </a:lnTo>
+                  <a:lnTo>
+                    <a:pt x="3033660" y="1161158"/>
+                  </a:lnTo>
+                  <a:lnTo>
+                    <a:pt x="2963316" y="1149786"/>
+                  </a:lnTo>
+                  <a:lnTo>
+                    <a:pt x="2892971" y="1137068"/>
+                  </a:lnTo>
+                  <a:lnTo>
+                    <a:pt x="2822627" y="1122844"/>
+                  </a:lnTo>
+                  <a:lnTo>
+                    <a:pt x="2752282" y="1106935"/>
+                  </a:lnTo>
+                  <a:lnTo>
+                    <a:pt x="2681938" y="1089143"/>
+                  </a:lnTo>
+                  <a:lnTo>
+                    <a:pt x="2611593" y="1069245"/>
+                  </a:lnTo>
+                  <a:lnTo>
+                    <a:pt x="2541249" y="1046990"/>
+                  </a:lnTo>
+                  <a:lnTo>
+                    <a:pt x="2470904" y="1022100"/>
+                  </a:lnTo>
+                  <a:lnTo>
+                    <a:pt x="2400560" y="994263"/>
+                  </a:lnTo>
+                  <a:lnTo>
+                    <a:pt x="2330215" y="963130"/>
+                  </a:lnTo>
+                  <a:lnTo>
+                    <a:pt x="2259871" y="946701"/>
+                  </a:lnTo>
+                  <a:lnTo>
+                    <a:pt x="2189526" y="932887"/>
+                  </a:lnTo>
+                  <a:lnTo>
+                    <a:pt x="2119182" y="918459"/>
+                  </a:lnTo>
+                  <a:lnTo>
+                    <a:pt x="2048837" y="903388"/>
+                  </a:lnTo>
+                  <a:lnTo>
+                    <a:pt x="1978493" y="887648"/>
+                  </a:lnTo>
+                  <a:lnTo>
+                    <a:pt x="1908148" y="871207"/>
+                  </a:lnTo>
+                  <a:lnTo>
+                    <a:pt x="1837804" y="854034"/>
+                  </a:lnTo>
+                  <a:lnTo>
+                    <a:pt x="1767459" y="836098"/>
+                  </a:lnTo>
+                  <a:lnTo>
+                    <a:pt x="1697115" y="817364"/>
+                  </a:lnTo>
+                  <a:lnTo>
+                    <a:pt x="1626770" y="797796"/>
+                  </a:lnTo>
+                  <a:lnTo>
+                    <a:pt x="1556426" y="777358"/>
+                  </a:lnTo>
+                  <a:lnTo>
+                    <a:pt x="1486081" y="756010"/>
+                  </a:lnTo>
+                  <a:lnTo>
+                    <a:pt x="1415737" y="733713"/>
+                  </a:lnTo>
+                  <a:lnTo>
+                    <a:pt x="1345392" y="710423"/>
+                  </a:lnTo>
+                  <a:lnTo>
+                    <a:pt x="1275048" y="686098"/>
+                  </a:lnTo>
+                  <a:lnTo>
+                    <a:pt x="1204703" y="660690"/>
+                  </a:lnTo>
+                  <a:lnTo>
+                    <a:pt x="1134359" y="634152"/>
+                  </a:lnTo>
+                  <a:lnTo>
+                    <a:pt x="1064014" y="606434"/>
+                  </a:lnTo>
+                  <a:lnTo>
+                    <a:pt x="993670" y="577482"/>
+                  </a:lnTo>
+                  <a:lnTo>
+                    <a:pt x="923325" y="547242"/>
+                  </a:lnTo>
+                  <a:lnTo>
+                    <a:pt x="852981" y="515657"/>
+                  </a:lnTo>
+                  <a:lnTo>
+                    <a:pt x="782636" y="482667"/>
+                  </a:lnTo>
+                  <a:lnTo>
+                    <a:pt x="712292" y="448209"/>
+                  </a:lnTo>
+                  <a:lnTo>
+                    <a:pt x="641947" y="412218"/>
+                  </a:lnTo>
+                  <a:lnTo>
+                    <a:pt x="571603" y="374626"/>
+                  </a:lnTo>
+                  <a:lnTo>
+                    <a:pt x="501258" y="335361"/>
+                  </a:lnTo>
+                  <a:lnTo>
+                    <a:pt x="430914" y="294350"/>
+                  </a:lnTo>
+                  <a:lnTo>
+                    <a:pt x="360569" y="251514"/>
+                  </a:lnTo>
+                  <a:lnTo>
+                    <a:pt x="290225" y="206772"/>
+                  </a:lnTo>
+                  <a:lnTo>
+                    <a:pt x="219880" y="160040"/>
+                  </a:lnTo>
+                  <a:lnTo>
+                    <a:pt x="149536" y="111229"/>
+                  </a:lnTo>
+                  <a:lnTo>
+                    <a:pt x="79191" y="60246"/>
+                  </a:lnTo>
+                  <a:lnTo>
+                    <a:pt x="8847" y="6995"/>
+                  </a:lnTo>
+                  <a:lnTo>
+                    <a:pt x="0" y="0"/>
+                  </a:lnTo>
+                </a:path>
+              </a:pathLst>
+            </a:custGeom>
+          </p:spPr>
+          <p:txBody>
+            <a:bodyPr/>
+            <a:lstStyle/>
+            <a:p/>
+          </p:txBody>
+        </p:sp>
+        <p:sp>
+          <p:nvSpPr>
+            <p:cNvPr id="70" name="pl70"/>
+            <p:cNvSpPr/>
+            <p:nvPr/>
+          </p:nvSpPr>
+          <p:spPr>
+            <a:xfrm>
+              <a:off x="3232010" y="4336484"/>
+              <a:ext cx="4967406" cy="1252005"/>
+            </a:xfrm>
+            <a:custGeom>
+              <a:avLst/>
+              <a:pathLst>
+                <a:path w="4967406" h="1252005">
+                  <a:moveTo>
+                    <a:pt x="0" y="0"/>
+                  </a:moveTo>
+                  <a:lnTo>
+                    <a:pt x="43291" y="59564"/>
+                  </a:lnTo>
+                  <a:lnTo>
+                    <a:pt x="113636" y="149113"/>
+                  </a:lnTo>
+                  <a:lnTo>
+                    <a:pt x="183980" y="231967"/>
+                  </a:lnTo>
+                  <a:lnTo>
+                    <a:pt x="254325" y="308626"/>
+                  </a:lnTo>
+                  <a:lnTo>
+                    <a:pt x="324669" y="379552"/>
+                  </a:lnTo>
+                  <a:lnTo>
+                    <a:pt x="395014" y="445176"/>
+                  </a:lnTo>
+                  <a:lnTo>
+                    <a:pt x="465358" y="505892"/>
+                  </a:lnTo>
+                  <a:lnTo>
+                    <a:pt x="535703" y="562069"/>
+                  </a:lnTo>
+                  <a:lnTo>
+                    <a:pt x="606047" y="614045"/>
+                  </a:lnTo>
+                  <a:lnTo>
+                    <a:pt x="676392" y="662135"/>
+                  </a:lnTo>
+                  <a:lnTo>
+                    <a:pt x="746736" y="706629"/>
+                  </a:lnTo>
+                  <a:lnTo>
+                    <a:pt x="817081" y="747796"/>
+                  </a:lnTo>
+                  <a:lnTo>
+                    <a:pt x="887425" y="785885"/>
+                  </a:lnTo>
+                  <a:lnTo>
+                    <a:pt x="957770" y="821126"/>
+                  </a:lnTo>
+                  <a:lnTo>
+                    <a:pt x="1028114" y="853733"/>
+                  </a:lnTo>
+                  <a:lnTo>
+                    <a:pt x="1098459" y="883901"/>
+                  </a:lnTo>
+                  <a:lnTo>
+                    <a:pt x="1168803" y="911813"/>
+                  </a:lnTo>
+                  <a:lnTo>
+                    <a:pt x="1239148" y="937638"/>
+                  </a:lnTo>
+                  <a:lnTo>
+                    <a:pt x="1309492" y="961533"/>
+                  </a:lnTo>
+                  <a:lnTo>
+                    <a:pt x="1379837" y="983640"/>
+                  </a:lnTo>
+                  <a:lnTo>
+                    <a:pt x="1450181" y="1004095"/>
+                  </a:lnTo>
+                  <a:lnTo>
+                    <a:pt x="1520526" y="1023020"/>
+                  </a:lnTo>
+                  <a:lnTo>
+                    <a:pt x="1590870" y="1040530"/>
+                  </a:lnTo>
+                  <a:lnTo>
+                    <a:pt x="1661214" y="1056731"/>
+                  </a:lnTo>
+                  <a:lnTo>
+                    <a:pt x="1731559" y="1071721"/>
+                  </a:lnTo>
+                  <a:lnTo>
+                    <a:pt x="1801903" y="1085589"/>
+                  </a:lnTo>
+                  <a:lnTo>
+                    <a:pt x="1872248" y="1098421"/>
+                  </a:lnTo>
+                  <a:lnTo>
+                    <a:pt x="1942592" y="1110293"/>
+                  </a:lnTo>
+                  <a:lnTo>
+                    <a:pt x="2012937" y="1121278"/>
+                  </a:lnTo>
+                  <a:lnTo>
+                    <a:pt x="2083281" y="1131441"/>
+                  </a:lnTo>
+                  <a:lnTo>
+                    <a:pt x="2153626" y="1140845"/>
+                  </a:lnTo>
+                  <a:lnTo>
+                    <a:pt x="2223970" y="1149545"/>
+                  </a:lnTo>
+                  <a:lnTo>
+                    <a:pt x="2294315" y="1157595"/>
+                  </a:lnTo>
+                  <a:lnTo>
+                    <a:pt x="2364659" y="1165042"/>
+                  </a:lnTo>
+                  <a:lnTo>
+                    <a:pt x="2435004" y="1171933"/>
+                  </a:lnTo>
+                  <a:lnTo>
+                    <a:pt x="2505348" y="1178309"/>
+                  </a:lnTo>
+                  <a:lnTo>
+                    <a:pt x="2575693" y="1184208"/>
+                  </a:lnTo>
+                  <a:lnTo>
+                    <a:pt x="2646037" y="1189666"/>
+                  </a:lnTo>
+                  <a:lnTo>
+                    <a:pt x="2716382" y="1194716"/>
+                  </a:lnTo>
+                  <a:lnTo>
+                    <a:pt x="2786726" y="1199388"/>
+                  </a:lnTo>
+                  <a:lnTo>
+                    <a:pt x="2857071" y="1203711"/>
+                  </a:lnTo>
+                  <a:lnTo>
+                    <a:pt x="2927415" y="1207710"/>
+                  </a:lnTo>
+                  <a:lnTo>
+                    <a:pt x="2997760" y="1211411"/>
+                  </a:lnTo>
+                  <a:lnTo>
+                    <a:pt x="3068104" y="1214835"/>
+                  </a:lnTo>
+                  <a:lnTo>
+                    <a:pt x="3138449" y="1218003"/>
+                  </a:lnTo>
+                  <a:lnTo>
+                    <a:pt x="3208793" y="1220934"/>
+                  </a:lnTo>
+                  <a:lnTo>
+                    <a:pt x="3279138" y="1223645"/>
+                  </a:lnTo>
+                  <a:lnTo>
+                    <a:pt x="3349482" y="1226154"/>
+                  </a:lnTo>
+                  <a:lnTo>
+                    <a:pt x="3419827" y="1228476"/>
+                  </a:lnTo>
+                  <a:lnTo>
+                    <a:pt x="3490171" y="1230624"/>
+                  </a:lnTo>
+                  <a:lnTo>
+                    <a:pt x="3560516" y="1232611"/>
+                  </a:lnTo>
+                  <a:lnTo>
+                    <a:pt x="3630860" y="1234450"/>
+                  </a:lnTo>
+                  <a:lnTo>
+                    <a:pt x="3701205" y="1236151"/>
+                  </a:lnTo>
+                  <a:lnTo>
+                    <a:pt x="3771549" y="1237725"/>
+                  </a:lnTo>
+                  <a:lnTo>
+                    <a:pt x="3841894" y="1239181"/>
+                  </a:lnTo>
+                  <a:lnTo>
+                    <a:pt x="3912238" y="1240529"/>
+                  </a:lnTo>
+                  <a:lnTo>
+                    <a:pt x="3982583" y="1241775"/>
+                  </a:lnTo>
+                  <a:lnTo>
+                    <a:pt x="4052927" y="1242929"/>
+                  </a:lnTo>
+                  <a:lnTo>
+                    <a:pt x="4123272" y="1243996"/>
+                  </a:lnTo>
+                  <a:lnTo>
+                    <a:pt x="4193616" y="1244983"/>
+                  </a:lnTo>
+                  <a:lnTo>
+                    <a:pt x="4263961" y="1245897"/>
+                  </a:lnTo>
+                  <a:lnTo>
+                    <a:pt x="4334305" y="1246742"/>
+                  </a:lnTo>
+                  <a:lnTo>
+                    <a:pt x="4404650" y="1247524"/>
+                  </a:lnTo>
+                  <a:lnTo>
+                    <a:pt x="4474994" y="1248248"/>
+                  </a:lnTo>
+                  <a:lnTo>
+                    <a:pt x="4545339" y="1248917"/>
+                  </a:lnTo>
+                  <a:lnTo>
+                    <a:pt x="4615683" y="1249537"/>
+                  </a:lnTo>
+                  <a:lnTo>
+                    <a:pt x="4686028" y="1250110"/>
+                  </a:lnTo>
+                  <a:lnTo>
+                    <a:pt x="4756372" y="1250640"/>
+                  </a:lnTo>
+                  <a:lnTo>
+                    <a:pt x="4826717" y="1251131"/>
+                  </a:lnTo>
+                  <a:lnTo>
+                    <a:pt x="4897061" y="1251585"/>
+                  </a:lnTo>
+                  <a:lnTo>
+                    <a:pt x="4967406" y="1252005"/>
+                  </a:lnTo>
+                </a:path>
+              </a:pathLst>
+            </a:custGeom>
+            <a:ln w="27101" cap="flat">
+              <a:solidFill>
+                <a:srgbClr val="FF8C00">
+                  <a:alpha val="100000"/>
+                </a:srgbClr>
+              </a:solidFill>
+              <a:prstDash val="solid"/>
+              <a:round/>
+            </a:ln>
+          </p:spPr>
+          <p:txBody>
+            <a:bodyPr/>
+            <a:lstStyle/>
+            <a:p/>
+          </p:txBody>
+        </p:sp>
+        <p:sp>
+          <p:nvSpPr>
+            <p:cNvPr id="71" name="pl71"/>
+            <p:cNvSpPr/>
+            <p:nvPr/>
+          </p:nvSpPr>
+          <p:spPr>
+            <a:xfrm>
+              <a:off x="887106" y="5294352"/>
+              <a:ext cx="7660515" cy="0"/>
+            </a:xfrm>
+            <a:custGeom>
+              <a:avLst/>
+              <a:pathLst>
+                <a:path w="7660515" h="0">
+                  <a:moveTo>
+                    <a:pt x="0" y="0"/>
+                  </a:moveTo>
+                  <a:lnTo>
+                    <a:pt x="7660515" y="0"/>
+                  </a:lnTo>
+                  <a:lnTo>
+                    <a:pt x="7660515" y="0"/>
+                  </a:lnTo>
+                </a:path>
+              </a:pathLst>
+            </a:custGeom>
+            <a:ln w="13550" cap="flat">
+              <a:solidFill>
+                <a:srgbClr val="7F7F7F">
+                  <a:alpha val="100000"/>
+                </a:srgbClr>
+              </a:solidFill>
+              <a:prstDash val="dash"/>
+              <a:round/>
+            </a:ln>
+          </p:spPr>
+          <p:txBody>
+            <a:bodyPr/>
+            <a:lstStyle/>
+            <a:p/>
+          </p:txBody>
+        </p:sp>
+        <p:sp>
+          <p:nvSpPr>
+            <p:cNvPr id="72" name="pl72"/>
+            <p:cNvSpPr/>
+            <p:nvPr/>
+          </p:nvSpPr>
+          <p:spPr>
+            <a:xfrm>
+              <a:off x="4530353" y="4336484"/>
+              <a:ext cx="0" cy="1317069"/>
+            </a:xfrm>
+            <a:custGeom>
+              <a:avLst/>
+              <a:pathLst>
+                <a:path w="0" h="1317069">
+                  <a:moveTo>
+                    <a:pt x="0" y="1317069"/>
+                  </a:moveTo>
+                  <a:lnTo>
+                    <a:pt x="0" y="0"/>
+                  </a:lnTo>
+                  <a:lnTo>
+                    <a:pt x="0" y="0"/>
+                  </a:lnTo>
+                </a:path>
+              </a:pathLst>
+            </a:custGeom>
+            <a:ln w="13550" cap="flat">
+              <a:solidFill>
+                <a:srgbClr val="666666">
+                  <a:alpha val="100000"/>
+                </a:srgbClr>
+              </a:solidFill>
+              <a:prstDash val="dot"/>
+              <a:round/>
+            </a:ln>
+          </p:spPr>
+          <p:txBody>
+            <a:bodyPr/>
+            <a:lstStyle/>
+            <a:p/>
+          </p:txBody>
+        </p:sp>
+        <p:sp>
+          <p:nvSpPr>
+            <p:cNvPr id="73" name="tx73"/>
+            <p:cNvSpPr/>
+            <p:nvPr/>
+          </p:nvSpPr>
+          <p:spPr>
+            <a:xfrm>
+              <a:off x="762297" y="5553636"/>
+              <a:ext cx="62179" cy="80101"/>
+            </a:xfrm>
+            <a:prstGeom prst="rect">
+              <a:avLst/>
+            </a:prstGeom>
+            <a:noFill/>
+          </p:spPr>
+          <p:txBody>
+            <a:bodyPr lIns="0" rIns="0" tIns="0" bIns="0" anchorCtr="1" anchor="ctr" wrap="none"/>
+            <a:lstStyle/>
+            <a:p>
+              <a:pPr algn="l" marL="0" marR="0" indent="0">
+                <a:lnSpc>
+                  <a:spcPts val="880"/>
+                </a:lnSpc>
+                <a:spcBef>
+                  <a:spcPts val="0"/>
+                </a:spcBef>
+                <a:spcAft>
+                  <a:spcPts val="0"/>
+                </a:spcAft>
+              </a:pPr>
+              <a:r>
+                <a:rPr sz="880">
+                  <a:solidFill>
+                    <a:srgbClr val="4D4D4D">
+                      <a:alpha val="100000"/>
+                    </a:srgbClr>
+                  </a:solidFill>
+                  <a:latin typeface="Helvetica"/>
+                  <a:cs typeface="Helvetica"/>
+                </a:rPr>
+                <a:t>0</a:t>
+              </a:r>
+            </a:p>
+          </p:txBody>
+        </p:sp>
+        <p:sp>
+          <p:nvSpPr>
+            <p:cNvPr id="74" name="tx74"/>
+            <p:cNvSpPr/>
+            <p:nvPr/>
+          </p:nvSpPr>
+          <p:spPr>
+            <a:xfrm>
+              <a:off x="762297" y="5254302"/>
+              <a:ext cx="62179" cy="80101"/>
+            </a:xfrm>
+            <a:prstGeom prst="rect">
+              <a:avLst/>
+            </a:prstGeom>
+            <a:noFill/>
+          </p:spPr>
+          <p:txBody>
+            <a:bodyPr lIns="0" rIns="0" tIns="0" bIns="0" anchorCtr="1" anchor="ctr" wrap="none"/>
+            <a:lstStyle/>
+            <a:p>
+              <a:pPr algn="l" marL="0" marR="0" indent="0">
+                <a:lnSpc>
+                  <a:spcPts val="880"/>
+                </a:lnSpc>
+                <a:spcBef>
+                  <a:spcPts val="0"/>
+                </a:spcBef>
+                <a:spcAft>
+                  <a:spcPts val="0"/>
+                </a:spcAft>
+              </a:pPr>
+              <a:r>
+                <a:rPr sz="880">
+                  <a:solidFill>
+                    <a:srgbClr val="4D4D4D">
+                      <a:alpha val="100000"/>
+                    </a:srgbClr>
+                  </a:solidFill>
+                  <a:latin typeface="Helvetica"/>
+                  <a:cs typeface="Helvetica"/>
+                </a:rPr>
+                <a:t>1</a:t>
+              </a:r>
+            </a:p>
+          </p:txBody>
+        </p:sp>
+        <p:sp>
+          <p:nvSpPr>
+            <p:cNvPr id="75" name="tx75"/>
+            <p:cNvSpPr/>
+            <p:nvPr/>
+          </p:nvSpPr>
+          <p:spPr>
+            <a:xfrm>
+              <a:off x="762297" y="4954968"/>
+              <a:ext cx="62179" cy="80101"/>
+            </a:xfrm>
+            <a:prstGeom prst="rect">
+              <a:avLst/>
+            </a:prstGeom>
+            <a:noFill/>
+          </p:spPr>
+          <p:txBody>
+            <a:bodyPr lIns="0" rIns="0" tIns="0" bIns="0" anchorCtr="1" anchor="ctr" wrap="none"/>
+            <a:lstStyle/>
+            <a:p>
+              <a:pPr algn="l" marL="0" marR="0" indent="0">
+                <a:lnSpc>
+                  <a:spcPts val="880"/>
+                </a:lnSpc>
+                <a:spcBef>
+                  <a:spcPts val="0"/>
+                </a:spcBef>
+                <a:spcAft>
+                  <a:spcPts val="0"/>
+                </a:spcAft>
+              </a:pPr>
+              <a:r>
+                <a:rPr sz="880">
+                  <a:solidFill>
+                    <a:srgbClr val="4D4D4D">
+                      <a:alpha val="100000"/>
+                    </a:srgbClr>
+                  </a:solidFill>
+                  <a:latin typeface="Helvetica"/>
+                  <a:cs typeface="Helvetica"/>
+                </a:rPr>
+                <a:t>2</a:t>
+              </a:r>
+            </a:p>
+          </p:txBody>
+        </p:sp>
+        <p:sp>
+          <p:nvSpPr>
+            <p:cNvPr id="76" name="tx76"/>
+            <p:cNvSpPr/>
+            <p:nvPr/>
+          </p:nvSpPr>
+          <p:spPr>
+            <a:xfrm>
+              <a:off x="762297" y="4655634"/>
+              <a:ext cx="62179" cy="80101"/>
+            </a:xfrm>
+            <a:prstGeom prst="rect">
+              <a:avLst/>
+            </a:prstGeom>
+            <a:noFill/>
+          </p:spPr>
+          <p:txBody>
+            <a:bodyPr lIns="0" rIns="0" tIns="0" bIns="0" anchorCtr="1" anchor="ctr" wrap="none"/>
+            <a:lstStyle/>
+            <a:p>
+              <a:pPr algn="l" marL="0" marR="0" indent="0">
+                <a:lnSpc>
+                  <a:spcPts val="880"/>
+                </a:lnSpc>
+                <a:spcBef>
+                  <a:spcPts val="0"/>
+                </a:spcBef>
+                <a:spcAft>
+                  <a:spcPts val="0"/>
+                </a:spcAft>
+              </a:pPr>
+              <a:r>
+                <a:rPr sz="880">
+                  <a:solidFill>
+                    <a:srgbClr val="4D4D4D">
+                      <a:alpha val="100000"/>
+                    </a:srgbClr>
+                  </a:solidFill>
+                  <a:latin typeface="Helvetica"/>
+                  <a:cs typeface="Helvetica"/>
+                </a:rPr>
+                <a:t>3</a:t>
+              </a:r>
+            </a:p>
+          </p:txBody>
+        </p:sp>
+        <p:sp>
+          <p:nvSpPr>
+            <p:cNvPr id="77" name="tx77"/>
+            <p:cNvSpPr/>
+            <p:nvPr/>
+          </p:nvSpPr>
+          <p:spPr>
+            <a:xfrm>
+              <a:off x="762297" y="4356300"/>
+              <a:ext cx="62179" cy="80101"/>
+            </a:xfrm>
+            <a:prstGeom prst="rect">
+              <a:avLst/>
+            </a:prstGeom>
+            <a:noFill/>
+          </p:spPr>
+          <p:txBody>
+            <a:bodyPr lIns="0" rIns="0" tIns="0" bIns="0" anchorCtr="1" anchor="ctr" wrap="none"/>
+            <a:lstStyle/>
+            <a:p>
+              <a:pPr algn="l" marL="0" marR="0" indent="0">
+                <a:lnSpc>
+                  <a:spcPts val="880"/>
+                </a:lnSpc>
+                <a:spcBef>
+                  <a:spcPts val="0"/>
+                </a:spcBef>
+                <a:spcAft>
+                  <a:spcPts val="0"/>
+                </a:spcAft>
+              </a:pPr>
+              <a:r>
+                <a:rPr sz="880">
+                  <a:solidFill>
+                    <a:srgbClr val="4D4D4D">
+                      <a:alpha val="100000"/>
+                    </a:srgbClr>
+                  </a:solidFill>
+                  <a:latin typeface="Helvetica"/>
+                  <a:cs typeface="Helvetica"/>
+                </a:rPr>
+                <a:t>4</a:t>
+              </a:r>
+            </a:p>
+          </p:txBody>
+        </p:sp>
+        <p:sp>
+          <p:nvSpPr>
+            <p:cNvPr id="78" name="tx78"/>
+            <p:cNvSpPr/>
+            <p:nvPr/>
+          </p:nvSpPr>
+          <p:spPr>
+            <a:xfrm>
+              <a:off x="1241001" y="5716183"/>
+              <a:ext cx="161574" cy="80101"/>
+            </a:xfrm>
+            <a:prstGeom prst="rect">
+              <a:avLst/>
+            </a:prstGeom>
+            <a:noFill/>
+          </p:spPr>
+          <p:txBody>
+            <a:bodyPr lIns="0" rIns="0" tIns="0" bIns="0" anchorCtr="1" anchor="ctr" wrap="none"/>
+            <a:lstStyle/>
+            <a:p>
+              <a:pPr algn="l" marL="0" marR="0" indent="0">
+                <a:lnSpc>
+                  <a:spcPts val="880"/>
+                </a:lnSpc>
+                <a:spcBef>
+                  <a:spcPts val="0"/>
+                </a:spcBef>
+                <a:spcAft>
+                  <a:spcPts val="0"/>
+                </a:spcAft>
+              </a:pPr>
+              <a:r>
+                <a:rPr sz="880">
+                  <a:solidFill>
+                    <a:srgbClr val="4D4D4D">
+                      <a:alpha val="100000"/>
+                    </a:srgbClr>
+                  </a:solidFill>
+                  <a:latin typeface="Helvetica"/>
+                  <a:cs typeface="Helvetica"/>
+                </a:rPr>
+                <a:t>-40</a:t>
+              </a:r>
+            </a:p>
+          </p:txBody>
+        </p:sp>
+        <p:sp>
+          <p:nvSpPr>
+            <p:cNvPr id="79" name="tx79"/>
+            <p:cNvSpPr/>
+            <p:nvPr/>
+          </p:nvSpPr>
+          <p:spPr>
+            <a:xfrm>
+              <a:off x="2054602" y="5716183"/>
+              <a:ext cx="161574" cy="80101"/>
+            </a:xfrm>
+            <a:prstGeom prst="rect">
+              <a:avLst/>
+            </a:prstGeom>
+            <a:noFill/>
+          </p:spPr>
+          <p:txBody>
+            <a:bodyPr lIns="0" rIns="0" tIns="0" bIns="0" anchorCtr="1" anchor="ctr" wrap="none"/>
+            <a:lstStyle/>
+            <a:p>
+              <a:pPr algn="l" marL="0" marR="0" indent="0">
+                <a:lnSpc>
+                  <a:spcPts val="880"/>
+                </a:lnSpc>
+                <a:spcBef>
+                  <a:spcPts val="0"/>
+                </a:spcBef>
+                <a:spcAft>
+                  <a:spcPts val="0"/>
+                </a:spcAft>
+              </a:pPr>
+              <a:r>
+                <a:rPr sz="880">
+                  <a:solidFill>
+                    <a:srgbClr val="4D4D4D">
+                      <a:alpha val="100000"/>
+                    </a:srgbClr>
+                  </a:solidFill>
+                  <a:latin typeface="Helvetica"/>
+                  <a:cs typeface="Helvetica"/>
+                </a:rPr>
+                <a:t>-30</a:t>
+              </a:r>
+            </a:p>
+          </p:txBody>
+        </p:sp>
+        <p:sp>
+          <p:nvSpPr>
+            <p:cNvPr id="80" name="tx80"/>
+            <p:cNvSpPr/>
+            <p:nvPr/>
+          </p:nvSpPr>
+          <p:spPr>
+            <a:xfrm>
+              <a:off x="2868203" y="5716183"/>
+              <a:ext cx="161574" cy="80101"/>
+            </a:xfrm>
+            <a:prstGeom prst="rect">
+              <a:avLst/>
+            </a:prstGeom>
+            <a:noFill/>
+          </p:spPr>
+          <p:txBody>
+            <a:bodyPr lIns="0" rIns="0" tIns="0" bIns="0" anchorCtr="1" anchor="ctr" wrap="none"/>
+            <a:lstStyle/>
+            <a:p>
+              <a:pPr algn="l" marL="0" marR="0" indent="0">
+                <a:lnSpc>
+                  <a:spcPts val="880"/>
+                </a:lnSpc>
+                <a:spcBef>
+                  <a:spcPts val="0"/>
+                </a:spcBef>
+                <a:spcAft>
+                  <a:spcPts val="0"/>
+                </a:spcAft>
+              </a:pPr>
+              <a:r>
+                <a:rPr sz="880">
+                  <a:solidFill>
+                    <a:srgbClr val="4D4D4D">
+                      <a:alpha val="100000"/>
+                    </a:srgbClr>
+                  </a:solidFill>
+                  <a:latin typeface="Helvetica"/>
+                  <a:cs typeface="Helvetica"/>
+                </a:rPr>
+                <a:t>-20</a:t>
+              </a:r>
+            </a:p>
+          </p:txBody>
+        </p:sp>
+        <p:sp>
+          <p:nvSpPr>
+            <p:cNvPr id="81" name="tx81"/>
+            <p:cNvSpPr/>
+            <p:nvPr/>
+          </p:nvSpPr>
+          <p:spPr>
+            <a:xfrm>
+              <a:off x="3681805" y="5716183"/>
+              <a:ext cx="161574" cy="80101"/>
+            </a:xfrm>
+            <a:prstGeom prst="rect">
+              <a:avLst/>
+            </a:prstGeom>
+            <a:noFill/>
+          </p:spPr>
+          <p:txBody>
+            <a:bodyPr lIns="0" rIns="0" tIns="0" bIns="0" anchorCtr="1" anchor="ctr" wrap="none"/>
+            <a:lstStyle/>
+            <a:p>
+              <a:pPr algn="l" marL="0" marR="0" indent="0">
+                <a:lnSpc>
+                  <a:spcPts val="880"/>
+                </a:lnSpc>
+                <a:spcBef>
+                  <a:spcPts val="0"/>
+                </a:spcBef>
+                <a:spcAft>
+                  <a:spcPts val="0"/>
+                </a:spcAft>
+              </a:pPr>
+              <a:r>
+                <a:rPr sz="880">
+                  <a:solidFill>
+                    <a:srgbClr val="4D4D4D">
+                      <a:alpha val="100000"/>
+                    </a:srgbClr>
+                  </a:solidFill>
+                  <a:latin typeface="Helvetica"/>
+                  <a:cs typeface="Helvetica"/>
+                </a:rPr>
+                <a:t>-10</a:t>
+              </a:r>
+            </a:p>
+          </p:txBody>
+        </p:sp>
+        <p:sp>
+          <p:nvSpPr>
+            <p:cNvPr id="82" name="tx82"/>
+            <p:cNvSpPr/>
+            <p:nvPr/>
+          </p:nvSpPr>
+          <p:spPr>
+            <a:xfrm>
+              <a:off x="4545104" y="5716183"/>
+              <a:ext cx="62179" cy="80101"/>
+            </a:xfrm>
+            <a:prstGeom prst="rect">
+              <a:avLst/>
+            </a:prstGeom>
+            <a:noFill/>
+          </p:spPr>
+          <p:txBody>
+            <a:bodyPr lIns="0" rIns="0" tIns="0" bIns="0" anchorCtr="1" anchor="ctr" wrap="none"/>
+            <a:lstStyle/>
+            <a:p>
+              <a:pPr algn="l" marL="0" marR="0" indent="0">
+                <a:lnSpc>
+                  <a:spcPts val="880"/>
+                </a:lnSpc>
+                <a:spcBef>
+                  <a:spcPts val="0"/>
+                </a:spcBef>
+                <a:spcAft>
+                  <a:spcPts val="0"/>
+                </a:spcAft>
+              </a:pPr>
+              <a:r>
+                <a:rPr sz="880">
+                  <a:solidFill>
+                    <a:srgbClr val="4D4D4D">
+                      <a:alpha val="100000"/>
+                    </a:srgbClr>
+                  </a:solidFill>
+                  <a:latin typeface="Helvetica"/>
+                  <a:cs typeface="Helvetica"/>
+                </a:rPr>
+                <a:t>0</a:t>
+              </a:r>
+            </a:p>
+          </p:txBody>
+        </p:sp>
+        <p:sp>
+          <p:nvSpPr>
+            <p:cNvPr id="83" name="tx83"/>
+            <p:cNvSpPr/>
+            <p:nvPr/>
+          </p:nvSpPr>
+          <p:spPr>
+            <a:xfrm>
+              <a:off x="5327615" y="5716183"/>
+              <a:ext cx="124358" cy="80101"/>
+            </a:xfrm>
+            <a:prstGeom prst="rect">
+              <a:avLst/>
+            </a:prstGeom>
+            <a:noFill/>
+          </p:spPr>
+          <p:txBody>
+            <a:bodyPr lIns="0" rIns="0" tIns="0" bIns="0" anchorCtr="1" anchor="ctr" wrap="none"/>
+            <a:lstStyle/>
+            <a:p>
+              <a:pPr algn="l" marL="0" marR="0" indent="0">
+                <a:lnSpc>
+                  <a:spcPts val="880"/>
+                </a:lnSpc>
+                <a:spcBef>
+                  <a:spcPts val="0"/>
+                </a:spcBef>
+                <a:spcAft>
+                  <a:spcPts val="0"/>
+                </a:spcAft>
+              </a:pPr>
+              <a:r>
+                <a:rPr sz="880">
+                  <a:solidFill>
+                    <a:srgbClr val="4D4D4D">
+                      <a:alpha val="100000"/>
+                    </a:srgbClr>
+                  </a:solidFill>
+                  <a:latin typeface="Helvetica"/>
+                  <a:cs typeface="Helvetica"/>
+                </a:rPr>
+                <a:t>10</a:t>
+              </a:r>
+            </a:p>
+          </p:txBody>
+        </p:sp>
+        <p:sp>
+          <p:nvSpPr>
+            <p:cNvPr id="84" name="tx84"/>
+            <p:cNvSpPr/>
+            <p:nvPr/>
+          </p:nvSpPr>
+          <p:spPr>
+            <a:xfrm>
+              <a:off x="6141217" y="5716183"/>
+              <a:ext cx="124358" cy="80101"/>
+            </a:xfrm>
+            <a:prstGeom prst="rect">
+              <a:avLst/>
+            </a:prstGeom>
+            <a:noFill/>
+          </p:spPr>
+          <p:txBody>
+            <a:bodyPr lIns="0" rIns="0" tIns="0" bIns="0" anchorCtr="1" anchor="ctr" wrap="none"/>
+            <a:lstStyle/>
+            <a:p>
+              <a:pPr algn="l" marL="0" marR="0" indent="0">
+                <a:lnSpc>
+                  <a:spcPts val="880"/>
+                </a:lnSpc>
+                <a:spcBef>
+                  <a:spcPts val="0"/>
+                </a:spcBef>
+                <a:spcAft>
+                  <a:spcPts val="0"/>
+                </a:spcAft>
+              </a:pPr>
+              <a:r>
+                <a:rPr sz="880">
+                  <a:solidFill>
+                    <a:srgbClr val="4D4D4D">
+                      <a:alpha val="100000"/>
+                    </a:srgbClr>
+                  </a:solidFill>
+                  <a:latin typeface="Helvetica"/>
+                  <a:cs typeface="Helvetica"/>
+                </a:rPr>
+                <a:t>20</a:t>
+              </a:r>
+            </a:p>
+          </p:txBody>
+        </p:sp>
+        <p:sp>
+          <p:nvSpPr>
+            <p:cNvPr id="85" name="tx85"/>
+            <p:cNvSpPr/>
+            <p:nvPr/>
+          </p:nvSpPr>
+          <p:spPr>
+            <a:xfrm>
+              <a:off x="6954818" y="5716183"/>
+              <a:ext cx="124358" cy="80101"/>
+            </a:xfrm>
+            <a:prstGeom prst="rect">
+              <a:avLst/>
+            </a:prstGeom>
+            <a:noFill/>
+          </p:spPr>
+          <p:txBody>
+            <a:bodyPr lIns="0" rIns="0" tIns="0" bIns="0" anchorCtr="1" anchor="ctr" wrap="none"/>
+            <a:lstStyle/>
+            <a:p>
+              <a:pPr algn="l" marL="0" marR="0" indent="0">
+                <a:lnSpc>
+                  <a:spcPts val="880"/>
+                </a:lnSpc>
+                <a:spcBef>
+                  <a:spcPts val="0"/>
+                </a:spcBef>
+                <a:spcAft>
+                  <a:spcPts val="0"/>
+                </a:spcAft>
+              </a:pPr>
+              <a:r>
+                <a:rPr sz="880">
+                  <a:solidFill>
+                    <a:srgbClr val="4D4D4D">
+                      <a:alpha val="100000"/>
+                    </a:srgbClr>
+                  </a:solidFill>
+                  <a:latin typeface="Helvetica"/>
+                  <a:cs typeface="Helvetica"/>
+                </a:rPr>
+                <a:t>30</a:t>
+              </a:r>
+            </a:p>
+          </p:txBody>
+        </p:sp>
+        <p:sp>
+          <p:nvSpPr>
+            <p:cNvPr id="86" name="tx86"/>
+            <p:cNvSpPr/>
+            <p:nvPr/>
+          </p:nvSpPr>
+          <p:spPr>
+            <a:xfrm>
+              <a:off x="7768419" y="5716183"/>
+              <a:ext cx="124358" cy="80101"/>
+            </a:xfrm>
+            <a:prstGeom prst="rect">
+              <a:avLst/>
+            </a:prstGeom>
+            <a:noFill/>
+          </p:spPr>
+          <p:txBody>
+            <a:bodyPr lIns="0" rIns="0" tIns="0" bIns="0" anchorCtr="1" anchor="ctr" wrap="none"/>
+            <a:lstStyle/>
+            <a:p>
+              <a:pPr algn="l" marL="0" marR="0" indent="0">
+                <a:lnSpc>
+                  <a:spcPts val="880"/>
+                </a:lnSpc>
+                <a:spcBef>
+                  <a:spcPts val="0"/>
+                </a:spcBef>
+                <a:spcAft>
+                  <a:spcPts val="0"/>
+                </a:spcAft>
+              </a:pPr>
+              <a:r>
+                <a:rPr sz="880">
+                  <a:solidFill>
+                    <a:srgbClr val="4D4D4D">
+                      <a:alpha val="100000"/>
+                    </a:srgbClr>
+                  </a:solidFill>
+                  <a:latin typeface="Helvetica"/>
+                  <a:cs typeface="Helvetica"/>
+                </a:rPr>
+                <a:t>40</a:t>
+              </a:r>
+            </a:p>
+          </p:txBody>
+        </p:sp>
+        <p:sp>
+          <p:nvSpPr>
+            <p:cNvPr id="87" name="tx87"/>
+            <p:cNvSpPr/>
+            <p:nvPr/>
+          </p:nvSpPr>
+          <p:spPr>
+            <a:xfrm>
+              <a:off x="2928340" y="5855859"/>
+              <a:ext cx="3578047" cy="100218"/>
+            </a:xfrm>
+            <a:prstGeom prst="rect">
+              <a:avLst/>
+            </a:prstGeom>
+            <a:noFill/>
+          </p:spPr>
+          <p:txBody>
+            <a:bodyPr lIns="0" rIns="0" tIns="0" bIns="0" anchorCtr="1" anchor="ctr" wrap="none"/>
+            <a:lstStyle/>
+            <a:p>
+              <a:pPr algn="l" marL="0" marR="0" indent="0">
+                <a:lnSpc>
+                  <a:spcPts val="1100"/>
+                </a:lnSpc>
+                <a:spcBef>
+                  <a:spcPts val="0"/>
+                </a:spcBef>
+                <a:spcAft>
+                  <a:spcPts val="0"/>
+                </a:spcAft>
+              </a:pPr>
+              <a:r>
+                <a:rPr sz="1100">
+                  <a:solidFill>
+                    <a:srgbClr val="000000">
+                      <a:alpha val="100000"/>
+                    </a:srgbClr>
+                  </a:solidFill>
+                  <a:latin typeface="Helvetica"/>
+                  <a:cs typeface="Helvetica"/>
+                </a:rPr>
+                <a:t>eGFR difference (%): 100 × (CKD-EPI Cr-Cys − CG) / CG</a:t>
+              </a:r>
+            </a:p>
+          </p:txBody>
+        </p:sp>
+        <p:sp>
+          <p:nvSpPr>
+            <p:cNvPr id="88" name="tx88"/>
+            <p:cNvSpPr/>
+            <p:nvPr/>
+          </p:nvSpPr>
+          <p:spPr>
+            <a:xfrm rot="-5400000">
+              <a:off x="250689" y="4944909"/>
+              <a:ext cx="791596" cy="100218"/>
+            </a:xfrm>
+            <a:prstGeom prst="rect">
+              <a:avLst/>
+            </a:prstGeom>
+            <a:noFill/>
+          </p:spPr>
+          <p:txBody>
+            <a:bodyPr lIns="0" rIns="0" tIns="0" bIns="0" anchorCtr="1" anchor="ctr" wrap="none"/>
+            <a:lstStyle/>
+            <a:p>
+              <a:pPr algn="l" marL="0" marR="0" indent="0">
+                <a:lnSpc>
+                  <a:spcPts val="1100"/>
+                </a:lnSpc>
+                <a:spcBef>
+                  <a:spcPts val="0"/>
+                </a:spcBef>
+                <a:spcAft>
+                  <a:spcPts val="0"/>
+                </a:spcAft>
+              </a:pPr>
+              <a:r>
+                <a:rPr sz="1100">
+                  <a:solidFill>
+                    <a:srgbClr val="000000">
+                      <a:alpha val="100000"/>
+                    </a:srgbClr>
+                  </a:solidFill>
+                  <a:latin typeface="Helvetica"/>
+                  <a:cs typeface="Helvetica"/>
+                </a:rPr>
+                <a:t>HR (95% CI)</a:t>
+              </a:r>
+            </a:p>
+          </p:txBody>
+        </p:sp>
+        <p:sp>
+          <p:nvSpPr>
+            <p:cNvPr id="89" name="tx89"/>
+            <p:cNvSpPr/>
+            <p:nvPr/>
+          </p:nvSpPr>
+          <p:spPr>
+            <a:xfrm>
+              <a:off x="887106" y="4159544"/>
+              <a:ext cx="6994977" cy="82021"/>
+            </a:xfrm>
+            <a:prstGeom prst="rect">
+              <a:avLst/>
+            </a:prstGeom>
+            <a:noFill/>
+          </p:spPr>
+          <p:txBody>
+            <a:bodyPr lIns="0" rIns="0" tIns="0" bIns="0" anchorCtr="1" anchor="ctr" wrap="none"/>
+            <a:lstStyle/>
+            <a:p>
+              <a:pPr algn="l" marL="0" marR="0" indent="0">
+                <a:lnSpc>
+                  <a:spcPts val="900"/>
+                </a:lnSpc>
+                <a:spcBef>
+                  <a:spcPts val="0"/>
+                </a:spcBef>
+                <a:spcAft>
+                  <a:spcPts val="0"/>
+                </a:spcAft>
+              </a:pPr>
+              <a:r>
+                <a:rPr sz="900">
+                  <a:solidFill>
+                    <a:srgbClr val="404040">
+                      <a:alpha val="100000"/>
+                    </a:srgbClr>
+                  </a:solidFill>
+                  <a:latin typeface="Helvetica"/>
+                  <a:cs typeface="Helvetica"/>
+                </a:rPr>
+                <a:t>HR per 10 % decline: 2.46 (1.65-3.65), p_Bonf = &lt;0.001 (n = 6)  |  per IQR decline (Δ = 29.9 %): 14.72 (4.51-48.03)  |  IQR: [-15.0, 14.9] %</a:t>
+              </a:r>
+            </a:p>
+          </p:txBody>
+        </p:sp>
+        <p:sp>
+          <p:nvSpPr>
+            <p:cNvPr id="90" name="tx90"/>
+            <p:cNvSpPr/>
+            <p:nvPr/>
+          </p:nvSpPr>
+          <p:spPr>
+            <a:xfrm>
+              <a:off x="887106" y="3932770"/>
               <a:ext cx="2783799" cy="120152"/>
             </a:xfrm>
             <a:prstGeom prst="rect">
